--- a/docs/aiops_r8_presentation.pptx
+++ b/docs/aiops_r8_presentation.pptx
@@ -5,11 +5,14 @@
     <p:sldMasterId id="2147483648" r:id="rId1"/>
   </p:sldMasterIdLst>
   <p:sldIdLst>
-    <p:sldId id="256" r:id="rId7"/>
-    <p:sldId id="257" r:id="rId8"/>
-    <p:sldId id="258" r:id="rId9"/>
-    <p:sldId id="259" r:id="rId10"/>
-    <p:sldId id="260" r:id="rId11"/>
+    <p:sldId id="256" r:id="rId2"/>
+    <p:sldId id="261" r:id="rId3"/>
+    <p:sldId id="262" r:id="rId4"/>
+    <p:sldId id="263" r:id="rId5"/>
+    <p:sldId id="257" r:id="rId6"/>
+    <p:sldId id="258" r:id="rId7"/>
+    <p:sldId id="259" r:id="rId8"/>
+    <p:sldId id="260" r:id="rId9"/>
   </p:sldIdLst>
   <p:sldSz cx="9144000" cy="6858000" type="screen4x3"/>
   <p:notesSz cx="6858000" cy="9144000"/>
@@ -108,6 +111,22 @@
       </a:defRPr>
     </a:lvl9pPr>
   </p:defaultTextStyle>
+  <p:extLst>
+    <p:ext uri="{EFAFB233-063F-42B5-8137-9DF3F51BA10A}">
+      <p15:sldGuideLst xmlns:p15="http://schemas.microsoft.com/office/powerpoint/2012/main">
+        <p15:guide id="1" orient="horz" pos="2160">
+          <p15:clr>
+            <a:srgbClr val="A4A3A4"/>
+          </p15:clr>
+        </p15:guide>
+        <p15:guide id="2" pos="2880">
+          <p15:clr>
+            <a:srgbClr val="A4A3A4"/>
+          </p15:clr>
+        </p15:guide>
+      </p15:sldGuideLst>
+    </p:ext>
+  </p:extLst>
 </p:presentation>
 </file>
 
@@ -149,10 +168,9 @@
           <a:lstStyle/>
           <a:p>
             <a:r>
-              <a:rPr lang="en-US" smtClean="0"/>
+              <a:rPr lang="en-US"/>
               <a:t>Click to edit Master title style</a:t>
             </a:r>
-            <a:endParaRPr lang="en-US"/>
           </a:p>
         </p:txBody>
       </p:sp>
@@ -268,10 +286,9 @@
           </a:lstStyle>
           <a:p>
             <a:r>
-              <a:rPr lang="en-US" smtClean="0"/>
+              <a:rPr lang="en-US"/>
               <a:t>Click to edit Master subtitle style</a:t>
             </a:r>
-            <a:endParaRPr lang="en-US"/>
           </a:p>
         </p:txBody>
       </p:sp>
@@ -292,7 +309,7 @@
           <a:p>
             <a:fld id="{5BCAD085-E8A6-8845-BD4E-CB4CCA059FC4}" type="datetimeFigureOut">
               <a:rPr lang="en-US" smtClean="0"/>
-              <a:t>1/27/13</a:t>
+              <a:t>3/10/26</a:t>
             </a:fld>
             <a:endParaRPr lang="en-US"/>
           </a:p>
@@ -386,10 +403,9 @@
           <a:lstStyle/>
           <a:p>
             <a:r>
-              <a:rPr lang="en-US" smtClean="0"/>
+              <a:rPr lang="en-US"/>
               <a:t>Click to edit Master title style</a:t>
             </a:r>
-            <a:endParaRPr lang="en-US"/>
           </a:p>
         </p:txBody>
       </p:sp>
@@ -410,38 +426,37 @@
           <a:p>
             <a:pPr lvl="0"/>
             <a:r>
-              <a:rPr lang="en-US" smtClean="0"/>
+              <a:rPr lang="en-US"/>
               <a:t>Click to edit Master text styles</a:t>
             </a:r>
           </a:p>
           <a:p>
             <a:pPr lvl="1"/>
             <a:r>
-              <a:rPr lang="en-US" smtClean="0"/>
+              <a:rPr lang="en-US"/>
               <a:t>Second level</a:t>
             </a:r>
           </a:p>
           <a:p>
             <a:pPr lvl="2"/>
             <a:r>
-              <a:rPr lang="en-US" smtClean="0"/>
+              <a:rPr lang="en-US"/>
               <a:t>Third level</a:t>
             </a:r>
           </a:p>
           <a:p>
             <a:pPr lvl="3"/>
             <a:r>
-              <a:rPr lang="en-US" smtClean="0"/>
+              <a:rPr lang="en-US"/>
               <a:t>Fourth level</a:t>
             </a:r>
           </a:p>
           <a:p>
             <a:pPr lvl="4"/>
             <a:r>
-              <a:rPr lang="en-US" smtClean="0"/>
+              <a:rPr lang="en-US"/>
               <a:t>Fifth level</a:t>
             </a:r>
-            <a:endParaRPr lang="en-US"/>
           </a:p>
         </p:txBody>
       </p:sp>
@@ -462,7 +477,7 @@
           <a:p>
             <a:fld id="{5BCAD085-E8A6-8845-BD4E-CB4CCA059FC4}" type="datetimeFigureOut">
               <a:rPr lang="en-US" smtClean="0"/>
-              <a:t>1/27/13</a:t>
+              <a:t>3/10/26</a:t>
             </a:fld>
             <a:endParaRPr lang="en-US"/>
           </a:p>
@@ -561,10 +576,9 @@
           <a:lstStyle/>
           <a:p>
             <a:r>
-              <a:rPr lang="en-US" smtClean="0"/>
+              <a:rPr lang="en-US"/>
               <a:t>Click to edit Master title style</a:t>
             </a:r>
-            <a:endParaRPr lang="en-US"/>
           </a:p>
         </p:txBody>
       </p:sp>
@@ -590,38 +604,37 @@
           <a:p>
             <a:pPr lvl="0"/>
             <a:r>
-              <a:rPr lang="en-US" smtClean="0"/>
+              <a:rPr lang="en-US"/>
               <a:t>Click to edit Master text styles</a:t>
             </a:r>
           </a:p>
           <a:p>
             <a:pPr lvl="1"/>
             <a:r>
-              <a:rPr lang="en-US" smtClean="0"/>
+              <a:rPr lang="en-US"/>
               <a:t>Second level</a:t>
             </a:r>
           </a:p>
           <a:p>
             <a:pPr lvl="2"/>
             <a:r>
-              <a:rPr lang="en-US" smtClean="0"/>
+              <a:rPr lang="en-US"/>
               <a:t>Third level</a:t>
             </a:r>
           </a:p>
           <a:p>
             <a:pPr lvl="3"/>
             <a:r>
-              <a:rPr lang="en-US" smtClean="0"/>
+              <a:rPr lang="en-US"/>
               <a:t>Fourth level</a:t>
             </a:r>
           </a:p>
           <a:p>
             <a:pPr lvl="4"/>
             <a:r>
-              <a:rPr lang="en-US" smtClean="0"/>
+              <a:rPr lang="en-US"/>
               <a:t>Fifth level</a:t>
             </a:r>
-            <a:endParaRPr lang="en-US"/>
           </a:p>
         </p:txBody>
       </p:sp>
@@ -642,7 +655,7 @@
           <a:p>
             <a:fld id="{5BCAD085-E8A6-8845-BD4E-CB4CCA059FC4}" type="datetimeFigureOut">
               <a:rPr lang="en-US" smtClean="0"/>
-              <a:t>1/27/13</a:t>
+              <a:t>3/10/26</a:t>
             </a:fld>
             <a:endParaRPr lang="en-US"/>
           </a:p>
@@ -736,10 +749,9 @@
           <a:lstStyle/>
           <a:p>
             <a:r>
-              <a:rPr lang="en-US" smtClean="0"/>
+              <a:rPr lang="en-US"/>
               <a:t>Click to edit Master title style</a:t>
             </a:r>
-            <a:endParaRPr lang="en-US"/>
           </a:p>
         </p:txBody>
       </p:sp>
@@ -760,38 +772,37 @@
           <a:p>
             <a:pPr lvl="0"/>
             <a:r>
-              <a:rPr lang="en-US" smtClean="0"/>
+              <a:rPr lang="en-US"/>
               <a:t>Click to edit Master text styles</a:t>
             </a:r>
           </a:p>
           <a:p>
             <a:pPr lvl="1"/>
             <a:r>
-              <a:rPr lang="en-US" smtClean="0"/>
+              <a:rPr lang="en-US"/>
               <a:t>Second level</a:t>
             </a:r>
           </a:p>
           <a:p>
             <a:pPr lvl="2"/>
             <a:r>
-              <a:rPr lang="en-US" smtClean="0"/>
+              <a:rPr lang="en-US"/>
               <a:t>Third level</a:t>
             </a:r>
           </a:p>
           <a:p>
             <a:pPr lvl="3"/>
             <a:r>
-              <a:rPr lang="en-US" smtClean="0"/>
+              <a:rPr lang="en-US"/>
               <a:t>Fourth level</a:t>
             </a:r>
           </a:p>
           <a:p>
             <a:pPr lvl="4"/>
             <a:r>
-              <a:rPr lang="en-US" smtClean="0"/>
+              <a:rPr lang="en-US"/>
               <a:t>Fifth level</a:t>
             </a:r>
-            <a:endParaRPr lang="en-US"/>
           </a:p>
         </p:txBody>
       </p:sp>
@@ -812,7 +823,7 @@
           <a:p>
             <a:fld id="{5BCAD085-E8A6-8845-BD4E-CB4CCA059FC4}" type="datetimeFigureOut">
               <a:rPr lang="en-US" smtClean="0"/>
-              <a:t>1/27/13</a:t>
+              <a:t>3/10/26</a:t>
             </a:fld>
             <a:endParaRPr lang="en-US"/>
           </a:p>
@@ -915,10 +926,9 @@
           </a:lstStyle>
           <a:p>
             <a:r>
-              <a:rPr lang="en-US" smtClean="0"/>
+              <a:rPr lang="en-US"/>
               <a:t>Click to edit Master title style</a:t>
             </a:r>
-            <a:endParaRPr lang="en-US"/>
           </a:p>
         </p:txBody>
       </p:sp>
@@ -1035,7 +1045,7 @@
           <a:p>
             <a:pPr lvl="0"/>
             <a:r>
-              <a:rPr lang="en-US" smtClean="0"/>
+              <a:rPr lang="en-US"/>
               <a:t>Click to edit Master text styles</a:t>
             </a:r>
           </a:p>
@@ -1058,7 +1068,7 @@
           <a:p>
             <a:fld id="{5BCAD085-E8A6-8845-BD4E-CB4CCA059FC4}" type="datetimeFigureOut">
               <a:rPr lang="en-US" smtClean="0"/>
-              <a:t>1/27/13</a:t>
+              <a:t>3/10/26</a:t>
             </a:fld>
             <a:endParaRPr lang="en-US"/>
           </a:p>
@@ -1152,10 +1162,9 @@
           <a:lstStyle/>
           <a:p>
             <a:r>
-              <a:rPr lang="en-US" smtClean="0"/>
+              <a:rPr lang="en-US"/>
               <a:t>Click to edit Master title style</a:t>
             </a:r>
-            <a:endParaRPr lang="en-US"/>
           </a:p>
         </p:txBody>
       </p:sp>
@@ -1209,38 +1218,37 @@
           <a:p>
             <a:pPr lvl="0"/>
             <a:r>
-              <a:rPr lang="en-US" smtClean="0"/>
+              <a:rPr lang="en-US"/>
               <a:t>Click to edit Master text styles</a:t>
             </a:r>
           </a:p>
           <a:p>
             <a:pPr lvl="1"/>
             <a:r>
-              <a:rPr lang="en-US" smtClean="0"/>
+              <a:rPr lang="en-US"/>
               <a:t>Second level</a:t>
             </a:r>
           </a:p>
           <a:p>
             <a:pPr lvl="2"/>
             <a:r>
-              <a:rPr lang="en-US" smtClean="0"/>
+              <a:rPr lang="en-US"/>
               <a:t>Third level</a:t>
             </a:r>
           </a:p>
           <a:p>
             <a:pPr lvl="3"/>
             <a:r>
-              <a:rPr lang="en-US" smtClean="0"/>
+              <a:rPr lang="en-US"/>
               <a:t>Fourth level</a:t>
             </a:r>
           </a:p>
           <a:p>
             <a:pPr lvl="4"/>
             <a:r>
-              <a:rPr lang="en-US" smtClean="0"/>
+              <a:rPr lang="en-US"/>
               <a:t>Fifth level</a:t>
             </a:r>
-            <a:endParaRPr lang="en-US"/>
           </a:p>
         </p:txBody>
       </p:sp>
@@ -1294,38 +1302,37 @@
           <a:p>
             <a:pPr lvl="0"/>
             <a:r>
-              <a:rPr lang="en-US" smtClean="0"/>
+              <a:rPr lang="en-US"/>
               <a:t>Click to edit Master text styles</a:t>
             </a:r>
           </a:p>
           <a:p>
             <a:pPr lvl="1"/>
             <a:r>
-              <a:rPr lang="en-US" smtClean="0"/>
+              <a:rPr lang="en-US"/>
               <a:t>Second level</a:t>
             </a:r>
           </a:p>
           <a:p>
             <a:pPr lvl="2"/>
             <a:r>
-              <a:rPr lang="en-US" smtClean="0"/>
+              <a:rPr lang="en-US"/>
               <a:t>Third level</a:t>
             </a:r>
           </a:p>
           <a:p>
             <a:pPr lvl="3"/>
             <a:r>
-              <a:rPr lang="en-US" smtClean="0"/>
+              <a:rPr lang="en-US"/>
               <a:t>Fourth level</a:t>
             </a:r>
           </a:p>
           <a:p>
             <a:pPr lvl="4"/>
             <a:r>
-              <a:rPr lang="en-US" smtClean="0"/>
+              <a:rPr lang="en-US"/>
               <a:t>Fifth level</a:t>
             </a:r>
-            <a:endParaRPr lang="en-US"/>
           </a:p>
         </p:txBody>
       </p:sp>
@@ -1346,7 +1353,7 @@
           <a:p>
             <a:fld id="{5BCAD085-E8A6-8845-BD4E-CB4CCA059FC4}" type="datetimeFigureOut">
               <a:rPr lang="en-US" smtClean="0"/>
-              <a:t>1/27/13</a:t>
+              <a:t>3/10/26</a:t>
             </a:fld>
             <a:endParaRPr lang="en-US"/>
           </a:p>
@@ -1444,10 +1451,9 @@
           </a:lstStyle>
           <a:p>
             <a:r>
-              <a:rPr lang="en-US" smtClean="0"/>
+              <a:rPr lang="en-US"/>
               <a:t>Click to edit Master title style</a:t>
             </a:r>
-            <a:endParaRPr lang="en-US"/>
           </a:p>
         </p:txBody>
       </p:sp>
@@ -1510,7 +1516,7 @@
           <a:p>
             <a:pPr lvl="0"/>
             <a:r>
-              <a:rPr lang="en-US" smtClean="0"/>
+              <a:rPr lang="en-US"/>
               <a:t>Click to edit Master text styles</a:t>
             </a:r>
           </a:p>
@@ -1566,38 +1572,37 @@
           <a:p>
             <a:pPr lvl="0"/>
             <a:r>
-              <a:rPr lang="en-US" smtClean="0"/>
+              <a:rPr lang="en-US"/>
               <a:t>Click to edit Master text styles</a:t>
             </a:r>
           </a:p>
           <a:p>
             <a:pPr lvl="1"/>
             <a:r>
-              <a:rPr lang="en-US" smtClean="0"/>
+              <a:rPr lang="en-US"/>
               <a:t>Second level</a:t>
             </a:r>
           </a:p>
           <a:p>
             <a:pPr lvl="2"/>
             <a:r>
-              <a:rPr lang="en-US" smtClean="0"/>
+              <a:rPr lang="en-US"/>
               <a:t>Third level</a:t>
             </a:r>
           </a:p>
           <a:p>
             <a:pPr lvl="3"/>
             <a:r>
-              <a:rPr lang="en-US" smtClean="0"/>
+              <a:rPr lang="en-US"/>
               <a:t>Fourth level</a:t>
             </a:r>
           </a:p>
           <a:p>
             <a:pPr lvl="4"/>
             <a:r>
-              <a:rPr lang="en-US" smtClean="0"/>
+              <a:rPr lang="en-US"/>
               <a:t>Fifth level</a:t>
             </a:r>
-            <a:endParaRPr lang="en-US"/>
           </a:p>
         </p:txBody>
       </p:sp>
@@ -1660,7 +1665,7 @@
           <a:p>
             <a:pPr lvl="0"/>
             <a:r>
-              <a:rPr lang="en-US" smtClean="0"/>
+              <a:rPr lang="en-US"/>
               <a:t>Click to edit Master text styles</a:t>
             </a:r>
           </a:p>
@@ -1716,38 +1721,37 @@
           <a:p>
             <a:pPr lvl="0"/>
             <a:r>
-              <a:rPr lang="en-US" smtClean="0"/>
+              <a:rPr lang="en-US"/>
               <a:t>Click to edit Master text styles</a:t>
             </a:r>
           </a:p>
           <a:p>
             <a:pPr lvl="1"/>
             <a:r>
-              <a:rPr lang="en-US" smtClean="0"/>
+              <a:rPr lang="en-US"/>
               <a:t>Second level</a:t>
             </a:r>
           </a:p>
           <a:p>
             <a:pPr lvl="2"/>
             <a:r>
-              <a:rPr lang="en-US" smtClean="0"/>
+              <a:rPr lang="en-US"/>
               <a:t>Third level</a:t>
             </a:r>
           </a:p>
           <a:p>
             <a:pPr lvl="3"/>
             <a:r>
-              <a:rPr lang="en-US" smtClean="0"/>
+              <a:rPr lang="en-US"/>
               <a:t>Fourth level</a:t>
             </a:r>
           </a:p>
           <a:p>
             <a:pPr lvl="4"/>
             <a:r>
-              <a:rPr lang="en-US" smtClean="0"/>
+              <a:rPr lang="en-US"/>
               <a:t>Fifth level</a:t>
             </a:r>
-            <a:endParaRPr lang="en-US"/>
           </a:p>
         </p:txBody>
       </p:sp>
@@ -1768,7 +1772,7 @@
           <a:p>
             <a:fld id="{5BCAD085-E8A6-8845-BD4E-CB4CCA059FC4}" type="datetimeFigureOut">
               <a:rPr lang="en-US" smtClean="0"/>
-              <a:t>1/27/13</a:t>
+              <a:t>3/10/26</a:t>
             </a:fld>
             <a:endParaRPr lang="en-US"/>
           </a:p>
@@ -1862,10 +1866,9 @@
           <a:lstStyle/>
           <a:p>
             <a:r>
-              <a:rPr lang="en-US" smtClean="0"/>
+              <a:rPr lang="en-US"/>
               <a:t>Click to edit Master title style</a:t>
             </a:r>
-            <a:endParaRPr lang="en-US"/>
           </a:p>
         </p:txBody>
       </p:sp>
@@ -1886,7 +1889,7 @@
           <a:p>
             <a:fld id="{5BCAD085-E8A6-8845-BD4E-CB4CCA059FC4}" type="datetimeFigureOut">
               <a:rPr lang="en-US" smtClean="0"/>
-              <a:t>1/27/13</a:t>
+              <a:t>3/10/26</a:t>
             </a:fld>
             <a:endParaRPr lang="en-US"/>
           </a:p>
@@ -1981,7 +1984,7 @@
           <a:p>
             <a:fld id="{5BCAD085-E8A6-8845-BD4E-CB4CCA059FC4}" type="datetimeFigureOut">
               <a:rPr lang="en-US" smtClean="0"/>
-              <a:t>1/27/13</a:t>
+              <a:t>3/10/26</a:t>
             </a:fld>
             <a:endParaRPr lang="en-US"/>
           </a:p>
@@ -2084,10 +2087,9 @@
           </a:lstStyle>
           <a:p>
             <a:r>
-              <a:rPr lang="en-US" smtClean="0"/>
+              <a:rPr lang="en-US"/>
               <a:t>Click to edit Master title style</a:t>
             </a:r>
-            <a:endParaRPr lang="en-US"/>
           </a:p>
         </p:txBody>
       </p:sp>
@@ -2141,38 +2143,37 @@
           <a:p>
             <a:pPr lvl="0"/>
             <a:r>
-              <a:rPr lang="en-US" smtClean="0"/>
+              <a:rPr lang="en-US"/>
               <a:t>Click to edit Master text styles</a:t>
             </a:r>
           </a:p>
           <a:p>
             <a:pPr lvl="1"/>
             <a:r>
-              <a:rPr lang="en-US" smtClean="0"/>
+              <a:rPr lang="en-US"/>
               <a:t>Second level</a:t>
             </a:r>
           </a:p>
           <a:p>
             <a:pPr lvl="2"/>
             <a:r>
-              <a:rPr lang="en-US" smtClean="0"/>
+              <a:rPr lang="en-US"/>
               <a:t>Third level</a:t>
             </a:r>
           </a:p>
           <a:p>
             <a:pPr lvl="3"/>
             <a:r>
-              <a:rPr lang="en-US" smtClean="0"/>
+              <a:rPr lang="en-US"/>
               <a:t>Fourth level</a:t>
             </a:r>
           </a:p>
           <a:p>
             <a:pPr lvl="4"/>
             <a:r>
-              <a:rPr lang="en-US" smtClean="0"/>
+              <a:rPr lang="en-US"/>
               <a:t>Fifth level</a:t>
             </a:r>
-            <a:endParaRPr lang="en-US"/>
           </a:p>
         </p:txBody>
       </p:sp>
@@ -2235,7 +2236,7 @@
           <a:p>
             <a:pPr lvl="0"/>
             <a:r>
-              <a:rPr lang="en-US" smtClean="0"/>
+              <a:rPr lang="en-US"/>
               <a:t>Click to edit Master text styles</a:t>
             </a:r>
           </a:p>
@@ -2258,7 +2259,7 @@
           <a:p>
             <a:fld id="{5BCAD085-E8A6-8845-BD4E-CB4CCA059FC4}" type="datetimeFigureOut">
               <a:rPr lang="en-US" smtClean="0"/>
-              <a:t>1/27/13</a:t>
+              <a:t>3/10/26</a:t>
             </a:fld>
             <a:endParaRPr lang="en-US"/>
           </a:p>
@@ -2361,10 +2362,9 @@
           </a:lstStyle>
           <a:p>
             <a:r>
-              <a:rPr lang="en-US" smtClean="0"/>
+              <a:rPr lang="en-US"/>
               <a:t>Click to edit Master title style</a:t>
             </a:r>
-            <a:endParaRPr lang="en-US"/>
           </a:p>
         </p:txBody>
       </p:sp>
@@ -2488,7 +2488,7 @@
           <a:p>
             <a:pPr lvl="0"/>
             <a:r>
-              <a:rPr lang="en-US" smtClean="0"/>
+              <a:rPr lang="en-US"/>
               <a:t>Click to edit Master text styles</a:t>
             </a:r>
           </a:p>
@@ -2511,7 +2511,7 @@
           <a:p>
             <a:fld id="{5BCAD085-E8A6-8845-BD4E-CB4CCA059FC4}" type="datetimeFigureOut">
               <a:rPr lang="en-US" smtClean="0"/>
-              <a:t>1/27/13</a:t>
+              <a:t>3/10/26</a:t>
             </a:fld>
             <a:endParaRPr lang="en-US"/>
           </a:p>
@@ -2620,10 +2620,9 @@
           <a:lstStyle/>
           <a:p>
             <a:r>
-              <a:rPr lang="en-US" smtClean="0"/>
+              <a:rPr lang="en-US"/>
               <a:t>Click to edit Master title style</a:t>
             </a:r>
-            <a:endParaRPr lang="en-US"/>
           </a:p>
         </p:txBody>
       </p:sp>
@@ -2654,38 +2653,37 @@
           <a:p>
             <a:pPr lvl="0"/>
             <a:r>
-              <a:rPr lang="en-US" smtClean="0"/>
+              <a:rPr lang="en-US"/>
               <a:t>Click to edit Master text styles</a:t>
             </a:r>
           </a:p>
           <a:p>
             <a:pPr lvl="1"/>
             <a:r>
-              <a:rPr lang="en-US" smtClean="0"/>
+              <a:rPr lang="en-US"/>
               <a:t>Second level</a:t>
             </a:r>
           </a:p>
           <a:p>
             <a:pPr lvl="2"/>
             <a:r>
-              <a:rPr lang="en-US" smtClean="0"/>
+              <a:rPr lang="en-US"/>
               <a:t>Third level</a:t>
             </a:r>
           </a:p>
           <a:p>
             <a:pPr lvl="3"/>
             <a:r>
-              <a:rPr lang="en-US" smtClean="0"/>
+              <a:rPr lang="en-US"/>
               <a:t>Fourth level</a:t>
             </a:r>
           </a:p>
           <a:p>
             <a:pPr lvl="4"/>
             <a:r>
-              <a:rPr lang="en-US" smtClean="0"/>
+              <a:rPr lang="en-US"/>
               <a:t>Fifth level</a:t>
             </a:r>
-            <a:endParaRPr lang="en-US"/>
           </a:p>
         </p:txBody>
       </p:sp>
@@ -2724,7 +2722,7 @@
           <a:p>
             <a:fld id="{5BCAD085-E8A6-8845-BD4E-CB4CCA059FC4}" type="datetimeFigureOut">
               <a:rPr lang="en-US" smtClean="0"/>
-              <a:t>1/27/13</a:t>
+              <a:t>3/10/26</a:t>
             </a:fld>
             <a:endParaRPr lang="en-US"/>
           </a:p>
@@ -3083,7 +3081,7 @@
 </file>
 
 <file path=ppt/slides/slide1.xml><?xml version="1.0" encoding="utf-8"?>
-<p:sld xmlns:a="http://schemas.openxmlformats.org/drawingml/2006/main" xmlns:p="http://schemas.openxmlformats.org/presentationml/2006/main" xmlns:r="http://schemas.openxmlformats.org/officeDocument/2006/relationships">
+<p:sld xmlns:a="http://schemas.openxmlformats.org/drawingml/2006/main" xmlns:r="http://schemas.openxmlformats.org/officeDocument/2006/relationships" xmlns:p="http://schemas.openxmlformats.org/presentationml/2006/main">
   <p:cSld>
     <p:spTree>
       <p:nvGrpSpPr>
@@ -3091,7 +3089,14 @@
         <p:cNvGrpSpPr/>
         <p:nvPr/>
       </p:nvGrpSpPr>
-      <p:grpSpPr/>
+      <p:grpSpPr>
+        <a:xfrm>
+          <a:off x="0" y="0"/>
+          <a:ext cx="0" cy="0"/>
+          <a:chOff x="0" y="0"/>
+          <a:chExt cx="0" cy="0"/>
+        </a:xfrm>
+      </p:grpSpPr>
       <p:sp>
         <p:nvSpPr>
           <p:cNvPr id="2" name="Title 1"/>
@@ -3104,11 +3109,60 @@
         </p:nvSpPr>
         <p:spPr/>
         <p:txBody>
-          <a:bodyPr/>
-          <a:lstStyle/>
-          <a:p>
-            <a:r>
-              <a:t>AIOps R8 – Production-Safe CVE Patching</a:t>
+          <a:bodyPr>
+            <a:normAutofit/>
+          </a:bodyPr>
+          <a:lstStyle/>
+          <a:p>
+            <a:r>
+              <a:rPr dirty="0">
+                <a:solidFill>
+                  <a:schemeClr val="accent6">
+                    <a:lumMod val="75000"/>
+                  </a:schemeClr>
+                </a:solidFill>
+              </a:rPr>
+              <a:t>AIOps R</a:t>
+            </a:r>
+            <a:r>
+              <a:rPr lang="en-US" dirty="0">
+                <a:solidFill>
+                  <a:schemeClr val="accent6">
+                    <a:lumMod val="75000"/>
+                  </a:schemeClr>
+                </a:solidFill>
+              </a:rPr>
+              <a:t>HEL</a:t>
+            </a:r>
+            <a:r>
+              <a:rPr dirty="0">
+                <a:solidFill>
+                  <a:schemeClr val="accent6">
+                    <a:lumMod val="75000"/>
+                  </a:schemeClr>
+                </a:solidFill>
+              </a:rPr>
+              <a:t>8</a:t>
+            </a:r>
+            <a:r>
+              <a:rPr lang="en-US" dirty="0">
+                <a:solidFill>
+                  <a:schemeClr val="accent6">
+                    <a:lumMod val="75000"/>
+                  </a:schemeClr>
+                </a:solidFill>
+              </a:rPr>
+              <a:t> &amp; Windows </a:t>
+            </a:r>
+            <a:r>
+              <a:rPr dirty="0">
+                <a:solidFill>
+                  <a:schemeClr val="accent6">
+                    <a:lumMod val="75000"/>
+                  </a:schemeClr>
+                </a:solidFill>
+              </a:rPr>
+              <a:t>Production-Safe CVE Patching</a:t>
             </a:r>
           </a:p>
         </p:txBody>
@@ -3129,6 +3183,7 @@
           <a:lstStyle/>
           <a:p>
             <a:r>
+              <a:rPr dirty="0"/>
               <a:t>Architecture &amp; Flow</a:t>
             </a:r>
           </a:p>
@@ -3143,7 +3198,7 @@
 </file>
 
 <file path=ppt/slides/slide2.xml><?xml version="1.0" encoding="utf-8"?>
-<p:sld xmlns:a="http://schemas.openxmlformats.org/drawingml/2006/main" xmlns:p="http://schemas.openxmlformats.org/presentationml/2006/main" xmlns:r="http://schemas.openxmlformats.org/officeDocument/2006/relationships">
+<p:sld xmlns:a="http://schemas.openxmlformats.org/drawingml/2006/main" xmlns:r="http://schemas.openxmlformats.org/officeDocument/2006/relationships" xmlns:p="http://schemas.openxmlformats.org/presentationml/2006/main">
   <p:cSld>
     <p:spTree>
       <p:nvGrpSpPr>
@@ -3151,7 +3206,324 @@
         <p:cNvGrpSpPr/>
         <p:nvPr/>
       </p:nvGrpSpPr>
-      <p:grpSpPr/>
+      <p:grpSpPr>
+        <a:xfrm>
+          <a:off x="0" y="0"/>
+          <a:ext cx="0" cy="0"/>
+          <a:chOff x="0" y="0"/>
+          <a:chExt cx="0" cy="0"/>
+        </a:xfrm>
+      </p:grpSpPr>
+      <p:pic>
+        <p:nvPicPr>
+          <p:cNvPr id="5" name="Picture 4">
+            <a:extLst>
+              <a:ext uri="{FF2B5EF4-FFF2-40B4-BE49-F238E27FC236}">
+                <a16:creationId xmlns:a16="http://schemas.microsoft.com/office/drawing/2014/main" id="{55B8B708-1168-6A3E-4975-A51014E039F5}"/>
+              </a:ext>
+            </a:extLst>
+          </p:cNvPr>
+          <p:cNvPicPr>
+            <a:picLocks noChangeAspect="1"/>
+          </p:cNvPicPr>
+          <p:nvPr/>
+        </p:nvPicPr>
+        <p:blipFill>
+          <a:blip r:embed="rId2"/>
+          <a:stretch>
+            <a:fillRect/>
+          </a:stretch>
+        </p:blipFill>
+        <p:spPr>
+          <a:xfrm>
+            <a:off x="1378226" y="846242"/>
+            <a:ext cx="6969567" cy="5894388"/>
+          </a:xfrm>
+          <a:prstGeom prst="rect">
+            <a:avLst/>
+          </a:prstGeom>
+        </p:spPr>
+      </p:pic>
+      <p:sp>
+        <p:nvSpPr>
+          <p:cNvPr id="2" name="Title 1">
+            <a:extLst>
+              <a:ext uri="{FF2B5EF4-FFF2-40B4-BE49-F238E27FC236}">
+                <a16:creationId xmlns:a16="http://schemas.microsoft.com/office/drawing/2014/main" id="{CA85390D-17EE-4DE3-4FD4-0FAB6EA41AF5}"/>
+              </a:ext>
+            </a:extLst>
+          </p:cNvPr>
+          <p:cNvSpPr>
+            <a:spLocks noGrp="1"/>
+          </p:cNvSpPr>
+          <p:nvPr>
+            <p:ph type="title"/>
+          </p:nvPr>
+        </p:nvSpPr>
+        <p:spPr>
+          <a:xfrm>
+            <a:off x="2398643" y="117371"/>
+            <a:ext cx="4743449" cy="728870"/>
+          </a:xfrm>
+        </p:spPr>
+        <p:txBody>
+          <a:bodyPr>
+            <a:normAutofit fontScale="90000"/>
+          </a:bodyPr>
+          <a:lstStyle/>
+          <a:p>
+            <a:r>
+              <a:rPr lang="en-US" dirty="0">
+                <a:solidFill>
+                  <a:srgbClr val="0A13F4"/>
+                </a:solidFill>
+              </a:rPr>
+              <a:t>Current Architecture</a:t>
+            </a:r>
+            <a:endParaRPr dirty="0">
+              <a:solidFill>
+                <a:srgbClr val="0A13F4"/>
+              </a:solidFill>
+            </a:endParaRPr>
+          </a:p>
+        </p:txBody>
+      </p:sp>
+    </p:spTree>
+    <p:extLst>
+      <p:ext uri="{BB962C8B-B14F-4D97-AF65-F5344CB8AC3E}">
+        <p14:creationId xmlns:p14="http://schemas.microsoft.com/office/powerpoint/2010/main" val="1293430633"/>
+      </p:ext>
+    </p:extLst>
+  </p:cSld>
+  <p:clrMapOvr>
+    <a:masterClrMapping/>
+  </p:clrMapOvr>
+</p:sld>
+</file>
+
+<file path=ppt/slides/slide3.xml><?xml version="1.0" encoding="utf-8"?>
+<p:sld xmlns:a="http://schemas.openxmlformats.org/drawingml/2006/main" xmlns:r="http://schemas.openxmlformats.org/officeDocument/2006/relationships" xmlns:p="http://schemas.openxmlformats.org/presentationml/2006/main">
+  <p:cSld>
+    <p:spTree>
+      <p:nvGrpSpPr>
+        <p:cNvPr id="1" name=""/>
+        <p:cNvGrpSpPr/>
+        <p:nvPr/>
+      </p:nvGrpSpPr>
+      <p:grpSpPr>
+        <a:xfrm>
+          <a:off x="0" y="0"/>
+          <a:ext cx="0" cy="0"/>
+          <a:chOff x="0" y="0"/>
+          <a:chExt cx="0" cy="0"/>
+        </a:xfrm>
+      </p:grpSpPr>
+      <p:sp>
+        <p:nvSpPr>
+          <p:cNvPr id="11" name="TextBox 10">
+            <a:extLst>
+              <a:ext uri="{FF2B5EF4-FFF2-40B4-BE49-F238E27FC236}">
+                <a16:creationId xmlns:a16="http://schemas.microsoft.com/office/drawing/2014/main" id="{E39BB95E-2AB8-B646-0921-1B5F8BFB2B55}"/>
+              </a:ext>
+            </a:extLst>
+          </p:cNvPr>
+          <p:cNvSpPr txBox="1"/>
+          <p:nvPr/>
+        </p:nvSpPr>
+        <p:spPr>
+          <a:xfrm>
+            <a:off x="541614" y="0"/>
+            <a:ext cx="3432313" cy="707886"/>
+          </a:xfrm>
+          <a:prstGeom prst="rect">
+            <a:avLst/>
+          </a:prstGeom>
+          <a:noFill/>
+        </p:spPr>
+        <p:txBody>
+          <a:bodyPr wrap="square" rtlCol="0">
+            <a:spAutoFit/>
+          </a:bodyPr>
+          <a:lstStyle/>
+          <a:p>
+            <a:r>
+              <a:rPr lang="en-US" sz="4000" dirty="0">
+                <a:solidFill>
+                  <a:srgbClr val="0A13F4"/>
+                </a:solidFill>
+                <a:latin typeface="+mj-lt"/>
+                <a:ea typeface="+mj-ea"/>
+                <a:cs typeface="+mj-cs"/>
+              </a:rPr>
+              <a:t>Serverless</a:t>
+            </a:r>
+            <a:r>
+              <a:rPr lang="en-US" sz="1600" b="1" dirty="0">
+                <a:solidFill>
+                  <a:srgbClr val="0A13F4"/>
+                </a:solidFill>
+              </a:rPr>
+              <a:t> </a:t>
+            </a:r>
+            <a:r>
+              <a:rPr lang="en-US" sz="4000" dirty="0">
+                <a:solidFill>
+                  <a:srgbClr val="0A13F4"/>
+                </a:solidFill>
+                <a:latin typeface="+mj-lt"/>
+                <a:ea typeface="+mj-ea"/>
+                <a:cs typeface="+mj-cs"/>
+              </a:rPr>
+              <a:t>View</a:t>
+            </a:r>
+          </a:p>
+        </p:txBody>
+      </p:sp>
+      <p:pic>
+        <p:nvPicPr>
+          <p:cNvPr id="15" name="Picture 14">
+            <a:extLst>
+              <a:ext uri="{FF2B5EF4-FFF2-40B4-BE49-F238E27FC236}">
+                <a16:creationId xmlns:a16="http://schemas.microsoft.com/office/drawing/2014/main" id="{4E605E81-21BE-8EEC-1B3F-9EC46971D0AD}"/>
+              </a:ext>
+            </a:extLst>
+          </p:cNvPr>
+          <p:cNvPicPr>
+            <a:picLocks noChangeAspect="1"/>
+          </p:cNvPicPr>
+          <p:nvPr/>
+        </p:nvPicPr>
+        <p:blipFill>
+          <a:blip r:embed="rId2"/>
+          <a:stretch>
+            <a:fillRect/>
+          </a:stretch>
+        </p:blipFill>
+        <p:spPr>
+          <a:xfrm>
+            <a:off x="2716696" y="739569"/>
+            <a:ext cx="4022339" cy="5985632"/>
+          </a:xfrm>
+          <a:prstGeom prst="rect">
+            <a:avLst/>
+          </a:prstGeom>
+        </p:spPr>
+      </p:pic>
+    </p:spTree>
+    <p:extLst>
+      <p:ext uri="{BB962C8B-B14F-4D97-AF65-F5344CB8AC3E}">
+        <p14:creationId xmlns:p14="http://schemas.microsoft.com/office/powerpoint/2010/main" val="2357267153"/>
+      </p:ext>
+    </p:extLst>
+  </p:cSld>
+  <p:clrMapOvr>
+    <a:masterClrMapping/>
+  </p:clrMapOvr>
+</p:sld>
+</file>
+
+<file path=ppt/slides/slide4.xml><?xml version="1.0" encoding="utf-8"?>
+<p:sld xmlns:a="http://schemas.openxmlformats.org/drawingml/2006/main" xmlns:r="http://schemas.openxmlformats.org/officeDocument/2006/relationships" xmlns:p="http://schemas.openxmlformats.org/presentationml/2006/main">
+  <p:cSld>
+    <p:spTree>
+      <p:nvGrpSpPr>
+        <p:cNvPr id="1" name=""/>
+        <p:cNvGrpSpPr/>
+        <p:nvPr/>
+      </p:nvGrpSpPr>
+      <p:grpSpPr>
+        <a:xfrm>
+          <a:off x="0" y="0"/>
+          <a:ext cx="0" cy="0"/>
+          <a:chOff x="0" y="0"/>
+          <a:chExt cx="0" cy="0"/>
+        </a:xfrm>
+      </p:grpSpPr>
+      <p:sp>
+        <p:nvSpPr>
+          <p:cNvPr id="2" name="Title 1">
+            <a:extLst>
+              <a:ext uri="{FF2B5EF4-FFF2-40B4-BE49-F238E27FC236}">
+                <a16:creationId xmlns:a16="http://schemas.microsoft.com/office/drawing/2014/main" id="{B20568C6-3FB2-E532-45A4-8D8F03ACB113}"/>
+              </a:ext>
+            </a:extLst>
+          </p:cNvPr>
+          <p:cNvSpPr>
+            <a:spLocks noGrp="1"/>
+          </p:cNvSpPr>
+          <p:nvPr>
+            <p:ph type="title"/>
+          </p:nvPr>
+        </p:nvSpPr>
+        <p:spPr/>
+        <p:txBody>
+          <a:bodyPr/>
+          <a:lstStyle/>
+          <a:p>
+            <a:endParaRPr lang="en-US"/>
+          </a:p>
+        </p:txBody>
+      </p:sp>
+      <p:pic>
+        <p:nvPicPr>
+          <p:cNvPr id="6" name="Picture 5">
+            <a:extLst>
+              <a:ext uri="{FF2B5EF4-FFF2-40B4-BE49-F238E27FC236}">
+                <a16:creationId xmlns:a16="http://schemas.microsoft.com/office/drawing/2014/main" id="{C03DCF6F-877E-1365-9AFE-241DA934DBD2}"/>
+              </a:ext>
+            </a:extLst>
+          </p:cNvPr>
+          <p:cNvPicPr>
+            <a:picLocks noChangeAspect="1"/>
+          </p:cNvPicPr>
+          <p:nvPr/>
+        </p:nvPicPr>
+        <p:blipFill>
+          <a:blip r:embed="rId2"/>
+          <a:stretch>
+            <a:fillRect/>
+          </a:stretch>
+        </p:blipFill>
+        <p:spPr>
+          <a:xfrm>
+            <a:off x="698500" y="3429000"/>
+            <a:ext cx="3873500" cy="2654300"/>
+          </a:xfrm>
+          <a:prstGeom prst="rect">
+            <a:avLst/>
+          </a:prstGeom>
+        </p:spPr>
+      </p:pic>
+    </p:spTree>
+    <p:extLst>
+      <p:ext uri="{BB962C8B-B14F-4D97-AF65-F5344CB8AC3E}">
+        <p14:creationId xmlns:p14="http://schemas.microsoft.com/office/powerpoint/2010/main" val="24592578"/>
+      </p:ext>
+    </p:extLst>
+  </p:cSld>
+  <p:clrMapOvr>
+    <a:masterClrMapping/>
+  </p:clrMapOvr>
+</p:sld>
+</file>
+
+<file path=ppt/slides/slide5.xml><?xml version="1.0" encoding="utf-8"?>
+<p:sld xmlns:a="http://schemas.openxmlformats.org/drawingml/2006/main" xmlns:r="http://schemas.openxmlformats.org/officeDocument/2006/relationships" xmlns:p="http://schemas.openxmlformats.org/presentationml/2006/main">
+  <p:cSld>
+    <p:spTree>
+      <p:nvGrpSpPr>
+        <p:cNvPr id="1" name=""/>
+        <p:cNvGrpSpPr/>
+        <p:nvPr/>
+      </p:nvGrpSpPr>
+      <p:grpSpPr>
+        <a:xfrm>
+          <a:off x="0" y="0"/>
+          <a:ext cx="0" cy="0"/>
+          <a:chOff x="0" y="0"/>
+          <a:chExt cx="0" cy="0"/>
+        </a:xfrm>
+      </p:grpSpPr>
       <p:sp>
         <p:nvSpPr>
           <p:cNvPr id="2" name="Title 1"/>
@@ -3168,7 +3540,8 @@
           <a:lstStyle/>
           <a:p>
             <a:r>
-              <a:t>Slide 1: Component Stack</a:t>
+              <a:rPr dirty="0"/>
+              <a:t>Component Stack</a:t>
             </a:r>
           </a:p>
         </p:txBody>
@@ -3189,123 +3562,107 @@
           <a:lstStyle/>
           <a:p>
             <a:r>
-              <a:rPr sz="1000">
-                <a:latin typeface="Courier New"/>
-              </a:rPr>
-              <a:t>flowchart TB</a:t>
-            </a:r>
-          </a:p>
-          <a:p>
-            <a:r>
-              <a:rPr sz="1000">
-                <a:latin typeface="Courier New"/>
-              </a:rPr>
-              <a:t>    subgraph Title["AIOps R8 - Production-Safe CVE Patching"]</a:t>
-            </a:r>
-          </a:p>
-          <a:p>
-            <a:r>
-              <a:rPr sz="1000">
-                <a:latin typeface="Courier New"/>
-              </a:rPr>
-              <a:t>        direction TB</a:t>
-            </a:r>
-          </a:p>
-          <a:p>
-            <a:r>
-              <a:rPr sz="1000">
-                <a:latin typeface="Courier New"/>
-              </a:rPr>
-              <a:t>        A["Automated CVE patching"]</a:t>
-            </a:r>
-          </a:p>
-          <a:p>
-            <a:r>
-              <a:rPr sz="1000">
-                <a:latin typeface="Courier New"/>
-              </a:rPr>
-              <a:t>        B["RHEL8 + Windows"]</a:t>
-            </a:r>
-          </a:p>
-          <a:p>
-            <a:r>
-              <a:rPr sz="1000">
-                <a:latin typeface="Courier New"/>
-              </a:rPr>
-              <a:t>        C["Amazon Inspector v2"]</a:t>
-            </a:r>
-          </a:p>
-          <a:p>
-            <a:r>
-              <a:rPr sz="1000">
-                <a:latin typeface="Courier New"/>
-              </a:rPr>
-              <a:t>        D["Bedrock (Nova 2 Lite)"]</a:t>
-            </a:r>
-          </a:p>
-          <a:p>
-            <a:r>
-              <a:rPr sz="1000">
-                <a:latin typeface="Courier New"/>
-              </a:rPr>
-              <a:t>        E["Step Functions + EventBridge"]</a:t>
-            </a:r>
-          </a:p>
-          <a:p>
-            <a:r>
-              <a:rPr sz="1000">
-                <a:latin typeface="Courier New"/>
-              </a:rPr>
-              <a:t>        F["CVE-only, production-safe"]</a:t>
-            </a:r>
-          </a:p>
-          <a:p>
-            <a:r>
-              <a:rPr sz="1000">
-                <a:latin typeface="Courier New"/>
-              </a:rPr>
-              <a:t>    end</a:t>
-            </a:r>
-          </a:p>
-          <a:p>
-            <a:r>
-              <a:rPr sz="1000">
-                <a:latin typeface="Courier New"/>
-              </a:rPr>
-              <a:t>    A --&gt; B</a:t>
-            </a:r>
-          </a:p>
-          <a:p>
-            <a:r>
-              <a:rPr sz="1000">
-                <a:latin typeface="Courier New"/>
-              </a:rPr>
-              <a:t>    B --&gt; C</a:t>
-            </a:r>
-          </a:p>
-          <a:p>
-            <a:r>
-              <a:rPr sz="1000">
-                <a:latin typeface="Courier New"/>
-              </a:rPr>
-              <a:t>    C --&gt; D</a:t>
-            </a:r>
-          </a:p>
-          <a:p>
-            <a:r>
-              <a:rPr sz="1000">
-                <a:latin typeface="Courier New"/>
-              </a:rPr>
-              <a:t>    D --&gt; E</a:t>
-            </a:r>
-          </a:p>
-          <a:p>
-            <a:r>
-              <a:rPr sz="1000">
-                <a:latin typeface="Courier New"/>
-              </a:rPr>
-              <a:t>    E --&gt; F</a:t>
-            </a:r>
+              <a:rPr lang="en-US" sz="1000" b="1" dirty="0"/>
+              <a:t>What the Customer Wants</a:t>
+            </a:r>
+          </a:p>
+          <a:p>
+            <a:r>
+              <a:rPr lang="en-US" sz="1000" b="1" dirty="0"/>
+              <a:t>Automated, production-safe CVE patching that scales without risk.</a:t>
+            </a:r>
+            <a:endParaRPr lang="en-US" sz="1000" dirty="0"/>
+          </a:p>
+          <a:p>
+            <a:r>
+              <a:rPr lang="en-US" sz="1000" dirty="0"/>
+              <a:t>The customer needs to keep RHEL8 and Windows servers secure by applying critical security patches, while avoiding the operational risk and downtime that comes from blind or manual patching.</a:t>
+            </a:r>
+          </a:p>
+          <a:p>
+            <a:pPr marL="0" indent="0">
+              <a:buNone/>
+            </a:pPr>
+            <a:br>
+              <a:rPr lang="en-US" sz="1000" dirty="0"/>
+            </a:br>
+            <a:endParaRPr lang="en-US" sz="1000" dirty="0"/>
+          </a:p>
+          <a:p>
+            <a:r>
+              <a:rPr lang="en-US" sz="1000" b="1" dirty="0"/>
+              <a:t>The Core Ask</a:t>
+            </a:r>
+          </a:p>
+          <a:p>
+            <a:r>
+              <a:rPr lang="en-US" sz="1000" b="1" dirty="0"/>
+              <a:t>Patch only when it matters</a:t>
+            </a:r>
+            <a:endParaRPr lang="en-US" sz="1000" dirty="0"/>
+          </a:p>
+          <a:p>
+            <a:r>
+              <a:rPr lang="en-US" sz="1000" dirty="0"/>
+              <a:t>Apply updates only when there are critical CVEs—not every minor update, not on a fixed schedule regardless of risk.</a:t>
+            </a:r>
+          </a:p>
+          <a:p>
+            <a:r>
+              <a:rPr lang="en-US" sz="1000" b="1" dirty="0"/>
+              <a:t>Stay production-safe</a:t>
+            </a:r>
+            <a:endParaRPr lang="en-US" sz="1000" dirty="0"/>
+          </a:p>
+          <a:p>
+            <a:r>
+              <a:rPr lang="en-US" sz="1000" dirty="0"/>
+              <a:t>Limit patching to security-related updates. No feature updates, no optional packages, no changes that could introduce breaking behavior.</a:t>
+            </a:r>
+          </a:p>
+          <a:p>
+            <a:r>
+              <a:rPr lang="en-US" sz="1000" b="1" dirty="0"/>
+              <a:t>Remove manual effort</a:t>
+            </a:r>
+            <a:endParaRPr lang="en-US" sz="1000" dirty="0"/>
+          </a:p>
+          <a:p>
+            <a:r>
+              <a:rPr lang="en-US" sz="1000" dirty="0"/>
+              <a:t>No more ad-hoc scripts, inconsistent pre-patch scans, or manual decisions about when to patch.</a:t>
+            </a:r>
+          </a:p>
+          <a:p>
+            <a:r>
+              <a:rPr lang="en-US" sz="1000" b="1" dirty="0"/>
+              <a:t>Use structured, reliable data</a:t>
+            </a:r>
+            <a:endParaRPr lang="en-US" sz="1000" dirty="0"/>
+          </a:p>
+          <a:p>
+            <a:r>
+              <a:rPr lang="en-US" sz="1000" dirty="0"/>
+              <a:t>Base patch decisions on authoritative CVE data (severity, affected packages, IDs), not raw command output or custom scripts.</a:t>
+            </a:r>
+          </a:p>
+          <a:p>
+            <a:r>
+              <a:rPr lang="en-US" sz="1000" b="1" dirty="0"/>
+              <a:t>Scale across the fleet</a:t>
+            </a:r>
+            <a:endParaRPr lang="en-US" sz="1000" dirty="0"/>
+          </a:p>
+          <a:p>
+            <a:r>
+              <a:rPr lang="en-US" sz="1000" dirty="0"/>
+              <a:t>Support RHEL8 and Windows across many instances without manual per-instance work.</a:t>
+            </a:r>
+          </a:p>
+          <a:p>
+            <a:endParaRPr sz="1000" dirty="0">
+              <a:latin typeface="Courier New"/>
+            </a:endParaRPr>
           </a:p>
         </p:txBody>
       </p:sp>
@@ -3317,8 +3674,8 @@
 </p:sld>
 </file>
 
-<file path=ppt/slides/slide3.xml><?xml version="1.0" encoding="utf-8"?>
-<p:sld xmlns:a="http://schemas.openxmlformats.org/drawingml/2006/main" xmlns:p="http://schemas.openxmlformats.org/presentationml/2006/main" xmlns:r="http://schemas.openxmlformats.org/officeDocument/2006/relationships">
+<file path=ppt/slides/slide6.xml><?xml version="1.0" encoding="utf-8"?>
+<p:sld xmlns:a="http://schemas.openxmlformats.org/drawingml/2006/main" xmlns:r="http://schemas.openxmlformats.org/officeDocument/2006/relationships" xmlns:p="http://schemas.openxmlformats.org/presentationml/2006/main">
   <p:cSld>
     <p:spTree>
       <p:nvGrpSpPr>
@@ -3326,7 +3683,14 @@
         <p:cNvGrpSpPr/>
         <p:nvPr/>
       </p:nvGrpSpPr>
-      <p:grpSpPr/>
+      <p:grpSpPr>
+        <a:xfrm>
+          <a:off x="0" y="0"/>
+          <a:ext cx="0" cy="0"/>
+          <a:chOff x="0" y="0"/>
+          <a:chExt cx="0" cy="0"/>
+        </a:xfrm>
+      </p:grpSpPr>
       <p:sp>
         <p:nvSpPr>
           <p:cNvPr id="2" name="Title 1"/>
@@ -3452,8 +3816,8 @@
 </p:sld>
 </file>
 
-<file path=ppt/slides/slide4.xml><?xml version="1.0" encoding="utf-8"?>
-<p:sld xmlns:a="http://schemas.openxmlformats.org/drawingml/2006/main" xmlns:p="http://schemas.openxmlformats.org/presentationml/2006/main" xmlns:r="http://schemas.openxmlformats.org/officeDocument/2006/relationships">
+<file path=ppt/slides/slide7.xml><?xml version="1.0" encoding="utf-8"?>
+<p:sld xmlns:a="http://schemas.openxmlformats.org/drawingml/2006/main" xmlns:r="http://schemas.openxmlformats.org/officeDocument/2006/relationships" xmlns:p="http://schemas.openxmlformats.org/presentationml/2006/main">
   <p:cSld>
     <p:spTree>
       <p:nvGrpSpPr>
@@ -3461,7 +3825,14 @@
         <p:cNvGrpSpPr/>
         <p:nvPr/>
       </p:nvGrpSpPr>
-      <p:grpSpPr/>
+      <p:grpSpPr>
+        <a:xfrm>
+          <a:off x="0" y="0"/>
+          <a:ext cx="0" cy="0"/>
+          <a:chOff x="0" y="0"/>
+          <a:chExt cx="0" cy="0"/>
+        </a:xfrm>
+      </p:grpSpPr>
       <p:sp>
         <p:nvSpPr>
           <p:cNvPr id="2" name="Title 1"/>
@@ -3474,7 +3845,9 @@
         </p:nvSpPr>
         <p:spPr/>
         <p:txBody>
-          <a:bodyPr/>
+          <a:bodyPr>
+            <a:normAutofit fontScale="90000"/>
+          </a:bodyPr>
           <a:lstStyle/>
           <a:p>
             <a:r>
@@ -3585,7 +3958,11 @@
               <a:t>    AMI["AMI cleanup: daily"]</a:t>
             </a:r>
           </a:p>
-          <a:p/>
+          <a:p>
+            <a:endParaRPr sz="1000">
+              <a:latin typeface="Courier New"/>
+            </a:endParaRPr>
+          </a:p>
           <a:p>
             <a:r>
               <a:rPr sz="1000">
@@ -3668,8 +4045,8 @@
 </p:sld>
 </file>
 
-<file path=ppt/slides/slide5.xml><?xml version="1.0" encoding="utf-8"?>
-<p:sld xmlns:a="http://schemas.openxmlformats.org/drawingml/2006/main" xmlns:p="http://schemas.openxmlformats.org/presentationml/2006/main" xmlns:r="http://schemas.openxmlformats.org/officeDocument/2006/relationships">
+<file path=ppt/slides/slide8.xml><?xml version="1.0" encoding="utf-8"?>
+<p:sld xmlns:a="http://schemas.openxmlformats.org/drawingml/2006/main" xmlns:r="http://schemas.openxmlformats.org/officeDocument/2006/relationships" xmlns:p="http://schemas.openxmlformats.org/presentationml/2006/main">
   <p:cSld>
     <p:spTree>
       <p:nvGrpSpPr>
@@ -3677,7 +4054,14 @@
         <p:cNvGrpSpPr/>
         <p:nvPr/>
       </p:nvGrpSpPr>
-      <p:grpSpPr/>
+      <p:grpSpPr>
+        <a:xfrm>
+          <a:off x="0" y="0"/>
+          <a:ext cx="0" cy="0"/>
+          <a:chOff x="0" y="0"/>
+          <a:chExt cx="0" cy="0"/>
+        </a:xfrm>
+      </p:grpSpPr>
       <p:sp>
         <p:nvSpPr>
           <p:cNvPr id="2" name="Title 1"/>
@@ -3690,7 +4074,9 @@
         </p:nvSpPr>
         <p:spPr/>
         <p:txBody>
-          <a:bodyPr/>
+          <a:bodyPr>
+            <a:normAutofit fontScale="90000"/>
+          </a:bodyPr>
           <a:lstStyle/>
           <a:p>
             <a:r>
@@ -3711,7 +4097,9 @@
         </p:nvSpPr>
         <p:spPr/>
         <p:txBody>
-          <a:bodyPr/>
+          <a:bodyPr>
+            <a:normAutofit fontScale="92500" lnSpcReduction="10000"/>
+          </a:bodyPr>
           <a:lstStyle/>
           <a:p>
             <a:r>
@@ -3745,7 +4133,11 @@
               <a:t>    end</a:t>
             </a:r>
           </a:p>
-          <a:p/>
+          <a:p>
+            <a:endParaRPr sz="1000">
+              <a:latin typeface="Courier New"/>
+            </a:endParaRPr>
+          </a:p>
           <a:p>
             <a:r>
               <a:rPr sz="1000">
@@ -3770,7 +4162,11 @@
               <a:t>    end</a:t>
             </a:r>
           </a:p>
-          <a:p/>
+          <a:p>
+            <a:endParaRPr sz="1000">
+              <a:latin typeface="Courier New"/>
+            </a:endParaRPr>
+          </a:p>
           <a:p>
             <a:r>
               <a:rPr sz="1000">
@@ -3811,7 +4207,11 @@
               <a:t>    end</a:t>
             </a:r>
           </a:p>
-          <a:p/>
+          <a:p>
+            <a:endParaRPr sz="1000">
+              <a:latin typeface="Courier New"/>
+            </a:endParaRPr>
+          </a:p>
           <a:p>
             <a:r>
               <a:rPr sz="1000">
@@ -3836,7 +4236,11 @@
               <a:t>    end</a:t>
             </a:r>
           </a:p>
-          <a:p/>
+          <a:p>
+            <a:endParaRPr sz="1000">
+              <a:latin typeface="Courier New"/>
+            </a:endParaRPr>
+          </a:p>
           <a:p>
             <a:r>
               <a:rPr sz="1000">
@@ -3861,7 +4265,11 @@
               <a:t>    end</a:t>
             </a:r>
           </a:p>
-          <a:p/>
+          <a:p>
+            <a:endParaRPr sz="1000">
+              <a:latin typeface="Courier New"/>
+            </a:endParaRPr>
+          </a:p>
           <a:p>
             <a:r>
               <a:rPr sz="1000">

--- a/docs/aiops_r8_presentation.pptx
+++ b/docs/aiops_r8_presentation.pptx
@@ -9,10 +9,11 @@
     <p:sldId id="261" r:id="rId3"/>
     <p:sldId id="262" r:id="rId4"/>
     <p:sldId id="263" r:id="rId5"/>
-    <p:sldId id="257" r:id="rId6"/>
-    <p:sldId id="258" r:id="rId7"/>
-    <p:sldId id="259" r:id="rId8"/>
-    <p:sldId id="260" r:id="rId9"/>
+    <p:sldId id="264" r:id="rId6"/>
+    <p:sldId id="257" r:id="rId7"/>
+    <p:sldId id="258" r:id="rId8"/>
+    <p:sldId id="259" r:id="rId9"/>
+    <p:sldId id="260" r:id="rId10"/>
   </p:sldIdLst>
   <p:sldSz cx="9144000" cy="6858000" type="screen4x3"/>
   <p:notesSz cx="6858000" cy="9144000"/>
@@ -3512,7 +3513,13 @@
   <p:cSld>
     <p:spTree>
       <p:nvGrpSpPr>
-        <p:cNvPr id="1" name=""/>
+        <p:cNvPr id="1" name="">
+          <a:extLst>
+            <a:ext uri="{FF2B5EF4-FFF2-40B4-BE49-F238E27FC236}">
+              <a16:creationId xmlns:a16="http://schemas.microsoft.com/office/drawing/2014/main" id="{7D2834AC-7680-F908-4558-58A88E5B5426}"/>
+            </a:ext>
+          </a:extLst>
+        </p:cNvPr>
         <p:cNvGrpSpPr/>
         <p:nvPr/>
       </p:nvGrpSpPr>
@@ -3526,147 +3533,505 @@
       </p:grpSpPr>
       <p:sp>
         <p:nvSpPr>
-          <p:cNvPr id="2" name="Title 1"/>
-          <p:cNvSpPr>
-            <a:spLocks noGrp="1"/>
-          </p:cNvSpPr>
-          <p:nvPr>
-            <p:ph type="title"/>
-          </p:nvPr>
-        </p:nvSpPr>
-        <p:spPr/>
-        <p:txBody>
-          <a:bodyPr/>
-          <a:lstStyle/>
-          <a:p>
-            <a:r>
-              <a:rPr dirty="0"/>
-              <a:t>Component Stack</a:t>
-            </a:r>
-          </a:p>
-        </p:txBody>
-      </p:sp>
-      <p:sp>
-        <p:nvSpPr>
-          <p:cNvPr id="3" name="Content Placeholder 2"/>
-          <p:cNvSpPr>
-            <a:spLocks noGrp="1"/>
-          </p:cNvSpPr>
-          <p:nvPr>
-            <p:ph idx="1"/>
-          </p:nvPr>
-        </p:nvSpPr>
-        <p:spPr/>
-        <p:txBody>
-          <a:bodyPr/>
-          <a:lstStyle/>
-          <a:p>
-            <a:r>
-              <a:rPr lang="en-US" sz="1000" b="1" dirty="0"/>
-              <a:t>What the Customer Wants</a:t>
-            </a:r>
-          </a:p>
-          <a:p>
-            <a:r>
-              <a:rPr lang="en-US" sz="1000" b="1" dirty="0"/>
-              <a:t>Automated, production-safe CVE patching that scales without risk.</a:t>
-            </a:r>
-            <a:endParaRPr lang="en-US" sz="1000" dirty="0"/>
-          </a:p>
-          <a:p>
-            <a:r>
-              <a:rPr lang="en-US" sz="1000" dirty="0"/>
-              <a:t>The customer needs to keep RHEL8 and Windows servers secure by applying critical security patches, while avoiding the operational risk and downtime that comes from blind or manual patching.</a:t>
-            </a:r>
-          </a:p>
-          <a:p>
-            <a:pPr marL="0" indent="0">
+          <p:cNvPr id="4" name="TextBox 3">
+            <a:extLst>
+              <a:ext uri="{FF2B5EF4-FFF2-40B4-BE49-F238E27FC236}">
+                <a16:creationId xmlns:a16="http://schemas.microsoft.com/office/drawing/2014/main" id="{76D048C1-3BDF-3E76-A5E3-2DD31B3CC540}"/>
+              </a:ext>
+            </a:extLst>
+          </p:cNvPr>
+          <p:cNvSpPr txBox="1"/>
+          <p:nvPr/>
+        </p:nvSpPr>
+        <p:spPr>
+          <a:xfrm>
+            <a:off x="502470" y="1040178"/>
+            <a:ext cx="8641530" cy="5447645"/>
+          </a:xfrm>
+          <a:prstGeom prst="rect">
+            <a:avLst/>
+          </a:prstGeom>
+          <a:noFill/>
+        </p:spPr>
+        <p:txBody>
+          <a:bodyPr wrap="square">
+            <a:spAutoFit/>
+          </a:bodyPr>
+          <a:lstStyle/>
+          <a:p>
+            <a:pPr>
               <a:buNone/>
             </a:pPr>
-            <a:br>
-              <a:rPr lang="en-US" sz="1000" dirty="0"/>
-            </a:br>
-            <a:endParaRPr lang="en-US" sz="1000" dirty="0"/>
-          </a:p>
-          <a:p>
-            <a:r>
-              <a:rPr lang="en-US" sz="1000" b="1" dirty="0"/>
-              <a:t>The Core Ask</a:t>
-            </a:r>
-          </a:p>
-          <a:p>
-            <a:r>
-              <a:rPr lang="en-US" sz="1000" b="1" dirty="0"/>
-              <a:t>Patch only when it matters</a:t>
-            </a:r>
-            <a:endParaRPr lang="en-US" sz="1000" dirty="0"/>
-          </a:p>
-          <a:p>
-            <a:r>
-              <a:rPr lang="en-US" sz="1000" dirty="0"/>
-              <a:t>Apply updates only when there are critical CVEs—not every minor update, not on a fixed schedule regardless of risk.</a:t>
-            </a:r>
-          </a:p>
-          <a:p>
-            <a:r>
-              <a:rPr lang="en-US" sz="1000" b="1" dirty="0"/>
-              <a:t>Stay production-safe</a:t>
-            </a:r>
-            <a:endParaRPr lang="en-US" sz="1000" dirty="0"/>
-          </a:p>
-          <a:p>
-            <a:r>
-              <a:rPr lang="en-US" sz="1000" dirty="0"/>
-              <a:t>Limit patching to security-related updates. No feature updates, no optional packages, no changes that could introduce breaking behavior.</a:t>
-            </a:r>
-          </a:p>
-          <a:p>
-            <a:r>
-              <a:rPr lang="en-US" sz="1000" b="1" dirty="0"/>
-              <a:t>Remove manual effort</a:t>
-            </a:r>
-            <a:endParaRPr lang="en-US" sz="1000" dirty="0"/>
-          </a:p>
-          <a:p>
-            <a:r>
-              <a:rPr lang="en-US" sz="1000" dirty="0"/>
-              <a:t>No more ad-hoc scripts, inconsistent pre-patch scans, or manual decisions about when to patch.</a:t>
-            </a:r>
-          </a:p>
-          <a:p>
-            <a:r>
-              <a:rPr lang="en-US" sz="1000" b="1" dirty="0"/>
-              <a:t>Use structured, reliable data</a:t>
-            </a:r>
-            <a:endParaRPr lang="en-US" sz="1000" dirty="0"/>
-          </a:p>
-          <a:p>
-            <a:r>
-              <a:rPr lang="en-US" sz="1000" dirty="0"/>
-              <a:t>Base patch decisions on authoritative CVE data (severity, affected packages, IDs), not raw command output or custom scripts.</a:t>
-            </a:r>
-          </a:p>
-          <a:p>
-            <a:r>
-              <a:rPr lang="en-US" sz="1000" b="1" dirty="0"/>
-              <a:t>Scale across the fleet</a:t>
-            </a:r>
-            <a:endParaRPr lang="en-US" sz="1000" dirty="0"/>
-          </a:p>
-          <a:p>
-            <a:r>
-              <a:rPr lang="en-US" sz="1000" dirty="0"/>
-              <a:t>Support RHEL8 and Windows across many instances without manual per-instance work.</a:t>
-            </a:r>
-          </a:p>
-          <a:p>
-            <a:endParaRPr sz="1000" dirty="0">
-              <a:latin typeface="Courier New"/>
-            </a:endParaRPr>
+            <a:r>
+              <a:rPr lang="en-US" sz="1200" b="1" dirty="0">
+                <a:latin typeface="Courier New" panose="02070309020205020404" pitchFamily="49" charset="0"/>
+              </a:rPr>
+              <a:t>1. SCHEDULE (</a:t>
+            </a:r>
+            <a:r>
+              <a:rPr lang="en-US" sz="1200" b="1" dirty="0" err="1">
+                <a:latin typeface="Courier New" panose="02070309020205020404" pitchFamily="49" charset="0"/>
+              </a:rPr>
+              <a:t>EventBridge</a:t>
+            </a:r>
+            <a:r>
+              <a:rPr lang="en-US" sz="1200" b="1" dirty="0">
+                <a:latin typeface="Courier New" panose="02070309020205020404" pitchFamily="49" charset="0"/>
+              </a:rPr>
+              <a:t>)</a:t>
+            </a:r>
+          </a:p>
+          <a:p>
+            <a:pPr>
+              <a:buNone/>
+            </a:pPr>
+            <a:r>
+              <a:rPr lang="en-US" sz="1200" b="1" dirty="0">
+                <a:latin typeface="Courier New" panose="02070309020205020404" pitchFamily="49" charset="0"/>
+              </a:rPr>
+              <a:t>   │  </a:t>
+            </a:r>
+            <a:r>
+              <a:rPr lang="en-US" sz="1200" b="1" dirty="0" err="1">
+                <a:latin typeface="Courier New" panose="02070309020205020404" pitchFamily="49" charset="0"/>
+              </a:rPr>
+              <a:t>cron</a:t>
+            </a:r>
+            <a:r>
+              <a:rPr lang="en-US" sz="1200" b="1" dirty="0">
+                <a:latin typeface="Courier New" panose="02070309020205020404" pitchFamily="49" charset="0"/>
+              </a:rPr>
+              <a:t>(0 2 ? * 3#2 *)  →  2:00 AM UTC on 2nd Tuesday (after Patch Tuesday)</a:t>
+            </a:r>
+          </a:p>
+          <a:p>
+            <a:pPr>
+              <a:buNone/>
+            </a:pPr>
+            <a:r>
+              <a:rPr lang="en-US" sz="1200" b="1" dirty="0">
+                <a:latin typeface="Courier New" panose="02070309020205020404" pitchFamily="49" charset="0"/>
+              </a:rPr>
+              <a:t>   ▼</a:t>
+            </a:r>
+          </a:p>
+          <a:p>
+            <a:pPr>
+              <a:buNone/>
+            </a:pPr>
+            <a:r>
+              <a:rPr lang="en-US" sz="1200" b="1" dirty="0">
+                <a:solidFill>
+                  <a:schemeClr val="accent6"/>
+                </a:solidFill>
+                <a:latin typeface="Courier New" panose="02070309020205020404" pitchFamily="49" charset="0"/>
+              </a:rPr>
+              <a:t>2. DISCOVER INSTANCES (Lambda)</a:t>
+            </a:r>
+          </a:p>
+          <a:p>
+            <a:pPr>
+              <a:buNone/>
+            </a:pPr>
+            <a:r>
+              <a:rPr lang="en-US" sz="1200" b="1" dirty="0">
+                <a:solidFill>
+                  <a:schemeClr val="accent6"/>
+                </a:solidFill>
+                <a:latin typeface="Courier New" panose="02070309020205020404" pitchFamily="49" charset="0"/>
+              </a:rPr>
+              <a:t>   │  Instance Discovery Lambda: by tags (Role=patch-target) or static Terraform IDs</a:t>
+            </a:r>
+          </a:p>
+          <a:p>
+            <a:pPr>
+              <a:buNone/>
+            </a:pPr>
+            <a:r>
+              <a:rPr lang="en-US" sz="1200" b="1" dirty="0">
+                <a:solidFill>
+                  <a:schemeClr val="accent6"/>
+                </a:solidFill>
+                <a:latin typeface="Courier New" panose="02070309020205020404" pitchFamily="49" charset="0"/>
+              </a:rPr>
+              <a:t>   │  Excludes </a:t>
+            </a:r>
+            <a:r>
+              <a:rPr lang="en-US" sz="1200" b="1" dirty="0" err="1">
+                <a:solidFill>
+                  <a:schemeClr val="accent6"/>
+                </a:solidFill>
+                <a:latin typeface="Courier New" panose="02070309020205020404" pitchFamily="49" charset="0"/>
+              </a:rPr>
+              <a:t>PatchExcluded</a:t>
+            </a:r>
+            <a:r>
+              <a:rPr lang="en-US" sz="1200" b="1" dirty="0">
+                <a:solidFill>
+                  <a:schemeClr val="accent6"/>
+                </a:solidFill>
+                <a:latin typeface="Courier New" panose="02070309020205020404" pitchFamily="49" charset="0"/>
+              </a:rPr>
+              <a:t>=true</a:t>
+            </a:r>
+          </a:p>
+          <a:p>
+            <a:pPr>
+              <a:buNone/>
+            </a:pPr>
+            <a:r>
+              <a:rPr lang="en-US" sz="1200" b="1" dirty="0">
+                <a:latin typeface="Courier New" panose="02070309020205020404" pitchFamily="49" charset="0"/>
+              </a:rPr>
+              <a:t>   ▼</a:t>
+            </a:r>
+          </a:p>
+          <a:p>
+            <a:pPr>
+              <a:buNone/>
+            </a:pPr>
+            <a:r>
+              <a:rPr lang="en-US" sz="1200" b="1" dirty="0">
+                <a:latin typeface="Courier New" panose="02070309020205020404" pitchFamily="49" charset="0"/>
+              </a:rPr>
+              <a:t>3. CHECK SSM AGENT HEALTH (Lambda)</a:t>
+            </a:r>
+          </a:p>
+          <a:p>
+            <a:pPr>
+              <a:buNone/>
+            </a:pPr>
+            <a:r>
+              <a:rPr lang="en-US" sz="1200" b="1" dirty="0">
+                <a:latin typeface="Courier New" panose="02070309020205020404" pitchFamily="49" charset="0"/>
+              </a:rPr>
+              <a:t>   │  Filters out instances not in SSM Managed state; sends SNS alert if any excluded</a:t>
+            </a:r>
+          </a:p>
+          <a:p>
+            <a:pPr>
+              <a:buNone/>
+            </a:pPr>
+            <a:r>
+              <a:rPr lang="en-US" sz="1200" b="1" dirty="0">
+                <a:latin typeface="Courier New" panose="02070309020205020404" pitchFamily="49" charset="0"/>
+              </a:rPr>
+              <a:t>   ▼</a:t>
+            </a:r>
+          </a:p>
+          <a:p>
+            <a:pPr>
+              <a:buNone/>
+            </a:pPr>
+            <a:r>
+              <a:rPr lang="en-US" sz="1200" b="1" dirty="0">
+                <a:solidFill>
+                  <a:schemeClr val="accent6"/>
+                </a:solidFill>
+                <a:latin typeface="Courier New" panose="02070309020205020404" pitchFamily="49" charset="0"/>
+              </a:rPr>
+              <a:t>4. FETCH INSPECTOR FINDINGS (Lambda)</a:t>
+            </a:r>
+          </a:p>
+          <a:p>
+            <a:pPr>
+              <a:buNone/>
+            </a:pPr>
+            <a:r>
+              <a:rPr lang="en-US" sz="1200" b="1" dirty="0">
+                <a:solidFill>
+                  <a:schemeClr val="accent6"/>
+                </a:solidFill>
+                <a:latin typeface="Courier New" panose="02070309020205020404" pitchFamily="49" charset="0"/>
+              </a:rPr>
+              <a:t>   │  Inspector Findings Lambda fetches CVE findings from Amazon Inspector v2</a:t>
+            </a:r>
+          </a:p>
+          <a:p>
+            <a:pPr>
+              <a:buNone/>
+            </a:pPr>
+            <a:r>
+              <a:rPr lang="en-US" sz="1200" b="1" dirty="0">
+                <a:latin typeface="Courier New" panose="02070309020205020404" pitchFamily="49" charset="0"/>
+              </a:rPr>
+              <a:t>   ▼</a:t>
+            </a:r>
+          </a:p>
+          <a:p>
+            <a:pPr>
+              <a:buNone/>
+            </a:pPr>
+            <a:r>
+              <a:rPr lang="en-US" sz="1200" b="1" dirty="0">
+                <a:latin typeface="Courier New" panose="02070309020205020404" pitchFamily="49" charset="0"/>
+              </a:rPr>
+              <a:t>5. ANALYZE (Lambda + Bedrock)</a:t>
+            </a:r>
+          </a:p>
+          <a:p>
+            <a:pPr>
+              <a:buNone/>
+            </a:pPr>
+            <a:r>
+              <a:rPr lang="en-US" sz="1200" b="1" dirty="0">
+                <a:latin typeface="Courier New" panose="02070309020205020404" pitchFamily="49" charset="0"/>
+              </a:rPr>
+              <a:t>   │  Lambda sends Inspector findings to Bedrock; model analyzes CVEs</a:t>
+            </a:r>
+          </a:p>
+          <a:p>
+            <a:pPr>
+              <a:buNone/>
+            </a:pPr>
+            <a:r>
+              <a:rPr lang="en-US" sz="1200" b="1" dirty="0">
+                <a:latin typeface="Courier New" panose="02070309020205020404" pitchFamily="49" charset="0"/>
+              </a:rPr>
+              <a:t>   │  Returns </a:t>
+            </a:r>
+            <a:r>
+              <a:rPr lang="en-US" sz="1200" b="1" dirty="0" err="1">
+                <a:latin typeface="Courier New" panose="02070309020205020404" pitchFamily="49" charset="0"/>
+              </a:rPr>
+              <a:t>has_critical_cves</a:t>
+            </a:r>
+            <a:r>
+              <a:rPr lang="en-US" sz="1200" b="1" dirty="0">
+                <a:latin typeface="Courier New" panose="02070309020205020404" pitchFamily="49" charset="0"/>
+              </a:rPr>
+              <a:t> flag + recommendations</a:t>
+            </a:r>
+          </a:p>
+          <a:p>
+            <a:pPr>
+              <a:buNone/>
+            </a:pPr>
+            <a:r>
+              <a:rPr lang="en-US" sz="1200" b="1" dirty="0">
+                <a:latin typeface="Courier New" panose="02070309020205020404" pitchFamily="49" charset="0"/>
+              </a:rPr>
+              <a:t>   ▼</a:t>
+            </a:r>
+          </a:p>
+          <a:p>
+            <a:pPr>
+              <a:buNone/>
+            </a:pPr>
+            <a:r>
+              <a:rPr lang="en-US" sz="1200" b="1" dirty="0">
+                <a:solidFill>
+                  <a:schemeClr val="accent6"/>
+                </a:solidFill>
+                <a:latin typeface="Courier New" panose="02070309020205020404" pitchFamily="49" charset="0"/>
+              </a:rPr>
+              <a:t>6. CHECK MAINTENANCE WINDOW</a:t>
+            </a:r>
+          </a:p>
+          <a:p>
+            <a:pPr>
+              <a:buNone/>
+            </a:pPr>
+            <a:r>
+              <a:rPr lang="en-US" sz="1200" b="1" dirty="0">
+                <a:solidFill>
+                  <a:schemeClr val="accent6"/>
+                </a:solidFill>
+                <a:latin typeface="Courier New" panose="02070309020205020404" pitchFamily="49" charset="0"/>
+              </a:rPr>
+              <a:t>   │  If outside window → Skip (enabled by default)</a:t>
+            </a:r>
+          </a:p>
+          <a:p>
+            <a:pPr>
+              <a:buNone/>
+            </a:pPr>
+            <a:r>
+              <a:rPr lang="en-US" sz="1200" b="1" dirty="0">
+                <a:latin typeface="Courier New" panose="02070309020205020404" pitchFamily="49" charset="0"/>
+              </a:rPr>
+              <a:t>   ▼</a:t>
+            </a:r>
+          </a:p>
+          <a:p>
+            <a:pPr>
+              <a:buNone/>
+            </a:pPr>
+            <a:r>
+              <a:rPr lang="en-US" sz="1200" b="1" dirty="0">
+                <a:latin typeface="Courier New" panose="02070309020205020404" pitchFamily="49" charset="0"/>
+              </a:rPr>
+              <a:t>7. PREPARE BATCHES + APPLY (Map over batches)</a:t>
+            </a:r>
+          </a:p>
+          <a:p>
+            <a:pPr>
+              <a:buNone/>
+            </a:pPr>
+            <a:r>
+              <a:rPr lang="en-US" sz="1200" b="1" dirty="0">
+                <a:latin typeface="Courier New" panose="02070309020205020404" pitchFamily="49" charset="0"/>
+              </a:rPr>
+              <a:t>   │  Per batch: Patch → Wait 180s → </a:t>
+            </a:r>
+            <a:r>
+              <a:rPr lang="en-US" sz="1200" b="1" dirty="0" err="1">
+                <a:latin typeface="Courier New" panose="02070309020205020404" pitchFamily="49" charset="0"/>
+              </a:rPr>
+              <a:t>CheckFailure</a:t>
+            </a:r>
+            <a:r>
+              <a:rPr lang="en-US" sz="1200" b="1" dirty="0">
+                <a:latin typeface="Courier New" panose="02070309020205020404" pitchFamily="49" charset="0"/>
+              </a:rPr>
+              <a:t> → continue or abort</a:t>
+            </a:r>
+          </a:p>
+          <a:p>
+            <a:pPr>
+              <a:buNone/>
+            </a:pPr>
+            <a:r>
+              <a:rPr lang="en-US" sz="1200" b="1" dirty="0">
+                <a:latin typeface="Courier New" panose="02070309020205020404" pitchFamily="49" charset="0"/>
+              </a:rPr>
+              <a:t>   │  Batched patching stops within same run if instance fails to reboot</a:t>
+            </a:r>
+          </a:p>
+          <a:p>
+            <a:pPr>
+              <a:buNone/>
+            </a:pPr>
+            <a:r>
+              <a:rPr lang="en-US" sz="1200" b="1" dirty="0">
+                <a:latin typeface="Courier New" panose="02070309020205020404" pitchFamily="49" charset="0"/>
+              </a:rPr>
+              <a:t>   │  Canary: first batch uses </a:t>
+            </a:r>
+            <a:r>
+              <a:rPr lang="en-US" sz="1200" b="1" dirty="0" err="1">
+                <a:latin typeface="Courier New" panose="02070309020205020404" pitchFamily="49" charset="0"/>
+              </a:rPr>
+              <a:t>canary_batch_size</a:t>
+            </a:r>
+            <a:r>
+              <a:rPr lang="en-US" sz="1200" b="1" dirty="0">
+                <a:latin typeface="Courier New" panose="02070309020205020404" pitchFamily="49" charset="0"/>
+              </a:rPr>
+              <a:t>, then remaining batches</a:t>
+            </a:r>
+          </a:p>
+          <a:p>
+            <a:pPr>
+              <a:buNone/>
+            </a:pPr>
+            <a:r>
+              <a:rPr lang="en-US" sz="1200" b="1" dirty="0">
+                <a:latin typeface="Courier New" panose="02070309020205020404" pitchFamily="49" charset="0"/>
+              </a:rPr>
+              <a:t>   ▼</a:t>
+            </a:r>
+          </a:p>
+          <a:p>
+            <a:pPr>
+              <a:buNone/>
+            </a:pPr>
+            <a:r>
+              <a:rPr lang="en-US" sz="1200" b="1" dirty="0">
+                <a:solidFill>
+                  <a:schemeClr val="accent6"/>
+                </a:solidFill>
+                <a:latin typeface="Courier New" panose="02070309020205020404" pitchFamily="49" charset="0"/>
+              </a:rPr>
+              <a:t>8. POST-PATCH (Parallel, via Lambda → SSM)</a:t>
+            </a:r>
+          </a:p>
+          <a:p>
+            <a:pPr>
+              <a:buNone/>
+            </a:pPr>
+            <a:r>
+              <a:rPr lang="en-US" sz="1200" b="1" dirty="0">
+                <a:solidFill>
+                  <a:schemeClr val="accent6"/>
+                </a:solidFill>
+                <a:latin typeface="Courier New" panose="02070309020205020404" pitchFamily="49" charset="0"/>
+              </a:rPr>
+              <a:t>   │  SSM Runner Lambda verifies patches on RHEL8 and Windows</a:t>
+            </a:r>
+          </a:p>
+          <a:p>
+            <a:pPr>
+              <a:buNone/>
+            </a:pPr>
+            <a:r>
+              <a:rPr lang="en-US" sz="1200" b="1" dirty="0">
+                <a:latin typeface="Courier New" panose="02070309020205020404" pitchFamily="49" charset="0"/>
+              </a:rPr>
+              <a:t>   ▼</a:t>
+            </a:r>
+          </a:p>
+          <a:p>
+            <a:pPr>
+              <a:buNone/>
+            </a:pPr>
+            <a:r>
+              <a:rPr lang="en-US" sz="1200" b="1" dirty="0">
+                <a:latin typeface="Courier New" panose="02070309020205020404" pitchFamily="49" charset="0"/>
+              </a:rPr>
+              <a:t>9. COMPLETE</a:t>
+            </a:r>
+          </a:p>
+        </p:txBody>
+      </p:sp>
+      <p:sp>
+        <p:nvSpPr>
+          <p:cNvPr id="5" name="TextBox 4">
+            <a:extLst>
+              <a:ext uri="{FF2B5EF4-FFF2-40B4-BE49-F238E27FC236}">
+                <a16:creationId xmlns:a16="http://schemas.microsoft.com/office/drawing/2014/main" id="{59C5C8A8-15ED-A4E6-8948-8C240A25E73F}"/>
+              </a:ext>
+            </a:extLst>
+          </p:cNvPr>
+          <p:cNvSpPr txBox="1"/>
+          <p:nvPr/>
+        </p:nvSpPr>
+        <p:spPr>
+          <a:xfrm>
+            <a:off x="846414" y="193040"/>
+            <a:ext cx="6905666" cy="707886"/>
+          </a:xfrm>
+          <a:prstGeom prst="rect">
+            <a:avLst/>
+          </a:prstGeom>
+          <a:noFill/>
+        </p:spPr>
+        <p:txBody>
+          <a:bodyPr wrap="square" rtlCol="0">
+            <a:spAutoFit/>
+          </a:bodyPr>
+          <a:lstStyle/>
+          <a:p>
+            <a:r>
+              <a:rPr lang="en-US" sz="4000" dirty="0">
+                <a:solidFill>
+                  <a:srgbClr val="0A13F4"/>
+                </a:solidFill>
+                <a:latin typeface="+mj-lt"/>
+                <a:ea typeface="+mj-ea"/>
+                <a:cs typeface="+mj-cs"/>
+              </a:rPr>
+              <a:t>Amazon Inspector - Workflow</a:t>
+            </a:r>
           </a:p>
         </p:txBody>
       </p:sp>
     </p:spTree>
+    <p:extLst>
+      <p:ext uri="{BB962C8B-B14F-4D97-AF65-F5344CB8AC3E}">
+        <p14:creationId xmlns:p14="http://schemas.microsoft.com/office/powerpoint/2010/main" val="114748700"/>
+      </p:ext>
+    </p:extLst>
   </p:cSld>
   <p:clrMapOvr>
     <a:masterClrMapping/>
@@ -3707,7 +4072,8 @@
           <a:lstStyle/>
           <a:p>
             <a:r>
-              <a:t>Slide 2: The Problem – Pain Points</a:t>
+              <a:rPr dirty="0"/>
+              <a:t>Component Stack</a:t>
             </a:r>
           </a:p>
         </p:txBody>
@@ -3728,83 +4094,107 @@
           <a:lstStyle/>
           <a:p>
             <a:r>
-              <a:rPr sz="1000">
-                <a:latin typeface="Courier New"/>
-              </a:rPr>
-              <a:t>flowchart LR</a:t>
-            </a:r>
-          </a:p>
-          <a:p>
-            <a:r>
-              <a:rPr sz="1000">
-                <a:latin typeface="Courier New"/>
-              </a:rPr>
-              <a:t>    subgraph Problems["The Problem"]</a:t>
-            </a:r>
-          </a:p>
-          <a:p>
-            <a:r>
-              <a:rPr sz="1000">
-                <a:latin typeface="Courier New"/>
-              </a:rPr>
-              <a:t>        P1["Manual patching&lt;br/&gt;Error-prone, doesn't scale"]</a:t>
-            </a:r>
-          </a:p>
-          <a:p>
-            <a:r>
-              <a:rPr sz="1000">
-                <a:latin typeface="Courier New"/>
-              </a:rPr>
-              <a:t>        P2["Blind automation&lt;br/&gt;Unnecessary risk"]</a:t>
-            </a:r>
-          </a:p>
-          <a:p>
-            <a:r>
-              <a:rPr sz="1000">
-                <a:latin typeface="Courier New"/>
-              </a:rPr>
-              <a:t>        P3["Pre-patch scripts&lt;br/&gt;Inconsistent, hard to maintain"]</a:t>
-            </a:r>
-          </a:p>
-          <a:p>
-            <a:r>
-              <a:rPr sz="1000">
-                <a:latin typeface="Courier New"/>
-              </a:rPr>
-              <a:t>        P4["Need smart decision&lt;br/&gt;When to patch?"]</a:t>
-            </a:r>
-          </a:p>
-          <a:p>
-            <a:r>
-              <a:rPr sz="1000">
-                <a:latin typeface="Courier New"/>
-              </a:rPr>
-              <a:t>    end</a:t>
-            </a:r>
-          </a:p>
-          <a:p>
-            <a:r>
-              <a:rPr sz="1000">
-                <a:latin typeface="Courier New"/>
-              </a:rPr>
-              <a:t>    P1 --&gt; P4</a:t>
-            </a:r>
-          </a:p>
-          <a:p>
-            <a:r>
-              <a:rPr sz="1000">
-                <a:latin typeface="Courier New"/>
-              </a:rPr>
-              <a:t>    P2 --&gt; P4</a:t>
-            </a:r>
-          </a:p>
-          <a:p>
-            <a:r>
-              <a:rPr sz="1000">
-                <a:latin typeface="Courier New"/>
-              </a:rPr>
-              <a:t>    P3 --&gt; P4</a:t>
-            </a:r>
+              <a:rPr lang="en-US" sz="1000" b="1" dirty="0"/>
+              <a:t>What the Customer Wants</a:t>
+            </a:r>
+          </a:p>
+          <a:p>
+            <a:r>
+              <a:rPr lang="en-US" sz="1000" b="1" dirty="0"/>
+              <a:t>Automated, production-safe CVE patching that scales without risk.</a:t>
+            </a:r>
+            <a:endParaRPr lang="en-US" sz="1000" dirty="0"/>
+          </a:p>
+          <a:p>
+            <a:r>
+              <a:rPr lang="en-US" sz="1000" dirty="0"/>
+              <a:t>The customer needs to keep RHEL8 and Windows servers secure by applying critical security patches, while avoiding the operational risk and downtime that comes from blind or manual patching.</a:t>
+            </a:r>
+          </a:p>
+          <a:p>
+            <a:pPr marL="0" indent="0">
+              <a:buNone/>
+            </a:pPr>
+            <a:br>
+              <a:rPr lang="en-US" sz="1000" dirty="0"/>
+            </a:br>
+            <a:endParaRPr lang="en-US" sz="1000" dirty="0"/>
+          </a:p>
+          <a:p>
+            <a:r>
+              <a:rPr lang="en-US" sz="1000" b="1" dirty="0"/>
+              <a:t>The Core Ask</a:t>
+            </a:r>
+          </a:p>
+          <a:p>
+            <a:r>
+              <a:rPr lang="en-US" sz="1000" b="1" dirty="0"/>
+              <a:t>Patch only when it matters</a:t>
+            </a:r>
+            <a:endParaRPr lang="en-US" sz="1000" dirty="0"/>
+          </a:p>
+          <a:p>
+            <a:r>
+              <a:rPr lang="en-US" sz="1000" dirty="0"/>
+              <a:t>Apply updates only when there are critical CVEs—not every minor update, not on a fixed schedule regardless of risk.</a:t>
+            </a:r>
+          </a:p>
+          <a:p>
+            <a:r>
+              <a:rPr lang="en-US" sz="1000" b="1" dirty="0"/>
+              <a:t>Stay production-safe</a:t>
+            </a:r>
+            <a:endParaRPr lang="en-US" sz="1000" dirty="0"/>
+          </a:p>
+          <a:p>
+            <a:r>
+              <a:rPr lang="en-US" sz="1000" dirty="0"/>
+              <a:t>Limit patching to security-related updates. No feature updates, no optional packages, no changes that could introduce breaking behavior.</a:t>
+            </a:r>
+          </a:p>
+          <a:p>
+            <a:r>
+              <a:rPr lang="en-US" sz="1000" b="1" dirty="0"/>
+              <a:t>Remove manual effort</a:t>
+            </a:r>
+            <a:endParaRPr lang="en-US" sz="1000" dirty="0"/>
+          </a:p>
+          <a:p>
+            <a:r>
+              <a:rPr lang="en-US" sz="1000" dirty="0"/>
+              <a:t>No more ad-hoc scripts, inconsistent pre-patch scans, or manual decisions about when to patch.</a:t>
+            </a:r>
+          </a:p>
+          <a:p>
+            <a:r>
+              <a:rPr lang="en-US" sz="1000" b="1" dirty="0"/>
+              <a:t>Use structured, reliable data</a:t>
+            </a:r>
+            <a:endParaRPr lang="en-US" sz="1000" dirty="0"/>
+          </a:p>
+          <a:p>
+            <a:r>
+              <a:rPr lang="en-US" sz="1000" dirty="0"/>
+              <a:t>Base patch decisions on authoritative CVE data (severity, affected packages, IDs), not raw command output or custom scripts.</a:t>
+            </a:r>
+          </a:p>
+          <a:p>
+            <a:r>
+              <a:rPr lang="en-US" sz="1000" b="1" dirty="0"/>
+              <a:t>Scale across the fleet</a:t>
+            </a:r>
+            <a:endParaRPr lang="en-US" sz="1000" dirty="0"/>
+          </a:p>
+          <a:p>
+            <a:r>
+              <a:rPr lang="en-US" sz="1000" dirty="0"/>
+              <a:t>Support RHEL8 and Windows across many instances without manual per-instance work.</a:t>
+            </a:r>
+          </a:p>
+          <a:p>
+            <a:endParaRPr sz="1000" dirty="0">
+              <a:latin typeface="Courier New"/>
+            </a:endParaRPr>
           </a:p>
         </p:txBody>
       </p:sp>
@@ -3845,13 +4235,11 @@
         </p:nvSpPr>
         <p:spPr/>
         <p:txBody>
-          <a:bodyPr>
-            <a:normAutofit fontScale="90000"/>
-          </a:bodyPr>
-          <a:lstStyle/>
-          <a:p>
-            <a:r>
-              <a:t>Slide 3: The Solution – High-Level Flow</a:t>
+          <a:bodyPr/>
+          <a:lstStyle/>
+          <a:p>
+            <a:r>
+              <a:t>Slide 2: The Problem – Pain Points</a:t>
             </a:r>
           </a:p>
         </p:txBody>
@@ -3875,164 +4263,79 @@
               <a:rPr sz="1000">
                 <a:latin typeface="Courier New"/>
               </a:rPr>
-              <a:t>flowchart TB</a:t>
-            </a:r>
-          </a:p>
-          <a:p>
-            <a:r>
-              <a:rPr sz="1000">
-                <a:latin typeface="Courier New"/>
-              </a:rPr>
-              <a:t>    EB["EventBridge&lt;br/&gt;monthly schedule"]</a:t>
-            </a:r>
-          </a:p>
-          <a:p>
-            <a:r>
-              <a:rPr sz="1000">
-                <a:latin typeface="Courier New"/>
-              </a:rPr>
-              <a:t>    SF["Step Functions"]</a:t>
-            </a:r>
-          </a:p>
-          <a:p>
-            <a:r>
-              <a:rPr sz="1000">
-                <a:latin typeface="Courier New"/>
-              </a:rPr>
-              <a:t>    L1["1. Fetch Inspector findings&lt;br/&gt;Lambda"]</a:t>
-            </a:r>
-          </a:p>
-          <a:p>
-            <a:r>
-              <a:rPr sz="1000">
-                <a:latin typeface="Courier New"/>
-              </a:rPr>
-              <a:t>    L2["2. Analyze with Bedrock&lt;br/&gt;Lambda"]</a:t>
-            </a:r>
-          </a:p>
-          <a:p>
-            <a:r>
-              <a:rPr sz="1000">
-                <a:latin typeface="Courier New"/>
-              </a:rPr>
-              <a:t>    CHOICE{"3. Critical CVEs?"}</a:t>
-            </a:r>
-          </a:p>
-          <a:p>
-            <a:r>
-              <a:rPr sz="1000">
-                <a:latin typeface="Courier New"/>
-              </a:rPr>
-              <a:t>    APPLY["4. Apply patches&lt;br/&gt;Parallel: RHEL + Windows via SSM&lt;br/&gt;Circuit-breaker check, pre-patch AMIs"]</a:t>
-            </a:r>
-          </a:p>
-          <a:p>
-            <a:r>
-              <a:rPr sz="1000">
-                <a:latin typeface="Courier New"/>
-              </a:rPr>
-              <a:t>    POST["5. Post-patch verification&lt;br/&gt;Parallel"]</a:t>
-            </a:r>
-          </a:p>
-          <a:p>
-            <a:r>
-              <a:rPr sz="1000">
-                <a:latin typeface="Courier New"/>
-              </a:rPr>
-              <a:t>    SKIP["NotifyNoPatch&lt;br/&gt;Skip"]</a:t>
-            </a:r>
-          </a:p>
-          <a:p>
-            <a:r>
-              <a:rPr sz="1000">
-                <a:latin typeface="Courier New"/>
-              </a:rPr>
-              <a:t>    CB["Circuit-breaker: EC2 stopped → block CVE"]</a:t>
-            </a:r>
-          </a:p>
-          <a:p>
-            <a:r>
-              <a:rPr sz="1000">
-                <a:latin typeface="Courier New"/>
-              </a:rPr>
-              <a:t>    AMI["AMI cleanup: daily"]</a:t>
-            </a:r>
-          </a:p>
-          <a:p>
-            <a:endParaRPr sz="1000">
-              <a:latin typeface="Courier New"/>
-            </a:endParaRPr>
-          </a:p>
-          <a:p>
-            <a:r>
-              <a:rPr sz="1000">
-                <a:latin typeface="Courier New"/>
-              </a:rPr>
-              <a:t>    EB --&gt;|Trigger| SF</a:t>
-            </a:r>
-          </a:p>
-          <a:p>
-            <a:r>
-              <a:rPr sz="1000">
-                <a:latin typeface="Courier New"/>
-              </a:rPr>
-              <a:t>    SF --&gt; L1</a:t>
-            </a:r>
-          </a:p>
-          <a:p>
-            <a:r>
-              <a:rPr sz="1000">
-                <a:latin typeface="Courier New"/>
-              </a:rPr>
-              <a:t>    L1 --&gt; L2</a:t>
-            </a:r>
-          </a:p>
-          <a:p>
-            <a:r>
-              <a:rPr sz="1000">
-                <a:latin typeface="Courier New"/>
-              </a:rPr>
-              <a:t>    L2 --&gt; CHOICE</a:t>
-            </a:r>
-          </a:p>
-          <a:p>
-            <a:r>
-              <a:rPr sz="1000">
-                <a:latin typeface="Courier New"/>
-              </a:rPr>
-              <a:t>    CHOICE --&gt;|Yes| APPLY</a:t>
-            </a:r>
-          </a:p>
-          <a:p>
-            <a:r>
-              <a:rPr sz="1000">
-                <a:latin typeface="Courier New"/>
-              </a:rPr>
-              <a:t>    CHOICE --&gt;|No| SKIP</a:t>
-            </a:r>
-          </a:p>
-          <a:p>
-            <a:r>
-              <a:rPr sz="1000">
-                <a:latin typeface="Courier New"/>
-              </a:rPr>
-              <a:t>    APPLY --&gt; POST</a:t>
-            </a:r>
-          </a:p>
-          <a:p>
-            <a:r>
-              <a:rPr sz="1000">
-                <a:latin typeface="Courier New"/>
-              </a:rPr>
-              <a:t>    APPLY -.-&gt;|on failure| CB</a:t>
-            </a:r>
-          </a:p>
-          <a:p>
-            <a:r>
-              <a:rPr sz="1000">
-                <a:latin typeface="Courier New"/>
-              </a:rPr>
-              <a:t>    CB -.-&gt; AMI</a:t>
+              <a:t>flowchart LR</a:t>
+            </a:r>
+          </a:p>
+          <a:p>
+            <a:r>
+              <a:rPr sz="1000">
+                <a:latin typeface="Courier New"/>
+              </a:rPr>
+              <a:t>    subgraph Problems["The Problem"]</a:t>
+            </a:r>
+          </a:p>
+          <a:p>
+            <a:r>
+              <a:rPr sz="1000">
+                <a:latin typeface="Courier New"/>
+              </a:rPr>
+              <a:t>        P1["Manual patching&lt;br/&gt;Error-prone, doesn't scale"]</a:t>
+            </a:r>
+          </a:p>
+          <a:p>
+            <a:r>
+              <a:rPr sz="1000">
+                <a:latin typeface="Courier New"/>
+              </a:rPr>
+              <a:t>        P2["Blind automation&lt;br/&gt;Unnecessary risk"]</a:t>
+            </a:r>
+          </a:p>
+          <a:p>
+            <a:r>
+              <a:rPr sz="1000">
+                <a:latin typeface="Courier New"/>
+              </a:rPr>
+              <a:t>        P3["Pre-patch scripts&lt;br/&gt;Inconsistent, hard to maintain"]</a:t>
+            </a:r>
+          </a:p>
+          <a:p>
+            <a:r>
+              <a:rPr sz="1000">
+                <a:latin typeface="Courier New"/>
+              </a:rPr>
+              <a:t>        P4["Need smart decision&lt;br/&gt;When to patch?"]</a:t>
+            </a:r>
+          </a:p>
+          <a:p>
+            <a:r>
+              <a:rPr sz="1000">
+                <a:latin typeface="Courier New"/>
+              </a:rPr>
+              <a:t>    end</a:t>
+            </a:r>
+          </a:p>
+          <a:p>
+            <a:r>
+              <a:rPr sz="1000">
+                <a:latin typeface="Courier New"/>
+              </a:rPr>
+              <a:t>    P1 --&gt; P4</a:t>
+            </a:r>
+          </a:p>
+          <a:p>
+            <a:r>
+              <a:rPr sz="1000">
+                <a:latin typeface="Courier New"/>
+              </a:rPr>
+              <a:t>    P2 --&gt; P4</a:t>
+            </a:r>
+          </a:p>
+          <a:p>
+            <a:r>
+              <a:rPr sz="1000">
+                <a:latin typeface="Courier New"/>
+              </a:rPr>
+              <a:t>    P3 --&gt; P4</a:t>
             </a:r>
           </a:p>
         </p:txBody>
@@ -4046,6 +4349,235 @@
 </file>
 
 <file path=ppt/slides/slide8.xml><?xml version="1.0" encoding="utf-8"?>
+<p:sld xmlns:a="http://schemas.openxmlformats.org/drawingml/2006/main" xmlns:r="http://schemas.openxmlformats.org/officeDocument/2006/relationships" xmlns:p="http://schemas.openxmlformats.org/presentationml/2006/main">
+  <p:cSld>
+    <p:spTree>
+      <p:nvGrpSpPr>
+        <p:cNvPr id="1" name=""/>
+        <p:cNvGrpSpPr/>
+        <p:nvPr/>
+      </p:nvGrpSpPr>
+      <p:grpSpPr>
+        <a:xfrm>
+          <a:off x="0" y="0"/>
+          <a:ext cx="0" cy="0"/>
+          <a:chOff x="0" y="0"/>
+          <a:chExt cx="0" cy="0"/>
+        </a:xfrm>
+      </p:grpSpPr>
+      <p:sp>
+        <p:nvSpPr>
+          <p:cNvPr id="2" name="Title 1"/>
+          <p:cNvSpPr>
+            <a:spLocks noGrp="1"/>
+          </p:cNvSpPr>
+          <p:nvPr>
+            <p:ph type="title"/>
+          </p:nvPr>
+        </p:nvSpPr>
+        <p:spPr/>
+        <p:txBody>
+          <a:bodyPr>
+            <a:normAutofit fontScale="90000"/>
+          </a:bodyPr>
+          <a:lstStyle/>
+          <a:p>
+            <a:r>
+              <a:t>Slide 3: The Solution – High-Level Flow</a:t>
+            </a:r>
+          </a:p>
+        </p:txBody>
+      </p:sp>
+      <p:sp>
+        <p:nvSpPr>
+          <p:cNvPr id="3" name="Content Placeholder 2"/>
+          <p:cNvSpPr>
+            <a:spLocks noGrp="1"/>
+          </p:cNvSpPr>
+          <p:nvPr>
+            <p:ph idx="1"/>
+          </p:nvPr>
+        </p:nvSpPr>
+        <p:spPr/>
+        <p:txBody>
+          <a:bodyPr/>
+          <a:lstStyle/>
+          <a:p>
+            <a:r>
+              <a:rPr sz="1000">
+                <a:latin typeface="Courier New"/>
+              </a:rPr>
+              <a:t>flowchart TB</a:t>
+            </a:r>
+          </a:p>
+          <a:p>
+            <a:r>
+              <a:rPr sz="1000">
+                <a:latin typeface="Courier New"/>
+              </a:rPr>
+              <a:t>    EB["EventBridge&lt;br/&gt;monthly schedule"]</a:t>
+            </a:r>
+          </a:p>
+          <a:p>
+            <a:r>
+              <a:rPr sz="1000">
+                <a:latin typeface="Courier New"/>
+              </a:rPr>
+              <a:t>    SF["Step Functions"]</a:t>
+            </a:r>
+          </a:p>
+          <a:p>
+            <a:r>
+              <a:rPr sz="1000">
+                <a:latin typeface="Courier New"/>
+              </a:rPr>
+              <a:t>    L1["1. Fetch Inspector findings&lt;br/&gt;Lambda"]</a:t>
+            </a:r>
+          </a:p>
+          <a:p>
+            <a:r>
+              <a:rPr sz="1000">
+                <a:latin typeface="Courier New"/>
+              </a:rPr>
+              <a:t>    L2["2. Analyze with Bedrock&lt;br/&gt;Lambda"]</a:t>
+            </a:r>
+          </a:p>
+          <a:p>
+            <a:r>
+              <a:rPr sz="1000">
+                <a:latin typeface="Courier New"/>
+              </a:rPr>
+              <a:t>    CHOICE{"3. Critical CVEs?"}</a:t>
+            </a:r>
+          </a:p>
+          <a:p>
+            <a:r>
+              <a:rPr sz="1000">
+                <a:latin typeface="Courier New"/>
+              </a:rPr>
+              <a:t>    APPLY["4. Apply patches&lt;br/&gt;Parallel: RHEL + Windows via SSM&lt;br/&gt;Circuit-breaker check, pre-patch AMIs"]</a:t>
+            </a:r>
+          </a:p>
+          <a:p>
+            <a:r>
+              <a:rPr sz="1000">
+                <a:latin typeface="Courier New"/>
+              </a:rPr>
+              <a:t>    POST["5. Post-patch verification&lt;br/&gt;Parallel"]</a:t>
+            </a:r>
+          </a:p>
+          <a:p>
+            <a:r>
+              <a:rPr sz="1000">
+                <a:latin typeface="Courier New"/>
+              </a:rPr>
+              <a:t>    SKIP["NotifyNoPatch&lt;br/&gt;Skip"]</a:t>
+            </a:r>
+          </a:p>
+          <a:p>
+            <a:r>
+              <a:rPr sz="1000">
+                <a:latin typeface="Courier New"/>
+              </a:rPr>
+              <a:t>    CB["Circuit-breaker: EC2 stopped → block CVE"]</a:t>
+            </a:r>
+          </a:p>
+          <a:p>
+            <a:r>
+              <a:rPr sz="1000">
+                <a:latin typeface="Courier New"/>
+              </a:rPr>
+              <a:t>    AMI["AMI cleanup: daily"]</a:t>
+            </a:r>
+          </a:p>
+          <a:p>
+            <a:endParaRPr sz="1000">
+              <a:latin typeface="Courier New"/>
+            </a:endParaRPr>
+          </a:p>
+          <a:p>
+            <a:r>
+              <a:rPr sz="1000">
+                <a:latin typeface="Courier New"/>
+              </a:rPr>
+              <a:t>    EB --&gt;|Trigger| SF</a:t>
+            </a:r>
+          </a:p>
+          <a:p>
+            <a:r>
+              <a:rPr sz="1000">
+                <a:latin typeface="Courier New"/>
+              </a:rPr>
+              <a:t>    SF --&gt; L1</a:t>
+            </a:r>
+          </a:p>
+          <a:p>
+            <a:r>
+              <a:rPr sz="1000">
+                <a:latin typeface="Courier New"/>
+              </a:rPr>
+              <a:t>    L1 --&gt; L2</a:t>
+            </a:r>
+          </a:p>
+          <a:p>
+            <a:r>
+              <a:rPr sz="1000">
+                <a:latin typeface="Courier New"/>
+              </a:rPr>
+              <a:t>    L2 --&gt; CHOICE</a:t>
+            </a:r>
+          </a:p>
+          <a:p>
+            <a:r>
+              <a:rPr sz="1000">
+                <a:latin typeface="Courier New"/>
+              </a:rPr>
+              <a:t>    CHOICE --&gt;|Yes| APPLY</a:t>
+            </a:r>
+          </a:p>
+          <a:p>
+            <a:r>
+              <a:rPr sz="1000">
+                <a:latin typeface="Courier New"/>
+              </a:rPr>
+              <a:t>    CHOICE --&gt;|No| SKIP</a:t>
+            </a:r>
+          </a:p>
+          <a:p>
+            <a:r>
+              <a:rPr sz="1000">
+                <a:latin typeface="Courier New"/>
+              </a:rPr>
+              <a:t>    APPLY --&gt; POST</a:t>
+            </a:r>
+          </a:p>
+          <a:p>
+            <a:r>
+              <a:rPr sz="1000">
+                <a:latin typeface="Courier New"/>
+              </a:rPr>
+              <a:t>    APPLY -.-&gt;|on failure| CB</a:t>
+            </a:r>
+          </a:p>
+          <a:p>
+            <a:r>
+              <a:rPr sz="1000">
+                <a:latin typeface="Courier New"/>
+              </a:rPr>
+              <a:t>    CB -.-&gt; AMI</a:t>
+            </a:r>
+          </a:p>
+        </p:txBody>
+      </p:sp>
+    </p:spTree>
+  </p:cSld>
+  <p:clrMapOvr>
+    <a:masterClrMapping/>
+  </p:clrMapOvr>
+</p:sld>
+</file>
+
+<file path=ppt/slides/slide9.xml><?xml version="1.0" encoding="utf-8"?>
 <p:sld xmlns:a="http://schemas.openxmlformats.org/drawingml/2006/main" xmlns:r="http://schemas.openxmlformats.org/officeDocument/2006/relationships" xmlns:p="http://schemas.openxmlformats.org/presentationml/2006/main">
   <p:cSld>
     <p:spTree>

--- a/docs/aiops_r8_presentation.pptx
+++ b/docs/aiops_r8_presentation.pptx
@@ -9,11 +9,13 @@
     <p:sldId id="261" r:id="rId3"/>
     <p:sldId id="262" r:id="rId4"/>
     <p:sldId id="263" r:id="rId5"/>
-    <p:sldId id="264" r:id="rId6"/>
-    <p:sldId id="257" r:id="rId7"/>
-    <p:sldId id="258" r:id="rId8"/>
-    <p:sldId id="259" r:id="rId9"/>
-    <p:sldId id="260" r:id="rId10"/>
+    <p:sldId id="266" r:id="rId6"/>
+    <p:sldId id="265" r:id="rId7"/>
+    <p:sldId id="264" r:id="rId8"/>
+    <p:sldId id="257" r:id="rId9"/>
+    <p:sldId id="258" r:id="rId10"/>
+    <p:sldId id="259" r:id="rId11"/>
+    <p:sldId id="260" r:id="rId12"/>
   </p:sldIdLst>
   <p:sldSz cx="9144000" cy="6858000" type="screen4x3"/>
   <p:notesSz cx="6858000" cy="9144000"/>
@@ -310,7 +312,7 @@
           <a:p>
             <a:fld id="{5BCAD085-E8A6-8845-BD4E-CB4CCA059FC4}" type="datetimeFigureOut">
               <a:rPr lang="en-US" smtClean="0"/>
-              <a:t>3/10/26</a:t>
+              <a:t>3/11/26</a:t>
             </a:fld>
             <a:endParaRPr lang="en-US"/>
           </a:p>
@@ -478,7 +480,7 @@
           <a:p>
             <a:fld id="{5BCAD085-E8A6-8845-BD4E-CB4CCA059FC4}" type="datetimeFigureOut">
               <a:rPr lang="en-US" smtClean="0"/>
-              <a:t>3/10/26</a:t>
+              <a:t>3/11/26</a:t>
             </a:fld>
             <a:endParaRPr lang="en-US"/>
           </a:p>
@@ -656,7 +658,7 @@
           <a:p>
             <a:fld id="{5BCAD085-E8A6-8845-BD4E-CB4CCA059FC4}" type="datetimeFigureOut">
               <a:rPr lang="en-US" smtClean="0"/>
-              <a:t>3/10/26</a:t>
+              <a:t>3/11/26</a:t>
             </a:fld>
             <a:endParaRPr lang="en-US"/>
           </a:p>
@@ -824,7 +826,7 @@
           <a:p>
             <a:fld id="{5BCAD085-E8A6-8845-BD4E-CB4CCA059FC4}" type="datetimeFigureOut">
               <a:rPr lang="en-US" smtClean="0"/>
-              <a:t>3/10/26</a:t>
+              <a:t>3/11/26</a:t>
             </a:fld>
             <a:endParaRPr lang="en-US"/>
           </a:p>
@@ -1069,7 +1071,7 @@
           <a:p>
             <a:fld id="{5BCAD085-E8A6-8845-BD4E-CB4CCA059FC4}" type="datetimeFigureOut">
               <a:rPr lang="en-US" smtClean="0"/>
-              <a:t>3/10/26</a:t>
+              <a:t>3/11/26</a:t>
             </a:fld>
             <a:endParaRPr lang="en-US"/>
           </a:p>
@@ -1354,7 +1356,7 @@
           <a:p>
             <a:fld id="{5BCAD085-E8A6-8845-BD4E-CB4CCA059FC4}" type="datetimeFigureOut">
               <a:rPr lang="en-US" smtClean="0"/>
-              <a:t>3/10/26</a:t>
+              <a:t>3/11/26</a:t>
             </a:fld>
             <a:endParaRPr lang="en-US"/>
           </a:p>
@@ -1773,7 +1775,7 @@
           <a:p>
             <a:fld id="{5BCAD085-E8A6-8845-BD4E-CB4CCA059FC4}" type="datetimeFigureOut">
               <a:rPr lang="en-US" smtClean="0"/>
-              <a:t>3/10/26</a:t>
+              <a:t>3/11/26</a:t>
             </a:fld>
             <a:endParaRPr lang="en-US"/>
           </a:p>
@@ -1890,7 +1892,7 @@
           <a:p>
             <a:fld id="{5BCAD085-E8A6-8845-BD4E-CB4CCA059FC4}" type="datetimeFigureOut">
               <a:rPr lang="en-US" smtClean="0"/>
-              <a:t>3/10/26</a:t>
+              <a:t>3/11/26</a:t>
             </a:fld>
             <a:endParaRPr lang="en-US"/>
           </a:p>
@@ -1985,7 +1987,7 @@
           <a:p>
             <a:fld id="{5BCAD085-E8A6-8845-BD4E-CB4CCA059FC4}" type="datetimeFigureOut">
               <a:rPr lang="en-US" smtClean="0"/>
-              <a:t>3/10/26</a:t>
+              <a:t>3/11/26</a:t>
             </a:fld>
             <a:endParaRPr lang="en-US"/>
           </a:p>
@@ -2260,7 +2262,7 @@
           <a:p>
             <a:fld id="{5BCAD085-E8A6-8845-BD4E-CB4CCA059FC4}" type="datetimeFigureOut">
               <a:rPr lang="en-US" smtClean="0"/>
-              <a:t>3/10/26</a:t>
+              <a:t>3/11/26</a:t>
             </a:fld>
             <a:endParaRPr lang="en-US"/>
           </a:p>
@@ -2512,7 +2514,7 @@
           <a:p>
             <a:fld id="{5BCAD085-E8A6-8845-BD4E-CB4CCA059FC4}" type="datetimeFigureOut">
               <a:rPr lang="en-US" smtClean="0"/>
-              <a:t>3/10/26</a:t>
+              <a:t>3/11/26</a:t>
             </a:fld>
             <a:endParaRPr lang="en-US"/>
           </a:p>
@@ -2723,7 +2725,7 @@
           <a:p>
             <a:fld id="{5BCAD085-E8A6-8845-BD4E-CB4CCA059FC4}" type="datetimeFigureOut">
               <a:rPr lang="en-US" smtClean="0"/>
-              <a:t>3/10/26</a:t>
+              <a:t>3/11/26</a:t>
             </a:fld>
             <a:endParaRPr lang="en-US"/>
           </a:p>
@@ -3198,6 +3200,518 @@
 </p:sld>
 </file>
 
+<file path=ppt/slides/slide10.xml><?xml version="1.0" encoding="utf-8"?>
+<p:sld xmlns:a="http://schemas.openxmlformats.org/drawingml/2006/main" xmlns:r="http://schemas.openxmlformats.org/officeDocument/2006/relationships" xmlns:p="http://schemas.openxmlformats.org/presentationml/2006/main">
+  <p:cSld>
+    <p:spTree>
+      <p:nvGrpSpPr>
+        <p:cNvPr id="1" name=""/>
+        <p:cNvGrpSpPr/>
+        <p:nvPr/>
+      </p:nvGrpSpPr>
+      <p:grpSpPr>
+        <a:xfrm>
+          <a:off x="0" y="0"/>
+          <a:ext cx="0" cy="0"/>
+          <a:chOff x="0" y="0"/>
+          <a:chExt cx="0" cy="0"/>
+        </a:xfrm>
+      </p:grpSpPr>
+      <p:sp>
+        <p:nvSpPr>
+          <p:cNvPr id="2" name="Title 1"/>
+          <p:cNvSpPr>
+            <a:spLocks noGrp="1"/>
+          </p:cNvSpPr>
+          <p:nvPr>
+            <p:ph type="title"/>
+          </p:nvPr>
+        </p:nvSpPr>
+        <p:spPr/>
+        <p:txBody>
+          <a:bodyPr>
+            <a:normAutofit fontScale="90000"/>
+          </a:bodyPr>
+          <a:lstStyle/>
+          <a:p>
+            <a:r>
+              <a:t>Slide 3: The Solution – High-Level Flow</a:t>
+            </a:r>
+          </a:p>
+        </p:txBody>
+      </p:sp>
+      <p:sp>
+        <p:nvSpPr>
+          <p:cNvPr id="3" name="Content Placeholder 2"/>
+          <p:cNvSpPr>
+            <a:spLocks noGrp="1"/>
+          </p:cNvSpPr>
+          <p:nvPr>
+            <p:ph idx="1"/>
+          </p:nvPr>
+        </p:nvSpPr>
+        <p:spPr/>
+        <p:txBody>
+          <a:bodyPr/>
+          <a:lstStyle/>
+          <a:p>
+            <a:r>
+              <a:rPr sz="1000">
+                <a:latin typeface="Courier New"/>
+              </a:rPr>
+              <a:t>flowchart TB</a:t>
+            </a:r>
+          </a:p>
+          <a:p>
+            <a:r>
+              <a:rPr sz="1000">
+                <a:latin typeface="Courier New"/>
+              </a:rPr>
+              <a:t>    EB["EventBridge&lt;br/&gt;monthly schedule"]</a:t>
+            </a:r>
+          </a:p>
+          <a:p>
+            <a:r>
+              <a:rPr sz="1000">
+                <a:latin typeface="Courier New"/>
+              </a:rPr>
+              <a:t>    SF["Step Functions"]</a:t>
+            </a:r>
+          </a:p>
+          <a:p>
+            <a:r>
+              <a:rPr sz="1000">
+                <a:latin typeface="Courier New"/>
+              </a:rPr>
+              <a:t>    L1["1. Fetch Inspector findings&lt;br/&gt;Lambda"]</a:t>
+            </a:r>
+          </a:p>
+          <a:p>
+            <a:r>
+              <a:rPr sz="1000">
+                <a:latin typeface="Courier New"/>
+              </a:rPr>
+              <a:t>    L2["2. Analyze with Bedrock&lt;br/&gt;Lambda"]</a:t>
+            </a:r>
+          </a:p>
+          <a:p>
+            <a:r>
+              <a:rPr sz="1000">
+                <a:latin typeface="Courier New"/>
+              </a:rPr>
+              <a:t>    CHOICE{"3. Critical CVEs?"}</a:t>
+            </a:r>
+          </a:p>
+          <a:p>
+            <a:r>
+              <a:rPr sz="1000">
+                <a:latin typeface="Courier New"/>
+              </a:rPr>
+              <a:t>    APPLY["4. Apply patches&lt;br/&gt;Parallel: RHEL + Windows via SSM&lt;br/&gt;Circuit-breaker check, pre-patch AMIs"]</a:t>
+            </a:r>
+          </a:p>
+          <a:p>
+            <a:r>
+              <a:rPr sz="1000">
+                <a:latin typeface="Courier New"/>
+              </a:rPr>
+              <a:t>    POST["5. Post-patch verification&lt;br/&gt;Parallel"]</a:t>
+            </a:r>
+          </a:p>
+          <a:p>
+            <a:r>
+              <a:rPr sz="1000">
+                <a:latin typeface="Courier New"/>
+              </a:rPr>
+              <a:t>    SKIP["NotifyNoPatch&lt;br/&gt;Skip"]</a:t>
+            </a:r>
+          </a:p>
+          <a:p>
+            <a:r>
+              <a:rPr sz="1000">
+                <a:latin typeface="Courier New"/>
+              </a:rPr>
+              <a:t>    CB["Circuit-breaker: EC2 stopped → block CVE"]</a:t>
+            </a:r>
+          </a:p>
+          <a:p>
+            <a:r>
+              <a:rPr sz="1000">
+                <a:latin typeface="Courier New"/>
+              </a:rPr>
+              <a:t>    AMI["AMI cleanup: daily"]</a:t>
+            </a:r>
+          </a:p>
+          <a:p>
+            <a:endParaRPr sz="1000">
+              <a:latin typeface="Courier New"/>
+            </a:endParaRPr>
+          </a:p>
+          <a:p>
+            <a:r>
+              <a:rPr sz="1000">
+                <a:latin typeface="Courier New"/>
+              </a:rPr>
+              <a:t>    EB --&gt;|Trigger| SF</a:t>
+            </a:r>
+          </a:p>
+          <a:p>
+            <a:r>
+              <a:rPr sz="1000">
+                <a:latin typeface="Courier New"/>
+              </a:rPr>
+              <a:t>    SF --&gt; L1</a:t>
+            </a:r>
+          </a:p>
+          <a:p>
+            <a:r>
+              <a:rPr sz="1000">
+                <a:latin typeface="Courier New"/>
+              </a:rPr>
+              <a:t>    L1 --&gt; L2</a:t>
+            </a:r>
+          </a:p>
+          <a:p>
+            <a:r>
+              <a:rPr sz="1000">
+                <a:latin typeface="Courier New"/>
+              </a:rPr>
+              <a:t>    L2 --&gt; CHOICE</a:t>
+            </a:r>
+          </a:p>
+          <a:p>
+            <a:r>
+              <a:rPr sz="1000">
+                <a:latin typeface="Courier New"/>
+              </a:rPr>
+              <a:t>    CHOICE --&gt;|Yes| APPLY</a:t>
+            </a:r>
+          </a:p>
+          <a:p>
+            <a:r>
+              <a:rPr sz="1000">
+                <a:latin typeface="Courier New"/>
+              </a:rPr>
+              <a:t>    CHOICE --&gt;|No| SKIP</a:t>
+            </a:r>
+          </a:p>
+          <a:p>
+            <a:r>
+              <a:rPr sz="1000">
+                <a:latin typeface="Courier New"/>
+              </a:rPr>
+              <a:t>    APPLY --&gt; POST</a:t>
+            </a:r>
+          </a:p>
+          <a:p>
+            <a:r>
+              <a:rPr sz="1000">
+                <a:latin typeface="Courier New"/>
+              </a:rPr>
+              <a:t>    APPLY -.-&gt;|on failure| CB</a:t>
+            </a:r>
+          </a:p>
+          <a:p>
+            <a:r>
+              <a:rPr sz="1000">
+                <a:latin typeface="Courier New"/>
+              </a:rPr>
+              <a:t>    CB -.-&gt; AMI</a:t>
+            </a:r>
+          </a:p>
+        </p:txBody>
+      </p:sp>
+    </p:spTree>
+  </p:cSld>
+  <p:clrMapOvr>
+    <a:masterClrMapping/>
+  </p:clrMapOvr>
+</p:sld>
+</file>
+
+<file path=ppt/slides/slide11.xml><?xml version="1.0" encoding="utf-8"?>
+<p:sld xmlns:a="http://schemas.openxmlformats.org/drawingml/2006/main" xmlns:r="http://schemas.openxmlformats.org/officeDocument/2006/relationships" xmlns:p="http://schemas.openxmlformats.org/presentationml/2006/main">
+  <p:cSld>
+    <p:spTree>
+      <p:nvGrpSpPr>
+        <p:cNvPr id="1" name=""/>
+        <p:cNvGrpSpPr/>
+        <p:nvPr/>
+      </p:nvGrpSpPr>
+      <p:grpSpPr>
+        <a:xfrm>
+          <a:off x="0" y="0"/>
+          <a:ext cx="0" cy="0"/>
+          <a:chOff x="0" y="0"/>
+          <a:chExt cx="0" cy="0"/>
+        </a:xfrm>
+      </p:grpSpPr>
+      <p:sp>
+        <p:nvSpPr>
+          <p:cNvPr id="2" name="Title 1"/>
+          <p:cNvSpPr>
+            <a:spLocks noGrp="1"/>
+          </p:cNvSpPr>
+          <p:nvPr>
+            <p:ph type="title"/>
+          </p:nvPr>
+        </p:nvSpPr>
+        <p:spPr/>
+        <p:txBody>
+          <a:bodyPr>
+            <a:normAutofit fontScale="90000"/>
+          </a:bodyPr>
+          <a:lstStyle/>
+          <a:p>
+            <a:r>
+              <a:t>Slide 4: Architecture – Key Components</a:t>
+            </a:r>
+          </a:p>
+        </p:txBody>
+      </p:sp>
+      <p:sp>
+        <p:nvSpPr>
+          <p:cNvPr id="3" name="Content Placeholder 2"/>
+          <p:cNvSpPr>
+            <a:spLocks noGrp="1"/>
+          </p:cNvSpPr>
+          <p:nvPr>
+            <p:ph idx="1"/>
+          </p:nvPr>
+        </p:nvSpPr>
+        <p:spPr/>
+        <p:txBody>
+          <a:bodyPr>
+            <a:normAutofit fontScale="92500" lnSpcReduction="10000"/>
+          </a:bodyPr>
+          <a:lstStyle/>
+          <a:p>
+            <a:r>
+              <a:rPr sz="1000">
+                <a:latin typeface="Courier New"/>
+              </a:rPr>
+              <a:t>flowchart TB</a:t>
+            </a:r>
+          </a:p>
+          <a:p>
+            <a:r>
+              <a:rPr sz="1000">
+                <a:latin typeface="Courier New"/>
+              </a:rPr>
+              <a:t>    subgraph Data["Data Layer"]</a:t>
+            </a:r>
+          </a:p>
+          <a:p>
+            <a:r>
+              <a:rPr sz="1000">
+                <a:latin typeface="Courier New"/>
+              </a:rPr>
+              <a:t>        INSP["Amazon Inspector v2&lt;br/&gt;Discovers EC2, scans CVEs, stores findings"]</a:t>
+            </a:r>
+          </a:p>
+          <a:p>
+            <a:r>
+              <a:rPr sz="1000">
+                <a:latin typeface="Courier New"/>
+              </a:rPr>
+              <a:t>    end</a:t>
+            </a:r>
+          </a:p>
+          <a:p>
+            <a:endParaRPr sz="1000">
+              <a:latin typeface="Courier New"/>
+            </a:endParaRPr>
+          </a:p>
+          <a:p>
+            <a:r>
+              <a:rPr sz="1000">
+                <a:latin typeface="Courier New"/>
+              </a:rPr>
+              <a:t>    subgraph Orchestration["Orchestration"]</a:t>
+            </a:r>
+          </a:p>
+          <a:p>
+            <a:r>
+              <a:rPr sz="1000">
+                <a:latin typeface="Courier New"/>
+              </a:rPr>
+              <a:t>        SF["Step Functions&lt;br/&gt;Orchestrates, Choice gates patching"]</a:t>
+            </a:r>
+          </a:p>
+          <a:p>
+            <a:r>
+              <a:rPr sz="1000">
+                <a:latin typeface="Courier New"/>
+              </a:rPr>
+              <a:t>    end</a:t>
+            </a:r>
+          </a:p>
+          <a:p>
+            <a:endParaRPr sz="1000">
+              <a:latin typeface="Courier New"/>
+            </a:endParaRPr>
+          </a:p>
+          <a:p>
+            <a:r>
+              <a:rPr sz="1000">
+                <a:latin typeface="Courier New"/>
+              </a:rPr>
+              <a:t>    subgraph Lambdas["Lambda Layer"]</a:t>
+            </a:r>
+          </a:p>
+          <a:p>
+            <a:r>
+              <a:rPr sz="1000">
+                <a:latin typeface="Courier New"/>
+              </a:rPr>
+              <a:t>        L_INSP["Inspector Findings Lambda&lt;br/&gt;ListFindings API, filter by VPC"]</a:t>
+            </a:r>
+          </a:p>
+          <a:p>
+            <a:r>
+              <a:rPr sz="1000">
+                <a:latin typeface="Courier New"/>
+              </a:rPr>
+              <a:t>        L_ANALYZER["CVE Analyzer Lambda&lt;br/&gt;Bedrock → has_critical_cves"]</a:t>
+            </a:r>
+          </a:p>
+          <a:p>
+            <a:r>
+              <a:rPr sz="1000">
+                <a:latin typeface="Courier New"/>
+              </a:rPr>
+              <a:t>        L_SSM["SSM Runner Lambda&lt;br/&gt;Invokes SSM Run Command"]</a:t>
+            </a:r>
+          </a:p>
+          <a:p>
+            <a:r>
+              <a:rPr sz="1000">
+                <a:latin typeface="Courier New"/>
+              </a:rPr>
+              <a:t>    end</a:t>
+            </a:r>
+          </a:p>
+          <a:p>
+            <a:endParaRPr sz="1000">
+              <a:latin typeface="Courier New"/>
+            </a:endParaRPr>
+          </a:p>
+          <a:p>
+            <a:r>
+              <a:rPr sz="1000">
+                <a:latin typeface="Courier New"/>
+              </a:rPr>
+              <a:t>    subgraph AI["AI"]</a:t>
+            </a:r>
+          </a:p>
+          <a:p>
+            <a:r>
+              <a:rPr sz="1000">
+                <a:latin typeface="Courier New"/>
+              </a:rPr>
+              <a:t>        BEDROCK["Bedrock&lt;br/&gt;Analyzes severity, patch/no-patch"]</a:t>
+            </a:r>
+          </a:p>
+          <a:p>
+            <a:r>
+              <a:rPr sz="1000">
+                <a:latin typeface="Courier New"/>
+              </a:rPr>
+              <a:t>    end</a:t>
+            </a:r>
+          </a:p>
+          <a:p>
+            <a:endParaRPr sz="1000">
+              <a:latin typeface="Courier New"/>
+            </a:endParaRPr>
+          </a:p>
+          <a:p>
+            <a:r>
+              <a:rPr sz="1000">
+                <a:latin typeface="Courier New"/>
+              </a:rPr>
+              <a:t>    subgraph Execution["Execution"]</a:t>
+            </a:r>
+          </a:p>
+          <a:p>
+            <a:r>
+              <a:rPr sz="1000">
+                <a:latin typeface="Courier New"/>
+              </a:rPr>
+              <a:t>        SSM["Systems Manager&lt;br/&gt;dnf update --security (RHEL)&lt;br/&gt;Patch Baseline (Windows)"]</a:t>
+            </a:r>
+          </a:p>
+          <a:p>
+            <a:r>
+              <a:rPr sz="1000">
+                <a:latin typeface="Courier New"/>
+              </a:rPr>
+              <a:t>    end</a:t>
+            </a:r>
+          </a:p>
+          <a:p>
+            <a:endParaRPr sz="1000">
+              <a:latin typeface="Courier New"/>
+            </a:endParaRPr>
+          </a:p>
+          <a:p>
+            <a:r>
+              <a:rPr sz="1000">
+                <a:latin typeface="Courier New"/>
+              </a:rPr>
+              <a:t>    SF --&gt; L_INSP</a:t>
+            </a:r>
+          </a:p>
+          <a:p>
+            <a:r>
+              <a:rPr sz="1000">
+                <a:latin typeface="Courier New"/>
+              </a:rPr>
+              <a:t>    L_INSP --&gt; INSP</a:t>
+            </a:r>
+          </a:p>
+          <a:p>
+            <a:r>
+              <a:rPr sz="1000">
+                <a:latin typeface="Courier New"/>
+              </a:rPr>
+              <a:t>    SF --&gt; L_ANALYZER</a:t>
+            </a:r>
+          </a:p>
+          <a:p>
+            <a:r>
+              <a:rPr sz="1000">
+                <a:latin typeface="Courier New"/>
+              </a:rPr>
+              <a:t>    L_ANALYZER --&gt; BEDROCK</a:t>
+            </a:r>
+          </a:p>
+          <a:p>
+            <a:r>
+              <a:rPr sz="1000">
+                <a:latin typeface="Courier New"/>
+              </a:rPr>
+              <a:t>    SF --&gt; L_SSM</a:t>
+            </a:r>
+          </a:p>
+          <a:p>
+            <a:r>
+              <a:rPr sz="1000">
+                <a:latin typeface="Courier New"/>
+              </a:rPr>
+              <a:t>    L_SSM --&gt; SSM</a:t>
+            </a:r>
+          </a:p>
+        </p:txBody>
+      </p:sp>
+    </p:spTree>
+  </p:cSld>
+  <p:clrMapOvr>
+    <a:masterClrMapping/>
+  </p:clrMapOvr>
+</p:sld>
+</file>
+
 <file path=ppt/slides/slide2.xml><?xml version="1.0" encoding="utf-8"?>
 <p:sld xmlns:a="http://schemas.openxmlformats.org/drawingml/2006/main" xmlns:r="http://schemas.openxmlformats.org/officeDocument/2006/relationships" xmlns:p="http://schemas.openxmlformats.org/presentationml/2006/main">
   <p:cSld>
@@ -3511,6 +4025,474 @@
 <file path=ppt/slides/slide5.xml><?xml version="1.0" encoding="utf-8"?>
 <p:sld xmlns:a="http://schemas.openxmlformats.org/drawingml/2006/main" xmlns:r="http://schemas.openxmlformats.org/officeDocument/2006/relationships" xmlns:p="http://schemas.openxmlformats.org/presentationml/2006/main">
   <p:cSld>
+    <p:bg>
+      <p:bgPr>
+        <a:solidFill>
+          <a:schemeClr val="bg1"/>
+        </a:solidFill>
+        <a:effectLst/>
+      </p:bgPr>
+    </p:bg>
+    <p:spTree>
+      <p:nvGrpSpPr>
+        <p:cNvPr id="1" name="">
+          <a:extLst>
+            <a:ext uri="{FF2B5EF4-FFF2-40B4-BE49-F238E27FC236}">
+              <a16:creationId xmlns:a16="http://schemas.microsoft.com/office/drawing/2014/main" id="{129EA09F-0DB7-C4A5-5667-892731483C0B}"/>
+            </a:ext>
+          </a:extLst>
+        </p:cNvPr>
+        <p:cNvGrpSpPr/>
+        <p:nvPr/>
+      </p:nvGrpSpPr>
+      <p:grpSpPr>
+        <a:xfrm>
+          <a:off x="0" y="0"/>
+          <a:ext cx="0" cy="0"/>
+          <a:chOff x="0" y="0"/>
+          <a:chExt cx="0" cy="0"/>
+        </a:xfrm>
+      </p:grpSpPr>
+      <p:sp>
+        <p:nvSpPr>
+          <p:cNvPr id="9" name="Rectangle 8">
+            <a:extLst>
+              <a:ext uri="{FF2B5EF4-FFF2-40B4-BE49-F238E27FC236}">
+                <a16:creationId xmlns:a16="http://schemas.microsoft.com/office/drawing/2014/main" id="{B9FF99BD-075F-4761-A995-6FC574BD25EA}"/>
+              </a:ext>
+              <a:ext uri="{C183D7F6-B498-43B3-948B-1728B52AA6E4}">
+                <adec:decorative xmlns:adec="http://schemas.microsoft.com/office/drawing/2017/decorative" val="1"/>
+              </a:ext>
+            </a:extLst>
+          </p:cNvPr>
+          <p:cNvSpPr>
+            <a:spLocks noGrp="1" noRot="1" noChangeAspect="1" noMove="1" noResize="1" noEditPoints="1" noAdjustHandles="1" noChangeArrowheads="1" noChangeShapeType="1" noTextEdit="1"/>
+          </p:cNvSpPr>
+          <p:nvPr>
+            <p:extLst>
+              <p:ext uri="{386F3935-93C4-4BCD-93E2-E3B085C9AB24}">
+                <p16:designElem xmlns:p16="http://schemas.microsoft.com/office/powerpoint/2015/main" val="1"/>
+              </p:ext>
+            </p:extLst>
+          </p:nvPr>
+        </p:nvSpPr>
+        <p:spPr>
+          <a:xfrm>
+            <a:off x="0" y="0"/>
+            <a:ext cx="9144000" cy="6858000"/>
+          </a:xfrm>
+          <a:prstGeom prst="rect">
+            <a:avLst/>
+          </a:prstGeom>
+          <a:solidFill>
+            <a:schemeClr val="bg1">
+              <a:lumMod val="65000"/>
+            </a:schemeClr>
+          </a:solidFill>
+          <a:ln>
+            <a:noFill/>
+          </a:ln>
+        </p:spPr>
+        <p:style>
+          <a:lnRef idx="2">
+            <a:schemeClr val="accent1">
+              <a:shade val="50000"/>
+            </a:schemeClr>
+          </a:lnRef>
+          <a:fillRef idx="1">
+            <a:schemeClr val="accent1"/>
+          </a:fillRef>
+          <a:effectRef idx="0">
+            <a:schemeClr val="accent1"/>
+          </a:effectRef>
+          <a:fontRef idx="minor">
+            <a:schemeClr val="lt1"/>
+          </a:fontRef>
+        </p:style>
+        <p:txBody>
+          <a:bodyPr rtlCol="0" anchor="ctr"/>
+          <a:lstStyle/>
+          <a:p>
+            <a:pPr algn="ctr"/>
+            <a:endParaRPr lang="en-US"/>
+          </a:p>
+        </p:txBody>
+      </p:sp>
+      <p:sp>
+        <p:nvSpPr>
+          <p:cNvPr id="11" name="Rectangle 10">
+            <a:extLst>
+              <a:ext uri="{FF2B5EF4-FFF2-40B4-BE49-F238E27FC236}">
+                <a16:creationId xmlns:a16="http://schemas.microsoft.com/office/drawing/2014/main" id="{A7B21A54-9BA3-4EA9-B460-5A829ADD9051}"/>
+              </a:ext>
+              <a:ext uri="{C183D7F6-B498-43B3-948B-1728B52AA6E4}">
+                <adec:decorative xmlns:adec="http://schemas.microsoft.com/office/drawing/2017/decorative" val="1"/>
+              </a:ext>
+            </a:extLst>
+          </p:cNvPr>
+          <p:cNvSpPr>
+            <a:spLocks noGrp="1" noRot="1" noChangeAspect="1" noMove="1" noResize="1" noEditPoints="1" noAdjustHandles="1" noChangeArrowheads="1" noChangeShapeType="1" noTextEdit="1"/>
+          </p:cNvSpPr>
+          <p:nvPr>
+            <p:extLst>
+              <p:ext uri="{386F3935-93C4-4BCD-93E2-E3B085C9AB24}">
+                <p16:designElem xmlns:p16="http://schemas.microsoft.com/office/powerpoint/2015/main" val="1"/>
+              </p:ext>
+            </p:extLst>
+          </p:nvPr>
+        </p:nvSpPr>
+        <p:spPr>
+          <a:xfrm>
+            <a:off x="357759" y="480060"/>
+            <a:ext cx="8428482" cy="5897880"/>
+          </a:xfrm>
+          <a:prstGeom prst="rect">
+            <a:avLst/>
+          </a:prstGeom>
+          <a:noFill/>
+          <a:ln>
+            <a:solidFill>
+              <a:schemeClr val="bg1"/>
+            </a:solidFill>
+          </a:ln>
+        </p:spPr>
+        <p:style>
+          <a:lnRef idx="2">
+            <a:schemeClr val="accent1">
+              <a:shade val="50000"/>
+            </a:schemeClr>
+          </a:lnRef>
+          <a:fillRef idx="1">
+            <a:schemeClr val="accent1"/>
+          </a:fillRef>
+          <a:effectRef idx="0">
+            <a:schemeClr val="accent1"/>
+          </a:effectRef>
+          <a:fontRef idx="minor">
+            <a:schemeClr val="lt1"/>
+          </a:fontRef>
+        </p:style>
+        <p:txBody>
+          <a:bodyPr rtlCol="0" anchor="ctr"/>
+          <a:lstStyle/>
+          <a:p>
+            <a:pPr algn="ctr"/>
+            <a:endParaRPr lang="en-US"/>
+          </a:p>
+        </p:txBody>
+      </p:sp>
+      <p:sp>
+        <p:nvSpPr>
+          <p:cNvPr id="13" name="Rectangle 12">
+            <a:extLst>
+              <a:ext uri="{FF2B5EF4-FFF2-40B4-BE49-F238E27FC236}">
+                <a16:creationId xmlns:a16="http://schemas.microsoft.com/office/drawing/2014/main" id="{6FA8F714-B9D8-488A-8CCA-E9948FF913A9}"/>
+              </a:ext>
+              <a:ext uri="{C183D7F6-B498-43B3-948B-1728B52AA6E4}">
+                <adec:decorative xmlns:adec="http://schemas.microsoft.com/office/drawing/2017/decorative" val="1"/>
+              </a:ext>
+            </a:extLst>
+          </p:cNvPr>
+          <p:cNvSpPr>
+            <a:spLocks noGrp="1" noRot="1" noChangeAspect="1" noMove="1" noResize="1" noEditPoints="1" noAdjustHandles="1" noChangeArrowheads="1" noChangeShapeType="1" noTextEdit="1"/>
+          </p:cNvSpPr>
+          <p:nvPr>
+            <p:extLst>
+              <p:ext uri="{386F3935-93C4-4BCD-93E2-E3B085C9AB24}">
+                <p16:designElem xmlns:p16="http://schemas.microsoft.com/office/powerpoint/2015/main" val="1"/>
+              </p:ext>
+            </p:extLst>
+          </p:nvPr>
+        </p:nvSpPr>
+        <p:spPr>
+          <a:xfrm>
+            <a:off x="482599" y="643468"/>
+            <a:ext cx="8178800" cy="5571066"/>
+          </a:xfrm>
+          <a:prstGeom prst="rect">
+            <a:avLst/>
+          </a:prstGeom>
+          <a:solidFill>
+            <a:srgbClr val="FFFFFF"/>
+          </a:solidFill>
+          <a:ln>
+            <a:noFill/>
+          </a:ln>
+        </p:spPr>
+        <p:style>
+          <a:lnRef idx="2">
+            <a:schemeClr val="accent1">
+              <a:shade val="50000"/>
+            </a:schemeClr>
+          </a:lnRef>
+          <a:fillRef idx="1">
+            <a:schemeClr val="accent1"/>
+          </a:fillRef>
+          <a:effectRef idx="0">
+            <a:schemeClr val="accent1"/>
+          </a:effectRef>
+          <a:fontRef idx="minor">
+            <a:schemeClr val="lt1"/>
+          </a:fontRef>
+        </p:style>
+        <p:txBody>
+          <a:bodyPr rtlCol="0" anchor="ctr"/>
+          <a:lstStyle/>
+          <a:p>
+            <a:pPr algn="ctr"/>
+            <a:endParaRPr lang="en-US"/>
+          </a:p>
+        </p:txBody>
+      </p:sp>
+      <p:pic>
+        <p:nvPicPr>
+          <p:cNvPr id="4" name="Picture 3">
+            <a:extLst>
+              <a:ext uri="{FF2B5EF4-FFF2-40B4-BE49-F238E27FC236}">
+                <a16:creationId xmlns:a16="http://schemas.microsoft.com/office/drawing/2014/main" id="{CA4BD05B-1AFA-4761-4435-D9994462216D}"/>
+              </a:ext>
+            </a:extLst>
+          </p:cNvPr>
+          <p:cNvPicPr>
+            <a:picLocks noChangeAspect="1"/>
+          </p:cNvPicPr>
+          <p:nvPr/>
+        </p:nvPicPr>
+        <p:blipFill>
+          <a:blip r:embed="rId2"/>
+          <a:stretch>
+            <a:fillRect/>
+          </a:stretch>
+        </p:blipFill>
+        <p:spPr>
+          <a:xfrm>
+            <a:off x="851244" y="3449688"/>
+            <a:ext cx="7683157" cy="2366729"/>
+          </a:xfrm>
+          <a:prstGeom prst="rect">
+            <a:avLst/>
+          </a:prstGeom>
+        </p:spPr>
+      </p:pic>
+    </p:spTree>
+    <p:extLst>
+      <p:ext uri="{BB962C8B-B14F-4D97-AF65-F5344CB8AC3E}">
+        <p14:creationId xmlns:p14="http://schemas.microsoft.com/office/powerpoint/2010/main" val="1569718466"/>
+      </p:ext>
+    </p:extLst>
+  </p:cSld>
+  <p:clrMapOvr>
+    <a:masterClrMapping/>
+  </p:clrMapOvr>
+</p:sld>
+</file>
+
+<file path=ppt/slides/slide6.xml><?xml version="1.0" encoding="utf-8"?>
+<p:sld xmlns:a="http://schemas.openxmlformats.org/drawingml/2006/main" xmlns:r="http://schemas.openxmlformats.org/officeDocument/2006/relationships" xmlns:p="http://schemas.openxmlformats.org/presentationml/2006/main">
+  <p:cSld>
+    <p:bg>
+      <p:bgPr>
+        <a:solidFill>
+          <a:schemeClr val="bg1"/>
+        </a:solidFill>
+        <a:effectLst/>
+      </p:bgPr>
+    </p:bg>
+    <p:spTree>
+      <p:nvGrpSpPr>
+        <p:cNvPr id="1" name="">
+          <a:extLst>
+            <a:ext uri="{FF2B5EF4-FFF2-40B4-BE49-F238E27FC236}">
+              <a16:creationId xmlns:a16="http://schemas.microsoft.com/office/drawing/2014/main" id="{E14AE146-3C3B-4E51-0616-656C3B8151E7}"/>
+            </a:ext>
+          </a:extLst>
+        </p:cNvPr>
+        <p:cNvGrpSpPr/>
+        <p:nvPr/>
+      </p:nvGrpSpPr>
+      <p:grpSpPr>
+        <a:xfrm>
+          <a:off x="0" y="0"/>
+          <a:ext cx="0" cy="0"/>
+          <a:chOff x="0" y="0"/>
+          <a:chExt cx="0" cy="0"/>
+        </a:xfrm>
+      </p:grpSpPr>
+      <p:sp>
+        <p:nvSpPr>
+          <p:cNvPr id="28" name="Rectangle 27">
+            <a:extLst>
+              <a:ext uri="{FF2B5EF4-FFF2-40B4-BE49-F238E27FC236}">
+                <a16:creationId xmlns:a16="http://schemas.microsoft.com/office/drawing/2014/main" id="{32BC26D8-82FB-445E-AA49-62A77D7C1EE0}"/>
+              </a:ext>
+              <a:ext uri="{C183D7F6-B498-43B3-948B-1728B52AA6E4}">
+                <adec:decorative xmlns:adec="http://schemas.microsoft.com/office/drawing/2017/decorative" val="1"/>
+              </a:ext>
+            </a:extLst>
+          </p:cNvPr>
+          <p:cNvSpPr>
+            <a:spLocks noGrp="1" noRot="1" noChangeAspect="1" noMove="1" noResize="1" noEditPoints="1" noAdjustHandles="1" noChangeArrowheads="1" noChangeShapeType="1" noTextEdit="1"/>
+          </p:cNvSpPr>
+          <p:nvPr>
+            <p:extLst>
+              <p:ext uri="{386F3935-93C4-4BCD-93E2-E3B085C9AB24}">
+                <p16:designElem xmlns:p16="http://schemas.microsoft.com/office/powerpoint/2015/main" val="1"/>
+              </p:ext>
+            </p:extLst>
+          </p:nvPr>
+        </p:nvSpPr>
+        <p:spPr>
+          <a:xfrm>
+            <a:off x="0" y="0"/>
+            <a:ext cx="9144000" cy="6858000"/>
+          </a:xfrm>
+          <a:prstGeom prst="rect">
+            <a:avLst/>
+          </a:prstGeom>
+          <a:solidFill>
+            <a:schemeClr val="tx1">
+              <a:lumMod val="65000"/>
+              <a:lumOff val="35000"/>
+            </a:schemeClr>
+          </a:solidFill>
+          <a:ln>
+            <a:noFill/>
+          </a:ln>
+        </p:spPr>
+        <p:style>
+          <a:lnRef idx="2">
+            <a:schemeClr val="accent1">
+              <a:shade val="50000"/>
+            </a:schemeClr>
+          </a:lnRef>
+          <a:fillRef idx="1">
+            <a:schemeClr val="accent1"/>
+          </a:fillRef>
+          <a:effectRef idx="0">
+            <a:schemeClr val="accent1"/>
+          </a:effectRef>
+          <a:fontRef idx="minor">
+            <a:schemeClr val="lt1"/>
+          </a:fontRef>
+        </p:style>
+        <p:txBody>
+          <a:bodyPr rtlCol="0" anchor="ctr"/>
+          <a:lstStyle/>
+          <a:p>
+            <a:pPr algn="ctr"/>
+            <a:endParaRPr lang="en-US"/>
+          </a:p>
+        </p:txBody>
+      </p:sp>
+      <p:sp>
+        <p:nvSpPr>
+          <p:cNvPr id="30" name="Rectangle 29">
+            <a:extLst>
+              <a:ext uri="{FF2B5EF4-FFF2-40B4-BE49-F238E27FC236}">
+                <a16:creationId xmlns:a16="http://schemas.microsoft.com/office/drawing/2014/main" id="{CB44330D-EA18-4254-AA95-EB49948539B8}"/>
+              </a:ext>
+              <a:ext uri="{C183D7F6-B498-43B3-948B-1728B52AA6E4}">
+                <adec:decorative xmlns:adec="http://schemas.microsoft.com/office/drawing/2017/decorative" val="1"/>
+              </a:ext>
+            </a:extLst>
+          </p:cNvPr>
+          <p:cNvSpPr>
+            <a:spLocks noGrp="1" noRot="1" noChangeAspect="1" noMove="1" noResize="1" noEditPoints="1" noAdjustHandles="1" noChangeArrowheads="1" noChangeShapeType="1" noTextEdit="1"/>
+          </p:cNvSpPr>
+          <p:nvPr>
+            <p:extLst>
+              <p:ext uri="{386F3935-93C4-4BCD-93E2-E3B085C9AB24}">
+                <p16:designElem xmlns:p16="http://schemas.microsoft.com/office/powerpoint/2015/main" val="1"/>
+              </p:ext>
+            </p:extLst>
+          </p:nvPr>
+        </p:nvSpPr>
+        <p:spPr>
+          <a:xfrm>
+            <a:off x="357759" y="480060"/>
+            <a:ext cx="8428482" cy="5897880"/>
+          </a:xfrm>
+          <a:prstGeom prst="rect">
+            <a:avLst/>
+          </a:prstGeom>
+          <a:solidFill>
+            <a:srgbClr val="FFFFFF"/>
+          </a:solidFill>
+          <a:ln>
+            <a:noFill/>
+          </a:ln>
+        </p:spPr>
+        <p:style>
+          <a:lnRef idx="2">
+            <a:schemeClr val="accent1">
+              <a:shade val="50000"/>
+            </a:schemeClr>
+          </a:lnRef>
+          <a:fillRef idx="1">
+            <a:schemeClr val="accent1"/>
+          </a:fillRef>
+          <a:effectRef idx="0">
+            <a:schemeClr val="accent1"/>
+          </a:effectRef>
+          <a:fontRef idx="minor">
+            <a:schemeClr val="lt1"/>
+          </a:fontRef>
+        </p:style>
+        <p:txBody>
+          <a:bodyPr rtlCol="0" anchor="ctr"/>
+          <a:lstStyle/>
+          <a:p>
+            <a:pPr algn="ctr"/>
+            <a:endParaRPr lang="en-US"/>
+          </a:p>
+        </p:txBody>
+      </p:sp>
+      <p:pic>
+        <p:nvPicPr>
+          <p:cNvPr id="5" name="Picture 4">
+            <a:extLst>
+              <a:ext uri="{FF2B5EF4-FFF2-40B4-BE49-F238E27FC236}">
+                <a16:creationId xmlns:a16="http://schemas.microsoft.com/office/drawing/2014/main" id="{3194C77E-7DC5-586A-B38D-D6C4C32121E5}"/>
+              </a:ext>
+            </a:extLst>
+          </p:cNvPr>
+          <p:cNvPicPr>
+            <a:picLocks noChangeAspect="1"/>
+          </p:cNvPicPr>
+          <p:nvPr/>
+        </p:nvPicPr>
+        <p:blipFill>
+          <a:blip r:embed="rId2"/>
+          <a:stretch>
+            <a:fillRect/>
+          </a:stretch>
+        </p:blipFill>
+        <p:spPr>
+          <a:xfrm>
+            <a:off x="482600" y="1696721"/>
+            <a:ext cx="8178799" cy="4366622"/>
+          </a:xfrm>
+          <a:prstGeom prst="rect">
+            <a:avLst/>
+          </a:prstGeom>
+        </p:spPr>
+      </p:pic>
+    </p:spTree>
+    <p:extLst>
+      <p:ext uri="{BB962C8B-B14F-4D97-AF65-F5344CB8AC3E}">
+        <p14:creationId xmlns:p14="http://schemas.microsoft.com/office/powerpoint/2010/main" val="1609587067"/>
+      </p:ext>
+    </p:extLst>
+  </p:cSld>
+  <p:clrMapOvr>
+    <a:masterClrMapping/>
+  </p:clrMapOvr>
+</p:sld>
+</file>
+
+<file path=ppt/slides/slide7.xml><?xml version="1.0" encoding="utf-8"?>
+<p:sld xmlns:a="http://schemas.openxmlformats.org/drawingml/2006/main" xmlns:r="http://schemas.openxmlformats.org/officeDocument/2006/relationships" xmlns:p="http://schemas.openxmlformats.org/presentationml/2006/main">
+  <p:cSld>
     <p:spTree>
       <p:nvGrpSpPr>
         <p:cNvPr id="1" name="">
@@ -4032,315 +5014,6 @@
         <p14:creationId xmlns:p14="http://schemas.microsoft.com/office/powerpoint/2010/main" val="114748700"/>
       </p:ext>
     </p:extLst>
-  </p:cSld>
-  <p:clrMapOvr>
-    <a:masterClrMapping/>
-  </p:clrMapOvr>
-</p:sld>
-</file>
-
-<file path=ppt/slides/slide6.xml><?xml version="1.0" encoding="utf-8"?>
-<p:sld xmlns:a="http://schemas.openxmlformats.org/drawingml/2006/main" xmlns:r="http://schemas.openxmlformats.org/officeDocument/2006/relationships" xmlns:p="http://schemas.openxmlformats.org/presentationml/2006/main">
-  <p:cSld>
-    <p:spTree>
-      <p:nvGrpSpPr>
-        <p:cNvPr id="1" name=""/>
-        <p:cNvGrpSpPr/>
-        <p:nvPr/>
-      </p:nvGrpSpPr>
-      <p:grpSpPr>
-        <a:xfrm>
-          <a:off x="0" y="0"/>
-          <a:ext cx="0" cy="0"/>
-          <a:chOff x="0" y="0"/>
-          <a:chExt cx="0" cy="0"/>
-        </a:xfrm>
-      </p:grpSpPr>
-      <p:sp>
-        <p:nvSpPr>
-          <p:cNvPr id="2" name="Title 1"/>
-          <p:cNvSpPr>
-            <a:spLocks noGrp="1"/>
-          </p:cNvSpPr>
-          <p:nvPr>
-            <p:ph type="title"/>
-          </p:nvPr>
-        </p:nvSpPr>
-        <p:spPr/>
-        <p:txBody>
-          <a:bodyPr/>
-          <a:lstStyle/>
-          <a:p>
-            <a:r>
-              <a:rPr dirty="0"/>
-              <a:t>Component Stack</a:t>
-            </a:r>
-          </a:p>
-        </p:txBody>
-      </p:sp>
-      <p:sp>
-        <p:nvSpPr>
-          <p:cNvPr id="3" name="Content Placeholder 2"/>
-          <p:cNvSpPr>
-            <a:spLocks noGrp="1"/>
-          </p:cNvSpPr>
-          <p:nvPr>
-            <p:ph idx="1"/>
-          </p:nvPr>
-        </p:nvSpPr>
-        <p:spPr/>
-        <p:txBody>
-          <a:bodyPr/>
-          <a:lstStyle/>
-          <a:p>
-            <a:r>
-              <a:rPr lang="en-US" sz="1000" b="1" dirty="0"/>
-              <a:t>What the Customer Wants</a:t>
-            </a:r>
-          </a:p>
-          <a:p>
-            <a:r>
-              <a:rPr lang="en-US" sz="1000" b="1" dirty="0"/>
-              <a:t>Automated, production-safe CVE patching that scales without risk.</a:t>
-            </a:r>
-            <a:endParaRPr lang="en-US" sz="1000" dirty="0"/>
-          </a:p>
-          <a:p>
-            <a:r>
-              <a:rPr lang="en-US" sz="1000" dirty="0"/>
-              <a:t>The customer needs to keep RHEL8 and Windows servers secure by applying critical security patches, while avoiding the operational risk and downtime that comes from blind or manual patching.</a:t>
-            </a:r>
-          </a:p>
-          <a:p>
-            <a:pPr marL="0" indent="0">
-              <a:buNone/>
-            </a:pPr>
-            <a:br>
-              <a:rPr lang="en-US" sz="1000" dirty="0"/>
-            </a:br>
-            <a:endParaRPr lang="en-US" sz="1000" dirty="0"/>
-          </a:p>
-          <a:p>
-            <a:r>
-              <a:rPr lang="en-US" sz="1000" b="1" dirty="0"/>
-              <a:t>The Core Ask</a:t>
-            </a:r>
-          </a:p>
-          <a:p>
-            <a:r>
-              <a:rPr lang="en-US" sz="1000" b="1" dirty="0"/>
-              <a:t>Patch only when it matters</a:t>
-            </a:r>
-            <a:endParaRPr lang="en-US" sz="1000" dirty="0"/>
-          </a:p>
-          <a:p>
-            <a:r>
-              <a:rPr lang="en-US" sz="1000" dirty="0"/>
-              <a:t>Apply updates only when there are critical CVEs—not every minor update, not on a fixed schedule regardless of risk.</a:t>
-            </a:r>
-          </a:p>
-          <a:p>
-            <a:r>
-              <a:rPr lang="en-US" sz="1000" b="1" dirty="0"/>
-              <a:t>Stay production-safe</a:t>
-            </a:r>
-            <a:endParaRPr lang="en-US" sz="1000" dirty="0"/>
-          </a:p>
-          <a:p>
-            <a:r>
-              <a:rPr lang="en-US" sz="1000" dirty="0"/>
-              <a:t>Limit patching to security-related updates. No feature updates, no optional packages, no changes that could introduce breaking behavior.</a:t>
-            </a:r>
-          </a:p>
-          <a:p>
-            <a:r>
-              <a:rPr lang="en-US" sz="1000" b="1" dirty="0"/>
-              <a:t>Remove manual effort</a:t>
-            </a:r>
-            <a:endParaRPr lang="en-US" sz="1000" dirty="0"/>
-          </a:p>
-          <a:p>
-            <a:r>
-              <a:rPr lang="en-US" sz="1000" dirty="0"/>
-              <a:t>No more ad-hoc scripts, inconsistent pre-patch scans, or manual decisions about when to patch.</a:t>
-            </a:r>
-          </a:p>
-          <a:p>
-            <a:r>
-              <a:rPr lang="en-US" sz="1000" b="1" dirty="0"/>
-              <a:t>Use structured, reliable data</a:t>
-            </a:r>
-            <a:endParaRPr lang="en-US" sz="1000" dirty="0"/>
-          </a:p>
-          <a:p>
-            <a:r>
-              <a:rPr lang="en-US" sz="1000" dirty="0"/>
-              <a:t>Base patch decisions on authoritative CVE data (severity, affected packages, IDs), not raw command output or custom scripts.</a:t>
-            </a:r>
-          </a:p>
-          <a:p>
-            <a:r>
-              <a:rPr lang="en-US" sz="1000" b="1" dirty="0"/>
-              <a:t>Scale across the fleet</a:t>
-            </a:r>
-            <a:endParaRPr lang="en-US" sz="1000" dirty="0"/>
-          </a:p>
-          <a:p>
-            <a:r>
-              <a:rPr lang="en-US" sz="1000" dirty="0"/>
-              <a:t>Support RHEL8 and Windows across many instances without manual per-instance work.</a:t>
-            </a:r>
-          </a:p>
-          <a:p>
-            <a:endParaRPr sz="1000" dirty="0">
-              <a:latin typeface="Courier New"/>
-            </a:endParaRPr>
-          </a:p>
-        </p:txBody>
-      </p:sp>
-    </p:spTree>
-  </p:cSld>
-  <p:clrMapOvr>
-    <a:masterClrMapping/>
-  </p:clrMapOvr>
-</p:sld>
-</file>
-
-<file path=ppt/slides/slide7.xml><?xml version="1.0" encoding="utf-8"?>
-<p:sld xmlns:a="http://schemas.openxmlformats.org/drawingml/2006/main" xmlns:r="http://schemas.openxmlformats.org/officeDocument/2006/relationships" xmlns:p="http://schemas.openxmlformats.org/presentationml/2006/main">
-  <p:cSld>
-    <p:spTree>
-      <p:nvGrpSpPr>
-        <p:cNvPr id="1" name=""/>
-        <p:cNvGrpSpPr/>
-        <p:nvPr/>
-      </p:nvGrpSpPr>
-      <p:grpSpPr>
-        <a:xfrm>
-          <a:off x="0" y="0"/>
-          <a:ext cx="0" cy="0"/>
-          <a:chOff x="0" y="0"/>
-          <a:chExt cx="0" cy="0"/>
-        </a:xfrm>
-      </p:grpSpPr>
-      <p:sp>
-        <p:nvSpPr>
-          <p:cNvPr id="2" name="Title 1"/>
-          <p:cNvSpPr>
-            <a:spLocks noGrp="1"/>
-          </p:cNvSpPr>
-          <p:nvPr>
-            <p:ph type="title"/>
-          </p:nvPr>
-        </p:nvSpPr>
-        <p:spPr/>
-        <p:txBody>
-          <a:bodyPr/>
-          <a:lstStyle/>
-          <a:p>
-            <a:r>
-              <a:t>Slide 2: The Problem – Pain Points</a:t>
-            </a:r>
-          </a:p>
-        </p:txBody>
-      </p:sp>
-      <p:sp>
-        <p:nvSpPr>
-          <p:cNvPr id="3" name="Content Placeholder 2"/>
-          <p:cNvSpPr>
-            <a:spLocks noGrp="1"/>
-          </p:cNvSpPr>
-          <p:nvPr>
-            <p:ph idx="1"/>
-          </p:nvPr>
-        </p:nvSpPr>
-        <p:spPr/>
-        <p:txBody>
-          <a:bodyPr/>
-          <a:lstStyle/>
-          <a:p>
-            <a:r>
-              <a:rPr sz="1000">
-                <a:latin typeface="Courier New"/>
-              </a:rPr>
-              <a:t>flowchart LR</a:t>
-            </a:r>
-          </a:p>
-          <a:p>
-            <a:r>
-              <a:rPr sz="1000">
-                <a:latin typeface="Courier New"/>
-              </a:rPr>
-              <a:t>    subgraph Problems["The Problem"]</a:t>
-            </a:r>
-          </a:p>
-          <a:p>
-            <a:r>
-              <a:rPr sz="1000">
-                <a:latin typeface="Courier New"/>
-              </a:rPr>
-              <a:t>        P1["Manual patching&lt;br/&gt;Error-prone, doesn't scale"]</a:t>
-            </a:r>
-          </a:p>
-          <a:p>
-            <a:r>
-              <a:rPr sz="1000">
-                <a:latin typeface="Courier New"/>
-              </a:rPr>
-              <a:t>        P2["Blind automation&lt;br/&gt;Unnecessary risk"]</a:t>
-            </a:r>
-          </a:p>
-          <a:p>
-            <a:r>
-              <a:rPr sz="1000">
-                <a:latin typeface="Courier New"/>
-              </a:rPr>
-              <a:t>        P3["Pre-patch scripts&lt;br/&gt;Inconsistent, hard to maintain"]</a:t>
-            </a:r>
-          </a:p>
-          <a:p>
-            <a:r>
-              <a:rPr sz="1000">
-                <a:latin typeface="Courier New"/>
-              </a:rPr>
-              <a:t>        P4["Need smart decision&lt;br/&gt;When to patch?"]</a:t>
-            </a:r>
-          </a:p>
-          <a:p>
-            <a:r>
-              <a:rPr sz="1000">
-                <a:latin typeface="Courier New"/>
-              </a:rPr>
-              <a:t>    end</a:t>
-            </a:r>
-          </a:p>
-          <a:p>
-            <a:r>
-              <a:rPr sz="1000">
-                <a:latin typeface="Courier New"/>
-              </a:rPr>
-              <a:t>    P1 --&gt; P4</a:t>
-            </a:r>
-          </a:p>
-          <a:p>
-            <a:r>
-              <a:rPr sz="1000">
-                <a:latin typeface="Courier New"/>
-              </a:rPr>
-              <a:t>    P2 --&gt; P4</a:t>
-            </a:r>
-          </a:p>
-          <a:p>
-            <a:r>
-              <a:rPr sz="1000">
-                <a:latin typeface="Courier New"/>
-              </a:rPr>
-              <a:t>    P3 --&gt; P4</a:t>
-            </a:r>
-          </a:p>
-        </p:txBody>
-      </p:sp>
-    </p:spTree>
   </p:cSld>
   <p:clrMapOvr>
     <a:masterClrMapping/>
@@ -4377,13 +5050,12 @@
         </p:nvSpPr>
         <p:spPr/>
         <p:txBody>
-          <a:bodyPr>
-            <a:normAutofit fontScale="90000"/>
-          </a:bodyPr>
-          <a:lstStyle/>
-          <a:p>
-            <a:r>
-              <a:t>Slide 3: The Solution – High-Level Flow</a:t>
+          <a:bodyPr/>
+          <a:lstStyle/>
+          <a:p>
+            <a:r>
+              <a:rPr dirty="0"/>
+              <a:t>Component Stack</a:t>
             </a:r>
           </a:p>
         </p:txBody>
@@ -4404,168 +5076,107 @@
           <a:lstStyle/>
           <a:p>
             <a:r>
-              <a:rPr sz="1000">
-                <a:latin typeface="Courier New"/>
-              </a:rPr>
-              <a:t>flowchart TB</a:t>
-            </a:r>
-          </a:p>
-          <a:p>
-            <a:r>
-              <a:rPr sz="1000">
-                <a:latin typeface="Courier New"/>
-              </a:rPr>
-              <a:t>    EB["EventBridge&lt;br/&gt;monthly schedule"]</a:t>
-            </a:r>
-          </a:p>
-          <a:p>
-            <a:r>
-              <a:rPr sz="1000">
-                <a:latin typeface="Courier New"/>
-              </a:rPr>
-              <a:t>    SF["Step Functions"]</a:t>
-            </a:r>
-          </a:p>
-          <a:p>
-            <a:r>
-              <a:rPr sz="1000">
-                <a:latin typeface="Courier New"/>
-              </a:rPr>
-              <a:t>    L1["1. Fetch Inspector findings&lt;br/&gt;Lambda"]</a:t>
-            </a:r>
-          </a:p>
-          <a:p>
-            <a:r>
-              <a:rPr sz="1000">
-                <a:latin typeface="Courier New"/>
-              </a:rPr>
-              <a:t>    L2["2. Analyze with Bedrock&lt;br/&gt;Lambda"]</a:t>
-            </a:r>
-          </a:p>
-          <a:p>
-            <a:r>
-              <a:rPr sz="1000">
-                <a:latin typeface="Courier New"/>
-              </a:rPr>
-              <a:t>    CHOICE{"3. Critical CVEs?"}</a:t>
-            </a:r>
-          </a:p>
-          <a:p>
-            <a:r>
-              <a:rPr sz="1000">
-                <a:latin typeface="Courier New"/>
-              </a:rPr>
-              <a:t>    APPLY["4. Apply patches&lt;br/&gt;Parallel: RHEL + Windows via SSM&lt;br/&gt;Circuit-breaker check, pre-patch AMIs"]</a:t>
-            </a:r>
-          </a:p>
-          <a:p>
-            <a:r>
-              <a:rPr sz="1000">
-                <a:latin typeface="Courier New"/>
-              </a:rPr>
-              <a:t>    POST["5. Post-patch verification&lt;br/&gt;Parallel"]</a:t>
-            </a:r>
-          </a:p>
-          <a:p>
-            <a:r>
-              <a:rPr sz="1000">
-                <a:latin typeface="Courier New"/>
-              </a:rPr>
-              <a:t>    SKIP["NotifyNoPatch&lt;br/&gt;Skip"]</a:t>
-            </a:r>
-          </a:p>
-          <a:p>
-            <a:r>
-              <a:rPr sz="1000">
-                <a:latin typeface="Courier New"/>
-              </a:rPr>
-              <a:t>    CB["Circuit-breaker: EC2 stopped → block CVE"]</a:t>
-            </a:r>
-          </a:p>
-          <a:p>
-            <a:r>
-              <a:rPr sz="1000">
-                <a:latin typeface="Courier New"/>
-              </a:rPr>
-              <a:t>    AMI["AMI cleanup: daily"]</a:t>
-            </a:r>
-          </a:p>
-          <a:p>
-            <a:endParaRPr sz="1000">
+              <a:rPr lang="en-US" sz="1000" b="1" dirty="0"/>
+              <a:t>What the Customer Wants</a:t>
+            </a:r>
+          </a:p>
+          <a:p>
+            <a:r>
+              <a:rPr lang="en-US" sz="1000" b="1" dirty="0"/>
+              <a:t>Automated, production-safe CVE patching that scales without risk.</a:t>
+            </a:r>
+            <a:endParaRPr lang="en-US" sz="1000" dirty="0"/>
+          </a:p>
+          <a:p>
+            <a:r>
+              <a:rPr lang="en-US" sz="1000" dirty="0"/>
+              <a:t>The customer needs to keep RHEL8 and Windows servers secure by applying critical security patches, while avoiding the operational risk and downtime that comes from blind or manual patching.</a:t>
+            </a:r>
+          </a:p>
+          <a:p>
+            <a:pPr marL="0" indent="0">
+              <a:buNone/>
+            </a:pPr>
+            <a:br>
+              <a:rPr lang="en-US" sz="1000" dirty="0"/>
+            </a:br>
+            <a:endParaRPr lang="en-US" sz="1000" dirty="0"/>
+          </a:p>
+          <a:p>
+            <a:r>
+              <a:rPr lang="en-US" sz="1000" b="1" dirty="0"/>
+              <a:t>The Core Ask</a:t>
+            </a:r>
+          </a:p>
+          <a:p>
+            <a:r>
+              <a:rPr lang="en-US" sz="1000" b="1" dirty="0"/>
+              <a:t>Patch only when it matters</a:t>
+            </a:r>
+            <a:endParaRPr lang="en-US" sz="1000" dirty="0"/>
+          </a:p>
+          <a:p>
+            <a:r>
+              <a:rPr lang="en-US" sz="1000" dirty="0"/>
+              <a:t>Apply updates only when there are critical CVEs—not every minor update, not on a fixed schedule regardless of risk.</a:t>
+            </a:r>
+          </a:p>
+          <a:p>
+            <a:r>
+              <a:rPr lang="en-US" sz="1000" b="1" dirty="0"/>
+              <a:t>Stay production-safe</a:t>
+            </a:r>
+            <a:endParaRPr lang="en-US" sz="1000" dirty="0"/>
+          </a:p>
+          <a:p>
+            <a:r>
+              <a:rPr lang="en-US" sz="1000" dirty="0"/>
+              <a:t>Limit patching to security-related updates. No feature updates, no optional packages, no changes that could introduce breaking behavior.</a:t>
+            </a:r>
+          </a:p>
+          <a:p>
+            <a:r>
+              <a:rPr lang="en-US" sz="1000" b="1" dirty="0"/>
+              <a:t>Remove manual effort</a:t>
+            </a:r>
+            <a:endParaRPr lang="en-US" sz="1000" dirty="0"/>
+          </a:p>
+          <a:p>
+            <a:r>
+              <a:rPr lang="en-US" sz="1000" dirty="0"/>
+              <a:t>No more ad-hoc scripts, inconsistent pre-patch scans, or manual decisions about when to patch.</a:t>
+            </a:r>
+          </a:p>
+          <a:p>
+            <a:r>
+              <a:rPr lang="en-US" sz="1000" b="1" dirty="0"/>
+              <a:t>Use structured, reliable data</a:t>
+            </a:r>
+            <a:endParaRPr lang="en-US" sz="1000" dirty="0"/>
+          </a:p>
+          <a:p>
+            <a:r>
+              <a:rPr lang="en-US" sz="1000" dirty="0"/>
+              <a:t>Base patch decisions on authoritative CVE data (severity, affected packages, IDs), not raw command output or custom scripts.</a:t>
+            </a:r>
+          </a:p>
+          <a:p>
+            <a:r>
+              <a:rPr lang="en-US" sz="1000" b="1" dirty="0"/>
+              <a:t>Scale across the fleet</a:t>
+            </a:r>
+            <a:endParaRPr lang="en-US" sz="1000" dirty="0"/>
+          </a:p>
+          <a:p>
+            <a:r>
+              <a:rPr lang="en-US" sz="1000" dirty="0"/>
+              <a:t>Support RHEL8 and Windows across many instances without manual per-instance work.</a:t>
+            </a:r>
+          </a:p>
+          <a:p>
+            <a:endParaRPr sz="1000" dirty="0">
               <a:latin typeface="Courier New"/>
             </a:endParaRPr>
-          </a:p>
-          <a:p>
-            <a:r>
-              <a:rPr sz="1000">
-                <a:latin typeface="Courier New"/>
-              </a:rPr>
-              <a:t>    EB --&gt;|Trigger| SF</a:t>
-            </a:r>
-          </a:p>
-          <a:p>
-            <a:r>
-              <a:rPr sz="1000">
-                <a:latin typeface="Courier New"/>
-              </a:rPr>
-              <a:t>    SF --&gt; L1</a:t>
-            </a:r>
-          </a:p>
-          <a:p>
-            <a:r>
-              <a:rPr sz="1000">
-                <a:latin typeface="Courier New"/>
-              </a:rPr>
-              <a:t>    L1 --&gt; L2</a:t>
-            </a:r>
-          </a:p>
-          <a:p>
-            <a:r>
-              <a:rPr sz="1000">
-                <a:latin typeface="Courier New"/>
-              </a:rPr>
-              <a:t>    L2 --&gt; CHOICE</a:t>
-            </a:r>
-          </a:p>
-          <a:p>
-            <a:r>
-              <a:rPr sz="1000">
-                <a:latin typeface="Courier New"/>
-              </a:rPr>
-              <a:t>    CHOICE --&gt;|Yes| APPLY</a:t>
-            </a:r>
-          </a:p>
-          <a:p>
-            <a:r>
-              <a:rPr sz="1000">
-                <a:latin typeface="Courier New"/>
-              </a:rPr>
-              <a:t>    CHOICE --&gt;|No| SKIP</a:t>
-            </a:r>
-          </a:p>
-          <a:p>
-            <a:r>
-              <a:rPr sz="1000">
-                <a:latin typeface="Courier New"/>
-              </a:rPr>
-              <a:t>    APPLY --&gt; POST</a:t>
-            </a:r>
-          </a:p>
-          <a:p>
-            <a:r>
-              <a:rPr sz="1000">
-                <a:latin typeface="Courier New"/>
-              </a:rPr>
-              <a:t>    APPLY -.-&gt;|on failure| CB</a:t>
-            </a:r>
-          </a:p>
-          <a:p>
-            <a:r>
-              <a:rPr sz="1000">
-                <a:latin typeface="Courier New"/>
-              </a:rPr>
-              <a:t>    CB -.-&gt; AMI</a:t>
-            </a:r>
           </a:p>
         </p:txBody>
       </p:sp>
@@ -4606,13 +5217,11 @@
         </p:nvSpPr>
         <p:spPr/>
         <p:txBody>
-          <a:bodyPr>
-            <a:normAutofit fontScale="90000"/>
-          </a:bodyPr>
-          <a:lstStyle/>
-          <a:p>
-            <a:r>
-              <a:t>Slide 4: Architecture – Key Components</a:t>
+          <a:bodyPr/>
+          <a:lstStyle/>
+          <a:p>
+            <a:r>
+              <a:t>Slide 2: The Problem – Pain Points</a:t>
             </a:r>
           </a:p>
         </p:txBody>
@@ -4629,16 +5238,14 @@
         </p:nvSpPr>
         <p:spPr/>
         <p:txBody>
-          <a:bodyPr>
-            <a:normAutofit fontScale="92500" lnSpcReduction="10000"/>
-          </a:bodyPr>
+          <a:bodyPr/>
           <a:lstStyle/>
           <a:p>
             <a:r>
               <a:rPr sz="1000">
                 <a:latin typeface="Courier New"/>
               </a:rPr>
-              <a:t>flowchart TB</a:t>
+              <a:t>flowchart LR</a:t>
             </a:r>
           </a:p>
           <a:p>
@@ -4646,7 +5253,7 @@
               <a:rPr sz="1000">
                 <a:latin typeface="Courier New"/>
               </a:rPr>
-              <a:t>    subgraph Data["Data Layer"]</a:t>
+              <a:t>    subgraph Problems["The Problem"]</a:t>
             </a:r>
           </a:p>
           <a:p>
@@ -4654,7 +5261,7 @@
               <a:rPr sz="1000">
                 <a:latin typeface="Courier New"/>
               </a:rPr>
-              <a:t>        INSP["Amazon Inspector v2&lt;br/&gt;Discovers EC2, scans CVEs, stores findings"]</a:t>
+              <a:t>        P1["Manual patching&lt;br/&gt;Error-prone, doesn't scale"]</a:t>
             </a:r>
           </a:p>
           <a:p>
@@ -4662,20 +5269,15 @@
               <a:rPr sz="1000">
                 <a:latin typeface="Courier New"/>
               </a:rPr>
-              <a:t>    end</a:t>
-            </a:r>
-          </a:p>
-          <a:p>
-            <a:endParaRPr sz="1000">
-              <a:latin typeface="Courier New"/>
-            </a:endParaRPr>
+              <a:t>        P2["Blind automation&lt;br/&gt;Unnecessary risk"]</a:t>
+            </a:r>
           </a:p>
           <a:p>
             <a:r>
               <a:rPr sz="1000">
                 <a:latin typeface="Courier New"/>
               </a:rPr>
-              <a:t>    subgraph Orchestration["Orchestration"]</a:t>
+              <a:t>        P3["Pre-patch scripts&lt;br/&gt;Inconsistent, hard to maintain"]</a:t>
             </a:r>
           </a:p>
           <a:p>
@@ -4683,7 +5285,7 @@
               <a:rPr sz="1000">
                 <a:latin typeface="Courier New"/>
               </a:rPr>
-              <a:t>        SF["Step Functions&lt;br/&gt;Orchestrates, Choice gates patching"]</a:t>
+              <a:t>        P4["Need smart decision&lt;br/&gt;When to patch?"]</a:t>
             </a:r>
           </a:p>
           <a:p>
@@ -4695,16 +5297,11 @@
             </a:r>
           </a:p>
           <a:p>
-            <a:endParaRPr sz="1000">
-              <a:latin typeface="Courier New"/>
-            </a:endParaRPr>
-          </a:p>
-          <a:p>
             <a:r>
               <a:rPr sz="1000">
                 <a:latin typeface="Courier New"/>
               </a:rPr>
-              <a:t>    subgraph Lambdas["Lambda Layer"]</a:t>
+              <a:t>    P1 --&gt; P4</a:t>
             </a:r>
           </a:p>
           <a:p>
@@ -4712,7 +5309,7 @@
               <a:rPr sz="1000">
                 <a:latin typeface="Courier New"/>
               </a:rPr>
-              <a:t>        L_INSP["Inspector Findings Lambda&lt;br/&gt;ListFindings API, filter by VPC"]</a:t>
+              <a:t>    P2 --&gt; P4</a:t>
             </a:r>
           </a:p>
           <a:p>
@@ -4720,134 +5317,7 @@
               <a:rPr sz="1000">
                 <a:latin typeface="Courier New"/>
               </a:rPr>
-              <a:t>        L_ANALYZER["CVE Analyzer Lambda&lt;br/&gt;Bedrock → has_critical_cves"]</a:t>
-            </a:r>
-          </a:p>
-          <a:p>
-            <a:r>
-              <a:rPr sz="1000">
-                <a:latin typeface="Courier New"/>
-              </a:rPr>
-              <a:t>        L_SSM["SSM Runner Lambda&lt;br/&gt;Invokes SSM Run Command"]</a:t>
-            </a:r>
-          </a:p>
-          <a:p>
-            <a:r>
-              <a:rPr sz="1000">
-                <a:latin typeface="Courier New"/>
-              </a:rPr>
-              <a:t>    end</a:t>
-            </a:r>
-          </a:p>
-          <a:p>
-            <a:endParaRPr sz="1000">
-              <a:latin typeface="Courier New"/>
-            </a:endParaRPr>
-          </a:p>
-          <a:p>
-            <a:r>
-              <a:rPr sz="1000">
-                <a:latin typeface="Courier New"/>
-              </a:rPr>
-              <a:t>    subgraph AI["AI"]</a:t>
-            </a:r>
-          </a:p>
-          <a:p>
-            <a:r>
-              <a:rPr sz="1000">
-                <a:latin typeface="Courier New"/>
-              </a:rPr>
-              <a:t>        BEDROCK["Bedrock&lt;br/&gt;Analyzes severity, patch/no-patch"]</a:t>
-            </a:r>
-          </a:p>
-          <a:p>
-            <a:r>
-              <a:rPr sz="1000">
-                <a:latin typeface="Courier New"/>
-              </a:rPr>
-              <a:t>    end</a:t>
-            </a:r>
-          </a:p>
-          <a:p>
-            <a:endParaRPr sz="1000">
-              <a:latin typeface="Courier New"/>
-            </a:endParaRPr>
-          </a:p>
-          <a:p>
-            <a:r>
-              <a:rPr sz="1000">
-                <a:latin typeface="Courier New"/>
-              </a:rPr>
-              <a:t>    subgraph Execution["Execution"]</a:t>
-            </a:r>
-          </a:p>
-          <a:p>
-            <a:r>
-              <a:rPr sz="1000">
-                <a:latin typeface="Courier New"/>
-              </a:rPr>
-              <a:t>        SSM["Systems Manager&lt;br/&gt;dnf update --security (RHEL)&lt;br/&gt;Patch Baseline (Windows)"]</a:t>
-            </a:r>
-          </a:p>
-          <a:p>
-            <a:r>
-              <a:rPr sz="1000">
-                <a:latin typeface="Courier New"/>
-              </a:rPr>
-              <a:t>    end</a:t>
-            </a:r>
-          </a:p>
-          <a:p>
-            <a:endParaRPr sz="1000">
-              <a:latin typeface="Courier New"/>
-            </a:endParaRPr>
-          </a:p>
-          <a:p>
-            <a:r>
-              <a:rPr sz="1000">
-                <a:latin typeface="Courier New"/>
-              </a:rPr>
-              <a:t>    SF --&gt; L_INSP</a:t>
-            </a:r>
-          </a:p>
-          <a:p>
-            <a:r>
-              <a:rPr sz="1000">
-                <a:latin typeface="Courier New"/>
-              </a:rPr>
-              <a:t>    L_INSP --&gt; INSP</a:t>
-            </a:r>
-          </a:p>
-          <a:p>
-            <a:r>
-              <a:rPr sz="1000">
-                <a:latin typeface="Courier New"/>
-              </a:rPr>
-              <a:t>    SF --&gt; L_ANALYZER</a:t>
-            </a:r>
-          </a:p>
-          <a:p>
-            <a:r>
-              <a:rPr sz="1000">
-                <a:latin typeface="Courier New"/>
-              </a:rPr>
-              <a:t>    L_ANALYZER --&gt; BEDROCK</a:t>
-            </a:r>
-          </a:p>
-          <a:p>
-            <a:r>
-              <a:rPr sz="1000">
-                <a:latin typeface="Courier New"/>
-              </a:rPr>
-              <a:t>    SF --&gt; L_SSM</a:t>
-            </a:r>
-          </a:p>
-          <a:p>
-            <a:r>
-              <a:rPr sz="1000">
-                <a:latin typeface="Courier New"/>
-              </a:rPr>
-              <a:t>    L_SSM --&gt; SSM</a:t>
+              <a:t>    P3 --&gt; P4</a:t>
             </a:r>
           </a:p>
         </p:txBody>

--- a/docs/aiops_r8_presentation.pptx
+++ b/docs/aiops_r8_presentation.pptx
@@ -6,16 +6,19 @@
   </p:sldMasterIdLst>
   <p:sldIdLst>
     <p:sldId id="256" r:id="rId2"/>
-    <p:sldId id="261" r:id="rId3"/>
-    <p:sldId id="262" r:id="rId4"/>
-    <p:sldId id="263" r:id="rId5"/>
-    <p:sldId id="266" r:id="rId6"/>
-    <p:sldId id="265" r:id="rId7"/>
-    <p:sldId id="264" r:id="rId8"/>
-    <p:sldId id="257" r:id="rId9"/>
-    <p:sldId id="258" r:id="rId10"/>
-    <p:sldId id="259" r:id="rId11"/>
-    <p:sldId id="260" r:id="rId12"/>
+    <p:sldId id="269" r:id="rId3"/>
+    <p:sldId id="270" r:id="rId4"/>
+    <p:sldId id="268" r:id="rId5"/>
+    <p:sldId id="273" r:id="rId6"/>
+    <p:sldId id="271" r:id="rId7"/>
+    <p:sldId id="261" r:id="rId8"/>
+    <p:sldId id="264" r:id="rId9"/>
+    <p:sldId id="265" r:id="rId10"/>
+    <p:sldId id="266" r:id="rId11"/>
+    <p:sldId id="272" r:id="rId12"/>
+    <p:sldId id="262" r:id="rId13"/>
+    <p:sldId id="263" r:id="rId14"/>
+    <p:sldId id="267" r:id="rId15"/>
   </p:sldIdLst>
   <p:sldSz cx="9144000" cy="6858000" type="screen4x3"/>
   <p:notesSz cx="6858000" cy="9144000"/>
@@ -312,7 +315,7 @@
           <a:p>
             <a:fld id="{5BCAD085-E8A6-8845-BD4E-CB4CCA059FC4}" type="datetimeFigureOut">
               <a:rPr lang="en-US" smtClean="0"/>
-              <a:t>3/11/26</a:t>
+              <a:t>3/11/2026</a:t>
             </a:fld>
             <a:endParaRPr lang="en-US"/>
           </a:p>
@@ -480,7 +483,7 @@
           <a:p>
             <a:fld id="{5BCAD085-E8A6-8845-BD4E-CB4CCA059FC4}" type="datetimeFigureOut">
               <a:rPr lang="en-US" smtClean="0"/>
-              <a:t>3/11/26</a:t>
+              <a:t>3/11/2026</a:t>
             </a:fld>
             <a:endParaRPr lang="en-US"/>
           </a:p>
@@ -658,7 +661,7 @@
           <a:p>
             <a:fld id="{5BCAD085-E8A6-8845-BD4E-CB4CCA059FC4}" type="datetimeFigureOut">
               <a:rPr lang="en-US" smtClean="0"/>
-              <a:t>3/11/26</a:t>
+              <a:t>3/11/2026</a:t>
             </a:fld>
             <a:endParaRPr lang="en-US"/>
           </a:p>
@@ -826,7 +829,7 @@
           <a:p>
             <a:fld id="{5BCAD085-E8A6-8845-BD4E-CB4CCA059FC4}" type="datetimeFigureOut">
               <a:rPr lang="en-US" smtClean="0"/>
-              <a:t>3/11/26</a:t>
+              <a:t>3/11/2026</a:t>
             </a:fld>
             <a:endParaRPr lang="en-US"/>
           </a:p>
@@ -1071,7 +1074,7 @@
           <a:p>
             <a:fld id="{5BCAD085-E8A6-8845-BD4E-CB4CCA059FC4}" type="datetimeFigureOut">
               <a:rPr lang="en-US" smtClean="0"/>
-              <a:t>3/11/26</a:t>
+              <a:t>3/11/2026</a:t>
             </a:fld>
             <a:endParaRPr lang="en-US"/>
           </a:p>
@@ -1356,7 +1359,7 @@
           <a:p>
             <a:fld id="{5BCAD085-E8A6-8845-BD4E-CB4CCA059FC4}" type="datetimeFigureOut">
               <a:rPr lang="en-US" smtClean="0"/>
-              <a:t>3/11/26</a:t>
+              <a:t>3/11/2026</a:t>
             </a:fld>
             <a:endParaRPr lang="en-US"/>
           </a:p>
@@ -1775,7 +1778,7 @@
           <a:p>
             <a:fld id="{5BCAD085-E8A6-8845-BD4E-CB4CCA059FC4}" type="datetimeFigureOut">
               <a:rPr lang="en-US" smtClean="0"/>
-              <a:t>3/11/26</a:t>
+              <a:t>3/11/2026</a:t>
             </a:fld>
             <a:endParaRPr lang="en-US"/>
           </a:p>
@@ -1892,7 +1895,7 @@
           <a:p>
             <a:fld id="{5BCAD085-E8A6-8845-BD4E-CB4CCA059FC4}" type="datetimeFigureOut">
               <a:rPr lang="en-US" smtClean="0"/>
-              <a:t>3/11/26</a:t>
+              <a:t>3/11/2026</a:t>
             </a:fld>
             <a:endParaRPr lang="en-US"/>
           </a:p>
@@ -1987,7 +1990,7 @@
           <a:p>
             <a:fld id="{5BCAD085-E8A6-8845-BD4E-CB4CCA059FC4}" type="datetimeFigureOut">
               <a:rPr lang="en-US" smtClean="0"/>
-              <a:t>3/11/26</a:t>
+              <a:t>3/11/2026</a:t>
             </a:fld>
             <a:endParaRPr lang="en-US"/>
           </a:p>
@@ -2262,7 +2265,7 @@
           <a:p>
             <a:fld id="{5BCAD085-E8A6-8845-BD4E-CB4CCA059FC4}" type="datetimeFigureOut">
               <a:rPr lang="en-US" smtClean="0"/>
-              <a:t>3/11/26</a:t>
+              <a:t>3/11/2026</a:t>
             </a:fld>
             <a:endParaRPr lang="en-US"/>
           </a:p>
@@ -2514,7 +2517,7 @@
           <a:p>
             <a:fld id="{5BCAD085-E8A6-8845-BD4E-CB4CCA059FC4}" type="datetimeFigureOut">
               <a:rPr lang="en-US" smtClean="0"/>
-              <a:t>3/11/26</a:t>
+              <a:t>3/11/2026</a:t>
             </a:fld>
             <a:endParaRPr lang="en-US"/>
           </a:p>
@@ -2725,7 +2728,7 @@
           <a:p>
             <a:fld id="{5BCAD085-E8A6-8845-BD4E-CB4CCA059FC4}" type="datetimeFigureOut">
               <a:rPr lang="en-US" smtClean="0"/>
-              <a:t>3/11/26</a:t>
+              <a:t>3/11/2026</a:t>
             </a:fld>
             <a:endParaRPr lang="en-US"/>
           </a:p>
@@ -3203,828 +3206,6 @@
 <file path=ppt/slides/slide10.xml><?xml version="1.0" encoding="utf-8"?>
 <p:sld xmlns:a="http://schemas.openxmlformats.org/drawingml/2006/main" xmlns:r="http://schemas.openxmlformats.org/officeDocument/2006/relationships" xmlns:p="http://schemas.openxmlformats.org/presentationml/2006/main">
   <p:cSld>
-    <p:spTree>
-      <p:nvGrpSpPr>
-        <p:cNvPr id="1" name=""/>
-        <p:cNvGrpSpPr/>
-        <p:nvPr/>
-      </p:nvGrpSpPr>
-      <p:grpSpPr>
-        <a:xfrm>
-          <a:off x="0" y="0"/>
-          <a:ext cx="0" cy="0"/>
-          <a:chOff x="0" y="0"/>
-          <a:chExt cx="0" cy="0"/>
-        </a:xfrm>
-      </p:grpSpPr>
-      <p:sp>
-        <p:nvSpPr>
-          <p:cNvPr id="2" name="Title 1"/>
-          <p:cNvSpPr>
-            <a:spLocks noGrp="1"/>
-          </p:cNvSpPr>
-          <p:nvPr>
-            <p:ph type="title"/>
-          </p:nvPr>
-        </p:nvSpPr>
-        <p:spPr/>
-        <p:txBody>
-          <a:bodyPr>
-            <a:normAutofit fontScale="90000"/>
-          </a:bodyPr>
-          <a:lstStyle/>
-          <a:p>
-            <a:r>
-              <a:t>Slide 3: The Solution – High-Level Flow</a:t>
-            </a:r>
-          </a:p>
-        </p:txBody>
-      </p:sp>
-      <p:sp>
-        <p:nvSpPr>
-          <p:cNvPr id="3" name="Content Placeholder 2"/>
-          <p:cNvSpPr>
-            <a:spLocks noGrp="1"/>
-          </p:cNvSpPr>
-          <p:nvPr>
-            <p:ph idx="1"/>
-          </p:nvPr>
-        </p:nvSpPr>
-        <p:spPr/>
-        <p:txBody>
-          <a:bodyPr/>
-          <a:lstStyle/>
-          <a:p>
-            <a:r>
-              <a:rPr sz="1000">
-                <a:latin typeface="Courier New"/>
-              </a:rPr>
-              <a:t>flowchart TB</a:t>
-            </a:r>
-          </a:p>
-          <a:p>
-            <a:r>
-              <a:rPr sz="1000">
-                <a:latin typeface="Courier New"/>
-              </a:rPr>
-              <a:t>    EB["EventBridge&lt;br/&gt;monthly schedule"]</a:t>
-            </a:r>
-          </a:p>
-          <a:p>
-            <a:r>
-              <a:rPr sz="1000">
-                <a:latin typeface="Courier New"/>
-              </a:rPr>
-              <a:t>    SF["Step Functions"]</a:t>
-            </a:r>
-          </a:p>
-          <a:p>
-            <a:r>
-              <a:rPr sz="1000">
-                <a:latin typeface="Courier New"/>
-              </a:rPr>
-              <a:t>    L1["1. Fetch Inspector findings&lt;br/&gt;Lambda"]</a:t>
-            </a:r>
-          </a:p>
-          <a:p>
-            <a:r>
-              <a:rPr sz="1000">
-                <a:latin typeface="Courier New"/>
-              </a:rPr>
-              <a:t>    L2["2. Analyze with Bedrock&lt;br/&gt;Lambda"]</a:t>
-            </a:r>
-          </a:p>
-          <a:p>
-            <a:r>
-              <a:rPr sz="1000">
-                <a:latin typeface="Courier New"/>
-              </a:rPr>
-              <a:t>    CHOICE{"3. Critical CVEs?"}</a:t>
-            </a:r>
-          </a:p>
-          <a:p>
-            <a:r>
-              <a:rPr sz="1000">
-                <a:latin typeface="Courier New"/>
-              </a:rPr>
-              <a:t>    APPLY["4. Apply patches&lt;br/&gt;Parallel: RHEL + Windows via SSM&lt;br/&gt;Circuit-breaker check, pre-patch AMIs"]</a:t>
-            </a:r>
-          </a:p>
-          <a:p>
-            <a:r>
-              <a:rPr sz="1000">
-                <a:latin typeface="Courier New"/>
-              </a:rPr>
-              <a:t>    POST["5. Post-patch verification&lt;br/&gt;Parallel"]</a:t>
-            </a:r>
-          </a:p>
-          <a:p>
-            <a:r>
-              <a:rPr sz="1000">
-                <a:latin typeface="Courier New"/>
-              </a:rPr>
-              <a:t>    SKIP["NotifyNoPatch&lt;br/&gt;Skip"]</a:t>
-            </a:r>
-          </a:p>
-          <a:p>
-            <a:r>
-              <a:rPr sz="1000">
-                <a:latin typeface="Courier New"/>
-              </a:rPr>
-              <a:t>    CB["Circuit-breaker: EC2 stopped → block CVE"]</a:t>
-            </a:r>
-          </a:p>
-          <a:p>
-            <a:r>
-              <a:rPr sz="1000">
-                <a:latin typeface="Courier New"/>
-              </a:rPr>
-              <a:t>    AMI["AMI cleanup: daily"]</a:t>
-            </a:r>
-          </a:p>
-          <a:p>
-            <a:endParaRPr sz="1000">
-              <a:latin typeface="Courier New"/>
-            </a:endParaRPr>
-          </a:p>
-          <a:p>
-            <a:r>
-              <a:rPr sz="1000">
-                <a:latin typeface="Courier New"/>
-              </a:rPr>
-              <a:t>    EB --&gt;|Trigger| SF</a:t>
-            </a:r>
-          </a:p>
-          <a:p>
-            <a:r>
-              <a:rPr sz="1000">
-                <a:latin typeface="Courier New"/>
-              </a:rPr>
-              <a:t>    SF --&gt; L1</a:t>
-            </a:r>
-          </a:p>
-          <a:p>
-            <a:r>
-              <a:rPr sz="1000">
-                <a:latin typeface="Courier New"/>
-              </a:rPr>
-              <a:t>    L1 --&gt; L2</a:t>
-            </a:r>
-          </a:p>
-          <a:p>
-            <a:r>
-              <a:rPr sz="1000">
-                <a:latin typeface="Courier New"/>
-              </a:rPr>
-              <a:t>    L2 --&gt; CHOICE</a:t>
-            </a:r>
-          </a:p>
-          <a:p>
-            <a:r>
-              <a:rPr sz="1000">
-                <a:latin typeface="Courier New"/>
-              </a:rPr>
-              <a:t>    CHOICE --&gt;|Yes| APPLY</a:t>
-            </a:r>
-          </a:p>
-          <a:p>
-            <a:r>
-              <a:rPr sz="1000">
-                <a:latin typeface="Courier New"/>
-              </a:rPr>
-              <a:t>    CHOICE --&gt;|No| SKIP</a:t>
-            </a:r>
-          </a:p>
-          <a:p>
-            <a:r>
-              <a:rPr sz="1000">
-                <a:latin typeface="Courier New"/>
-              </a:rPr>
-              <a:t>    APPLY --&gt; POST</a:t>
-            </a:r>
-          </a:p>
-          <a:p>
-            <a:r>
-              <a:rPr sz="1000">
-                <a:latin typeface="Courier New"/>
-              </a:rPr>
-              <a:t>    APPLY -.-&gt;|on failure| CB</a:t>
-            </a:r>
-          </a:p>
-          <a:p>
-            <a:r>
-              <a:rPr sz="1000">
-                <a:latin typeface="Courier New"/>
-              </a:rPr>
-              <a:t>    CB -.-&gt; AMI</a:t>
-            </a:r>
-          </a:p>
-        </p:txBody>
-      </p:sp>
-    </p:spTree>
-  </p:cSld>
-  <p:clrMapOvr>
-    <a:masterClrMapping/>
-  </p:clrMapOvr>
-</p:sld>
-</file>
-
-<file path=ppt/slides/slide11.xml><?xml version="1.0" encoding="utf-8"?>
-<p:sld xmlns:a="http://schemas.openxmlformats.org/drawingml/2006/main" xmlns:r="http://schemas.openxmlformats.org/officeDocument/2006/relationships" xmlns:p="http://schemas.openxmlformats.org/presentationml/2006/main">
-  <p:cSld>
-    <p:spTree>
-      <p:nvGrpSpPr>
-        <p:cNvPr id="1" name=""/>
-        <p:cNvGrpSpPr/>
-        <p:nvPr/>
-      </p:nvGrpSpPr>
-      <p:grpSpPr>
-        <a:xfrm>
-          <a:off x="0" y="0"/>
-          <a:ext cx="0" cy="0"/>
-          <a:chOff x="0" y="0"/>
-          <a:chExt cx="0" cy="0"/>
-        </a:xfrm>
-      </p:grpSpPr>
-      <p:sp>
-        <p:nvSpPr>
-          <p:cNvPr id="2" name="Title 1"/>
-          <p:cNvSpPr>
-            <a:spLocks noGrp="1"/>
-          </p:cNvSpPr>
-          <p:nvPr>
-            <p:ph type="title"/>
-          </p:nvPr>
-        </p:nvSpPr>
-        <p:spPr/>
-        <p:txBody>
-          <a:bodyPr>
-            <a:normAutofit fontScale="90000"/>
-          </a:bodyPr>
-          <a:lstStyle/>
-          <a:p>
-            <a:r>
-              <a:t>Slide 4: Architecture – Key Components</a:t>
-            </a:r>
-          </a:p>
-        </p:txBody>
-      </p:sp>
-      <p:sp>
-        <p:nvSpPr>
-          <p:cNvPr id="3" name="Content Placeholder 2"/>
-          <p:cNvSpPr>
-            <a:spLocks noGrp="1"/>
-          </p:cNvSpPr>
-          <p:nvPr>
-            <p:ph idx="1"/>
-          </p:nvPr>
-        </p:nvSpPr>
-        <p:spPr/>
-        <p:txBody>
-          <a:bodyPr>
-            <a:normAutofit fontScale="92500" lnSpcReduction="10000"/>
-          </a:bodyPr>
-          <a:lstStyle/>
-          <a:p>
-            <a:r>
-              <a:rPr sz="1000">
-                <a:latin typeface="Courier New"/>
-              </a:rPr>
-              <a:t>flowchart TB</a:t>
-            </a:r>
-          </a:p>
-          <a:p>
-            <a:r>
-              <a:rPr sz="1000">
-                <a:latin typeface="Courier New"/>
-              </a:rPr>
-              <a:t>    subgraph Data["Data Layer"]</a:t>
-            </a:r>
-          </a:p>
-          <a:p>
-            <a:r>
-              <a:rPr sz="1000">
-                <a:latin typeface="Courier New"/>
-              </a:rPr>
-              <a:t>        INSP["Amazon Inspector v2&lt;br/&gt;Discovers EC2, scans CVEs, stores findings"]</a:t>
-            </a:r>
-          </a:p>
-          <a:p>
-            <a:r>
-              <a:rPr sz="1000">
-                <a:latin typeface="Courier New"/>
-              </a:rPr>
-              <a:t>    end</a:t>
-            </a:r>
-          </a:p>
-          <a:p>
-            <a:endParaRPr sz="1000">
-              <a:latin typeface="Courier New"/>
-            </a:endParaRPr>
-          </a:p>
-          <a:p>
-            <a:r>
-              <a:rPr sz="1000">
-                <a:latin typeface="Courier New"/>
-              </a:rPr>
-              <a:t>    subgraph Orchestration["Orchestration"]</a:t>
-            </a:r>
-          </a:p>
-          <a:p>
-            <a:r>
-              <a:rPr sz="1000">
-                <a:latin typeface="Courier New"/>
-              </a:rPr>
-              <a:t>        SF["Step Functions&lt;br/&gt;Orchestrates, Choice gates patching"]</a:t>
-            </a:r>
-          </a:p>
-          <a:p>
-            <a:r>
-              <a:rPr sz="1000">
-                <a:latin typeface="Courier New"/>
-              </a:rPr>
-              <a:t>    end</a:t>
-            </a:r>
-          </a:p>
-          <a:p>
-            <a:endParaRPr sz="1000">
-              <a:latin typeface="Courier New"/>
-            </a:endParaRPr>
-          </a:p>
-          <a:p>
-            <a:r>
-              <a:rPr sz="1000">
-                <a:latin typeface="Courier New"/>
-              </a:rPr>
-              <a:t>    subgraph Lambdas["Lambda Layer"]</a:t>
-            </a:r>
-          </a:p>
-          <a:p>
-            <a:r>
-              <a:rPr sz="1000">
-                <a:latin typeface="Courier New"/>
-              </a:rPr>
-              <a:t>        L_INSP["Inspector Findings Lambda&lt;br/&gt;ListFindings API, filter by VPC"]</a:t>
-            </a:r>
-          </a:p>
-          <a:p>
-            <a:r>
-              <a:rPr sz="1000">
-                <a:latin typeface="Courier New"/>
-              </a:rPr>
-              <a:t>        L_ANALYZER["CVE Analyzer Lambda&lt;br/&gt;Bedrock → has_critical_cves"]</a:t>
-            </a:r>
-          </a:p>
-          <a:p>
-            <a:r>
-              <a:rPr sz="1000">
-                <a:latin typeface="Courier New"/>
-              </a:rPr>
-              <a:t>        L_SSM["SSM Runner Lambda&lt;br/&gt;Invokes SSM Run Command"]</a:t>
-            </a:r>
-          </a:p>
-          <a:p>
-            <a:r>
-              <a:rPr sz="1000">
-                <a:latin typeface="Courier New"/>
-              </a:rPr>
-              <a:t>    end</a:t>
-            </a:r>
-          </a:p>
-          <a:p>
-            <a:endParaRPr sz="1000">
-              <a:latin typeface="Courier New"/>
-            </a:endParaRPr>
-          </a:p>
-          <a:p>
-            <a:r>
-              <a:rPr sz="1000">
-                <a:latin typeface="Courier New"/>
-              </a:rPr>
-              <a:t>    subgraph AI["AI"]</a:t>
-            </a:r>
-          </a:p>
-          <a:p>
-            <a:r>
-              <a:rPr sz="1000">
-                <a:latin typeface="Courier New"/>
-              </a:rPr>
-              <a:t>        BEDROCK["Bedrock&lt;br/&gt;Analyzes severity, patch/no-patch"]</a:t>
-            </a:r>
-          </a:p>
-          <a:p>
-            <a:r>
-              <a:rPr sz="1000">
-                <a:latin typeface="Courier New"/>
-              </a:rPr>
-              <a:t>    end</a:t>
-            </a:r>
-          </a:p>
-          <a:p>
-            <a:endParaRPr sz="1000">
-              <a:latin typeface="Courier New"/>
-            </a:endParaRPr>
-          </a:p>
-          <a:p>
-            <a:r>
-              <a:rPr sz="1000">
-                <a:latin typeface="Courier New"/>
-              </a:rPr>
-              <a:t>    subgraph Execution["Execution"]</a:t>
-            </a:r>
-          </a:p>
-          <a:p>
-            <a:r>
-              <a:rPr sz="1000">
-                <a:latin typeface="Courier New"/>
-              </a:rPr>
-              <a:t>        SSM["Systems Manager&lt;br/&gt;dnf update --security (RHEL)&lt;br/&gt;Patch Baseline (Windows)"]</a:t>
-            </a:r>
-          </a:p>
-          <a:p>
-            <a:r>
-              <a:rPr sz="1000">
-                <a:latin typeface="Courier New"/>
-              </a:rPr>
-              <a:t>    end</a:t>
-            </a:r>
-          </a:p>
-          <a:p>
-            <a:endParaRPr sz="1000">
-              <a:latin typeface="Courier New"/>
-            </a:endParaRPr>
-          </a:p>
-          <a:p>
-            <a:r>
-              <a:rPr sz="1000">
-                <a:latin typeface="Courier New"/>
-              </a:rPr>
-              <a:t>    SF --&gt; L_INSP</a:t>
-            </a:r>
-          </a:p>
-          <a:p>
-            <a:r>
-              <a:rPr sz="1000">
-                <a:latin typeface="Courier New"/>
-              </a:rPr>
-              <a:t>    L_INSP --&gt; INSP</a:t>
-            </a:r>
-          </a:p>
-          <a:p>
-            <a:r>
-              <a:rPr sz="1000">
-                <a:latin typeface="Courier New"/>
-              </a:rPr>
-              <a:t>    SF --&gt; L_ANALYZER</a:t>
-            </a:r>
-          </a:p>
-          <a:p>
-            <a:r>
-              <a:rPr sz="1000">
-                <a:latin typeface="Courier New"/>
-              </a:rPr>
-              <a:t>    L_ANALYZER --&gt; BEDROCK</a:t>
-            </a:r>
-          </a:p>
-          <a:p>
-            <a:r>
-              <a:rPr sz="1000">
-                <a:latin typeface="Courier New"/>
-              </a:rPr>
-              <a:t>    SF --&gt; L_SSM</a:t>
-            </a:r>
-          </a:p>
-          <a:p>
-            <a:r>
-              <a:rPr sz="1000">
-                <a:latin typeface="Courier New"/>
-              </a:rPr>
-              <a:t>    L_SSM --&gt; SSM</a:t>
-            </a:r>
-          </a:p>
-        </p:txBody>
-      </p:sp>
-    </p:spTree>
-  </p:cSld>
-  <p:clrMapOvr>
-    <a:masterClrMapping/>
-  </p:clrMapOvr>
-</p:sld>
-</file>
-
-<file path=ppt/slides/slide2.xml><?xml version="1.0" encoding="utf-8"?>
-<p:sld xmlns:a="http://schemas.openxmlformats.org/drawingml/2006/main" xmlns:r="http://schemas.openxmlformats.org/officeDocument/2006/relationships" xmlns:p="http://schemas.openxmlformats.org/presentationml/2006/main">
-  <p:cSld>
-    <p:spTree>
-      <p:nvGrpSpPr>
-        <p:cNvPr id="1" name=""/>
-        <p:cNvGrpSpPr/>
-        <p:nvPr/>
-      </p:nvGrpSpPr>
-      <p:grpSpPr>
-        <a:xfrm>
-          <a:off x="0" y="0"/>
-          <a:ext cx="0" cy="0"/>
-          <a:chOff x="0" y="0"/>
-          <a:chExt cx="0" cy="0"/>
-        </a:xfrm>
-      </p:grpSpPr>
-      <p:pic>
-        <p:nvPicPr>
-          <p:cNvPr id="5" name="Picture 4">
-            <a:extLst>
-              <a:ext uri="{FF2B5EF4-FFF2-40B4-BE49-F238E27FC236}">
-                <a16:creationId xmlns:a16="http://schemas.microsoft.com/office/drawing/2014/main" id="{55B8B708-1168-6A3E-4975-A51014E039F5}"/>
-              </a:ext>
-            </a:extLst>
-          </p:cNvPr>
-          <p:cNvPicPr>
-            <a:picLocks noChangeAspect="1"/>
-          </p:cNvPicPr>
-          <p:nvPr/>
-        </p:nvPicPr>
-        <p:blipFill>
-          <a:blip r:embed="rId2"/>
-          <a:stretch>
-            <a:fillRect/>
-          </a:stretch>
-        </p:blipFill>
-        <p:spPr>
-          <a:xfrm>
-            <a:off x="1378226" y="846242"/>
-            <a:ext cx="6969567" cy="5894388"/>
-          </a:xfrm>
-          <a:prstGeom prst="rect">
-            <a:avLst/>
-          </a:prstGeom>
-        </p:spPr>
-      </p:pic>
-      <p:sp>
-        <p:nvSpPr>
-          <p:cNvPr id="2" name="Title 1">
-            <a:extLst>
-              <a:ext uri="{FF2B5EF4-FFF2-40B4-BE49-F238E27FC236}">
-                <a16:creationId xmlns:a16="http://schemas.microsoft.com/office/drawing/2014/main" id="{CA85390D-17EE-4DE3-4FD4-0FAB6EA41AF5}"/>
-              </a:ext>
-            </a:extLst>
-          </p:cNvPr>
-          <p:cNvSpPr>
-            <a:spLocks noGrp="1"/>
-          </p:cNvSpPr>
-          <p:nvPr>
-            <p:ph type="title"/>
-          </p:nvPr>
-        </p:nvSpPr>
-        <p:spPr>
-          <a:xfrm>
-            <a:off x="2398643" y="117371"/>
-            <a:ext cx="4743449" cy="728870"/>
-          </a:xfrm>
-        </p:spPr>
-        <p:txBody>
-          <a:bodyPr>
-            <a:normAutofit fontScale="90000"/>
-          </a:bodyPr>
-          <a:lstStyle/>
-          <a:p>
-            <a:r>
-              <a:rPr lang="en-US" dirty="0">
-                <a:solidFill>
-                  <a:srgbClr val="0A13F4"/>
-                </a:solidFill>
-              </a:rPr>
-              <a:t>Current Architecture</a:t>
-            </a:r>
-            <a:endParaRPr dirty="0">
-              <a:solidFill>
-                <a:srgbClr val="0A13F4"/>
-              </a:solidFill>
-            </a:endParaRPr>
-          </a:p>
-        </p:txBody>
-      </p:sp>
-    </p:spTree>
-    <p:extLst>
-      <p:ext uri="{BB962C8B-B14F-4D97-AF65-F5344CB8AC3E}">
-        <p14:creationId xmlns:p14="http://schemas.microsoft.com/office/powerpoint/2010/main" val="1293430633"/>
-      </p:ext>
-    </p:extLst>
-  </p:cSld>
-  <p:clrMapOvr>
-    <a:masterClrMapping/>
-  </p:clrMapOvr>
-</p:sld>
-</file>
-
-<file path=ppt/slides/slide3.xml><?xml version="1.0" encoding="utf-8"?>
-<p:sld xmlns:a="http://schemas.openxmlformats.org/drawingml/2006/main" xmlns:r="http://schemas.openxmlformats.org/officeDocument/2006/relationships" xmlns:p="http://schemas.openxmlformats.org/presentationml/2006/main">
-  <p:cSld>
-    <p:spTree>
-      <p:nvGrpSpPr>
-        <p:cNvPr id="1" name=""/>
-        <p:cNvGrpSpPr/>
-        <p:nvPr/>
-      </p:nvGrpSpPr>
-      <p:grpSpPr>
-        <a:xfrm>
-          <a:off x="0" y="0"/>
-          <a:ext cx="0" cy="0"/>
-          <a:chOff x="0" y="0"/>
-          <a:chExt cx="0" cy="0"/>
-        </a:xfrm>
-      </p:grpSpPr>
-      <p:sp>
-        <p:nvSpPr>
-          <p:cNvPr id="11" name="TextBox 10">
-            <a:extLst>
-              <a:ext uri="{FF2B5EF4-FFF2-40B4-BE49-F238E27FC236}">
-                <a16:creationId xmlns:a16="http://schemas.microsoft.com/office/drawing/2014/main" id="{E39BB95E-2AB8-B646-0921-1B5F8BFB2B55}"/>
-              </a:ext>
-            </a:extLst>
-          </p:cNvPr>
-          <p:cNvSpPr txBox="1"/>
-          <p:nvPr/>
-        </p:nvSpPr>
-        <p:spPr>
-          <a:xfrm>
-            <a:off x="541614" y="0"/>
-            <a:ext cx="3432313" cy="707886"/>
-          </a:xfrm>
-          <a:prstGeom prst="rect">
-            <a:avLst/>
-          </a:prstGeom>
-          <a:noFill/>
-        </p:spPr>
-        <p:txBody>
-          <a:bodyPr wrap="square" rtlCol="0">
-            <a:spAutoFit/>
-          </a:bodyPr>
-          <a:lstStyle/>
-          <a:p>
-            <a:r>
-              <a:rPr lang="en-US" sz="4000" dirty="0">
-                <a:solidFill>
-                  <a:srgbClr val="0A13F4"/>
-                </a:solidFill>
-                <a:latin typeface="+mj-lt"/>
-                <a:ea typeface="+mj-ea"/>
-                <a:cs typeface="+mj-cs"/>
-              </a:rPr>
-              <a:t>Serverless</a:t>
-            </a:r>
-            <a:r>
-              <a:rPr lang="en-US" sz="1600" b="1" dirty="0">
-                <a:solidFill>
-                  <a:srgbClr val="0A13F4"/>
-                </a:solidFill>
-              </a:rPr>
-              <a:t> </a:t>
-            </a:r>
-            <a:r>
-              <a:rPr lang="en-US" sz="4000" dirty="0">
-                <a:solidFill>
-                  <a:srgbClr val="0A13F4"/>
-                </a:solidFill>
-                <a:latin typeface="+mj-lt"/>
-                <a:ea typeface="+mj-ea"/>
-                <a:cs typeface="+mj-cs"/>
-              </a:rPr>
-              <a:t>View</a:t>
-            </a:r>
-          </a:p>
-        </p:txBody>
-      </p:sp>
-      <p:pic>
-        <p:nvPicPr>
-          <p:cNvPr id="15" name="Picture 14">
-            <a:extLst>
-              <a:ext uri="{FF2B5EF4-FFF2-40B4-BE49-F238E27FC236}">
-                <a16:creationId xmlns:a16="http://schemas.microsoft.com/office/drawing/2014/main" id="{4E605E81-21BE-8EEC-1B3F-9EC46971D0AD}"/>
-              </a:ext>
-            </a:extLst>
-          </p:cNvPr>
-          <p:cNvPicPr>
-            <a:picLocks noChangeAspect="1"/>
-          </p:cNvPicPr>
-          <p:nvPr/>
-        </p:nvPicPr>
-        <p:blipFill>
-          <a:blip r:embed="rId2"/>
-          <a:stretch>
-            <a:fillRect/>
-          </a:stretch>
-        </p:blipFill>
-        <p:spPr>
-          <a:xfrm>
-            <a:off x="2716696" y="739569"/>
-            <a:ext cx="4022339" cy="5985632"/>
-          </a:xfrm>
-          <a:prstGeom prst="rect">
-            <a:avLst/>
-          </a:prstGeom>
-        </p:spPr>
-      </p:pic>
-    </p:spTree>
-    <p:extLst>
-      <p:ext uri="{BB962C8B-B14F-4D97-AF65-F5344CB8AC3E}">
-        <p14:creationId xmlns:p14="http://schemas.microsoft.com/office/powerpoint/2010/main" val="2357267153"/>
-      </p:ext>
-    </p:extLst>
-  </p:cSld>
-  <p:clrMapOvr>
-    <a:masterClrMapping/>
-  </p:clrMapOvr>
-</p:sld>
-</file>
-
-<file path=ppt/slides/slide4.xml><?xml version="1.0" encoding="utf-8"?>
-<p:sld xmlns:a="http://schemas.openxmlformats.org/drawingml/2006/main" xmlns:r="http://schemas.openxmlformats.org/officeDocument/2006/relationships" xmlns:p="http://schemas.openxmlformats.org/presentationml/2006/main">
-  <p:cSld>
-    <p:spTree>
-      <p:nvGrpSpPr>
-        <p:cNvPr id="1" name=""/>
-        <p:cNvGrpSpPr/>
-        <p:nvPr/>
-      </p:nvGrpSpPr>
-      <p:grpSpPr>
-        <a:xfrm>
-          <a:off x="0" y="0"/>
-          <a:ext cx="0" cy="0"/>
-          <a:chOff x="0" y="0"/>
-          <a:chExt cx="0" cy="0"/>
-        </a:xfrm>
-      </p:grpSpPr>
-      <p:sp>
-        <p:nvSpPr>
-          <p:cNvPr id="2" name="Title 1">
-            <a:extLst>
-              <a:ext uri="{FF2B5EF4-FFF2-40B4-BE49-F238E27FC236}">
-                <a16:creationId xmlns:a16="http://schemas.microsoft.com/office/drawing/2014/main" id="{B20568C6-3FB2-E532-45A4-8D8F03ACB113}"/>
-              </a:ext>
-            </a:extLst>
-          </p:cNvPr>
-          <p:cNvSpPr>
-            <a:spLocks noGrp="1"/>
-          </p:cNvSpPr>
-          <p:nvPr>
-            <p:ph type="title"/>
-          </p:nvPr>
-        </p:nvSpPr>
-        <p:spPr/>
-        <p:txBody>
-          <a:bodyPr/>
-          <a:lstStyle/>
-          <a:p>
-            <a:endParaRPr lang="en-US"/>
-          </a:p>
-        </p:txBody>
-      </p:sp>
-      <p:pic>
-        <p:nvPicPr>
-          <p:cNvPr id="6" name="Picture 5">
-            <a:extLst>
-              <a:ext uri="{FF2B5EF4-FFF2-40B4-BE49-F238E27FC236}">
-                <a16:creationId xmlns:a16="http://schemas.microsoft.com/office/drawing/2014/main" id="{C03DCF6F-877E-1365-9AFE-241DA934DBD2}"/>
-              </a:ext>
-            </a:extLst>
-          </p:cNvPr>
-          <p:cNvPicPr>
-            <a:picLocks noChangeAspect="1"/>
-          </p:cNvPicPr>
-          <p:nvPr/>
-        </p:nvPicPr>
-        <p:blipFill>
-          <a:blip r:embed="rId2"/>
-          <a:stretch>
-            <a:fillRect/>
-          </a:stretch>
-        </p:blipFill>
-        <p:spPr>
-          <a:xfrm>
-            <a:off x="698500" y="3429000"/>
-            <a:ext cx="3873500" cy="2654300"/>
-          </a:xfrm>
-          <a:prstGeom prst="rect">
-            <a:avLst/>
-          </a:prstGeom>
-        </p:spPr>
-      </p:pic>
-    </p:spTree>
-    <p:extLst>
-      <p:ext uri="{BB962C8B-B14F-4D97-AF65-F5344CB8AC3E}">
-        <p14:creationId xmlns:p14="http://schemas.microsoft.com/office/powerpoint/2010/main" val="24592578"/>
-      </p:ext>
-    </p:extLst>
-  </p:cSld>
-  <p:clrMapOvr>
-    <a:masterClrMapping/>
-  </p:clrMapOvr>
-</p:sld>
-</file>
-
-<file path=ppt/slides/slide5.xml><?xml version="1.0" encoding="utf-8"?>
-<p:sld xmlns:a="http://schemas.openxmlformats.org/drawingml/2006/main" xmlns:r="http://schemas.openxmlformats.org/officeDocument/2006/relationships" xmlns:p="http://schemas.openxmlformats.org/presentationml/2006/main">
-  <p:cSld>
     <p:bg>
       <p:bgPr>
         <a:solidFill>
@@ -4287,7 +3468,4433 @@
 </p:sld>
 </file>
 
+<file path=ppt/slides/slide11.xml><?xml version="1.0" encoding="utf-8"?>
+<p:sld xmlns:a="http://schemas.openxmlformats.org/drawingml/2006/main" xmlns:r="http://schemas.openxmlformats.org/officeDocument/2006/relationships" xmlns:p="http://schemas.openxmlformats.org/presentationml/2006/main">
+  <p:cSld>
+    <p:spTree>
+      <p:nvGrpSpPr>
+        <p:cNvPr id="1" name="">
+          <a:extLst>
+            <a:ext uri="{FF2B5EF4-FFF2-40B4-BE49-F238E27FC236}">
+              <a16:creationId xmlns:a16="http://schemas.microsoft.com/office/drawing/2014/main" id="{1B4F83B5-3DC2-EE84-339C-18A3C0DF92F1}"/>
+            </a:ext>
+          </a:extLst>
+        </p:cNvPr>
+        <p:cNvGrpSpPr/>
+        <p:nvPr/>
+      </p:nvGrpSpPr>
+      <p:grpSpPr>
+        <a:xfrm>
+          <a:off x="0" y="0"/>
+          <a:ext cx="0" cy="0"/>
+          <a:chOff x="0" y="0"/>
+          <a:chExt cx="0" cy="0"/>
+        </a:xfrm>
+      </p:grpSpPr>
+    </p:spTree>
+    <p:extLst>
+      <p:ext uri="{BB962C8B-B14F-4D97-AF65-F5344CB8AC3E}">
+        <p14:creationId xmlns:p14="http://schemas.microsoft.com/office/powerpoint/2010/main" val="3208037144"/>
+      </p:ext>
+    </p:extLst>
+  </p:cSld>
+  <p:clrMapOvr>
+    <a:masterClrMapping/>
+  </p:clrMapOvr>
+</p:sld>
+</file>
+
+<file path=ppt/slides/slide12.xml><?xml version="1.0" encoding="utf-8"?>
+<p:sld xmlns:a="http://schemas.openxmlformats.org/drawingml/2006/main" xmlns:r="http://schemas.openxmlformats.org/officeDocument/2006/relationships" xmlns:p="http://schemas.openxmlformats.org/presentationml/2006/main">
+  <p:cSld>
+    <p:spTree>
+      <p:nvGrpSpPr>
+        <p:cNvPr id="1" name=""/>
+        <p:cNvGrpSpPr/>
+        <p:nvPr/>
+      </p:nvGrpSpPr>
+      <p:grpSpPr>
+        <a:xfrm>
+          <a:off x="0" y="0"/>
+          <a:ext cx="0" cy="0"/>
+          <a:chOff x="0" y="0"/>
+          <a:chExt cx="0" cy="0"/>
+        </a:xfrm>
+      </p:grpSpPr>
+      <p:sp>
+        <p:nvSpPr>
+          <p:cNvPr id="11" name="TextBox 10">
+            <a:extLst>
+              <a:ext uri="{FF2B5EF4-FFF2-40B4-BE49-F238E27FC236}">
+                <a16:creationId xmlns:a16="http://schemas.microsoft.com/office/drawing/2014/main" id="{E39BB95E-2AB8-B646-0921-1B5F8BFB2B55}"/>
+              </a:ext>
+            </a:extLst>
+          </p:cNvPr>
+          <p:cNvSpPr txBox="1"/>
+          <p:nvPr/>
+        </p:nvSpPr>
+        <p:spPr>
+          <a:xfrm>
+            <a:off x="541614" y="0"/>
+            <a:ext cx="3432313" cy="707886"/>
+          </a:xfrm>
+          <a:prstGeom prst="rect">
+            <a:avLst/>
+          </a:prstGeom>
+          <a:noFill/>
+        </p:spPr>
+        <p:txBody>
+          <a:bodyPr wrap="square" rtlCol="0">
+            <a:spAutoFit/>
+          </a:bodyPr>
+          <a:lstStyle/>
+          <a:p>
+            <a:r>
+              <a:rPr lang="en-US" sz="4000" dirty="0">
+                <a:solidFill>
+                  <a:srgbClr val="0A13F4"/>
+                </a:solidFill>
+                <a:latin typeface="+mj-lt"/>
+                <a:ea typeface="+mj-ea"/>
+                <a:cs typeface="+mj-cs"/>
+              </a:rPr>
+              <a:t>Serverless</a:t>
+            </a:r>
+            <a:r>
+              <a:rPr lang="en-US" sz="1600" b="1" dirty="0">
+                <a:solidFill>
+                  <a:srgbClr val="0A13F4"/>
+                </a:solidFill>
+              </a:rPr>
+              <a:t> </a:t>
+            </a:r>
+            <a:r>
+              <a:rPr lang="en-US" sz="4000" dirty="0">
+                <a:solidFill>
+                  <a:srgbClr val="0A13F4"/>
+                </a:solidFill>
+                <a:latin typeface="+mj-lt"/>
+                <a:ea typeface="+mj-ea"/>
+                <a:cs typeface="+mj-cs"/>
+              </a:rPr>
+              <a:t>View</a:t>
+            </a:r>
+          </a:p>
+        </p:txBody>
+      </p:sp>
+      <p:pic>
+        <p:nvPicPr>
+          <p:cNvPr id="15" name="Picture 14">
+            <a:extLst>
+              <a:ext uri="{FF2B5EF4-FFF2-40B4-BE49-F238E27FC236}">
+                <a16:creationId xmlns:a16="http://schemas.microsoft.com/office/drawing/2014/main" id="{4E605E81-21BE-8EEC-1B3F-9EC46971D0AD}"/>
+              </a:ext>
+            </a:extLst>
+          </p:cNvPr>
+          <p:cNvPicPr>
+            <a:picLocks noChangeAspect="1"/>
+          </p:cNvPicPr>
+          <p:nvPr/>
+        </p:nvPicPr>
+        <p:blipFill>
+          <a:blip r:embed="rId2"/>
+          <a:stretch>
+            <a:fillRect/>
+          </a:stretch>
+        </p:blipFill>
+        <p:spPr>
+          <a:xfrm>
+            <a:off x="2716696" y="739569"/>
+            <a:ext cx="4022339" cy="5985632"/>
+          </a:xfrm>
+          <a:prstGeom prst="rect">
+            <a:avLst/>
+          </a:prstGeom>
+        </p:spPr>
+      </p:pic>
+    </p:spTree>
+    <p:extLst>
+      <p:ext uri="{BB962C8B-B14F-4D97-AF65-F5344CB8AC3E}">
+        <p14:creationId xmlns:p14="http://schemas.microsoft.com/office/powerpoint/2010/main" val="2357267153"/>
+      </p:ext>
+    </p:extLst>
+  </p:cSld>
+  <p:clrMapOvr>
+    <a:masterClrMapping/>
+  </p:clrMapOvr>
+</p:sld>
+</file>
+
+<file path=ppt/slides/slide13.xml><?xml version="1.0" encoding="utf-8"?>
+<p:sld xmlns:a="http://schemas.openxmlformats.org/drawingml/2006/main" xmlns:r="http://schemas.openxmlformats.org/officeDocument/2006/relationships" xmlns:p="http://schemas.openxmlformats.org/presentationml/2006/main">
+  <p:cSld>
+    <p:bg>
+      <p:bgPr>
+        <a:solidFill>
+          <a:schemeClr val="bg1"/>
+        </a:solidFill>
+        <a:effectLst/>
+      </p:bgPr>
+    </p:bg>
+    <p:spTree>
+      <p:nvGrpSpPr>
+        <p:cNvPr id="1" name=""/>
+        <p:cNvGrpSpPr/>
+        <p:nvPr/>
+      </p:nvGrpSpPr>
+      <p:grpSpPr>
+        <a:xfrm>
+          <a:off x="0" y="0"/>
+          <a:ext cx="0" cy="0"/>
+          <a:chOff x="0" y="0"/>
+          <a:chExt cx="0" cy="0"/>
+        </a:xfrm>
+      </p:grpSpPr>
+      <p:sp useBgFill="1">
+        <p:nvSpPr>
+          <p:cNvPr id="12" name="Rectangle 11">
+            <a:extLst>
+              <a:ext uri="{FF2B5EF4-FFF2-40B4-BE49-F238E27FC236}">
+                <a16:creationId xmlns:a16="http://schemas.microsoft.com/office/drawing/2014/main" id="{53F29798-D584-4792-9B62-3F5F5C36D619}"/>
+              </a:ext>
+              <a:ext uri="{C183D7F6-B498-43B3-948B-1728B52AA6E4}">
+                <adec:decorative xmlns:adec="http://schemas.microsoft.com/office/drawing/2017/decorative" val="1"/>
+              </a:ext>
+            </a:extLst>
+          </p:cNvPr>
+          <p:cNvSpPr>
+            <a:spLocks noGrp="1" noRot="1" noChangeAspect="1" noMove="1" noResize="1" noEditPoints="1" noAdjustHandles="1" noChangeArrowheads="1" noChangeShapeType="1" noTextEdit="1"/>
+          </p:cNvSpPr>
+          <p:nvPr>
+            <p:extLst>
+              <p:ext uri="{386F3935-93C4-4BCD-93E2-E3B085C9AB24}">
+                <p16:designElem xmlns:p16="http://schemas.microsoft.com/office/powerpoint/2015/main" val="1"/>
+              </p:ext>
+            </p:extLst>
+          </p:nvPr>
+        </p:nvSpPr>
+        <p:spPr>
+          <a:xfrm>
+            <a:off x="0" y="0"/>
+            <a:ext cx="9141714" cy="6858000"/>
+          </a:xfrm>
+          <a:prstGeom prst="rect">
+            <a:avLst/>
+          </a:prstGeom>
+          <a:ln>
+            <a:noFill/>
+          </a:ln>
+        </p:spPr>
+        <p:style>
+          <a:lnRef idx="2">
+            <a:schemeClr val="accent1">
+              <a:shade val="50000"/>
+            </a:schemeClr>
+          </a:lnRef>
+          <a:fillRef idx="1">
+            <a:schemeClr val="accent1"/>
+          </a:fillRef>
+          <a:effectRef idx="0">
+            <a:schemeClr val="accent1"/>
+          </a:effectRef>
+          <a:fontRef idx="minor">
+            <a:schemeClr val="lt1"/>
+          </a:fontRef>
+        </p:style>
+        <p:txBody>
+          <a:bodyPr rtlCol="0" anchor="ctr"/>
+          <a:lstStyle/>
+          <a:p>
+            <a:pPr algn="ctr"/>
+            <a:endParaRPr lang="en-US"/>
+          </a:p>
+        </p:txBody>
+      </p:sp>
+      <p:sp>
+        <p:nvSpPr>
+          <p:cNvPr id="9" name="Rectangle 2">
+            <a:extLst>
+              <a:ext uri="{FF2B5EF4-FFF2-40B4-BE49-F238E27FC236}">
+                <a16:creationId xmlns:a16="http://schemas.microsoft.com/office/drawing/2014/main" id="{56E8C295-C397-EACB-EC70-FA56F32AD854}"/>
+              </a:ext>
+            </a:extLst>
+          </p:cNvPr>
+          <p:cNvSpPr>
+            <a:spLocks noGrp="1" noChangeArrowheads="1"/>
+          </p:cNvSpPr>
+          <p:nvPr>
+            <p:ph type="title"/>
+          </p:nvPr>
+        </p:nvSpPr>
+        <p:spPr bwMode="auto">
+          <a:xfrm>
+            <a:off x="628650" y="184806"/>
+            <a:ext cx="7886700" cy="997450"/>
+          </a:xfrm>
+          <a:prstGeom prst="rect">
+            <a:avLst/>
+          </a:prstGeom>
+          <a:extLst>
+            <a:ext uri="{909E8E84-426E-40DD-AFC4-6F175D3DCCD1}">
+              <a14:hiddenFill xmlns:a14="http://schemas.microsoft.com/office/drawing/2010/main">
+                <a:solidFill>
+                  <a:schemeClr val="accent1"/>
+                </a:solidFill>
+              </a14:hiddenFill>
+            </a:ext>
+            <a:ext uri="{91240B29-F687-4F45-9708-019B960494DF}">
+              <a14:hiddenLine xmlns:a14="http://schemas.microsoft.com/office/drawing/2010/main" w="9525">
+                <a:solidFill>
+                  <a:schemeClr val="tx1"/>
+                </a:solidFill>
+                <a:miter lim="800000"/>
+                <a:headEnd/>
+                <a:tailEnd/>
+              </a14:hiddenLine>
+            </a:ext>
+            <a:ext uri="{AF507438-7753-43E0-B8FC-AC1667EBCBE1}">
+              <a14:hiddenEffects xmlns:a14="http://schemas.microsoft.com/office/drawing/2010/main">
+                <a:effectLst>
+                  <a:outerShdw dist="35921" dir="2700000" algn="ctr" rotWithShape="0">
+                    <a:schemeClr val="bg2"/>
+                  </a:outerShdw>
+                </a:effectLst>
+              </a14:hiddenEffects>
+            </a:ext>
+          </a:extLst>
+        </p:spPr>
+        <p:txBody>
+          <a:bodyPr vert="horz" lIns="91440" tIns="45720" rIns="91440" bIns="45720" numCol="1" rtlCol="0" anchor="ctr" anchorCtr="0" compatLnSpc="1">
+            <a:prstTxWarp prst="textNoShape">
+              <a:avLst/>
+            </a:prstTxWarp>
+            <a:normAutofit/>
+          </a:bodyPr>
+          <a:lstStyle/>
+          <a:p>
+            <a:pPr marL="0" marR="0" lvl="0" indent="0" algn="l" defTabSz="914400" fontAlgn="base">
+              <a:lnSpc>
+                <a:spcPct val="90000"/>
+              </a:lnSpc>
+              <a:spcAft>
+                <a:spcPct val="0"/>
+              </a:spcAft>
+              <a:buClrTx/>
+              <a:buSzTx/>
+              <a:tabLst/>
+            </a:pPr>
+            <a:r>
+              <a:rPr kumimoji="0" lang="en-US" altLang="en-US" sz="3100" b="1" i="0" u="none" strike="noStrike" kern="1200" cap="none" normalizeH="0" baseline="0" dirty="0">
+                <a:ln>
+                  <a:noFill/>
+                </a:ln>
+                <a:solidFill>
+                  <a:schemeClr val="tx1"/>
+                </a:solidFill>
+                <a:effectLst/>
+                <a:latin typeface="+mj-lt"/>
+                <a:ea typeface="+mj-ea"/>
+                <a:cs typeface="+mj-cs"/>
+              </a:rPr>
+              <a:t>Lambda Functions  </a:t>
+            </a:r>
+          </a:p>
+          <a:p>
+            <a:pPr marL="0" marR="0" lvl="0" indent="0" algn="l" defTabSz="914400" fontAlgn="base">
+              <a:lnSpc>
+                <a:spcPct val="90000"/>
+              </a:lnSpc>
+              <a:spcAft>
+                <a:spcPct val="0"/>
+              </a:spcAft>
+              <a:buClrTx/>
+              <a:buSzTx/>
+              <a:tabLst/>
+            </a:pPr>
+            <a:r>
+              <a:rPr kumimoji="0" lang="en-US" altLang="en-US" sz="2400" b="0" i="0" u="none" strike="noStrike" kern="1200" cap="none" normalizeH="0" baseline="0" dirty="0">
+                <a:ln>
+                  <a:noFill/>
+                </a:ln>
+                <a:solidFill>
+                  <a:schemeClr val="tx1"/>
+                </a:solidFill>
+                <a:effectLst/>
+                <a:latin typeface="+mj-lt"/>
+                <a:ea typeface="+mj-ea"/>
+                <a:cs typeface="+mj-cs"/>
+              </a:rPr>
+              <a:t>All Lambda functions used in the aiops-r8 patch workflow.</a:t>
+            </a:r>
+          </a:p>
+          <a:p>
+            <a:pPr marL="0" marR="0" lvl="0" indent="0" algn="l" defTabSz="914400" fontAlgn="base">
+              <a:lnSpc>
+                <a:spcPct val="90000"/>
+              </a:lnSpc>
+              <a:spcAft>
+                <a:spcPct val="0"/>
+              </a:spcAft>
+              <a:buClrTx/>
+              <a:buSzTx/>
+              <a:tabLst/>
+            </a:pPr>
+            <a:endParaRPr kumimoji="0" lang="en-US" altLang="en-US" sz="3100" b="0" i="0" u="none" strike="noStrike" kern="1200" cap="none" normalizeH="0" baseline="0" dirty="0">
+              <a:ln>
+                <a:noFill/>
+              </a:ln>
+              <a:solidFill>
+                <a:schemeClr val="tx1"/>
+              </a:solidFill>
+              <a:effectLst/>
+              <a:latin typeface="+mj-lt"/>
+              <a:ea typeface="+mj-ea"/>
+              <a:cs typeface="+mj-cs"/>
+            </a:endParaRPr>
+          </a:p>
+        </p:txBody>
+      </p:sp>
+      <p:graphicFrame>
+        <p:nvGraphicFramePr>
+          <p:cNvPr id="10" name="Table 9">
+            <a:extLst>
+              <a:ext uri="{FF2B5EF4-FFF2-40B4-BE49-F238E27FC236}">
+                <a16:creationId xmlns:a16="http://schemas.microsoft.com/office/drawing/2014/main" id="{E1B87FD6-61D8-1D01-00E6-02D10598CEB2}"/>
+              </a:ext>
+            </a:extLst>
+          </p:cNvPr>
+          <p:cNvGraphicFramePr>
+            <a:graphicFrameLocks noGrp="1"/>
+          </p:cNvGraphicFramePr>
+          <p:nvPr>
+            <p:extLst>
+              <p:ext uri="{D42A27DB-BD31-4B8C-83A1-F6EECF244321}">
+                <p14:modId xmlns:p14="http://schemas.microsoft.com/office/powerpoint/2010/main" val="4277937260"/>
+              </p:ext>
+            </p:extLst>
+          </p:nvPr>
+        </p:nvGraphicFramePr>
+        <p:xfrm>
+          <a:off x="628649" y="1477818"/>
+          <a:ext cx="8376805" cy="5195377"/>
+        </p:xfrm>
+        <a:graphic>
+          <a:graphicData uri="http://schemas.openxmlformats.org/drawingml/2006/table">
+            <a:tbl>
+              <a:tblPr firstRow="1" bandRow="1">
+                <a:noFill/>
+              </a:tblPr>
+              <a:tblGrid>
+                <a:gridCol w="867899">
+                  <a:extLst>
+                    <a:ext uri="{9D8B030D-6E8A-4147-A177-3AD203B41FA5}">
+                      <a16:colId xmlns:a16="http://schemas.microsoft.com/office/drawing/2014/main" val="3167625328"/>
+                    </a:ext>
+                  </a:extLst>
+                </a:gridCol>
+                <a:gridCol w="2336369">
+                  <a:extLst>
+                    <a:ext uri="{9D8B030D-6E8A-4147-A177-3AD203B41FA5}">
+                      <a16:colId xmlns:a16="http://schemas.microsoft.com/office/drawing/2014/main" val="3645220495"/>
+                    </a:ext>
+                  </a:extLst>
+                </a:gridCol>
+                <a:gridCol w="5172537">
+                  <a:extLst>
+                    <a:ext uri="{9D8B030D-6E8A-4147-A177-3AD203B41FA5}">
+                      <a16:colId xmlns:a16="http://schemas.microsoft.com/office/drawing/2014/main" val="3470556923"/>
+                    </a:ext>
+                  </a:extLst>
+                </a:gridCol>
+              </a:tblGrid>
+              <a:tr h="372529">
+                <a:tc>
+                  <a:txBody>
+                    <a:bodyPr/>
+                    <a:lstStyle/>
+                    <a:p>
+                      <a:pPr>
+                        <a:buNone/>
+                      </a:pPr>
+                      <a:r>
+                        <a:rPr lang="en-US" sz="1300" b="0" cap="none" spc="0">
+                          <a:solidFill>
+                            <a:schemeClr val="tx1"/>
+                          </a:solidFill>
+                        </a:rPr>
+                        <a:t>#</a:t>
+                      </a:r>
+                    </a:p>
+                  </a:txBody>
+                  <a:tcPr marL="37743" marR="37743" marT="12131" marB="75485" anchor="b">
+                    <a:lnL w="12700" cmpd="sng">
+                      <a:noFill/>
+                    </a:lnL>
+                    <a:lnR w="12700" cmpd="sng">
+                      <a:noFill/>
+                    </a:lnR>
+                    <a:lnT w="9525" cap="flat" cmpd="sng" algn="ctr">
+                      <a:noFill/>
+                      <a:prstDash val="solid"/>
+                    </a:lnT>
+                    <a:lnB w="38100" cmpd="sng">
+                      <a:noFill/>
+                    </a:lnB>
+                    <a:noFill/>
+                  </a:tcPr>
+                </a:tc>
+                <a:tc>
+                  <a:txBody>
+                    <a:bodyPr/>
+                    <a:lstStyle/>
+                    <a:p>
+                      <a:pPr>
+                        <a:buNone/>
+                      </a:pPr>
+                      <a:r>
+                        <a:rPr lang="en-US" sz="1300" b="0" cap="none" spc="0">
+                          <a:solidFill>
+                            <a:schemeClr val="tx1"/>
+                          </a:solidFill>
+                        </a:rPr>
+                        <a:t>Lambda Function</a:t>
+                      </a:r>
+                    </a:p>
+                  </a:txBody>
+                  <a:tcPr marL="37743" marR="37743" marT="12131" marB="75485" anchor="b">
+                    <a:lnL w="12700" cmpd="sng">
+                      <a:noFill/>
+                    </a:lnL>
+                    <a:lnR w="12700" cmpd="sng">
+                      <a:noFill/>
+                    </a:lnR>
+                    <a:lnT w="9525" cap="flat" cmpd="sng" algn="ctr">
+                      <a:noFill/>
+                      <a:prstDash val="solid"/>
+                    </a:lnT>
+                    <a:lnB w="38100" cmpd="sng">
+                      <a:noFill/>
+                    </a:lnB>
+                    <a:noFill/>
+                  </a:tcPr>
+                </a:tc>
+                <a:tc>
+                  <a:txBody>
+                    <a:bodyPr/>
+                    <a:lstStyle/>
+                    <a:p>
+                      <a:pPr>
+                        <a:buNone/>
+                      </a:pPr>
+                      <a:r>
+                        <a:rPr lang="en-US" sz="1300" b="0" cap="none" spc="0">
+                          <a:solidFill>
+                            <a:schemeClr val="tx1"/>
+                          </a:solidFill>
+                        </a:rPr>
+                        <a:t>One-liner</a:t>
+                      </a:r>
+                    </a:p>
+                  </a:txBody>
+                  <a:tcPr marL="37743" marR="37743" marT="12131" marB="75485" anchor="b">
+                    <a:lnL w="12700" cmpd="sng">
+                      <a:noFill/>
+                    </a:lnL>
+                    <a:lnR w="12700" cmpd="sng">
+                      <a:noFill/>
+                    </a:lnR>
+                    <a:lnT w="9525" cap="flat" cmpd="sng" algn="ctr">
+                      <a:noFill/>
+                      <a:prstDash val="solid"/>
+                    </a:lnT>
+                    <a:lnB w="38100" cmpd="sng">
+                      <a:noFill/>
+                    </a:lnB>
+                    <a:noFill/>
+                  </a:tcPr>
+                </a:tc>
+                <a:extLst>
+                  <a:ext uri="{0D108BD9-81ED-4DB2-BD59-A6C34878D82A}">
+                    <a16:rowId xmlns:a16="http://schemas.microsoft.com/office/drawing/2014/main" val="4190275261"/>
+                  </a:ext>
+                </a:extLst>
+              </a:tr>
+              <a:tr h="490027">
+                <a:tc>
+                  <a:txBody>
+                    <a:bodyPr/>
+                    <a:lstStyle/>
+                    <a:p>
+                      <a:pPr>
+                        <a:buNone/>
+                      </a:pPr>
+                      <a:r>
+                        <a:rPr lang="en-US" sz="1000" cap="none" spc="0">
+                          <a:solidFill>
+                            <a:schemeClr val="tx1"/>
+                          </a:solidFill>
+                        </a:rPr>
+                        <a:t>1</a:t>
+                      </a:r>
+                    </a:p>
+                  </a:txBody>
+                  <a:tcPr marL="37743" marR="37743" marT="12131" marB="75485" anchor="ctr">
+                    <a:lnL w="12700" cmpd="sng">
+                      <a:noFill/>
+                      <a:prstDash val="solid"/>
+                    </a:lnL>
+                    <a:lnR w="12700" cmpd="sng">
+                      <a:noFill/>
+                      <a:prstDash val="solid"/>
+                    </a:lnR>
+                    <a:lnT w="38100" cmpd="sng">
+                      <a:noFill/>
+                    </a:lnT>
+                    <a:lnB w="12700" cap="flat" cmpd="sng" algn="ctr">
+                      <a:solidFill>
+                        <a:schemeClr val="accent1"/>
+                      </a:solidFill>
+                      <a:prstDash val="solid"/>
+                    </a:lnB>
+                    <a:noFill/>
+                  </a:tcPr>
+                </a:tc>
+                <a:tc>
+                  <a:txBody>
+                    <a:bodyPr/>
+                    <a:lstStyle/>
+                    <a:p>
+                      <a:pPr>
+                        <a:buNone/>
+                      </a:pPr>
+                      <a:r>
+                        <a:rPr lang="en-US" sz="1000" b="1" cap="none" spc="0">
+                          <a:solidFill>
+                            <a:schemeClr val="tx1"/>
+                          </a:solidFill>
+                        </a:rPr>
+                        <a:t>instance-discovery</a:t>
+                      </a:r>
+                      <a:endParaRPr lang="en-US" sz="1000" cap="none" spc="0">
+                        <a:solidFill>
+                          <a:schemeClr val="tx1"/>
+                        </a:solidFill>
+                      </a:endParaRPr>
+                    </a:p>
+                  </a:txBody>
+                  <a:tcPr marL="37743" marR="37743" marT="12131" marB="75485" anchor="ctr">
+                    <a:lnL w="12700" cmpd="sng">
+                      <a:noFill/>
+                      <a:prstDash val="solid"/>
+                    </a:lnL>
+                    <a:lnR w="12700" cmpd="sng">
+                      <a:noFill/>
+                      <a:prstDash val="solid"/>
+                    </a:lnR>
+                    <a:lnT w="38100" cmpd="sng">
+                      <a:noFill/>
+                    </a:lnT>
+                    <a:lnB w="12700" cap="flat" cmpd="sng" algn="ctr">
+                      <a:solidFill>
+                        <a:schemeClr val="accent1"/>
+                      </a:solidFill>
+                      <a:prstDash val="solid"/>
+                    </a:lnB>
+                    <a:noFill/>
+                  </a:tcPr>
+                </a:tc>
+                <a:tc>
+                  <a:txBody>
+                    <a:bodyPr/>
+                    <a:lstStyle/>
+                    <a:p>
+                      <a:pPr>
+                        <a:buNone/>
+                      </a:pPr>
+                      <a:r>
+                        <a:rPr lang="en-US" sz="1000" cap="none" spc="0">
+                          <a:solidFill>
+                            <a:schemeClr val="tx1"/>
+                          </a:solidFill>
+                        </a:rPr>
+                        <a:t>Discovers EC2 instances by tags (e.g. </a:t>
+                      </a:r>
+                      <a:r>
+                        <a:rPr lang="en-US" sz="1000" cap="none" spc="0">
+                          <a:solidFill>
+                            <a:schemeClr val="tx1"/>
+                          </a:solidFill>
+                          <a:latin typeface="Courier New" panose="02070309020205020404" pitchFamily="49" charset="0"/>
+                        </a:rPr>
+                        <a:t>Role=patch-target</a:t>
+                      </a:r>
+                      <a:r>
+                        <a:rPr lang="en-US" sz="1000" cap="none" spc="0">
+                          <a:solidFill>
+                            <a:schemeClr val="tx1"/>
+                          </a:solidFill>
+                        </a:rPr>
+                        <a:t>) in the VPC for dynamic fleets.</a:t>
+                      </a:r>
+                    </a:p>
+                  </a:txBody>
+                  <a:tcPr marL="37743" marR="37743" marT="12131" marB="75485" anchor="ctr">
+                    <a:lnL w="12700" cmpd="sng">
+                      <a:noFill/>
+                      <a:prstDash val="solid"/>
+                    </a:lnL>
+                    <a:lnR w="12700" cmpd="sng">
+                      <a:noFill/>
+                      <a:prstDash val="solid"/>
+                    </a:lnR>
+                    <a:lnT w="38100" cmpd="sng">
+                      <a:noFill/>
+                    </a:lnT>
+                    <a:lnB w="12700" cap="flat" cmpd="sng" algn="ctr">
+                      <a:solidFill>
+                        <a:schemeClr val="accent1"/>
+                      </a:solidFill>
+                      <a:prstDash val="solid"/>
+                    </a:lnB>
+                    <a:noFill/>
+                  </a:tcPr>
+                </a:tc>
+                <a:extLst>
+                  <a:ext uri="{0D108BD9-81ED-4DB2-BD59-A6C34878D82A}">
+                    <a16:rowId xmlns:a16="http://schemas.microsoft.com/office/drawing/2014/main" val="2971319803"/>
+                  </a:ext>
+                </a:extLst>
+              </a:tr>
+              <a:tr h="313781">
+                <a:tc>
+                  <a:txBody>
+                    <a:bodyPr/>
+                    <a:lstStyle/>
+                    <a:p>
+                      <a:pPr>
+                        <a:buNone/>
+                      </a:pPr>
+                      <a:r>
+                        <a:rPr lang="en-US" sz="1000" cap="none" spc="0">
+                          <a:solidFill>
+                            <a:schemeClr val="tx1"/>
+                          </a:solidFill>
+                        </a:rPr>
+                        <a:t>2</a:t>
+                      </a:r>
+                    </a:p>
+                  </a:txBody>
+                  <a:tcPr marL="37743" marR="37743" marT="12131" marB="75485" anchor="ctr">
+                    <a:lnL w="12700" cmpd="sng">
+                      <a:noFill/>
+                      <a:prstDash val="solid"/>
+                    </a:lnL>
+                    <a:lnR w="12700" cmpd="sng">
+                      <a:noFill/>
+                      <a:prstDash val="solid"/>
+                    </a:lnR>
+                    <a:lnT w="12700" cap="flat" cmpd="sng" algn="ctr">
+                      <a:solidFill>
+                        <a:schemeClr val="accent1"/>
+                      </a:solidFill>
+                      <a:prstDash val="solid"/>
+                    </a:lnT>
+                    <a:lnB w="12700" cmpd="sng">
+                      <a:noFill/>
+                      <a:prstDash val="solid"/>
+                    </a:lnB>
+                    <a:solidFill>
+                      <a:schemeClr val="bg1">
+                        <a:lumMod val="95000"/>
+                      </a:schemeClr>
+                    </a:solidFill>
+                  </a:tcPr>
+                </a:tc>
+                <a:tc>
+                  <a:txBody>
+                    <a:bodyPr/>
+                    <a:lstStyle/>
+                    <a:p>
+                      <a:pPr>
+                        <a:buNone/>
+                      </a:pPr>
+                      <a:r>
+                        <a:rPr lang="en-US" sz="1000" b="1" cap="none" spc="0">
+                          <a:solidFill>
+                            <a:schemeClr val="tx1"/>
+                          </a:solidFill>
+                        </a:rPr>
+                        <a:t>inspector-findings</a:t>
+                      </a:r>
+                      <a:endParaRPr lang="en-US" sz="1000" cap="none" spc="0">
+                        <a:solidFill>
+                          <a:schemeClr val="tx1"/>
+                        </a:solidFill>
+                      </a:endParaRPr>
+                    </a:p>
+                  </a:txBody>
+                  <a:tcPr marL="37743" marR="37743" marT="12131" marB="75485" anchor="ctr">
+                    <a:lnL w="12700" cmpd="sng">
+                      <a:noFill/>
+                      <a:prstDash val="solid"/>
+                    </a:lnL>
+                    <a:lnR w="12700" cmpd="sng">
+                      <a:noFill/>
+                      <a:prstDash val="solid"/>
+                    </a:lnR>
+                    <a:lnT w="12700" cap="flat" cmpd="sng" algn="ctr">
+                      <a:solidFill>
+                        <a:schemeClr val="accent1"/>
+                      </a:solidFill>
+                      <a:prstDash val="solid"/>
+                    </a:lnT>
+                    <a:lnB w="12700" cmpd="sng">
+                      <a:noFill/>
+                      <a:prstDash val="solid"/>
+                    </a:lnB>
+                    <a:solidFill>
+                      <a:schemeClr val="bg1">
+                        <a:lumMod val="95000"/>
+                      </a:schemeClr>
+                    </a:solidFill>
+                  </a:tcPr>
+                </a:tc>
+                <a:tc>
+                  <a:txBody>
+                    <a:bodyPr/>
+                    <a:lstStyle/>
+                    <a:p>
+                      <a:pPr>
+                        <a:buNone/>
+                      </a:pPr>
+                      <a:r>
+                        <a:rPr lang="en-US" sz="1000" cap="none" spc="0">
+                          <a:solidFill>
+                            <a:schemeClr val="tx1"/>
+                          </a:solidFill>
+                        </a:rPr>
+                        <a:t>Fetches Amazon Inspector v2 CVE findings for EC2 instances.</a:t>
+                      </a:r>
+                    </a:p>
+                  </a:txBody>
+                  <a:tcPr marL="37743" marR="37743" marT="12131" marB="75485" anchor="ctr">
+                    <a:lnL w="12700" cmpd="sng">
+                      <a:noFill/>
+                      <a:prstDash val="solid"/>
+                    </a:lnL>
+                    <a:lnR w="12700" cmpd="sng">
+                      <a:noFill/>
+                      <a:prstDash val="solid"/>
+                    </a:lnR>
+                    <a:lnT w="12700" cap="flat" cmpd="sng" algn="ctr">
+                      <a:solidFill>
+                        <a:schemeClr val="accent1"/>
+                      </a:solidFill>
+                      <a:prstDash val="solid"/>
+                    </a:lnT>
+                    <a:lnB w="12700" cmpd="sng">
+                      <a:noFill/>
+                      <a:prstDash val="solid"/>
+                    </a:lnB>
+                    <a:solidFill>
+                      <a:schemeClr val="bg1">
+                        <a:lumMod val="95000"/>
+                      </a:schemeClr>
+                    </a:solidFill>
+                  </a:tcPr>
+                </a:tc>
+                <a:extLst>
+                  <a:ext uri="{0D108BD9-81ED-4DB2-BD59-A6C34878D82A}">
+                    <a16:rowId xmlns:a16="http://schemas.microsoft.com/office/drawing/2014/main" val="3840385536"/>
+                  </a:ext>
+                </a:extLst>
+              </a:tr>
+              <a:tr h="313781">
+                <a:tc>
+                  <a:txBody>
+                    <a:bodyPr/>
+                    <a:lstStyle/>
+                    <a:p>
+                      <a:pPr>
+                        <a:buNone/>
+                      </a:pPr>
+                      <a:r>
+                        <a:rPr lang="en-US" sz="1000" cap="none" spc="0">
+                          <a:solidFill>
+                            <a:schemeClr val="tx1"/>
+                          </a:solidFill>
+                        </a:rPr>
+                        <a:t>3</a:t>
+                      </a:r>
+                    </a:p>
+                  </a:txBody>
+                  <a:tcPr marL="37743" marR="37743" marT="12131" marB="75485" anchor="ctr">
+                    <a:lnL w="12700" cmpd="sng">
+                      <a:noFill/>
+                      <a:prstDash val="solid"/>
+                    </a:lnL>
+                    <a:lnR w="12700" cmpd="sng">
+                      <a:noFill/>
+                      <a:prstDash val="solid"/>
+                    </a:lnR>
+                    <a:lnT w="12700" cmpd="sng">
+                      <a:noFill/>
+                      <a:prstDash val="solid"/>
+                    </a:lnT>
+                    <a:lnB w="12700" cap="flat" cmpd="sng" algn="ctr">
+                      <a:solidFill>
+                        <a:schemeClr val="accent1"/>
+                      </a:solidFill>
+                      <a:prstDash val="solid"/>
+                    </a:lnB>
+                    <a:noFill/>
+                  </a:tcPr>
+                </a:tc>
+                <a:tc>
+                  <a:txBody>
+                    <a:bodyPr/>
+                    <a:lstStyle/>
+                    <a:p>
+                      <a:pPr>
+                        <a:buNone/>
+                      </a:pPr>
+                      <a:r>
+                        <a:rPr lang="en-US" sz="1000" b="1" cap="none" spc="0">
+                          <a:solidFill>
+                            <a:schemeClr val="tx1"/>
+                          </a:solidFill>
+                        </a:rPr>
+                        <a:t>cve-analyzer</a:t>
+                      </a:r>
+                      <a:endParaRPr lang="en-US" sz="1000" cap="none" spc="0">
+                        <a:solidFill>
+                          <a:schemeClr val="tx1"/>
+                        </a:solidFill>
+                      </a:endParaRPr>
+                    </a:p>
+                  </a:txBody>
+                  <a:tcPr marL="37743" marR="37743" marT="12131" marB="75485" anchor="ctr">
+                    <a:lnL w="12700" cmpd="sng">
+                      <a:noFill/>
+                      <a:prstDash val="solid"/>
+                    </a:lnL>
+                    <a:lnR w="12700" cmpd="sng">
+                      <a:noFill/>
+                      <a:prstDash val="solid"/>
+                    </a:lnR>
+                    <a:lnT w="12700" cmpd="sng">
+                      <a:noFill/>
+                      <a:prstDash val="solid"/>
+                    </a:lnT>
+                    <a:lnB w="12700" cap="flat" cmpd="sng" algn="ctr">
+                      <a:solidFill>
+                        <a:schemeClr val="accent1"/>
+                      </a:solidFill>
+                      <a:prstDash val="solid"/>
+                    </a:lnB>
+                    <a:noFill/>
+                  </a:tcPr>
+                </a:tc>
+                <a:tc>
+                  <a:txBody>
+                    <a:bodyPr/>
+                    <a:lstStyle/>
+                    <a:p>
+                      <a:pPr>
+                        <a:buNone/>
+                      </a:pPr>
+                      <a:r>
+                        <a:rPr lang="en-US" sz="1000" cap="none" spc="0">
+                          <a:solidFill>
+                            <a:schemeClr val="tx1"/>
+                          </a:solidFill>
+                        </a:rPr>
+                        <a:t>Uses Bedrock to analyze CVEs and decide if critical patches are needed.</a:t>
+                      </a:r>
+                    </a:p>
+                  </a:txBody>
+                  <a:tcPr marL="37743" marR="37743" marT="12131" marB="75485" anchor="ctr">
+                    <a:lnL w="12700" cmpd="sng">
+                      <a:noFill/>
+                      <a:prstDash val="solid"/>
+                    </a:lnL>
+                    <a:lnR w="12700" cmpd="sng">
+                      <a:noFill/>
+                      <a:prstDash val="solid"/>
+                    </a:lnR>
+                    <a:lnT w="12700" cmpd="sng">
+                      <a:noFill/>
+                      <a:prstDash val="solid"/>
+                    </a:lnT>
+                    <a:lnB w="12700" cap="flat" cmpd="sng" algn="ctr">
+                      <a:solidFill>
+                        <a:schemeClr val="accent1"/>
+                      </a:solidFill>
+                      <a:prstDash val="solid"/>
+                    </a:lnB>
+                    <a:noFill/>
+                  </a:tcPr>
+                </a:tc>
+                <a:extLst>
+                  <a:ext uri="{0D108BD9-81ED-4DB2-BD59-A6C34878D82A}">
+                    <a16:rowId xmlns:a16="http://schemas.microsoft.com/office/drawing/2014/main" val="2486586354"/>
+                  </a:ext>
+                </a:extLst>
+              </a:tr>
+              <a:tr h="490027">
+                <a:tc>
+                  <a:txBody>
+                    <a:bodyPr/>
+                    <a:lstStyle/>
+                    <a:p>
+                      <a:pPr>
+                        <a:buNone/>
+                      </a:pPr>
+                      <a:r>
+                        <a:rPr lang="en-US" sz="1000" cap="none" spc="0">
+                          <a:solidFill>
+                            <a:schemeClr val="tx1"/>
+                          </a:solidFill>
+                        </a:rPr>
+                        <a:t>4</a:t>
+                      </a:r>
+                    </a:p>
+                  </a:txBody>
+                  <a:tcPr marL="37743" marR="37743" marT="12131" marB="75485" anchor="ctr">
+                    <a:lnL w="12700" cmpd="sng">
+                      <a:noFill/>
+                      <a:prstDash val="solid"/>
+                    </a:lnL>
+                    <a:lnR w="12700" cmpd="sng">
+                      <a:noFill/>
+                      <a:prstDash val="solid"/>
+                    </a:lnR>
+                    <a:lnT w="12700" cap="flat" cmpd="sng" algn="ctr">
+                      <a:solidFill>
+                        <a:schemeClr val="accent1"/>
+                      </a:solidFill>
+                      <a:prstDash val="solid"/>
+                    </a:lnT>
+                    <a:lnB w="12700" cmpd="sng">
+                      <a:noFill/>
+                      <a:prstDash val="solid"/>
+                    </a:lnB>
+                    <a:solidFill>
+                      <a:schemeClr val="bg1">
+                        <a:lumMod val="95000"/>
+                      </a:schemeClr>
+                    </a:solidFill>
+                  </a:tcPr>
+                </a:tc>
+                <a:tc>
+                  <a:txBody>
+                    <a:bodyPr/>
+                    <a:lstStyle/>
+                    <a:p>
+                      <a:pPr>
+                        <a:buNone/>
+                      </a:pPr>
+                      <a:r>
+                        <a:rPr lang="en-US" sz="1000" b="1" cap="none" spc="0">
+                          <a:solidFill>
+                            <a:schemeClr val="tx1"/>
+                          </a:solidFill>
+                        </a:rPr>
+                        <a:t>ssm-runner</a:t>
+                      </a:r>
+                      <a:endParaRPr lang="en-US" sz="1000" cap="none" spc="0">
+                        <a:solidFill>
+                          <a:schemeClr val="tx1"/>
+                        </a:solidFill>
+                      </a:endParaRPr>
+                    </a:p>
+                  </a:txBody>
+                  <a:tcPr marL="37743" marR="37743" marT="12131" marB="75485" anchor="ctr">
+                    <a:lnL w="12700" cmpd="sng">
+                      <a:noFill/>
+                      <a:prstDash val="solid"/>
+                    </a:lnL>
+                    <a:lnR w="12700" cmpd="sng">
+                      <a:noFill/>
+                      <a:prstDash val="solid"/>
+                    </a:lnR>
+                    <a:lnT w="12700" cap="flat" cmpd="sng" algn="ctr">
+                      <a:solidFill>
+                        <a:schemeClr val="accent1"/>
+                      </a:solidFill>
+                      <a:prstDash val="solid"/>
+                    </a:lnT>
+                    <a:lnB w="12700" cmpd="sng">
+                      <a:noFill/>
+                      <a:prstDash val="solid"/>
+                    </a:lnB>
+                    <a:solidFill>
+                      <a:schemeClr val="bg1">
+                        <a:lumMod val="95000"/>
+                      </a:schemeClr>
+                    </a:solidFill>
+                  </a:tcPr>
+                </a:tc>
+                <a:tc>
+                  <a:txBody>
+                    <a:bodyPr/>
+                    <a:lstStyle/>
+                    <a:p>
+                      <a:pPr>
+                        <a:buNone/>
+                      </a:pPr>
+                      <a:r>
+                        <a:rPr lang="en-US" sz="1000" cap="none" spc="0">
+                          <a:solidFill>
+                            <a:schemeClr val="tx1"/>
+                          </a:solidFill>
+                        </a:rPr>
+                        <a:t>Runs SSM commands for patching, checks blocked CVEs, creates pre-patch AMIs, and records executions.</a:t>
+                      </a:r>
+                    </a:p>
+                  </a:txBody>
+                  <a:tcPr marL="37743" marR="37743" marT="12131" marB="75485" anchor="ctr">
+                    <a:lnL w="12700" cmpd="sng">
+                      <a:noFill/>
+                      <a:prstDash val="solid"/>
+                    </a:lnL>
+                    <a:lnR w="12700" cmpd="sng">
+                      <a:noFill/>
+                      <a:prstDash val="solid"/>
+                    </a:lnR>
+                    <a:lnT w="12700" cap="flat" cmpd="sng" algn="ctr">
+                      <a:solidFill>
+                        <a:schemeClr val="accent1"/>
+                      </a:solidFill>
+                      <a:prstDash val="solid"/>
+                    </a:lnT>
+                    <a:lnB w="12700" cmpd="sng">
+                      <a:noFill/>
+                      <a:prstDash val="solid"/>
+                    </a:lnB>
+                    <a:solidFill>
+                      <a:schemeClr val="bg1">
+                        <a:lumMod val="95000"/>
+                      </a:schemeClr>
+                    </a:solidFill>
+                  </a:tcPr>
+                </a:tc>
+                <a:extLst>
+                  <a:ext uri="{0D108BD9-81ED-4DB2-BD59-A6C34878D82A}">
+                    <a16:rowId xmlns:a16="http://schemas.microsoft.com/office/drawing/2014/main" val="2350803563"/>
+                  </a:ext>
+                </a:extLst>
+              </a:tr>
+              <a:tr h="490027">
+                <a:tc>
+                  <a:txBody>
+                    <a:bodyPr/>
+                    <a:lstStyle/>
+                    <a:p>
+                      <a:pPr>
+                        <a:buNone/>
+                      </a:pPr>
+                      <a:r>
+                        <a:rPr lang="en-US" sz="1000" cap="none" spc="0">
+                          <a:solidFill>
+                            <a:schemeClr val="tx1"/>
+                          </a:solidFill>
+                        </a:rPr>
+                        <a:t>5</a:t>
+                      </a:r>
+                    </a:p>
+                  </a:txBody>
+                  <a:tcPr marL="37743" marR="37743" marT="12131" marB="75485" anchor="ctr">
+                    <a:lnL w="12700" cmpd="sng">
+                      <a:noFill/>
+                      <a:prstDash val="solid"/>
+                    </a:lnL>
+                    <a:lnR w="12700" cmpd="sng">
+                      <a:noFill/>
+                      <a:prstDash val="solid"/>
+                    </a:lnR>
+                    <a:lnT w="12700" cmpd="sng">
+                      <a:noFill/>
+                      <a:prstDash val="solid"/>
+                    </a:lnT>
+                    <a:lnB w="12700" cap="flat" cmpd="sng" algn="ctr">
+                      <a:solidFill>
+                        <a:schemeClr val="accent1"/>
+                      </a:solidFill>
+                      <a:prstDash val="solid"/>
+                    </a:lnB>
+                    <a:noFill/>
+                  </a:tcPr>
+                </a:tc>
+                <a:tc>
+                  <a:txBody>
+                    <a:bodyPr/>
+                    <a:lstStyle/>
+                    <a:p>
+                      <a:pPr>
+                        <a:buNone/>
+                      </a:pPr>
+                      <a:r>
+                        <a:rPr lang="en-US" sz="1000" b="1" cap="none" spc="0">
+                          <a:solidFill>
+                            <a:schemeClr val="tx1"/>
+                          </a:solidFill>
+                        </a:rPr>
+                        <a:t>ssm-agent-health</a:t>
+                      </a:r>
+                      <a:endParaRPr lang="en-US" sz="1000" cap="none" spc="0">
+                        <a:solidFill>
+                          <a:schemeClr val="tx1"/>
+                        </a:solidFill>
+                      </a:endParaRPr>
+                    </a:p>
+                  </a:txBody>
+                  <a:tcPr marL="37743" marR="37743" marT="12131" marB="75485" anchor="ctr">
+                    <a:lnL w="12700" cmpd="sng">
+                      <a:noFill/>
+                      <a:prstDash val="solid"/>
+                    </a:lnL>
+                    <a:lnR w="12700" cmpd="sng">
+                      <a:noFill/>
+                      <a:prstDash val="solid"/>
+                    </a:lnR>
+                    <a:lnT w="12700" cmpd="sng">
+                      <a:noFill/>
+                      <a:prstDash val="solid"/>
+                    </a:lnT>
+                    <a:lnB w="12700" cap="flat" cmpd="sng" algn="ctr">
+                      <a:solidFill>
+                        <a:schemeClr val="accent1"/>
+                      </a:solidFill>
+                      <a:prstDash val="solid"/>
+                    </a:lnB>
+                    <a:noFill/>
+                  </a:tcPr>
+                </a:tc>
+                <a:tc>
+                  <a:txBody>
+                    <a:bodyPr/>
+                    <a:lstStyle/>
+                    <a:p>
+                      <a:pPr>
+                        <a:buNone/>
+                      </a:pPr>
+                      <a:r>
+                        <a:rPr lang="en-US" sz="1000" cap="none" spc="0">
+                          <a:solidFill>
+                            <a:schemeClr val="tx1"/>
+                          </a:solidFill>
+                        </a:rPr>
+                        <a:t>Verifies instances are SSM-managed and online before patching; filters out unhealthy instances.</a:t>
+                      </a:r>
+                    </a:p>
+                  </a:txBody>
+                  <a:tcPr marL="37743" marR="37743" marT="12131" marB="75485" anchor="ctr">
+                    <a:lnL w="12700" cmpd="sng">
+                      <a:noFill/>
+                      <a:prstDash val="solid"/>
+                    </a:lnL>
+                    <a:lnR w="12700" cmpd="sng">
+                      <a:noFill/>
+                      <a:prstDash val="solid"/>
+                    </a:lnR>
+                    <a:lnT w="12700" cmpd="sng">
+                      <a:noFill/>
+                      <a:prstDash val="solid"/>
+                    </a:lnT>
+                    <a:lnB w="12700" cap="flat" cmpd="sng" algn="ctr">
+                      <a:solidFill>
+                        <a:schemeClr val="accent1"/>
+                      </a:solidFill>
+                      <a:prstDash val="solid"/>
+                    </a:lnB>
+                    <a:noFill/>
+                  </a:tcPr>
+                </a:tc>
+                <a:extLst>
+                  <a:ext uri="{0D108BD9-81ED-4DB2-BD59-A6C34878D82A}">
+                    <a16:rowId xmlns:a16="http://schemas.microsoft.com/office/drawing/2014/main" val="1286650673"/>
+                  </a:ext>
+                </a:extLst>
+              </a:tr>
+              <a:tr h="313781">
+                <a:tc>
+                  <a:txBody>
+                    <a:bodyPr/>
+                    <a:lstStyle/>
+                    <a:p>
+                      <a:pPr>
+                        <a:buNone/>
+                      </a:pPr>
+                      <a:r>
+                        <a:rPr lang="en-US" sz="1000" cap="none" spc="0">
+                          <a:solidFill>
+                            <a:schemeClr val="tx1"/>
+                          </a:solidFill>
+                        </a:rPr>
+                        <a:t>6</a:t>
+                      </a:r>
+                    </a:p>
+                  </a:txBody>
+                  <a:tcPr marL="37743" marR="37743" marT="12131" marB="75485" anchor="ctr">
+                    <a:lnL w="12700" cmpd="sng">
+                      <a:noFill/>
+                      <a:prstDash val="solid"/>
+                    </a:lnL>
+                    <a:lnR w="12700" cmpd="sng">
+                      <a:noFill/>
+                      <a:prstDash val="solid"/>
+                    </a:lnR>
+                    <a:lnT w="12700" cap="flat" cmpd="sng" algn="ctr">
+                      <a:solidFill>
+                        <a:schemeClr val="accent1"/>
+                      </a:solidFill>
+                      <a:prstDash val="solid"/>
+                    </a:lnT>
+                    <a:lnB w="12700" cmpd="sng">
+                      <a:noFill/>
+                      <a:prstDash val="solid"/>
+                    </a:lnB>
+                    <a:solidFill>
+                      <a:schemeClr val="bg1">
+                        <a:lumMod val="95000"/>
+                      </a:schemeClr>
+                    </a:solidFill>
+                  </a:tcPr>
+                </a:tc>
+                <a:tc>
+                  <a:txBody>
+                    <a:bodyPr/>
+                    <a:lstStyle/>
+                    <a:p>
+                      <a:pPr>
+                        <a:buNone/>
+                      </a:pPr>
+                      <a:r>
+                        <a:rPr lang="en-US" sz="1000" b="1" cap="none" spc="0">
+                          <a:solidFill>
+                            <a:schemeClr val="tx1"/>
+                          </a:solidFill>
+                        </a:rPr>
+                        <a:t>batch-prepare</a:t>
+                      </a:r>
+                      <a:endParaRPr lang="en-US" sz="1000" cap="none" spc="0">
+                        <a:solidFill>
+                          <a:schemeClr val="tx1"/>
+                        </a:solidFill>
+                      </a:endParaRPr>
+                    </a:p>
+                  </a:txBody>
+                  <a:tcPr marL="37743" marR="37743" marT="12131" marB="75485" anchor="ctr">
+                    <a:lnL w="12700" cmpd="sng">
+                      <a:noFill/>
+                      <a:prstDash val="solid"/>
+                    </a:lnL>
+                    <a:lnR w="12700" cmpd="sng">
+                      <a:noFill/>
+                      <a:prstDash val="solid"/>
+                    </a:lnR>
+                    <a:lnT w="12700" cap="flat" cmpd="sng" algn="ctr">
+                      <a:solidFill>
+                        <a:schemeClr val="accent1"/>
+                      </a:solidFill>
+                      <a:prstDash val="solid"/>
+                    </a:lnT>
+                    <a:lnB w="12700" cmpd="sng">
+                      <a:noFill/>
+                      <a:prstDash val="solid"/>
+                    </a:lnB>
+                    <a:solidFill>
+                      <a:schemeClr val="bg1">
+                        <a:lumMod val="95000"/>
+                      </a:schemeClr>
+                    </a:solidFill>
+                  </a:tcPr>
+                </a:tc>
+                <a:tc>
+                  <a:txBody>
+                    <a:bodyPr/>
+                    <a:lstStyle/>
+                    <a:p>
+                      <a:pPr>
+                        <a:buNone/>
+                      </a:pPr>
+                      <a:r>
+                        <a:rPr lang="en-US" sz="1000" cap="none" spc="0">
+                          <a:solidFill>
+                            <a:schemeClr val="tx1"/>
+                          </a:solidFill>
+                        </a:rPr>
+                        <a:t>Splits instance IDs into batches and prepares patch context for RHEL and Windows.</a:t>
+                      </a:r>
+                    </a:p>
+                  </a:txBody>
+                  <a:tcPr marL="37743" marR="37743" marT="12131" marB="75485" anchor="ctr">
+                    <a:lnL w="12700" cmpd="sng">
+                      <a:noFill/>
+                      <a:prstDash val="solid"/>
+                    </a:lnL>
+                    <a:lnR w="12700" cmpd="sng">
+                      <a:noFill/>
+                      <a:prstDash val="solid"/>
+                    </a:lnR>
+                    <a:lnT w="12700" cap="flat" cmpd="sng" algn="ctr">
+                      <a:solidFill>
+                        <a:schemeClr val="accent1"/>
+                      </a:solidFill>
+                      <a:prstDash val="solid"/>
+                    </a:lnT>
+                    <a:lnB w="12700" cmpd="sng">
+                      <a:noFill/>
+                      <a:prstDash val="solid"/>
+                    </a:lnB>
+                    <a:solidFill>
+                      <a:schemeClr val="bg1">
+                        <a:lumMod val="95000"/>
+                      </a:schemeClr>
+                    </a:solidFill>
+                  </a:tcPr>
+                </a:tc>
+                <a:extLst>
+                  <a:ext uri="{0D108BD9-81ED-4DB2-BD59-A6C34878D82A}">
+                    <a16:rowId xmlns:a16="http://schemas.microsoft.com/office/drawing/2014/main" val="4144426567"/>
+                  </a:ext>
+                </a:extLst>
+              </a:tr>
+              <a:tr h="313781">
+                <a:tc>
+                  <a:txBody>
+                    <a:bodyPr/>
+                    <a:lstStyle/>
+                    <a:p>
+                      <a:pPr>
+                        <a:buNone/>
+                      </a:pPr>
+                      <a:r>
+                        <a:rPr lang="en-US" sz="1000" cap="none" spc="0">
+                          <a:solidFill>
+                            <a:schemeClr val="tx1"/>
+                          </a:solidFill>
+                        </a:rPr>
+                        <a:t>7</a:t>
+                      </a:r>
+                    </a:p>
+                  </a:txBody>
+                  <a:tcPr marL="37743" marR="37743" marT="12131" marB="75485" anchor="ctr">
+                    <a:lnL w="12700" cmpd="sng">
+                      <a:noFill/>
+                      <a:prstDash val="solid"/>
+                    </a:lnL>
+                    <a:lnR w="12700" cmpd="sng">
+                      <a:noFill/>
+                      <a:prstDash val="solid"/>
+                    </a:lnR>
+                    <a:lnT w="12700" cmpd="sng">
+                      <a:noFill/>
+                      <a:prstDash val="solid"/>
+                    </a:lnT>
+                    <a:lnB w="12700" cap="flat" cmpd="sng" algn="ctr">
+                      <a:solidFill>
+                        <a:schemeClr val="accent1"/>
+                      </a:solidFill>
+                      <a:prstDash val="solid"/>
+                    </a:lnB>
+                    <a:noFill/>
+                  </a:tcPr>
+                </a:tc>
+                <a:tc>
+                  <a:txBody>
+                    <a:bodyPr/>
+                    <a:lstStyle/>
+                    <a:p>
+                      <a:pPr>
+                        <a:buNone/>
+                      </a:pPr>
+                      <a:r>
+                        <a:rPr lang="en-US" sz="1000" b="1" cap="none" spc="0">
+                          <a:solidFill>
+                            <a:schemeClr val="tx1"/>
+                          </a:solidFill>
+                        </a:rPr>
+                        <a:t>get-batch</a:t>
+                      </a:r>
+                      <a:endParaRPr lang="en-US" sz="1000" cap="none" spc="0">
+                        <a:solidFill>
+                          <a:schemeClr val="tx1"/>
+                        </a:solidFill>
+                      </a:endParaRPr>
+                    </a:p>
+                  </a:txBody>
+                  <a:tcPr marL="37743" marR="37743" marT="12131" marB="75485" anchor="ctr">
+                    <a:lnL w="12700" cmpd="sng">
+                      <a:noFill/>
+                      <a:prstDash val="solid"/>
+                    </a:lnL>
+                    <a:lnR w="12700" cmpd="sng">
+                      <a:noFill/>
+                      <a:prstDash val="solid"/>
+                    </a:lnR>
+                    <a:lnT w="12700" cmpd="sng">
+                      <a:noFill/>
+                      <a:prstDash val="solid"/>
+                    </a:lnT>
+                    <a:lnB w="12700" cap="flat" cmpd="sng" algn="ctr">
+                      <a:solidFill>
+                        <a:schemeClr val="accent1"/>
+                      </a:solidFill>
+                      <a:prstDash val="solid"/>
+                    </a:lnB>
+                    <a:noFill/>
+                  </a:tcPr>
+                </a:tc>
+                <a:tc>
+                  <a:txBody>
+                    <a:bodyPr/>
+                    <a:lstStyle/>
+                    <a:p>
+                      <a:pPr>
+                        <a:buNone/>
+                      </a:pPr>
+                      <a:r>
+                        <a:rPr lang="en-US" sz="1000" cap="none" spc="0">
+                          <a:solidFill>
+                            <a:schemeClr val="tx1"/>
+                          </a:solidFill>
+                        </a:rPr>
+                        <a:t>Returns the batch at the given index for the batched patching loop.</a:t>
+                      </a:r>
+                    </a:p>
+                  </a:txBody>
+                  <a:tcPr marL="37743" marR="37743" marT="12131" marB="75485" anchor="ctr">
+                    <a:lnL w="12700" cmpd="sng">
+                      <a:noFill/>
+                      <a:prstDash val="solid"/>
+                    </a:lnL>
+                    <a:lnR w="12700" cmpd="sng">
+                      <a:noFill/>
+                      <a:prstDash val="solid"/>
+                    </a:lnR>
+                    <a:lnT w="12700" cmpd="sng">
+                      <a:noFill/>
+                      <a:prstDash val="solid"/>
+                    </a:lnT>
+                    <a:lnB w="12700" cap="flat" cmpd="sng" algn="ctr">
+                      <a:solidFill>
+                        <a:schemeClr val="accent1"/>
+                      </a:solidFill>
+                      <a:prstDash val="solid"/>
+                    </a:lnB>
+                    <a:noFill/>
+                  </a:tcPr>
+                </a:tc>
+                <a:extLst>
+                  <a:ext uri="{0D108BD9-81ED-4DB2-BD59-A6C34878D82A}">
+                    <a16:rowId xmlns:a16="http://schemas.microsoft.com/office/drawing/2014/main" val="2904217798"/>
+                  </a:ext>
+                </a:extLst>
+              </a:tr>
+              <a:tr h="490027">
+                <a:tc>
+                  <a:txBody>
+                    <a:bodyPr/>
+                    <a:lstStyle/>
+                    <a:p>
+                      <a:pPr>
+                        <a:buNone/>
+                      </a:pPr>
+                      <a:r>
+                        <a:rPr lang="en-US" sz="1000" cap="none" spc="0">
+                          <a:solidFill>
+                            <a:schemeClr val="tx1"/>
+                          </a:solidFill>
+                        </a:rPr>
+                        <a:t>8</a:t>
+                      </a:r>
+                    </a:p>
+                  </a:txBody>
+                  <a:tcPr marL="37743" marR="37743" marT="12131" marB="75485" anchor="ctr">
+                    <a:lnL w="12700" cmpd="sng">
+                      <a:noFill/>
+                      <a:prstDash val="solid"/>
+                    </a:lnL>
+                    <a:lnR w="12700" cmpd="sng">
+                      <a:noFill/>
+                      <a:prstDash val="solid"/>
+                    </a:lnR>
+                    <a:lnT w="12700" cap="flat" cmpd="sng" algn="ctr">
+                      <a:solidFill>
+                        <a:schemeClr val="accent1"/>
+                      </a:solidFill>
+                      <a:prstDash val="solid"/>
+                    </a:lnT>
+                    <a:lnB w="12700" cmpd="sng">
+                      <a:noFill/>
+                      <a:prstDash val="solid"/>
+                    </a:lnB>
+                    <a:solidFill>
+                      <a:schemeClr val="bg1">
+                        <a:lumMod val="95000"/>
+                      </a:schemeClr>
+                    </a:solidFill>
+                  </a:tcPr>
+                </a:tc>
+                <a:tc>
+                  <a:txBody>
+                    <a:bodyPr/>
+                    <a:lstStyle/>
+                    <a:p>
+                      <a:pPr>
+                        <a:buNone/>
+                      </a:pPr>
+                      <a:r>
+                        <a:rPr lang="en-US" sz="1000" b="1" cap="none" spc="0">
+                          <a:solidFill>
+                            <a:schemeClr val="tx1"/>
+                          </a:solidFill>
+                        </a:rPr>
+                        <a:t>failure-check</a:t>
+                      </a:r>
+                      <a:endParaRPr lang="en-US" sz="1000" cap="none" spc="0">
+                        <a:solidFill>
+                          <a:schemeClr val="tx1"/>
+                        </a:solidFill>
+                      </a:endParaRPr>
+                    </a:p>
+                  </a:txBody>
+                  <a:tcPr marL="37743" marR="37743" marT="12131" marB="75485" anchor="ctr">
+                    <a:lnL w="12700" cmpd="sng">
+                      <a:noFill/>
+                      <a:prstDash val="solid"/>
+                    </a:lnL>
+                    <a:lnR w="12700" cmpd="sng">
+                      <a:noFill/>
+                      <a:prstDash val="solid"/>
+                    </a:lnR>
+                    <a:lnT w="12700" cap="flat" cmpd="sng" algn="ctr">
+                      <a:solidFill>
+                        <a:schemeClr val="accent1"/>
+                      </a:solidFill>
+                      <a:prstDash val="solid"/>
+                    </a:lnT>
+                    <a:lnB w="12700" cmpd="sng">
+                      <a:noFill/>
+                      <a:prstDash val="solid"/>
+                    </a:lnB>
+                    <a:solidFill>
+                      <a:schemeClr val="bg1">
+                        <a:lumMod val="95000"/>
+                      </a:schemeClr>
+                    </a:solidFill>
+                  </a:tcPr>
+                </a:tc>
+                <a:tc>
+                  <a:txBody>
+                    <a:bodyPr/>
+                    <a:lstStyle/>
+                    <a:p>
+                      <a:pPr>
+                        <a:buNone/>
+                      </a:pPr>
+                      <a:r>
+                        <a:rPr lang="en-US" sz="1000" cap="none" spc="0">
+                          <a:solidFill>
+                            <a:schemeClr val="tx1"/>
+                          </a:solidFill>
+                        </a:rPr>
+                        <a:t>Checks if any recently patched instance has stopped before proceeding to the next batch.</a:t>
+                      </a:r>
+                    </a:p>
+                  </a:txBody>
+                  <a:tcPr marL="37743" marR="37743" marT="12131" marB="75485" anchor="ctr">
+                    <a:lnL w="12700" cmpd="sng">
+                      <a:noFill/>
+                      <a:prstDash val="solid"/>
+                    </a:lnL>
+                    <a:lnR w="12700" cmpd="sng">
+                      <a:noFill/>
+                      <a:prstDash val="solid"/>
+                    </a:lnR>
+                    <a:lnT w="12700" cap="flat" cmpd="sng" algn="ctr">
+                      <a:solidFill>
+                        <a:schemeClr val="accent1"/>
+                      </a:solidFill>
+                      <a:prstDash val="solid"/>
+                    </a:lnT>
+                    <a:lnB w="12700" cmpd="sng">
+                      <a:noFill/>
+                      <a:prstDash val="solid"/>
+                    </a:lnB>
+                    <a:solidFill>
+                      <a:schemeClr val="bg1">
+                        <a:lumMod val="95000"/>
+                      </a:schemeClr>
+                    </a:solidFill>
+                  </a:tcPr>
+                </a:tc>
+                <a:extLst>
+                  <a:ext uri="{0D108BD9-81ED-4DB2-BD59-A6C34878D82A}">
+                    <a16:rowId xmlns:a16="http://schemas.microsoft.com/office/drawing/2014/main" val="58282805"/>
+                  </a:ext>
+                </a:extLst>
+              </a:tr>
+              <a:tr h="313781">
+                <a:tc>
+                  <a:txBody>
+                    <a:bodyPr/>
+                    <a:lstStyle/>
+                    <a:p>
+                      <a:pPr>
+                        <a:buNone/>
+                      </a:pPr>
+                      <a:r>
+                        <a:rPr lang="en-US" sz="1000" cap="none" spc="0">
+                          <a:solidFill>
+                            <a:schemeClr val="tx1"/>
+                          </a:solidFill>
+                        </a:rPr>
+                        <a:t>9</a:t>
+                      </a:r>
+                    </a:p>
+                  </a:txBody>
+                  <a:tcPr marL="37743" marR="37743" marT="12131" marB="75485" anchor="ctr">
+                    <a:lnL w="12700" cmpd="sng">
+                      <a:noFill/>
+                      <a:prstDash val="solid"/>
+                    </a:lnL>
+                    <a:lnR w="12700" cmpd="sng">
+                      <a:noFill/>
+                      <a:prstDash val="solid"/>
+                    </a:lnR>
+                    <a:lnT w="12700" cmpd="sng">
+                      <a:noFill/>
+                      <a:prstDash val="solid"/>
+                    </a:lnT>
+                    <a:lnB w="12700" cap="flat" cmpd="sng" algn="ctr">
+                      <a:solidFill>
+                        <a:schemeClr val="accent1"/>
+                      </a:solidFill>
+                      <a:prstDash val="solid"/>
+                    </a:lnB>
+                    <a:noFill/>
+                  </a:tcPr>
+                </a:tc>
+                <a:tc>
+                  <a:txBody>
+                    <a:bodyPr/>
+                    <a:lstStyle/>
+                    <a:p>
+                      <a:pPr>
+                        <a:buNone/>
+                      </a:pPr>
+                      <a:r>
+                        <a:rPr lang="en-US" sz="1000" b="1" cap="none" spc="0">
+                          <a:solidFill>
+                            <a:schemeClr val="tx1"/>
+                          </a:solidFill>
+                        </a:rPr>
+                        <a:t>maintenance-window</a:t>
+                      </a:r>
+                      <a:endParaRPr lang="en-US" sz="1000" cap="none" spc="0">
+                        <a:solidFill>
+                          <a:schemeClr val="tx1"/>
+                        </a:solidFill>
+                      </a:endParaRPr>
+                    </a:p>
+                  </a:txBody>
+                  <a:tcPr marL="37743" marR="37743" marT="12131" marB="75485" anchor="ctr">
+                    <a:lnL w="12700" cmpd="sng">
+                      <a:noFill/>
+                      <a:prstDash val="solid"/>
+                    </a:lnL>
+                    <a:lnR w="12700" cmpd="sng">
+                      <a:noFill/>
+                      <a:prstDash val="solid"/>
+                    </a:lnR>
+                    <a:lnT w="12700" cmpd="sng">
+                      <a:noFill/>
+                      <a:prstDash val="solid"/>
+                    </a:lnT>
+                    <a:lnB w="12700" cap="flat" cmpd="sng" algn="ctr">
+                      <a:solidFill>
+                        <a:schemeClr val="accent1"/>
+                      </a:solidFill>
+                      <a:prstDash val="solid"/>
+                    </a:lnB>
+                    <a:noFill/>
+                  </a:tcPr>
+                </a:tc>
+                <a:tc>
+                  <a:txBody>
+                    <a:bodyPr/>
+                    <a:lstStyle/>
+                    <a:p>
+                      <a:pPr>
+                        <a:buNone/>
+                      </a:pPr>
+                      <a:r>
+                        <a:rPr lang="en-US" sz="1000" cap="none" spc="0">
+                          <a:solidFill>
+                            <a:schemeClr val="tx1"/>
+                          </a:solidFill>
+                        </a:rPr>
+                        <a:t>Checks if the current time is within the configured maintenance window.</a:t>
+                      </a:r>
+                    </a:p>
+                  </a:txBody>
+                  <a:tcPr marL="37743" marR="37743" marT="12131" marB="75485" anchor="ctr">
+                    <a:lnL w="12700" cmpd="sng">
+                      <a:noFill/>
+                      <a:prstDash val="solid"/>
+                    </a:lnL>
+                    <a:lnR w="12700" cmpd="sng">
+                      <a:noFill/>
+                      <a:prstDash val="solid"/>
+                    </a:lnR>
+                    <a:lnT w="12700" cmpd="sng">
+                      <a:noFill/>
+                      <a:prstDash val="solid"/>
+                    </a:lnT>
+                    <a:lnB w="12700" cap="flat" cmpd="sng" algn="ctr">
+                      <a:solidFill>
+                        <a:schemeClr val="accent1"/>
+                      </a:solidFill>
+                      <a:prstDash val="solid"/>
+                    </a:lnB>
+                    <a:noFill/>
+                  </a:tcPr>
+                </a:tc>
+                <a:extLst>
+                  <a:ext uri="{0D108BD9-81ED-4DB2-BD59-A6C34878D82A}">
+                    <a16:rowId xmlns:a16="http://schemas.microsoft.com/office/drawing/2014/main" val="2800879003"/>
+                  </a:ext>
+                </a:extLst>
+              </a:tr>
+              <a:tr h="490027">
+                <a:tc>
+                  <a:txBody>
+                    <a:bodyPr/>
+                    <a:lstStyle/>
+                    <a:p>
+                      <a:pPr>
+                        <a:buNone/>
+                      </a:pPr>
+                      <a:r>
+                        <a:rPr lang="en-US" sz="1000" cap="none" spc="0">
+                          <a:solidFill>
+                            <a:schemeClr val="tx1"/>
+                          </a:solidFill>
+                        </a:rPr>
+                        <a:t>10</a:t>
+                      </a:r>
+                    </a:p>
+                  </a:txBody>
+                  <a:tcPr marL="37743" marR="37743" marT="12131" marB="75485" anchor="ctr">
+                    <a:lnL w="12700" cmpd="sng">
+                      <a:noFill/>
+                      <a:prstDash val="solid"/>
+                    </a:lnL>
+                    <a:lnR w="12700" cmpd="sng">
+                      <a:noFill/>
+                      <a:prstDash val="solid"/>
+                    </a:lnR>
+                    <a:lnT w="12700" cap="flat" cmpd="sng" algn="ctr">
+                      <a:solidFill>
+                        <a:schemeClr val="accent1"/>
+                      </a:solidFill>
+                      <a:prstDash val="solid"/>
+                    </a:lnT>
+                    <a:lnB w="12700" cmpd="sng">
+                      <a:noFill/>
+                      <a:prstDash val="solid"/>
+                    </a:lnB>
+                    <a:solidFill>
+                      <a:schemeClr val="bg1">
+                        <a:lumMod val="95000"/>
+                      </a:schemeClr>
+                    </a:solidFill>
+                  </a:tcPr>
+                </a:tc>
+                <a:tc>
+                  <a:txBody>
+                    <a:bodyPr/>
+                    <a:lstStyle/>
+                    <a:p>
+                      <a:pPr>
+                        <a:buNone/>
+                      </a:pPr>
+                      <a:r>
+                        <a:rPr lang="en-US" sz="1000" b="1" cap="none" spc="0">
+                          <a:solidFill>
+                            <a:schemeClr val="tx1"/>
+                          </a:solidFill>
+                        </a:rPr>
+                        <a:t>ec2-stopped-handler</a:t>
+                      </a:r>
+                      <a:endParaRPr lang="en-US" sz="1000" cap="none" spc="0">
+                        <a:solidFill>
+                          <a:schemeClr val="tx1"/>
+                        </a:solidFill>
+                      </a:endParaRPr>
+                    </a:p>
+                  </a:txBody>
+                  <a:tcPr marL="37743" marR="37743" marT="12131" marB="75485" anchor="ctr">
+                    <a:lnL w="12700" cmpd="sng">
+                      <a:noFill/>
+                      <a:prstDash val="solid"/>
+                    </a:lnL>
+                    <a:lnR w="12700" cmpd="sng">
+                      <a:noFill/>
+                      <a:prstDash val="solid"/>
+                    </a:lnR>
+                    <a:lnT w="12700" cap="flat" cmpd="sng" algn="ctr">
+                      <a:solidFill>
+                        <a:schemeClr val="accent1"/>
+                      </a:solidFill>
+                      <a:prstDash val="solid"/>
+                    </a:lnT>
+                    <a:lnB w="12700" cmpd="sng">
+                      <a:noFill/>
+                      <a:prstDash val="solid"/>
+                    </a:lnB>
+                    <a:solidFill>
+                      <a:schemeClr val="bg1">
+                        <a:lumMod val="95000"/>
+                      </a:schemeClr>
+                    </a:solidFill>
+                  </a:tcPr>
+                </a:tc>
+                <a:tc>
+                  <a:txBody>
+                    <a:bodyPr/>
+                    <a:lstStyle/>
+                    <a:p>
+                      <a:pPr>
+                        <a:buNone/>
+                      </a:pPr>
+                      <a:r>
+                        <a:rPr lang="en-US" sz="1000" cap="none" spc="0">
+                          <a:solidFill>
+                            <a:schemeClr val="tx1"/>
+                          </a:solidFill>
+                        </a:rPr>
+                        <a:t>Circuit-breaker: when an instance stops, checks if it was recently patched and records CVEs to block future patches.</a:t>
+                      </a:r>
+                    </a:p>
+                  </a:txBody>
+                  <a:tcPr marL="37743" marR="37743" marT="12131" marB="75485" anchor="ctr">
+                    <a:lnL w="12700" cmpd="sng">
+                      <a:noFill/>
+                      <a:prstDash val="solid"/>
+                    </a:lnL>
+                    <a:lnR w="12700" cmpd="sng">
+                      <a:noFill/>
+                      <a:prstDash val="solid"/>
+                    </a:lnR>
+                    <a:lnT w="12700" cap="flat" cmpd="sng" algn="ctr">
+                      <a:solidFill>
+                        <a:schemeClr val="accent1"/>
+                      </a:solidFill>
+                      <a:prstDash val="solid"/>
+                    </a:lnT>
+                    <a:lnB w="12700" cmpd="sng">
+                      <a:noFill/>
+                      <a:prstDash val="solid"/>
+                    </a:lnB>
+                    <a:solidFill>
+                      <a:schemeClr val="bg1">
+                        <a:lumMod val="95000"/>
+                      </a:schemeClr>
+                    </a:solidFill>
+                  </a:tcPr>
+                </a:tc>
+                <a:extLst>
+                  <a:ext uri="{0D108BD9-81ED-4DB2-BD59-A6C34878D82A}">
+                    <a16:rowId xmlns:a16="http://schemas.microsoft.com/office/drawing/2014/main" val="2050942110"/>
+                  </a:ext>
+                </a:extLst>
+              </a:tr>
+              <a:tr h="313781">
+                <a:tc>
+                  <a:txBody>
+                    <a:bodyPr/>
+                    <a:lstStyle/>
+                    <a:p>
+                      <a:pPr>
+                        <a:buNone/>
+                      </a:pPr>
+                      <a:r>
+                        <a:rPr lang="en-US" sz="1000" cap="none" spc="0">
+                          <a:solidFill>
+                            <a:schemeClr val="tx1"/>
+                          </a:solidFill>
+                        </a:rPr>
+                        <a:t>11</a:t>
+                      </a:r>
+                    </a:p>
+                  </a:txBody>
+                  <a:tcPr marL="37743" marR="37743" marT="12131" marB="75485" anchor="ctr">
+                    <a:lnL w="12700" cmpd="sng">
+                      <a:noFill/>
+                      <a:prstDash val="solid"/>
+                    </a:lnL>
+                    <a:lnR w="12700" cmpd="sng">
+                      <a:noFill/>
+                      <a:prstDash val="solid"/>
+                    </a:lnR>
+                    <a:lnT w="12700" cmpd="sng">
+                      <a:noFill/>
+                      <a:prstDash val="solid"/>
+                    </a:lnT>
+                    <a:lnB w="12700" cap="flat" cmpd="sng" algn="ctr">
+                      <a:solidFill>
+                        <a:schemeClr val="accent1"/>
+                      </a:solidFill>
+                      <a:prstDash val="solid"/>
+                    </a:lnB>
+                    <a:noFill/>
+                  </a:tcPr>
+                </a:tc>
+                <a:tc>
+                  <a:txBody>
+                    <a:bodyPr/>
+                    <a:lstStyle/>
+                    <a:p>
+                      <a:pPr>
+                        <a:buNone/>
+                      </a:pPr>
+                      <a:r>
+                        <a:rPr lang="en-US" sz="1000" b="1" cap="none" spc="0">
+                          <a:solidFill>
+                            <a:schemeClr val="tx1"/>
+                          </a:solidFill>
+                        </a:rPr>
+                        <a:t>ami-cleanup</a:t>
+                      </a:r>
+                      <a:endParaRPr lang="en-US" sz="1000" cap="none" spc="0">
+                        <a:solidFill>
+                          <a:schemeClr val="tx1"/>
+                        </a:solidFill>
+                      </a:endParaRPr>
+                    </a:p>
+                  </a:txBody>
+                  <a:tcPr marL="37743" marR="37743" marT="12131" marB="75485" anchor="ctr">
+                    <a:lnL w="12700" cmpd="sng">
+                      <a:noFill/>
+                      <a:prstDash val="solid"/>
+                    </a:lnL>
+                    <a:lnR w="12700" cmpd="sng">
+                      <a:noFill/>
+                      <a:prstDash val="solid"/>
+                    </a:lnR>
+                    <a:lnT w="12700" cmpd="sng">
+                      <a:noFill/>
+                      <a:prstDash val="solid"/>
+                    </a:lnT>
+                    <a:lnB w="12700" cap="flat" cmpd="sng" algn="ctr">
+                      <a:solidFill>
+                        <a:schemeClr val="accent1"/>
+                      </a:solidFill>
+                      <a:prstDash val="solid"/>
+                    </a:lnB>
+                    <a:noFill/>
+                  </a:tcPr>
+                </a:tc>
+                <a:tc>
+                  <a:txBody>
+                    <a:bodyPr/>
+                    <a:lstStyle/>
+                    <a:p>
+                      <a:pPr>
+                        <a:buNone/>
+                      </a:pPr>
+                      <a:r>
+                        <a:rPr lang="en-US" sz="1000" cap="none" spc="0">
+                          <a:solidFill>
+                            <a:schemeClr val="tx1"/>
+                          </a:solidFill>
+                        </a:rPr>
+                        <a:t>Deregisters old pre-patch AMIs and deletes snapshots beyond the retention period.</a:t>
+                      </a:r>
+                    </a:p>
+                  </a:txBody>
+                  <a:tcPr marL="37743" marR="37743" marT="12131" marB="75485" anchor="ctr">
+                    <a:lnL w="12700" cmpd="sng">
+                      <a:noFill/>
+                      <a:prstDash val="solid"/>
+                    </a:lnL>
+                    <a:lnR w="12700" cmpd="sng">
+                      <a:noFill/>
+                      <a:prstDash val="solid"/>
+                    </a:lnR>
+                    <a:lnT w="12700" cmpd="sng">
+                      <a:noFill/>
+                      <a:prstDash val="solid"/>
+                    </a:lnT>
+                    <a:lnB w="12700" cap="flat" cmpd="sng" algn="ctr">
+                      <a:solidFill>
+                        <a:schemeClr val="accent1"/>
+                      </a:solidFill>
+                      <a:prstDash val="solid"/>
+                    </a:lnB>
+                    <a:noFill/>
+                  </a:tcPr>
+                </a:tc>
+                <a:extLst>
+                  <a:ext uri="{0D108BD9-81ED-4DB2-BD59-A6C34878D82A}">
+                    <a16:rowId xmlns:a16="http://schemas.microsoft.com/office/drawing/2014/main" val="3238648924"/>
+                  </a:ext>
+                </a:extLst>
+              </a:tr>
+              <a:tr h="490027">
+                <a:tc>
+                  <a:txBody>
+                    <a:bodyPr/>
+                    <a:lstStyle/>
+                    <a:p>
+                      <a:pPr>
+                        <a:buNone/>
+                      </a:pPr>
+                      <a:r>
+                        <a:rPr lang="en-US" sz="1000" cap="none" spc="0">
+                          <a:solidFill>
+                            <a:schemeClr val="tx1"/>
+                          </a:solidFill>
+                        </a:rPr>
+                        <a:t>12</a:t>
+                      </a:r>
+                    </a:p>
+                  </a:txBody>
+                  <a:tcPr marL="37743" marR="37743" marT="12131" marB="75485" anchor="ctr">
+                    <a:lnL w="12700" cmpd="sng">
+                      <a:noFill/>
+                      <a:prstDash val="solid"/>
+                    </a:lnL>
+                    <a:lnR w="12700" cmpd="sng">
+                      <a:noFill/>
+                      <a:prstDash val="solid"/>
+                    </a:lnR>
+                    <a:lnT w="12700" cap="flat" cmpd="sng" algn="ctr">
+                      <a:solidFill>
+                        <a:schemeClr val="accent1"/>
+                      </a:solidFill>
+                      <a:prstDash val="solid"/>
+                    </a:lnT>
+                    <a:lnB w="12700" cmpd="sng">
+                      <a:noFill/>
+                      <a:prstDash val="solid"/>
+                    </a:lnB>
+                    <a:solidFill>
+                      <a:schemeClr val="bg1">
+                        <a:lumMod val="95000"/>
+                      </a:schemeClr>
+                    </a:solidFill>
+                  </a:tcPr>
+                </a:tc>
+                <a:tc>
+                  <a:txBody>
+                    <a:bodyPr/>
+                    <a:lstStyle/>
+                    <a:p>
+                      <a:pPr>
+                        <a:buNone/>
+                      </a:pPr>
+                      <a:r>
+                        <a:rPr lang="en-US" sz="1000" b="1" cap="none" spc="0" dirty="0" err="1">
+                          <a:solidFill>
+                            <a:schemeClr val="tx1"/>
+                          </a:solidFill>
+                        </a:rPr>
+                        <a:t>sfn</a:t>
+                      </a:r>
+                      <a:r>
+                        <a:rPr lang="en-US" sz="1000" b="1" cap="none" spc="0" dirty="0">
+                          <a:solidFill>
+                            <a:schemeClr val="tx1"/>
+                          </a:solidFill>
+                        </a:rPr>
+                        <a:t>-failure-notifier</a:t>
+                      </a:r>
+                      <a:endParaRPr lang="en-US" sz="1000" cap="none" spc="0" dirty="0">
+                        <a:solidFill>
+                          <a:schemeClr val="tx1"/>
+                        </a:solidFill>
+                      </a:endParaRPr>
+                    </a:p>
+                  </a:txBody>
+                  <a:tcPr marL="37743" marR="37743" marT="12131" marB="75485" anchor="ctr">
+                    <a:lnL w="12700" cmpd="sng">
+                      <a:noFill/>
+                      <a:prstDash val="solid"/>
+                    </a:lnL>
+                    <a:lnR w="12700" cmpd="sng">
+                      <a:noFill/>
+                      <a:prstDash val="solid"/>
+                    </a:lnR>
+                    <a:lnT w="12700" cap="flat" cmpd="sng" algn="ctr">
+                      <a:solidFill>
+                        <a:schemeClr val="accent1"/>
+                      </a:solidFill>
+                      <a:prstDash val="solid"/>
+                    </a:lnT>
+                    <a:lnB w="12700" cmpd="sng">
+                      <a:noFill/>
+                      <a:prstDash val="solid"/>
+                    </a:lnB>
+                    <a:solidFill>
+                      <a:schemeClr val="bg1">
+                        <a:lumMod val="95000"/>
+                      </a:schemeClr>
+                    </a:solidFill>
+                  </a:tcPr>
+                </a:tc>
+                <a:tc>
+                  <a:txBody>
+                    <a:bodyPr/>
+                    <a:lstStyle/>
+                    <a:p>
+                      <a:pPr>
+                        <a:buNone/>
+                      </a:pPr>
+                      <a:r>
+                        <a:rPr lang="en-US" sz="1000" cap="none" spc="0" dirty="0">
+                          <a:solidFill>
+                            <a:schemeClr val="tx1"/>
+                          </a:solidFill>
+                        </a:rPr>
+                        <a:t>Sends an SNS alert when the patch workflow Step Functions execution fails, aborts, or times out.</a:t>
+                      </a:r>
+                    </a:p>
+                  </a:txBody>
+                  <a:tcPr marL="37743" marR="37743" marT="12131" marB="75485" anchor="ctr">
+                    <a:lnL w="12700" cmpd="sng">
+                      <a:noFill/>
+                      <a:prstDash val="solid"/>
+                    </a:lnL>
+                    <a:lnR w="12700" cmpd="sng">
+                      <a:noFill/>
+                      <a:prstDash val="solid"/>
+                    </a:lnR>
+                    <a:lnT w="12700" cap="flat" cmpd="sng" algn="ctr">
+                      <a:solidFill>
+                        <a:schemeClr val="accent1"/>
+                      </a:solidFill>
+                      <a:prstDash val="solid"/>
+                    </a:lnT>
+                    <a:lnB w="12700" cmpd="sng">
+                      <a:noFill/>
+                      <a:prstDash val="solid"/>
+                    </a:lnB>
+                    <a:solidFill>
+                      <a:schemeClr val="bg1">
+                        <a:lumMod val="95000"/>
+                      </a:schemeClr>
+                    </a:solidFill>
+                  </a:tcPr>
+                </a:tc>
+                <a:extLst>
+                  <a:ext uri="{0D108BD9-81ED-4DB2-BD59-A6C34878D82A}">
+                    <a16:rowId xmlns:a16="http://schemas.microsoft.com/office/drawing/2014/main" val="1253708882"/>
+                  </a:ext>
+                </a:extLst>
+              </a:tr>
+            </a:tbl>
+          </a:graphicData>
+        </a:graphic>
+      </p:graphicFrame>
+    </p:spTree>
+    <p:extLst>
+      <p:ext uri="{BB962C8B-B14F-4D97-AF65-F5344CB8AC3E}">
+        <p14:creationId xmlns:p14="http://schemas.microsoft.com/office/powerpoint/2010/main" val="24592578"/>
+      </p:ext>
+    </p:extLst>
+  </p:cSld>
+  <p:clrMapOvr>
+    <a:masterClrMapping/>
+  </p:clrMapOvr>
+</p:sld>
+</file>
+
+<file path=ppt/slides/slide14.xml><?xml version="1.0" encoding="utf-8"?>
+<p:sld xmlns:a="http://schemas.openxmlformats.org/drawingml/2006/main" xmlns:r="http://schemas.openxmlformats.org/officeDocument/2006/relationships" xmlns:p="http://schemas.openxmlformats.org/presentationml/2006/main">
+  <p:cSld>
+    <p:spTree>
+      <p:nvGrpSpPr>
+        <p:cNvPr id="1" name="">
+          <a:extLst>
+            <a:ext uri="{FF2B5EF4-FFF2-40B4-BE49-F238E27FC236}">
+              <a16:creationId xmlns:a16="http://schemas.microsoft.com/office/drawing/2014/main" id="{37135943-D1E7-B9CD-D124-10969D53A57D}"/>
+            </a:ext>
+          </a:extLst>
+        </p:cNvPr>
+        <p:cNvGrpSpPr/>
+        <p:nvPr/>
+      </p:nvGrpSpPr>
+      <p:grpSpPr>
+        <a:xfrm>
+          <a:off x="0" y="0"/>
+          <a:ext cx="0" cy="0"/>
+          <a:chOff x="0" y="0"/>
+          <a:chExt cx="0" cy="0"/>
+        </a:xfrm>
+      </p:grpSpPr>
+      <p:pic>
+        <p:nvPicPr>
+          <p:cNvPr id="7" name="Picture 6">
+            <a:extLst>
+              <a:ext uri="{FF2B5EF4-FFF2-40B4-BE49-F238E27FC236}">
+                <a16:creationId xmlns:a16="http://schemas.microsoft.com/office/drawing/2014/main" id="{D8A009D5-3605-0DEE-6A0D-AE37CF68604B}"/>
+              </a:ext>
+            </a:extLst>
+          </p:cNvPr>
+          <p:cNvPicPr>
+            <a:picLocks noChangeAspect="1"/>
+          </p:cNvPicPr>
+          <p:nvPr/>
+        </p:nvPicPr>
+        <p:blipFill>
+          <a:blip r:embed="rId2"/>
+          <a:stretch>
+            <a:fillRect/>
+          </a:stretch>
+        </p:blipFill>
+        <p:spPr>
+          <a:xfrm>
+            <a:off x="1311350" y="0"/>
+            <a:ext cx="6363286" cy="6858000"/>
+          </a:xfrm>
+          <a:prstGeom prst="rect">
+            <a:avLst/>
+          </a:prstGeom>
+        </p:spPr>
+      </p:pic>
+    </p:spTree>
+    <p:extLst>
+      <p:ext uri="{BB962C8B-B14F-4D97-AF65-F5344CB8AC3E}">
+        <p14:creationId xmlns:p14="http://schemas.microsoft.com/office/powerpoint/2010/main" val="260307853"/>
+      </p:ext>
+    </p:extLst>
+  </p:cSld>
+  <p:clrMapOvr>
+    <a:masterClrMapping/>
+  </p:clrMapOvr>
+</p:sld>
+</file>
+
+<file path=ppt/slides/slide2.xml><?xml version="1.0" encoding="utf-8"?>
+<p:sld xmlns:a="http://schemas.openxmlformats.org/drawingml/2006/main" xmlns:r="http://schemas.openxmlformats.org/officeDocument/2006/relationships" xmlns:p="http://schemas.openxmlformats.org/presentationml/2006/main">
+  <p:cSld>
+    <p:spTree>
+      <p:nvGrpSpPr>
+        <p:cNvPr id="1" name="">
+          <a:extLst>
+            <a:ext uri="{FF2B5EF4-FFF2-40B4-BE49-F238E27FC236}">
+              <a16:creationId xmlns:a16="http://schemas.microsoft.com/office/drawing/2014/main" id="{ADFEFFB5-1BAD-759E-2028-B143E5538BF6}"/>
+            </a:ext>
+          </a:extLst>
+        </p:cNvPr>
+        <p:cNvGrpSpPr/>
+        <p:nvPr/>
+      </p:nvGrpSpPr>
+      <p:grpSpPr>
+        <a:xfrm>
+          <a:off x="0" y="0"/>
+          <a:ext cx="0" cy="0"/>
+          <a:chOff x="0" y="0"/>
+          <a:chExt cx="0" cy="0"/>
+        </a:xfrm>
+      </p:grpSpPr>
+      <p:sp>
+        <p:nvSpPr>
+          <p:cNvPr id="7" name="TextBox 6">
+            <a:extLst>
+              <a:ext uri="{FF2B5EF4-FFF2-40B4-BE49-F238E27FC236}">
+                <a16:creationId xmlns:a16="http://schemas.microsoft.com/office/drawing/2014/main" id="{252228F7-69EC-E19E-F15C-E42FA27AA121}"/>
+              </a:ext>
+            </a:extLst>
+          </p:cNvPr>
+          <p:cNvSpPr txBox="1"/>
+          <p:nvPr/>
+        </p:nvSpPr>
+        <p:spPr>
+          <a:xfrm>
+            <a:off x="2699915" y="75749"/>
+            <a:ext cx="3089482" cy="646331"/>
+          </a:xfrm>
+          <a:prstGeom prst="rect">
+            <a:avLst/>
+          </a:prstGeom>
+          <a:noFill/>
+        </p:spPr>
+        <p:txBody>
+          <a:bodyPr wrap="square" rtlCol="0">
+            <a:spAutoFit/>
+          </a:bodyPr>
+          <a:lstStyle/>
+          <a:p>
+            <a:r>
+              <a:rPr lang="en-US" b="1" dirty="0">
+                <a:solidFill>
+                  <a:srgbClr val="0A13F4"/>
+                </a:solidFill>
+              </a:rPr>
+              <a:t>What the Customer Wants ?</a:t>
+            </a:r>
+          </a:p>
+          <a:p>
+            <a:endParaRPr lang="en-US" dirty="0"/>
+          </a:p>
+        </p:txBody>
+      </p:sp>
+      <p:sp>
+        <p:nvSpPr>
+          <p:cNvPr id="9" name="TextBox 8">
+            <a:extLst>
+              <a:ext uri="{FF2B5EF4-FFF2-40B4-BE49-F238E27FC236}">
+                <a16:creationId xmlns:a16="http://schemas.microsoft.com/office/drawing/2014/main" id="{1CCED912-D614-17EF-D6FB-46B221E37F29}"/>
+              </a:ext>
+            </a:extLst>
+          </p:cNvPr>
+          <p:cNvSpPr txBox="1"/>
+          <p:nvPr/>
+        </p:nvSpPr>
+        <p:spPr>
+          <a:xfrm>
+            <a:off x="173141" y="722079"/>
+            <a:ext cx="8589407" cy="5632311"/>
+          </a:xfrm>
+          <a:prstGeom prst="rect">
+            <a:avLst/>
+          </a:prstGeom>
+          <a:noFill/>
+        </p:spPr>
+        <p:txBody>
+          <a:bodyPr wrap="square" rtlCol="0">
+            <a:spAutoFit/>
+          </a:bodyPr>
+          <a:lstStyle/>
+          <a:p>
+            <a:r>
+              <a:rPr lang="en-US" b="1" dirty="0"/>
+              <a:t>Automated, production-safe critical CVE patching that scales without risk.</a:t>
+            </a:r>
+            <a:endParaRPr lang="en-US" dirty="0"/>
+          </a:p>
+          <a:p>
+            <a:endParaRPr lang="en-US" dirty="0"/>
+          </a:p>
+          <a:p>
+            <a:r>
+              <a:rPr lang="en-US" b="1" dirty="0">
+                <a:solidFill>
+                  <a:srgbClr val="0A13F4"/>
+                </a:solidFill>
+              </a:rPr>
+              <a:t>The Core Ask:</a:t>
+            </a:r>
+          </a:p>
+          <a:p>
+            <a:endParaRPr lang="en-US" b="1" dirty="0">
+              <a:solidFill>
+                <a:srgbClr val="0A13F4"/>
+              </a:solidFill>
+            </a:endParaRPr>
+          </a:p>
+          <a:p>
+            <a:pPr marL="285750" indent="-285750">
+              <a:buFont typeface="Arial" panose="020B0604020202020204" pitchFamily="34" charset="0"/>
+              <a:buChar char="•"/>
+            </a:pPr>
+            <a:r>
+              <a:rPr lang="en-US" b="1" dirty="0"/>
+              <a:t>Patch only when it matters</a:t>
+            </a:r>
+            <a:endParaRPr lang="en-US" dirty="0"/>
+          </a:p>
+          <a:p>
+            <a:r>
+              <a:rPr lang="en-US" dirty="0"/>
+              <a:t>Apply updates only when there are critical CVEs—not every minor update, not on a fixed schedule regardless of risk.</a:t>
+            </a:r>
+          </a:p>
+          <a:p>
+            <a:r>
+              <a:rPr lang="en-US" dirty="0"/>
+              <a:t>CVE = </a:t>
+            </a:r>
+            <a:r>
+              <a:rPr lang="en-US" b="1" dirty="0"/>
+              <a:t>Common Vulnerabilities and Exposures.</a:t>
+            </a:r>
+            <a:endParaRPr lang="en-US" dirty="0"/>
+          </a:p>
+          <a:p>
+            <a:pPr marL="285750" indent="-285750">
+              <a:buFont typeface="Arial" panose="020B0604020202020204" pitchFamily="34" charset="0"/>
+              <a:buChar char="•"/>
+            </a:pPr>
+            <a:r>
+              <a:rPr lang="en-US" b="1" dirty="0"/>
+              <a:t>Stay production-safe</a:t>
+            </a:r>
+            <a:endParaRPr lang="en-US" dirty="0"/>
+          </a:p>
+          <a:p>
+            <a:r>
+              <a:rPr lang="en-US" dirty="0"/>
+              <a:t>Limit patching to security-related updates. No feature updates, no optional packages, no changes that could introduce breaking behavior.</a:t>
+            </a:r>
+          </a:p>
+          <a:p>
+            <a:pPr marL="285750" indent="-285750">
+              <a:buFont typeface="Arial" panose="020B0604020202020204" pitchFamily="34" charset="0"/>
+              <a:buChar char="•"/>
+            </a:pPr>
+            <a:r>
+              <a:rPr lang="en-US" b="1" dirty="0"/>
+              <a:t>Remove manual effort</a:t>
+            </a:r>
+            <a:endParaRPr lang="en-US" dirty="0"/>
+          </a:p>
+          <a:p>
+            <a:r>
+              <a:rPr lang="en-US" dirty="0"/>
+              <a:t>No more ad-hoc scripts, inconsistent pre-patch scans, or manual decisions about when to patch.</a:t>
+            </a:r>
+          </a:p>
+          <a:p>
+            <a:pPr marL="285750" indent="-285750">
+              <a:buFont typeface="Arial" panose="020B0604020202020204" pitchFamily="34" charset="0"/>
+              <a:buChar char="•"/>
+            </a:pPr>
+            <a:r>
+              <a:rPr lang="en-US" b="1" dirty="0"/>
+              <a:t>Use structured, reliable data</a:t>
+            </a:r>
+            <a:endParaRPr lang="en-US" dirty="0"/>
+          </a:p>
+          <a:p>
+            <a:r>
+              <a:rPr lang="en-US" dirty="0"/>
+              <a:t>Base patch decisions on authoritative CVE data (severity, affected packages, IDs), not raw command output or custom scripts.</a:t>
+            </a:r>
+          </a:p>
+          <a:p>
+            <a:pPr marL="285750" indent="-285750">
+              <a:buFont typeface="Arial" panose="020B0604020202020204" pitchFamily="34" charset="0"/>
+              <a:buChar char="•"/>
+            </a:pPr>
+            <a:r>
+              <a:rPr lang="en-US" b="1" dirty="0"/>
+              <a:t>Scale across the fleet</a:t>
+            </a:r>
+            <a:endParaRPr lang="en-US" dirty="0"/>
+          </a:p>
+          <a:p>
+            <a:r>
+              <a:rPr lang="en-US" dirty="0"/>
+              <a:t>Support RHEL8 and Windows across many instances without manual per-instance work.</a:t>
+            </a:r>
+          </a:p>
+          <a:p>
+            <a:endParaRPr lang="en-US" dirty="0"/>
+          </a:p>
+        </p:txBody>
+      </p:sp>
+    </p:spTree>
+    <p:extLst>
+      <p:ext uri="{BB962C8B-B14F-4D97-AF65-F5344CB8AC3E}">
+        <p14:creationId xmlns:p14="http://schemas.microsoft.com/office/powerpoint/2010/main" val="1830248627"/>
+      </p:ext>
+    </p:extLst>
+  </p:cSld>
+  <p:clrMapOvr>
+    <a:masterClrMapping/>
+  </p:clrMapOvr>
+</p:sld>
+</file>
+
+<file path=ppt/slides/slide3.xml><?xml version="1.0" encoding="utf-8"?>
+<p:sld xmlns:a="http://schemas.openxmlformats.org/drawingml/2006/main" xmlns:r="http://schemas.openxmlformats.org/officeDocument/2006/relationships" xmlns:p="http://schemas.openxmlformats.org/presentationml/2006/main">
+  <p:cSld>
+    <p:spTree>
+      <p:nvGrpSpPr>
+        <p:cNvPr id="1" name="">
+          <a:extLst>
+            <a:ext uri="{FF2B5EF4-FFF2-40B4-BE49-F238E27FC236}">
+              <a16:creationId xmlns:a16="http://schemas.microsoft.com/office/drawing/2014/main" id="{68E22379-B66B-889F-F814-6D87EA3CA36B}"/>
+            </a:ext>
+          </a:extLst>
+        </p:cNvPr>
+        <p:cNvGrpSpPr/>
+        <p:nvPr/>
+      </p:nvGrpSpPr>
+      <p:grpSpPr>
+        <a:xfrm>
+          <a:off x="0" y="0"/>
+          <a:ext cx="0" cy="0"/>
+          <a:chOff x="0" y="0"/>
+          <a:chExt cx="0" cy="0"/>
+        </a:xfrm>
+      </p:grpSpPr>
+      <p:sp>
+        <p:nvSpPr>
+          <p:cNvPr id="2" name="TextBox 1">
+            <a:extLst>
+              <a:ext uri="{FF2B5EF4-FFF2-40B4-BE49-F238E27FC236}">
+                <a16:creationId xmlns:a16="http://schemas.microsoft.com/office/drawing/2014/main" id="{752E937A-671D-E70C-8677-FE9524F73A6A}"/>
+              </a:ext>
+            </a:extLst>
+          </p:cNvPr>
+          <p:cNvSpPr txBox="1"/>
+          <p:nvPr/>
+        </p:nvSpPr>
+        <p:spPr>
+          <a:xfrm>
+            <a:off x="2499721" y="113624"/>
+            <a:ext cx="3089482" cy="646331"/>
+          </a:xfrm>
+          <a:prstGeom prst="rect">
+            <a:avLst/>
+          </a:prstGeom>
+          <a:noFill/>
+        </p:spPr>
+        <p:txBody>
+          <a:bodyPr wrap="square" rtlCol="0">
+            <a:spAutoFit/>
+          </a:bodyPr>
+          <a:lstStyle/>
+          <a:p>
+            <a:r>
+              <a:rPr lang="en-US" b="1" dirty="0">
+                <a:solidFill>
+                  <a:srgbClr val="0A13F4"/>
+                </a:solidFill>
+              </a:rPr>
+              <a:t>Success Criteria</a:t>
+            </a:r>
+          </a:p>
+          <a:p>
+            <a:endParaRPr lang="en-US" dirty="0"/>
+          </a:p>
+        </p:txBody>
+      </p:sp>
+      <p:graphicFrame>
+        <p:nvGraphicFramePr>
+          <p:cNvPr id="4" name="Table 3">
+            <a:extLst>
+              <a:ext uri="{FF2B5EF4-FFF2-40B4-BE49-F238E27FC236}">
+                <a16:creationId xmlns:a16="http://schemas.microsoft.com/office/drawing/2014/main" id="{C2AFA3CD-2B38-19FC-7FB8-E99E69E2B9FA}"/>
+              </a:ext>
+            </a:extLst>
+          </p:cNvPr>
+          <p:cNvGraphicFramePr>
+            <a:graphicFrameLocks noGrp="1"/>
+          </p:cNvGraphicFramePr>
+          <p:nvPr>
+            <p:extLst>
+              <p:ext uri="{D42A27DB-BD31-4B8C-83A1-F6EECF244321}">
+                <p14:modId xmlns:p14="http://schemas.microsoft.com/office/powerpoint/2010/main" val="937498075"/>
+              </p:ext>
+            </p:extLst>
+          </p:nvPr>
+        </p:nvGraphicFramePr>
+        <p:xfrm>
+          <a:off x="551885" y="612690"/>
+          <a:ext cx="7932016" cy="2816310"/>
+        </p:xfrm>
+        <a:graphic>
+          <a:graphicData uri="http://schemas.openxmlformats.org/drawingml/2006/table">
+            <a:tbl>
+              <a:tblPr/>
+              <a:tblGrid>
+                <a:gridCol w="1423627">
+                  <a:extLst>
+                    <a:ext uri="{9D8B030D-6E8A-4147-A177-3AD203B41FA5}">
+                      <a16:colId xmlns:a16="http://schemas.microsoft.com/office/drawing/2014/main" val="2275774282"/>
+                    </a:ext>
+                  </a:extLst>
+                </a:gridCol>
+                <a:gridCol w="6508389">
+                  <a:extLst>
+                    <a:ext uri="{9D8B030D-6E8A-4147-A177-3AD203B41FA5}">
+                      <a16:colId xmlns:a16="http://schemas.microsoft.com/office/drawing/2014/main" val="3027229116"/>
+                    </a:ext>
+                  </a:extLst>
+                </a:gridCol>
+              </a:tblGrid>
+              <a:tr h="296846">
+                <a:tc>
+                  <a:txBody>
+                    <a:bodyPr/>
+                    <a:lstStyle/>
+                    <a:p>
+                      <a:pPr>
+                        <a:buNone/>
+                      </a:pPr>
+                      <a:r>
+                        <a:rPr lang="en-US"/>
+                        <a:t>Outcome</a:t>
+                      </a:r>
+                    </a:p>
+                  </a:txBody>
+                  <a:tcPr anchor="ctr">
+                    <a:lnL>
+                      <a:noFill/>
+                    </a:lnL>
+                    <a:lnR>
+                      <a:noFill/>
+                    </a:lnR>
+                    <a:lnT>
+                      <a:noFill/>
+                    </a:lnT>
+                    <a:lnB>
+                      <a:noFill/>
+                    </a:lnB>
+                    <a:noFill/>
+                  </a:tcPr>
+                </a:tc>
+                <a:tc>
+                  <a:txBody>
+                    <a:bodyPr/>
+                    <a:lstStyle/>
+                    <a:p>
+                      <a:pPr>
+                        <a:buNone/>
+                      </a:pPr>
+                      <a:r>
+                        <a:rPr lang="en-US"/>
+                        <a:t>Description</a:t>
+                      </a:r>
+                    </a:p>
+                  </a:txBody>
+                  <a:tcPr anchor="ctr">
+                    <a:lnL>
+                      <a:noFill/>
+                    </a:lnL>
+                    <a:lnR>
+                      <a:noFill/>
+                    </a:lnR>
+                    <a:lnT>
+                      <a:noFill/>
+                    </a:lnT>
+                    <a:lnB>
+                      <a:noFill/>
+                    </a:lnB>
+                    <a:noFill/>
+                  </a:tcPr>
+                </a:tc>
+                <a:extLst>
+                  <a:ext uri="{0D108BD9-81ED-4DB2-BD59-A6C34878D82A}">
+                    <a16:rowId xmlns:a16="http://schemas.microsoft.com/office/drawing/2014/main" val="1769247865"/>
+                  </a:ext>
+                </a:extLst>
+              </a:tr>
+              <a:tr h="296846">
+                <a:tc>
+                  <a:txBody>
+                    <a:bodyPr/>
+                    <a:lstStyle/>
+                    <a:p>
+                      <a:pPr>
+                        <a:buNone/>
+                      </a:pPr>
+                      <a:r>
+                        <a:rPr lang="en-US" b="1"/>
+                        <a:t>Security</a:t>
+                      </a:r>
+                      <a:endParaRPr lang="en-US"/>
+                    </a:p>
+                  </a:txBody>
+                  <a:tcPr anchor="ctr">
+                    <a:lnL>
+                      <a:noFill/>
+                    </a:lnL>
+                    <a:lnR>
+                      <a:noFill/>
+                    </a:lnR>
+                    <a:lnT>
+                      <a:noFill/>
+                    </a:lnT>
+                    <a:lnB>
+                      <a:noFill/>
+                    </a:lnB>
+                    <a:noFill/>
+                  </a:tcPr>
+                </a:tc>
+                <a:tc>
+                  <a:txBody>
+                    <a:bodyPr/>
+                    <a:lstStyle/>
+                    <a:p>
+                      <a:pPr>
+                        <a:buNone/>
+                      </a:pPr>
+                      <a:r>
+                        <a:rPr lang="en-US"/>
+                        <a:t>Critical CVEs are patched in a timely way</a:t>
+                      </a:r>
+                    </a:p>
+                  </a:txBody>
+                  <a:tcPr anchor="ctr">
+                    <a:lnL>
+                      <a:noFill/>
+                    </a:lnL>
+                    <a:lnR>
+                      <a:noFill/>
+                    </a:lnR>
+                    <a:lnT>
+                      <a:noFill/>
+                    </a:lnT>
+                    <a:lnB>
+                      <a:noFill/>
+                    </a:lnB>
+                    <a:noFill/>
+                  </a:tcPr>
+                </a:tc>
+                <a:extLst>
+                  <a:ext uri="{0D108BD9-81ED-4DB2-BD59-A6C34878D82A}">
+                    <a16:rowId xmlns:a16="http://schemas.microsoft.com/office/drawing/2014/main" val="1336791099"/>
+                  </a:ext>
+                </a:extLst>
+              </a:tr>
+              <a:tr h="481570">
+                <a:tc>
+                  <a:txBody>
+                    <a:bodyPr/>
+                    <a:lstStyle/>
+                    <a:p>
+                      <a:pPr>
+                        <a:buNone/>
+                      </a:pPr>
+                      <a:r>
+                        <a:rPr lang="en-US" b="1" dirty="0"/>
+                        <a:t>Stability</a:t>
+                      </a:r>
+                      <a:endParaRPr lang="en-US" dirty="0"/>
+                    </a:p>
+                  </a:txBody>
+                  <a:tcPr anchor="ctr">
+                    <a:lnL>
+                      <a:noFill/>
+                    </a:lnL>
+                    <a:lnR>
+                      <a:noFill/>
+                    </a:lnR>
+                    <a:lnT>
+                      <a:noFill/>
+                    </a:lnT>
+                    <a:lnB>
+                      <a:noFill/>
+                    </a:lnB>
+                    <a:noFill/>
+                  </a:tcPr>
+                </a:tc>
+                <a:tc>
+                  <a:txBody>
+                    <a:bodyPr/>
+                    <a:lstStyle/>
+                    <a:p>
+                      <a:pPr>
+                        <a:buNone/>
+                      </a:pPr>
+                      <a:r>
+                        <a:rPr lang="en-US"/>
+                        <a:t>Only security updates are applied; production risk is minimized</a:t>
+                      </a:r>
+                    </a:p>
+                  </a:txBody>
+                  <a:tcPr anchor="ctr">
+                    <a:lnL>
+                      <a:noFill/>
+                    </a:lnL>
+                    <a:lnR>
+                      <a:noFill/>
+                    </a:lnR>
+                    <a:lnT>
+                      <a:noFill/>
+                    </a:lnT>
+                    <a:lnB>
+                      <a:noFill/>
+                    </a:lnB>
+                    <a:noFill/>
+                  </a:tcPr>
+                </a:tc>
+                <a:extLst>
+                  <a:ext uri="{0D108BD9-81ED-4DB2-BD59-A6C34878D82A}">
+                    <a16:rowId xmlns:a16="http://schemas.microsoft.com/office/drawing/2014/main" val="2768615019"/>
+                  </a:ext>
+                </a:extLst>
+              </a:tr>
+              <a:tr h="481570">
+                <a:tc>
+                  <a:txBody>
+                    <a:bodyPr/>
+                    <a:lstStyle/>
+                    <a:p>
+                      <a:pPr>
+                        <a:buNone/>
+                      </a:pPr>
+                      <a:r>
+                        <a:rPr lang="en-US" b="1"/>
+                        <a:t>Automation</a:t>
+                      </a:r>
+                      <a:endParaRPr lang="en-US"/>
+                    </a:p>
+                  </a:txBody>
+                  <a:tcPr anchor="ctr">
+                    <a:lnL>
+                      <a:noFill/>
+                    </a:lnL>
+                    <a:lnR>
+                      <a:noFill/>
+                    </a:lnR>
+                    <a:lnT>
+                      <a:noFill/>
+                    </a:lnT>
+                    <a:lnB>
+                      <a:noFill/>
+                    </a:lnB>
+                    <a:noFill/>
+                  </a:tcPr>
+                </a:tc>
+                <a:tc>
+                  <a:txBody>
+                    <a:bodyPr/>
+                    <a:lstStyle/>
+                    <a:p>
+                      <a:pPr>
+                        <a:buNone/>
+                      </a:pPr>
+                      <a:r>
+                        <a:rPr lang="en-US"/>
+                        <a:t>Patching runs on a schedule with minimal human intervention</a:t>
+                      </a:r>
+                    </a:p>
+                  </a:txBody>
+                  <a:tcPr anchor="ctr">
+                    <a:lnL>
+                      <a:noFill/>
+                    </a:lnL>
+                    <a:lnR>
+                      <a:noFill/>
+                    </a:lnR>
+                    <a:lnT>
+                      <a:noFill/>
+                    </a:lnT>
+                    <a:lnB>
+                      <a:noFill/>
+                    </a:lnB>
+                    <a:noFill/>
+                  </a:tcPr>
+                </a:tc>
+                <a:extLst>
+                  <a:ext uri="{0D108BD9-81ED-4DB2-BD59-A6C34878D82A}">
+                    <a16:rowId xmlns:a16="http://schemas.microsoft.com/office/drawing/2014/main" val="1259206317"/>
+                  </a:ext>
+                </a:extLst>
+              </a:tr>
+              <a:tr h="519481">
+                <a:tc>
+                  <a:txBody>
+                    <a:bodyPr/>
+                    <a:lstStyle/>
+                    <a:p>
+                      <a:pPr>
+                        <a:buNone/>
+                      </a:pPr>
+                      <a:r>
+                        <a:rPr lang="en-US" b="1"/>
+                        <a:t>Visibility</a:t>
+                      </a:r>
+                      <a:endParaRPr lang="en-US"/>
+                    </a:p>
+                  </a:txBody>
+                  <a:tcPr anchor="ctr">
+                    <a:lnL>
+                      <a:noFill/>
+                    </a:lnL>
+                    <a:lnR>
+                      <a:noFill/>
+                    </a:lnR>
+                    <a:lnT>
+                      <a:noFill/>
+                    </a:lnT>
+                    <a:lnB>
+                      <a:noFill/>
+                    </a:lnB>
+                    <a:noFill/>
+                  </a:tcPr>
+                </a:tc>
+                <a:tc>
+                  <a:txBody>
+                    <a:bodyPr/>
+                    <a:lstStyle/>
+                    <a:p>
+                      <a:pPr>
+                        <a:buNone/>
+                      </a:pPr>
+                      <a:r>
+                        <a:rPr lang="en-US"/>
+                        <a:t>Patch decisions are traceable; reports exist for audit and troubleshooting</a:t>
+                      </a:r>
+                    </a:p>
+                  </a:txBody>
+                  <a:tcPr anchor="ctr">
+                    <a:lnL>
+                      <a:noFill/>
+                    </a:lnL>
+                    <a:lnR>
+                      <a:noFill/>
+                    </a:lnR>
+                    <a:lnT>
+                      <a:noFill/>
+                    </a:lnT>
+                    <a:lnB>
+                      <a:noFill/>
+                    </a:lnB>
+                    <a:noFill/>
+                  </a:tcPr>
+                </a:tc>
+                <a:extLst>
+                  <a:ext uri="{0D108BD9-81ED-4DB2-BD59-A6C34878D82A}">
+                    <a16:rowId xmlns:a16="http://schemas.microsoft.com/office/drawing/2014/main" val="1703346078"/>
+                  </a:ext>
+                </a:extLst>
+              </a:tr>
+              <a:tr h="481570">
+                <a:tc>
+                  <a:txBody>
+                    <a:bodyPr/>
+                    <a:lstStyle/>
+                    <a:p>
+                      <a:pPr>
+                        <a:buNone/>
+                      </a:pPr>
+                      <a:r>
+                        <a:rPr lang="en-US" b="1"/>
+                        <a:t>Consistency</a:t>
+                      </a:r>
+                      <a:endParaRPr lang="en-US"/>
+                    </a:p>
+                  </a:txBody>
+                  <a:tcPr anchor="ctr">
+                    <a:lnL>
+                      <a:noFill/>
+                    </a:lnL>
+                    <a:lnR>
+                      <a:noFill/>
+                    </a:lnR>
+                    <a:lnT>
+                      <a:noFill/>
+                    </a:lnT>
+                    <a:lnB>
+                      <a:noFill/>
+                    </a:lnB>
+                    <a:noFill/>
+                  </a:tcPr>
+                </a:tc>
+                <a:tc>
+                  <a:txBody>
+                    <a:bodyPr/>
+                    <a:lstStyle/>
+                    <a:p>
+                      <a:pPr>
+                        <a:buNone/>
+                      </a:pPr>
+                      <a:r>
+                        <a:rPr lang="en-US" dirty="0"/>
+                        <a:t>Same process for RHEL and Windows, driven by a single workflow</a:t>
+                      </a:r>
+                    </a:p>
+                  </a:txBody>
+                  <a:tcPr anchor="ctr">
+                    <a:lnL>
+                      <a:noFill/>
+                    </a:lnL>
+                    <a:lnR>
+                      <a:noFill/>
+                    </a:lnR>
+                    <a:lnT>
+                      <a:noFill/>
+                    </a:lnT>
+                    <a:lnB>
+                      <a:noFill/>
+                    </a:lnB>
+                    <a:noFill/>
+                  </a:tcPr>
+                </a:tc>
+                <a:extLst>
+                  <a:ext uri="{0D108BD9-81ED-4DB2-BD59-A6C34878D82A}">
+                    <a16:rowId xmlns:a16="http://schemas.microsoft.com/office/drawing/2014/main" val="3039029778"/>
+                  </a:ext>
+                </a:extLst>
+              </a:tr>
+            </a:tbl>
+          </a:graphicData>
+        </a:graphic>
+      </p:graphicFrame>
+      <p:sp>
+        <p:nvSpPr>
+          <p:cNvPr id="6" name="TextBox 5">
+            <a:extLst>
+              <a:ext uri="{FF2B5EF4-FFF2-40B4-BE49-F238E27FC236}">
+                <a16:creationId xmlns:a16="http://schemas.microsoft.com/office/drawing/2014/main" id="{85B76B40-EA6B-ACA8-9E70-85FC363EE167}"/>
+              </a:ext>
+            </a:extLst>
+          </p:cNvPr>
+          <p:cNvSpPr txBox="1"/>
+          <p:nvPr/>
+        </p:nvSpPr>
+        <p:spPr>
+          <a:xfrm>
+            <a:off x="286764" y="3846973"/>
+            <a:ext cx="8705738" cy="2308324"/>
+          </a:xfrm>
+          <a:prstGeom prst="rect">
+            <a:avLst/>
+          </a:prstGeom>
+          <a:noFill/>
+        </p:spPr>
+        <p:txBody>
+          <a:bodyPr wrap="square">
+            <a:spAutoFit/>
+          </a:bodyPr>
+          <a:lstStyle/>
+          <a:p>
+            <a:pPr>
+              <a:buNone/>
+            </a:pPr>
+            <a:r>
+              <a:rPr lang="en-US" b="1" dirty="0"/>
+              <a:t>What “Done” Looks Like</a:t>
+            </a:r>
+          </a:p>
+          <a:p>
+            <a:pPr>
+              <a:buFont typeface="Arial" panose="020B0604020202020204" pitchFamily="34" charset="0"/>
+              <a:buChar char="•"/>
+            </a:pPr>
+            <a:r>
+              <a:rPr lang="en-US" dirty="0"/>
+              <a:t>  Critical vulnerabilities are identified automatically from a trusted source (Inspector).</a:t>
+            </a:r>
+          </a:p>
+          <a:p>
+            <a:pPr>
+              <a:buFont typeface="Arial" panose="020B0604020202020204" pitchFamily="34" charset="0"/>
+              <a:buChar char="•"/>
+            </a:pPr>
+            <a:r>
+              <a:rPr lang="en-US" dirty="0"/>
+              <a:t>  An AI-driven decision determines whether patching is needed based on severity and context.</a:t>
+            </a:r>
+          </a:p>
+          <a:p>
+            <a:pPr>
+              <a:buFont typeface="Arial" panose="020B0604020202020204" pitchFamily="34" charset="0"/>
+              <a:buChar char="•"/>
+            </a:pPr>
+            <a:r>
+              <a:rPr lang="en-US" dirty="0"/>
+              <a:t>  When needed, only security updates are applied—CVE-related patches only.</a:t>
+            </a:r>
+          </a:p>
+          <a:p>
+            <a:pPr>
+              <a:buFont typeface="Arial" panose="020B0604020202020204" pitchFamily="34" charset="0"/>
+              <a:buChar char="•"/>
+            </a:pPr>
+            <a:r>
+              <a:rPr lang="en-US" dirty="0"/>
+              <a:t>  RHEL8 and Windows instances are patched in parallel.</a:t>
+            </a:r>
+          </a:p>
+          <a:p>
+            <a:pPr>
+              <a:buFont typeface="Arial" panose="020B0604020202020204" pitchFamily="34" charset="0"/>
+              <a:buChar char="•"/>
+            </a:pPr>
+            <a:r>
+              <a:rPr lang="en-US" dirty="0"/>
+              <a:t>  Each run leaves an audit trail and local reports for compliance and debugging.</a:t>
+            </a:r>
+          </a:p>
+          <a:p>
+            <a:pPr>
+              <a:buFont typeface="Arial" panose="020B0604020202020204" pitchFamily="34" charset="0"/>
+              <a:buChar char="•"/>
+            </a:pPr>
+            <a:r>
+              <a:rPr lang="en-US" dirty="0"/>
+              <a:t>  The entire flow is automated, repeatable, and deployable via Infrastructure as Code.</a:t>
+            </a:r>
+          </a:p>
+        </p:txBody>
+      </p:sp>
+    </p:spTree>
+    <p:extLst>
+      <p:ext uri="{BB962C8B-B14F-4D97-AF65-F5344CB8AC3E}">
+        <p14:creationId xmlns:p14="http://schemas.microsoft.com/office/powerpoint/2010/main" val="1810032658"/>
+      </p:ext>
+    </p:extLst>
+  </p:cSld>
+  <p:clrMapOvr>
+    <a:masterClrMapping/>
+  </p:clrMapOvr>
+</p:sld>
+</file>
+
+<file path=ppt/slides/slide4.xml><?xml version="1.0" encoding="utf-8"?>
+<p:sld xmlns:a="http://schemas.openxmlformats.org/drawingml/2006/main" xmlns:r="http://schemas.openxmlformats.org/officeDocument/2006/relationships" xmlns:p="http://schemas.openxmlformats.org/presentationml/2006/main">
+  <p:cSld>
+    <p:spTree>
+      <p:nvGrpSpPr>
+        <p:cNvPr id="1" name="">
+          <a:extLst>
+            <a:ext uri="{FF2B5EF4-FFF2-40B4-BE49-F238E27FC236}">
+              <a16:creationId xmlns:a16="http://schemas.microsoft.com/office/drawing/2014/main" id="{51BB09BC-B7D4-6BD4-46AE-2ABD830F8B6E}"/>
+            </a:ext>
+          </a:extLst>
+        </p:cNvPr>
+        <p:cNvGrpSpPr/>
+        <p:nvPr/>
+      </p:nvGrpSpPr>
+      <p:grpSpPr>
+        <a:xfrm>
+          <a:off x="0" y="0"/>
+          <a:ext cx="0" cy="0"/>
+          <a:chOff x="0" y="0"/>
+          <a:chExt cx="0" cy="0"/>
+        </a:xfrm>
+      </p:grpSpPr>
+      <p:sp>
+        <p:nvSpPr>
+          <p:cNvPr id="2" name="Title 1">
+            <a:extLst>
+              <a:ext uri="{FF2B5EF4-FFF2-40B4-BE49-F238E27FC236}">
+                <a16:creationId xmlns:a16="http://schemas.microsoft.com/office/drawing/2014/main" id="{CB185B07-2542-730E-4BA9-D03EAD29A5BE}"/>
+              </a:ext>
+            </a:extLst>
+          </p:cNvPr>
+          <p:cNvSpPr>
+            <a:spLocks noGrp="1"/>
+          </p:cNvSpPr>
+          <p:nvPr>
+            <p:ph type="ctrTitle"/>
+          </p:nvPr>
+        </p:nvSpPr>
+        <p:spPr>
+          <a:xfrm>
+            <a:off x="2026152" y="276294"/>
+            <a:ext cx="4886120" cy="651264"/>
+          </a:xfrm>
+        </p:spPr>
+        <p:txBody>
+          <a:bodyPr>
+            <a:normAutofit fontScale="90000"/>
+          </a:bodyPr>
+          <a:lstStyle/>
+          <a:p>
+            <a:r>
+              <a:rPr lang="en-US" sz="2400" b="1" dirty="0">
+                <a:solidFill>
+                  <a:srgbClr val="00B050"/>
+                </a:solidFill>
+              </a:rPr>
+              <a:t>Production-Safe CVE Patching with </a:t>
+            </a:r>
+            <a:br>
+              <a:rPr lang="en-US" sz="2400" b="1" dirty="0">
+                <a:solidFill>
+                  <a:srgbClr val="00B050"/>
+                </a:solidFill>
+              </a:rPr>
+            </a:br>
+            <a:r>
+              <a:rPr lang="en-US" sz="2400" b="1" dirty="0">
+                <a:solidFill>
+                  <a:srgbClr val="00B050"/>
+                </a:solidFill>
+              </a:rPr>
+              <a:t>AWS Lambda, Inspector, and Bedrock</a:t>
+            </a:r>
+            <a:br>
+              <a:rPr lang="en-US" sz="2400" dirty="0"/>
+            </a:br>
+            <a:endParaRPr sz="2400" dirty="0">
+              <a:solidFill>
+                <a:schemeClr val="accent6">
+                  <a:lumMod val="75000"/>
+                </a:schemeClr>
+              </a:solidFill>
+            </a:endParaRPr>
+          </a:p>
+        </p:txBody>
+      </p:sp>
+      <p:sp>
+        <p:nvSpPr>
+          <p:cNvPr id="3" name="Subtitle 2">
+            <a:extLst>
+              <a:ext uri="{FF2B5EF4-FFF2-40B4-BE49-F238E27FC236}">
+                <a16:creationId xmlns:a16="http://schemas.microsoft.com/office/drawing/2014/main" id="{5F316623-090C-73C0-A17B-17C95EA97361}"/>
+              </a:ext>
+            </a:extLst>
+          </p:cNvPr>
+          <p:cNvSpPr>
+            <a:spLocks noGrp="1"/>
+          </p:cNvSpPr>
+          <p:nvPr>
+            <p:ph type="subTitle" idx="1"/>
+          </p:nvPr>
+        </p:nvSpPr>
+        <p:spPr>
+          <a:xfrm>
+            <a:off x="654553" y="1465342"/>
+            <a:ext cx="7943438" cy="5116364"/>
+          </a:xfrm>
+        </p:spPr>
+        <p:txBody>
+          <a:bodyPr>
+            <a:noAutofit/>
+          </a:bodyPr>
+          <a:lstStyle/>
+          <a:p>
+            <a:pPr marL="171450" indent="-171450" algn="l">
+              <a:buFont typeface="Arial" panose="020B0604020202020204" pitchFamily="34" charset="0"/>
+              <a:buChar char="•"/>
+            </a:pPr>
+            <a:r>
+              <a:rPr lang="en-US" sz="2400" dirty="0">
+                <a:solidFill>
+                  <a:schemeClr val="tx1"/>
+                </a:solidFill>
+              </a:rPr>
+              <a:t>Automated CVE patching for </a:t>
+            </a:r>
+            <a:r>
+              <a:rPr lang="en-US" sz="2400" b="1" dirty="0">
+                <a:solidFill>
+                  <a:schemeClr val="tx1"/>
+                </a:solidFill>
+              </a:rPr>
+              <a:t>RHEL8</a:t>
+            </a:r>
+            <a:r>
+              <a:rPr lang="en-US" sz="2400" dirty="0">
+                <a:solidFill>
+                  <a:schemeClr val="tx1"/>
+                </a:solidFill>
+              </a:rPr>
+              <a:t> and </a:t>
+            </a:r>
+            <a:r>
+              <a:rPr lang="en-US" sz="2400" b="1" dirty="0">
+                <a:solidFill>
+                  <a:schemeClr val="tx1"/>
+                </a:solidFill>
+              </a:rPr>
+              <a:t>Windows</a:t>
+            </a:r>
+            <a:r>
+              <a:rPr lang="en-US" sz="2400" dirty="0">
+                <a:solidFill>
+                  <a:schemeClr val="tx1"/>
+                </a:solidFill>
+              </a:rPr>
+              <a:t> servers</a:t>
+            </a:r>
+          </a:p>
+          <a:p>
+            <a:pPr marL="171450" indent="-171450" algn="l">
+              <a:buFont typeface="Arial" panose="020B0604020202020204" pitchFamily="34" charset="0"/>
+              <a:buChar char="•"/>
+            </a:pPr>
+            <a:r>
+              <a:rPr lang="en-US" sz="2400" dirty="0">
+                <a:solidFill>
+                  <a:schemeClr val="tx1"/>
+                </a:solidFill>
+              </a:rPr>
+              <a:t>Uses </a:t>
+            </a:r>
+            <a:r>
+              <a:rPr lang="en-US" sz="2400" b="1" dirty="0">
+                <a:solidFill>
+                  <a:schemeClr val="tx1"/>
+                </a:solidFill>
+              </a:rPr>
+              <a:t>Amazon Inspector v2</a:t>
+            </a:r>
+            <a:r>
+              <a:rPr lang="en-US" sz="2400" dirty="0">
+                <a:solidFill>
+                  <a:schemeClr val="tx1"/>
+                </a:solidFill>
+              </a:rPr>
+              <a:t> for vulnerability scanning</a:t>
+            </a:r>
+          </a:p>
+          <a:p>
+            <a:pPr marL="171450" indent="-171450" algn="l">
+              <a:buFont typeface="Arial" panose="020B0604020202020204" pitchFamily="34" charset="0"/>
+              <a:buChar char="•"/>
+            </a:pPr>
+            <a:r>
+              <a:rPr lang="en-US" sz="2400" dirty="0">
+                <a:solidFill>
+                  <a:schemeClr val="tx1"/>
+                </a:solidFill>
+              </a:rPr>
+              <a:t>Uses </a:t>
+            </a:r>
+            <a:r>
+              <a:rPr lang="en-US" sz="2400" b="1" dirty="0">
+                <a:solidFill>
+                  <a:schemeClr val="tx1"/>
+                </a:solidFill>
+              </a:rPr>
+              <a:t>Bedrock</a:t>
+            </a:r>
+            <a:r>
+              <a:rPr lang="en-US" sz="2400" dirty="0">
+                <a:solidFill>
+                  <a:schemeClr val="tx1"/>
+                </a:solidFill>
+              </a:rPr>
+              <a:t> (Amazon Nova 2 Lite) for AI-driven patch decisions</a:t>
+            </a:r>
+          </a:p>
+          <a:p>
+            <a:pPr marL="171450" indent="-171450" algn="l">
+              <a:buFont typeface="Arial" panose="020B0604020202020204" pitchFamily="34" charset="0"/>
+              <a:buChar char="•"/>
+            </a:pPr>
+            <a:r>
+              <a:rPr lang="en-US" sz="2400" dirty="0">
+                <a:solidFill>
+                  <a:schemeClr val="tx1"/>
+                </a:solidFill>
+              </a:rPr>
+              <a:t>Orchestrated by </a:t>
+            </a:r>
+            <a:r>
+              <a:rPr lang="en-US" sz="2400" b="1" dirty="0">
+                <a:solidFill>
+                  <a:schemeClr val="tx1"/>
+                </a:solidFill>
+              </a:rPr>
+              <a:t>Step Functions</a:t>
+            </a:r>
+            <a:r>
+              <a:rPr lang="en-US" sz="2400" dirty="0">
+                <a:solidFill>
+                  <a:schemeClr val="tx1"/>
+                </a:solidFill>
+              </a:rPr>
+              <a:t>, triggered by </a:t>
+            </a:r>
+            <a:r>
+              <a:rPr lang="en-US" sz="2400" b="1" dirty="0" err="1">
+                <a:solidFill>
+                  <a:schemeClr val="tx1"/>
+                </a:solidFill>
+              </a:rPr>
+              <a:t>EventBridge</a:t>
+            </a:r>
+            <a:endParaRPr lang="en-US" sz="2400" dirty="0">
+              <a:solidFill>
+                <a:schemeClr val="tx1"/>
+              </a:solidFill>
+            </a:endParaRPr>
+          </a:p>
+          <a:p>
+            <a:pPr marL="171450" indent="-171450" algn="l">
+              <a:buFont typeface="Arial" panose="020B0604020202020204" pitchFamily="34" charset="0"/>
+              <a:buChar char="•"/>
+            </a:pPr>
+            <a:r>
+              <a:rPr lang="en-US" sz="2400" b="1" dirty="0">
+                <a:solidFill>
+                  <a:schemeClr val="tx1"/>
+                </a:solidFill>
+              </a:rPr>
+              <a:t>CVE-only</a:t>
+            </a:r>
+            <a:r>
+              <a:rPr lang="en-US" sz="2400" dirty="0">
+                <a:solidFill>
+                  <a:schemeClr val="tx1"/>
+                </a:solidFill>
+              </a:rPr>
+              <a:t> patching – security updates only, production-safe</a:t>
+            </a:r>
+          </a:p>
+        </p:txBody>
+      </p:sp>
+    </p:spTree>
+    <p:extLst>
+      <p:ext uri="{BB962C8B-B14F-4D97-AF65-F5344CB8AC3E}">
+        <p14:creationId xmlns:p14="http://schemas.microsoft.com/office/powerpoint/2010/main" val="2547233094"/>
+      </p:ext>
+    </p:extLst>
+  </p:cSld>
+  <p:clrMapOvr>
+    <a:masterClrMapping/>
+  </p:clrMapOvr>
+</p:sld>
+</file>
+
+<file path=ppt/slides/slide5.xml><?xml version="1.0" encoding="utf-8"?>
+<p:sld xmlns:a="http://schemas.openxmlformats.org/drawingml/2006/main" xmlns:r="http://schemas.openxmlformats.org/officeDocument/2006/relationships" xmlns:p="http://schemas.openxmlformats.org/presentationml/2006/main">
+  <p:cSld>
+    <p:spTree>
+      <p:nvGrpSpPr>
+        <p:cNvPr id="1" name="">
+          <a:extLst>
+            <a:ext uri="{FF2B5EF4-FFF2-40B4-BE49-F238E27FC236}">
+              <a16:creationId xmlns:a16="http://schemas.microsoft.com/office/drawing/2014/main" id="{9CAFAEA6-9F06-9DDB-9CAC-0A3D140FE2E2}"/>
+            </a:ext>
+          </a:extLst>
+        </p:cNvPr>
+        <p:cNvGrpSpPr/>
+        <p:nvPr/>
+      </p:nvGrpSpPr>
+      <p:grpSpPr>
+        <a:xfrm>
+          <a:off x="0" y="0"/>
+          <a:ext cx="0" cy="0"/>
+          <a:chOff x="0" y="0"/>
+          <a:chExt cx="0" cy="0"/>
+        </a:xfrm>
+      </p:grpSpPr>
+      <p:sp>
+        <p:nvSpPr>
+          <p:cNvPr id="3" name="TextBox 2">
+            <a:extLst>
+              <a:ext uri="{FF2B5EF4-FFF2-40B4-BE49-F238E27FC236}">
+                <a16:creationId xmlns:a16="http://schemas.microsoft.com/office/drawing/2014/main" id="{5F07811F-6302-32B9-8898-1A62528DB8A1}"/>
+              </a:ext>
+            </a:extLst>
+          </p:cNvPr>
+          <p:cNvSpPr txBox="1"/>
+          <p:nvPr/>
+        </p:nvSpPr>
+        <p:spPr>
+          <a:xfrm>
+            <a:off x="1677302" y="147759"/>
+            <a:ext cx="5115770" cy="369332"/>
+          </a:xfrm>
+          <a:prstGeom prst="rect">
+            <a:avLst/>
+          </a:prstGeom>
+          <a:noFill/>
+        </p:spPr>
+        <p:txBody>
+          <a:bodyPr wrap="square">
+            <a:spAutoFit/>
+          </a:bodyPr>
+          <a:lstStyle/>
+          <a:p>
+            <a:r>
+              <a:rPr lang="en-US" b="1" dirty="0">
+                <a:solidFill>
+                  <a:srgbClr val="0A13F4"/>
+                </a:solidFill>
+              </a:rPr>
+              <a:t>Guardrails for Patching RHEL8 and Windows Hosts</a:t>
+            </a:r>
+          </a:p>
+        </p:txBody>
+      </p:sp>
+      <p:sp>
+        <p:nvSpPr>
+          <p:cNvPr id="4" name="TextBox 3">
+            <a:extLst>
+              <a:ext uri="{FF2B5EF4-FFF2-40B4-BE49-F238E27FC236}">
+                <a16:creationId xmlns:a16="http://schemas.microsoft.com/office/drawing/2014/main" id="{69122997-11B7-FF5D-740B-B26DD403089E}"/>
+              </a:ext>
+            </a:extLst>
+          </p:cNvPr>
+          <p:cNvSpPr txBox="1"/>
+          <p:nvPr/>
+        </p:nvSpPr>
+        <p:spPr>
+          <a:xfrm>
+            <a:off x="995559" y="770885"/>
+            <a:ext cx="7775105" cy="4247317"/>
+          </a:xfrm>
+          <a:prstGeom prst="rect">
+            <a:avLst/>
+          </a:prstGeom>
+          <a:noFill/>
+        </p:spPr>
+        <p:txBody>
+          <a:bodyPr wrap="square">
+            <a:spAutoFit/>
+          </a:bodyPr>
+          <a:lstStyle/>
+          <a:p>
+            <a:pPr marL="342900" indent="-342900">
+              <a:buFont typeface="+mj-lt"/>
+              <a:buAutoNum type="arabicPeriod"/>
+            </a:pPr>
+            <a:r>
+              <a:rPr lang="en-US" dirty="0"/>
+              <a:t>Circuit-Breaker (CVE Block After Reboot Failure).</a:t>
+            </a:r>
+          </a:p>
+          <a:p>
+            <a:pPr marL="342900" indent="-342900">
+              <a:buFont typeface="+mj-lt"/>
+              <a:buAutoNum type="arabicPeriod"/>
+            </a:pPr>
+            <a:r>
+              <a:rPr lang="en-US" dirty="0"/>
+              <a:t>CVE Analysis (Bedrock)</a:t>
+            </a:r>
+          </a:p>
+          <a:p>
+            <a:pPr marL="342900" indent="-342900">
+              <a:buFont typeface="+mj-lt"/>
+              <a:buAutoNum type="arabicPeriod"/>
+            </a:pPr>
+            <a:r>
+              <a:rPr lang="en-US" dirty="0">
+                <a:solidFill>
+                  <a:srgbClr val="00B0F0"/>
+                </a:solidFill>
+              </a:rPr>
+              <a:t>Pre-Patch AMI</a:t>
+            </a:r>
+          </a:p>
+          <a:p>
+            <a:pPr marL="342900" indent="-342900">
+              <a:buFont typeface="+mj-lt"/>
+              <a:buAutoNum type="arabicPeriod"/>
+            </a:pPr>
+            <a:r>
+              <a:rPr lang="en-US" dirty="0"/>
+              <a:t>Dry-Run Mode</a:t>
+            </a:r>
+          </a:p>
+          <a:p>
+            <a:pPr marL="342900" indent="-342900">
+              <a:buFont typeface="+mj-lt"/>
+              <a:buAutoNum type="arabicPeriod"/>
+            </a:pPr>
+            <a:r>
+              <a:rPr lang="en-US" dirty="0"/>
+              <a:t>Maintenance Window</a:t>
+            </a:r>
+          </a:p>
+          <a:p>
+            <a:pPr marL="342900" indent="-342900">
+              <a:buFont typeface="+mj-lt"/>
+              <a:buAutoNum type="arabicPeriod"/>
+            </a:pPr>
+            <a:r>
+              <a:rPr lang="en-US" dirty="0">
+                <a:solidFill>
+                  <a:srgbClr val="00B0F0"/>
+                </a:solidFill>
+              </a:rPr>
+              <a:t>Instance Exclusion (</a:t>
+            </a:r>
+            <a:r>
+              <a:rPr lang="en-US" dirty="0" err="1">
+                <a:solidFill>
+                  <a:srgbClr val="00B0F0"/>
+                </a:solidFill>
+              </a:rPr>
+              <a:t>PatchExcluded</a:t>
+            </a:r>
+            <a:r>
+              <a:rPr lang="en-US" dirty="0">
+                <a:solidFill>
+                  <a:srgbClr val="00B0F0"/>
+                </a:solidFill>
+              </a:rPr>
+              <a:t> Tag)</a:t>
+            </a:r>
+          </a:p>
+          <a:p>
+            <a:pPr marL="342900" indent="-342900">
+              <a:buFont typeface="+mj-lt"/>
+              <a:buAutoNum type="arabicPeriod"/>
+            </a:pPr>
+            <a:r>
+              <a:rPr lang="en-US" dirty="0"/>
+              <a:t>SSM Agent Health Pre-Check</a:t>
+            </a:r>
+          </a:p>
+          <a:p>
+            <a:pPr marL="342900" indent="-342900">
+              <a:buFont typeface="+mj-lt"/>
+              <a:buAutoNum type="arabicPeriod"/>
+            </a:pPr>
+            <a:r>
+              <a:rPr lang="en-US" dirty="0"/>
+              <a:t>Canary / Phased Rollout</a:t>
+            </a:r>
+          </a:p>
+          <a:p>
+            <a:pPr marL="342900" indent="-342900">
+              <a:buFont typeface="+mj-lt"/>
+              <a:buAutoNum type="arabicPeriod"/>
+            </a:pPr>
+            <a:r>
+              <a:rPr lang="en-US" dirty="0">
+                <a:solidFill>
+                  <a:srgbClr val="00B0F0"/>
+                </a:solidFill>
+              </a:rPr>
+              <a:t>Batched Patching</a:t>
+            </a:r>
+          </a:p>
+          <a:p>
+            <a:pPr marL="342900" indent="-342900">
+              <a:buFont typeface="+mj-lt"/>
+              <a:buAutoNum type="arabicPeriod"/>
+            </a:pPr>
+            <a:r>
+              <a:rPr lang="en-US" dirty="0"/>
+              <a:t>Failure Detection (Within Run)</a:t>
+            </a:r>
+          </a:p>
+          <a:p>
+            <a:pPr marL="342900" indent="-342900">
+              <a:buFont typeface="+mj-lt"/>
+              <a:buAutoNum type="arabicPeriod"/>
+            </a:pPr>
+            <a:r>
+              <a:rPr lang="en-US" dirty="0"/>
+              <a:t>Patch Scope (RHEL – Security Only)</a:t>
+            </a:r>
+          </a:p>
+          <a:p>
+            <a:pPr marL="342900" indent="-342900">
+              <a:buFont typeface="+mj-lt"/>
+              <a:buAutoNum type="arabicPeriod"/>
+            </a:pPr>
+            <a:r>
+              <a:rPr lang="en-US" dirty="0">
+                <a:solidFill>
+                  <a:srgbClr val="00B0F0"/>
+                </a:solidFill>
+              </a:rPr>
+              <a:t>Patch Baseline (Windows – CVE Only)</a:t>
+            </a:r>
+          </a:p>
+          <a:p>
+            <a:pPr marL="342900" indent="-342900">
+              <a:buFont typeface="+mj-lt"/>
+              <a:buAutoNum type="arabicPeriod"/>
+            </a:pPr>
+            <a:r>
+              <a:rPr lang="en-US" dirty="0"/>
+              <a:t>Reboot Behavior (Windows)</a:t>
+            </a:r>
+          </a:p>
+          <a:p>
+            <a:pPr marL="342900" indent="-342900">
+              <a:buFont typeface="+mj-lt"/>
+              <a:buAutoNum type="arabicPeriod"/>
+            </a:pPr>
+            <a:r>
+              <a:rPr lang="en-US" dirty="0"/>
+              <a:t>Workflow Failure Notification (SNS)</a:t>
+            </a:r>
+          </a:p>
+          <a:p>
+            <a:endParaRPr lang="en-US" dirty="0"/>
+          </a:p>
+        </p:txBody>
+      </p:sp>
+    </p:spTree>
+    <p:extLst>
+      <p:ext uri="{BB962C8B-B14F-4D97-AF65-F5344CB8AC3E}">
+        <p14:creationId xmlns:p14="http://schemas.microsoft.com/office/powerpoint/2010/main" val="3301708505"/>
+      </p:ext>
+    </p:extLst>
+  </p:cSld>
+  <p:clrMapOvr>
+    <a:masterClrMapping/>
+  </p:clrMapOvr>
+</p:sld>
+</file>
+
 <file path=ppt/slides/slide6.xml><?xml version="1.0" encoding="utf-8"?>
+<p:sld xmlns:a="http://schemas.openxmlformats.org/drawingml/2006/main" xmlns:r="http://schemas.openxmlformats.org/officeDocument/2006/relationships" xmlns:p="http://schemas.openxmlformats.org/presentationml/2006/main">
+  <p:cSld>
+    <p:spTree>
+      <p:nvGrpSpPr>
+        <p:cNvPr id="1" name="">
+          <a:extLst>
+            <a:ext uri="{FF2B5EF4-FFF2-40B4-BE49-F238E27FC236}">
+              <a16:creationId xmlns:a16="http://schemas.microsoft.com/office/drawing/2014/main" id="{F4E64146-2E6D-11D5-4209-0A7F120447ED}"/>
+            </a:ext>
+          </a:extLst>
+        </p:cNvPr>
+        <p:cNvGrpSpPr/>
+        <p:nvPr/>
+      </p:nvGrpSpPr>
+      <p:grpSpPr>
+        <a:xfrm>
+          <a:off x="0" y="0"/>
+          <a:ext cx="0" cy="0"/>
+          <a:chOff x="0" y="0"/>
+          <a:chExt cx="0" cy="0"/>
+        </a:xfrm>
+      </p:grpSpPr>
+    </p:spTree>
+    <p:extLst>
+      <p:ext uri="{BB962C8B-B14F-4D97-AF65-F5344CB8AC3E}">
+        <p14:creationId xmlns:p14="http://schemas.microsoft.com/office/powerpoint/2010/main" val="1189538047"/>
+      </p:ext>
+    </p:extLst>
+  </p:cSld>
+  <p:clrMapOvr>
+    <a:masterClrMapping/>
+  </p:clrMapOvr>
+</p:sld>
+</file>
+
+<file path=ppt/slides/slide7.xml><?xml version="1.0" encoding="utf-8"?>
+<p:sld xmlns:a="http://schemas.openxmlformats.org/drawingml/2006/main" xmlns:r="http://schemas.openxmlformats.org/officeDocument/2006/relationships" xmlns:p="http://schemas.openxmlformats.org/presentationml/2006/main">
+  <p:cSld>
+    <p:spTree>
+      <p:nvGrpSpPr>
+        <p:cNvPr id="1" name=""/>
+        <p:cNvGrpSpPr/>
+        <p:nvPr/>
+      </p:nvGrpSpPr>
+      <p:grpSpPr>
+        <a:xfrm>
+          <a:off x="0" y="0"/>
+          <a:ext cx="0" cy="0"/>
+          <a:chOff x="0" y="0"/>
+          <a:chExt cx="0" cy="0"/>
+        </a:xfrm>
+      </p:grpSpPr>
+      <p:pic>
+        <p:nvPicPr>
+          <p:cNvPr id="5" name="Picture 4">
+            <a:extLst>
+              <a:ext uri="{FF2B5EF4-FFF2-40B4-BE49-F238E27FC236}">
+                <a16:creationId xmlns:a16="http://schemas.microsoft.com/office/drawing/2014/main" id="{55B8B708-1168-6A3E-4975-A51014E039F5}"/>
+              </a:ext>
+            </a:extLst>
+          </p:cNvPr>
+          <p:cNvPicPr>
+            <a:picLocks noChangeAspect="1"/>
+          </p:cNvPicPr>
+          <p:nvPr/>
+        </p:nvPicPr>
+        <p:blipFill>
+          <a:blip r:embed="rId2"/>
+          <a:stretch>
+            <a:fillRect/>
+          </a:stretch>
+        </p:blipFill>
+        <p:spPr>
+          <a:xfrm>
+            <a:off x="1378226" y="846242"/>
+            <a:ext cx="6969567" cy="5894388"/>
+          </a:xfrm>
+          <a:prstGeom prst="rect">
+            <a:avLst/>
+          </a:prstGeom>
+        </p:spPr>
+      </p:pic>
+      <p:sp>
+        <p:nvSpPr>
+          <p:cNvPr id="2" name="Title 1">
+            <a:extLst>
+              <a:ext uri="{FF2B5EF4-FFF2-40B4-BE49-F238E27FC236}">
+                <a16:creationId xmlns:a16="http://schemas.microsoft.com/office/drawing/2014/main" id="{CA85390D-17EE-4DE3-4FD4-0FAB6EA41AF5}"/>
+              </a:ext>
+            </a:extLst>
+          </p:cNvPr>
+          <p:cNvSpPr>
+            <a:spLocks noGrp="1"/>
+          </p:cNvSpPr>
+          <p:nvPr>
+            <p:ph type="title"/>
+          </p:nvPr>
+        </p:nvSpPr>
+        <p:spPr>
+          <a:xfrm>
+            <a:off x="2398643" y="117371"/>
+            <a:ext cx="4743449" cy="728870"/>
+          </a:xfrm>
+        </p:spPr>
+        <p:txBody>
+          <a:bodyPr>
+            <a:normAutofit fontScale="90000"/>
+          </a:bodyPr>
+          <a:lstStyle/>
+          <a:p>
+            <a:r>
+              <a:rPr lang="en-US" dirty="0">
+                <a:solidFill>
+                  <a:srgbClr val="0A13F4"/>
+                </a:solidFill>
+              </a:rPr>
+              <a:t>Current Architecture</a:t>
+            </a:r>
+            <a:endParaRPr dirty="0">
+              <a:solidFill>
+                <a:srgbClr val="0A13F4"/>
+              </a:solidFill>
+            </a:endParaRPr>
+          </a:p>
+        </p:txBody>
+      </p:sp>
+    </p:spTree>
+    <p:extLst>
+      <p:ext uri="{BB962C8B-B14F-4D97-AF65-F5344CB8AC3E}">
+        <p14:creationId xmlns:p14="http://schemas.microsoft.com/office/powerpoint/2010/main" val="1293430633"/>
+      </p:ext>
+    </p:extLst>
+  </p:cSld>
+  <p:clrMapOvr>
+    <a:masterClrMapping/>
+  </p:clrMapOvr>
+</p:sld>
+</file>
+
+<file path=ppt/slides/slide8.xml><?xml version="1.0" encoding="utf-8"?>
+<p:sld xmlns:a="http://schemas.openxmlformats.org/drawingml/2006/main" xmlns:r="http://schemas.openxmlformats.org/officeDocument/2006/relationships" xmlns:p="http://schemas.openxmlformats.org/presentationml/2006/main">
+  <p:cSld>
+    <p:spTree>
+      <p:nvGrpSpPr>
+        <p:cNvPr id="1" name="">
+          <a:extLst>
+            <a:ext uri="{FF2B5EF4-FFF2-40B4-BE49-F238E27FC236}">
+              <a16:creationId xmlns:a16="http://schemas.microsoft.com/office/drawing/2014/main" id="{7D2834AC-7680-F908-4558-58A88E5B5426}"/>
+            </a:ext>
+          </a:extLst>
+        </p:cNvPr>
+        <p:cNvGrpSpPr/>
+        <p:nvPr/>
+      </p:nvGrpSpPr>
+      <p:grpSpPr>
+        <a:xfrm>
+          <a:off x="0" y="0"/>
+          <a:ext cx="0" cy="0"/>
+          <a:chOff x="0" y="0"/>
+          <a:chExt cx="0" cy="0"/>
+        </a:xfrm>
+      </p:grpSpPr>
+      <p:sp>
+        <p:nvSpPr>
+          <p:cNvPr id="4" name="TextBox 3">
+            <a:extLst>
+              <a:ext uri="{FF2B5EF4-FFF2-40B4-BE49-F238E27FC236}">
+                <a16:creationId xmlns:a16="http://schemas.microsoft.com/office/drawing/2014/main" id="{76D048C1-3BDF-3E76-A5E3-2DD31B3CC540}"/>
+              </a:ext>
+            </a:extLst>
+          </p:cNvPr>
+          <p:cNvSpPr txBox="1"/>
+          <p:nvPr/>
+        </p:nvSpPr>
+        <p:spPr>
+          <a:xfrm>
+            <a:off x="502470" y="1040178"/>
+            <a:ext cx="8641530" cy="5447645"/>
+          </a:xfrm>
+          <a:prstGeom prst="rect">
+            <a:avLst/>
+          </a:prstGeom>
+          <a:noFill/>
+        </p:spPr>
+        <p:txBody>
+          <a:bodyPr wrap="square">
+            <a:spAutoFit/>
+          </a:bodyPr>
+          <a:lstStyle/>
+          <a:p>
+            <a:pPr>
+              <a:buNone/>
+            </a:pPr>
+            <a:r>
+              <a:rPr lang="en-US" sz="1200" b="1" dirty="0">
+                <a:latin typeface="Courier New" panose="02070309020205020404" pitchFamily="49" charset="0"/>
+              </a:rPr>
+              <a:t>1. SCHEDULE (</a:t>
+            </a:r>
+            <a:r>
+              <a:rPr lang="en-US" sz="1200" b="1" dirty="0" err="1">
+                <a:latin typeface="Courier New" panose="02070309020205020404" pitchFamily="49" charset="0"/>
+              </a:rPr>
+              <a:t>EventBridge</a:t>
+            </a:r>
+            <a:r>
+              <a:rPr lang="en-US" sz="1200" b="1" dirty="0">
+                <a:latin typeface="Courier New" panose="02070309020205020404" pitchFamily="49" charset="0"/>
+              </a:rPr>
+              <a:t>)</a:t>
+            </a:r>
+          </a:p>
+          <a:p>
+            <a:pPr>
+              <a:buNone/>
+            </a:pPr>
+            <a:r>
+              <a:rPr lang="en-US" sz="1200" b="1" dirty="0">
+                <a:latin typeface="Courier New" panose="02070309020205020404" pitchFamily="49" charset="0"/>
+              </a:rPr>
+              <a:t>   │  </a:t>
+            </a:r>
+            <a:r>
+              <a:rPr lang="en-US" sz="1200" b="1" dirty="0" err="1">
+                <a:latin typeface="Courier New" panose="02070309020205020404" pitchFamily="49" charset="0"/>
+              </a:rPr>
+              <a:t>cron</a:t>
+            </a:r>
+            <a:r>
+              <a:rPr lang="en-US" sz="1200" b="1" dirty="0">
+                <a:latin typeface="Courier New" panose="02070309020205020404" pitchFamily="49" charset="0"/>
+              </a:rPr>
+              <a:t>(0 2 ? * 3#2 *)  →  2:00 AM UTC on 2nd Tuesday (after Patch Tuesday)</a:t>
+            </a:r>
+          </a:p>
+          <a:p>
+            <a:pPr>
+              <a:buNone/>
+            </a:pPr>
+            <a:r>
+              <a:rPr lang="en-US" sz="1200" b="1" dirty="0">
+                <a:latin typeface="Courier New" panose="02070309020205020404" pitchFamily="49" charset="0"/>
+              </a:rPr>
+              <a:t>   ▼</a:t>
+            </a:r>
+          </a:p>
+          <a:p>
+            <a:pPr>
+              <a:buNone/>
+            </a:pPr>
+            <a:r>
+              <a:rPr lang="en-US" sz="1200" b="1" dirty="0">
+                <a:solidFill>
+                  <a:schemeClr val="accent6"/>
+                </a:solidFill>
+                <a:latin typeface="Courier New" panose="02070309020205020404" pitchFamily="49" charset="0"/>
+              </a:rPr>
+              <a:t>2. DISCOVER INSTANCES (Lambda)</a:t>
+            </a:r>
+          </a:p>
+          <a:p>
+            <a:pPr>
+              <a:buNone/>
+            </a:pPr>
+            <a:r>
+              <a:rPr lang="en-US" sz="1200" b="1" dirty="0">
+                <a:solidFill>
+                  <a:schemeClr val="accent6"/>
+                </a:solidFill>
+                <a:latin typeface="Courier New" panose="02070309020205020404" pitchFamily="49" charset="0"/>
+              </a:rPr>
+              <a:t>   │  Instance Discovery Lambda: by tags (Role=patch-target) or static Terraform IDs</a:t>
+            </a:r>
+          </a:p>
+          <a:p>
+            <a:pPr>
+              <a:buNone/>
+            </a:pPr>
+            <a:r>
+              <a:rPr lang="en-US" sz="1200" b="1" dirty="0">
+                <a:solidFill>
+                  <a:schemeClr val="accent6"/>
+                </a:solidFill>
+                <a:latin typeface="Courier New" panose="02070309020205020404" pitchFamily="49" charset="0"/>
+              </a:rPr>
+              <a:t>   │  Excludes </a:t>
+            </a:r>
+            <a:r>
+              <a:rPr lang="en-US" sz="1200" b="1" dirty="0" err="1">
+                <a:solidFill>
+                  <a:schemeClr val="accent6"/>
+                </a:solidFill>
+                <a:latin typeface="Courier New" panose="02070309020205020404" pitchFamily="49" charset="0"/>
+              </a:rPr>
+              <a:t>PatchExcluded</a:t>
+            </a:r>
+            <a:r>
+              <a:rPr lang="en-US" sz="1200" b="1" dirty="0">
+                <a:solidFill>
+                  <a:schemeClr val="accent6"/>
+                </a:solidFill>
+                <a:latin typeface="Courier New" panose="02070309020205020404" pitchFamily="49" charset="0"/>
+              </a:rPr>
+              <a:t>=true</a:t>
+            </a:r>
+          </a:p>
+          <a:p>
+            <a:pPr>
+              <a:buNone/>
+            </a:pPr>
+            <a:r>
+              <a:rPr lang="en-US" sz="1200" b="1" dirty="0">
+                <a:latin typeface="Courier New" panose="02070309020205020404" pitchFamily="49" charset="0"/>
+              </a:rPr>
+              <a:t>   ▼</a:t>
+            </a:r>
+          </a:p>
+          <a:p>
+            <a:pPr>
+              <a:buNone/>
+            </a:pPr>
+            <a:r>
+              <a:rPr lang="en-US" sz="1200" b="1" dirty="0">
+                <a:latin typeface="Courier New" panose="02070309020205020404" pitchFamily="49" charset="0"/>
+              </a:rPr>
+              <a:t>3. CHECK SSM AGENT HEALTH (Lambda)</a:t>
+            </a:r>
+          </a:p>
+          <a:p>
+            <a:pPr>
+              <a:buNone/>
+            </a:pPr>
+            <a:r>
+              <a:rPr lang="en-US" sz="1200" b="1" dirty="0">
+                <a:latin typeface="Courier New" panose="02070309020205020404" pitchFamily="49" charset="0"/>
+              </a:rPr>
+              <a:t>   │  Filters out instances not in SSM Managed state; sends SNS alert if any excluded</a:t>
+            </a:r>
+          </a:p>
+          <a:p>
+            <a:pPr>
+              <a:buNone/>
+            </a:pPr>
+            <a:r>
+              <a:rPr lang="en-US" sz="1200" b="1" dirty="0">
+                <a:latin typeface="Courier New" panose="02070309020205020404" pitchFamily="49" charset="0"/>
+              </a:rPr>
+              <a:t>   ▼</a:t>
+            </a:r>
+          </a:p>
+          <a:p>
+            <a:pPr>
+              <a:buNone/>
+            </a:pPr>
+            <a:r>
+              <a:rPr lang="en-US" sz="1200" b="1" dirty="0">
+                <a:solidFill>
+                  <a:schemeClr val="accent6"/>
+                </a:solidFill>
+                <a:latin typeface="Courier New" panose="02070309020205020404" pitchFamily="49" charset="0"/>
+              </a:rPr>
+              <a:t>4. FETCH INSPECTOR FINDINGS (Lambda)</a:t>
+            </a:r>
+          </a:p>
+          <a:p>
+            <a:pPr>
+              <a:buNone/>
+            </a:pPr>
+            <a:r>
+              <a:rPr lang="en-US" sz="1200" b="1" dirty="0">
+                <a:solidFill>
+                  <a:schemeClr val="accent6"/>
+                </a:solidFill>
+                <a:latin typeface="Courier New" panose="02070309020205020404" pitchFamily="49" charset="0"/>
+              </a:rPr>
+              <a:t>   │  Inspector Findings Lambda fetches CVE findings from Amazon Inspector v2</a:t>
+            </a:r>
+          </a:p>
+          <a:p>
+            <a:pPr>
+              <a:buNone/>
+            </a:pPr>
+            <a:r>
+              <a:rPr lang="en-US" sz="1200" b="1" dirty="0">
+                <a:latin typeface="Courier New" panose="02070309020205020404" pitchFamily="49" charset="0"/>
+              </a:rPr>
+              <a:t>   ▼</a:t>
+            </a:r>
+          </a:p>
+          <a:p>
+            <a:pPr>
+              <a:buNone/>
+            </a:pPr>
+            <a:r>
+              <a:rPr lang="en-US" sz="1200" b="1" dirty="0">
+                <a:latin typeface="Courier New" panose="02070309020205020404" pitchFamily="49" charset="0"/>
+              </a:rPr>
+              <a:t>5. ANALYZE (Lambda + Bedrock)</a:t>
+            </a:r>
+          </a:p>
+          <a:p>
+            <a:pPr>
+              <a:buNone/>
+            </a:pPr>
+            <a:r>
+              <a:rPr lang="en-US" sz="1200" b="1" dirty="0">
+                <a:latin typeface="Courier New" panose="02070309020205020404" pitchFamily="49" charset="0"/>
+              </a:rPr>
+              <a:t>   │  Lambda sends Inspector findings to Bedrock; model analyzes CVEs</a:t>
+            </a:r>
+          </a:p>
+          <a:p>
+            <a:pPr>
+              <a:buNone/>
+            </a:pPr>
+            <a:r>
+              <a:rPr lang="en-US" sz="1200" b="1" dirty="0">
+                <a:latin typeface="Courier New" panose="02070309020205020404" pitchFamily="49" charset="0"/>
+              </a:rPr>
+              <a:t>   │  Returns </a:t>
+            </a:r>
+            <a:r>
+              <a:rPr lang="en-US" sz="1200" b="1" dirty="0" err="1">
+                <a:latin typeface="Courier New" panose="02070309020205020404" pitchFamily="49" charset="0"/>
+              </a:rPr>
+              <a:t>has_critical_cves</a:t>
+            </a:r>
+            <a:r>
+              <a:rPr lang="en-US" sz="1200" b="1" dirty="0">
+                <a:latin typeface="Courier New" panose="02070309020205020404" pitchFamily="49" charset="0"/>
+              </a:rPr>
+              <a:t> flag + recommendations</a:t>
+            </a:r>
+          </a:p>
+          <a:p>
+            <a:pPr>
+              <a:buNone/>
+            </a:pPr>
+            <a:r>
+              <a:rPr lang="en-US" sz="1200" b="1" dirty="0">
+                <a:latin typeface="Courier New" panose="02070309020205020404" pitchFamily="49" charset="0"/>
+              </a:rPr>
+              <a:t>   ▼</a:t>
+            </a:r>
+          </a:p>
+          <a:p>
+            <a:pPr>
+              <a:buNone/>
+            </a:pPr>
+            <a:r>
+              <a:rPr lang="en-US" sz="1200" b="1" dirty="0">
+                <a:solidFill>
+                  <a:schemeClr val="accent6"/>
+                </a:solidFill>
+                <a:latin typeface="Courier New" panose="02070309020205020404" pitchFamily="49" charset="0"/>
+              </a:rPr>
+              <a:t>6. CHECK MAINTENANCE WINDOW</a:t>
+            </a:r>
+          </a:p>
+          <a:p>
+            <a:pPr>
+              <a:buNone/>
+            </a:pPr>
+            <a:r>
+              <a:rPr lang="en-US" sz="1200" b="1" dirty="0">
+                <a:solidFill>
+                  <a:schemeClr val="accent6"/>
+                </a:solidFill>
+                <a:latin typeface="Courier New" panose="02070309020205020404" pitchFamily="49" charset="0"/>
+              </a:rPr>
+              <a:t>   │  If outside window → Skip (enabled by default)</a:t>
+            </a:r>
+          </a:p>
+          <a:p>
+            <a:pPr>
+              <a:buNone/>
+            </a:pPr>
+            <a:r>
+              <a:rPr lang="en-US" sz="1200" b="1" dirty="0">
+                <a:latin typeface="Courier New" panose="02070309020205020404" pitchFamily="49" charset="0"/>
+              </a:rPr>
+              <a:t>   ▼</a:t>
+            </a:r>
+          </a:p>
+          <a:p>
+            <a:pPr>
+              <a:buNone/>
+            </a:pPr>
+            <a:r>
+              <a:rPr lang="en-US" sz="1200" b="1" dirty="0">
+                <a:latin typeface="Courier New" panose="02070309020205020404" pitchFamily="49" charset="0"/>
+              </a:rPr>
+              <a:t>7. PREPARE BATCHES + APPLY (Map over batches)</a:t>
+            </a:r>
+          </a:p>
+          <a:p>
+            <a:pPr>
+              <a:buNone/>
+            </a:pPr>
+            <a:r>
+              <a:rPr lang="en-US" sz="1200" b="1" dirty="0">
+                <a:latin typeface="Courier New" panose="02070309020205020404" pitchFamily="49" charset="0"/>
+              </a:rPr>
+              <a:t>   │  Per batch: Patch → Wait 180s → </a:t>
+            </a:r>
+            <a:r>
+              <a:rPr lang="en-US" sz="1200" b="1" dirty="0" err="1">
+                <a:latin typeface="Courier New" panose="02070309020205020404" pitchFamily="49" charset="0"/>
+              </a:rPr>
+              <a:t>CheckFailure</a:t>
+            </a:r>
+            <a:r>
+              <a:rPr lang="en-US" sz="1200" b="1" dirty="0">
+                <a:latin typeface="Courier New" panose="02070309020205020404" pitchFamily="49" charset="0"/>
+              </a:rPr>
+              <a:t> → continue or abort</a:t>
+            </a:r>
+          </a:p>
+          <a:p>
+            <a:pPr>
+              <a:buNone/>
+            </a:pPr>
+            <a:r>
+              <a:rPr lang="en-US" sz="1200" b="1" dirty="0">
+                <a:latin typeface="Courier New" panose="02070309020205020404" pitchFamily="49" charset="0"/>
+              </a:rPr>
+              <a:t>   │  Batched patching stops within same run if instance fails to reboot</a:t>
+            </a:r>
+          </a:p>
+          <a:p>
+            <a:pPr>
+              <a:buNone/>
+            </a:pPr>
+            <a:r>
+              <a:rPr lang="en-US" sz="1200" b="1" dirty="0">
+                <a:latin typeface="Courier New" panose="02070309020205020404" pitchFamily="49" charset="0"/>
+              </a:rPr>
+              <a:t>   │  Canary: first batch uses </a:t>
+            </a:r>
+            <a:r>
+              <a:rPr lang="en-US" sz="1200" b="1" dirty="0" err="1">
+                <a:latin typeface="Courier New" panose="02070309020205020404" pitchFamily="49" charset="0"/>
+              </a:rPr>
+              <a:t>canary_batch_size</a:t>
+            </a:r>
+            <a:r>
+              <a:rPr lang="en-US" sz="1200" b="1" dirty="0">
+                <a:latin typeface="Courier New" panose="02070309020205020404" pitchFamily="49" charset="0"/>
+              </a:rPr>
+              <a:t>, then remaining batches</a:t>
+            </a:r>
+          </a:p>
+          <a:p>
+            <a:pPr>
+              <a:buNone/>
+            </a:pPr>
+            <a:r>
+              <a:rPr lang="en-US" sz="1200" b="1" dirty="0">
+                <a:latin typeface="Courier New" panose="02070309020205020404" pitchFamily="49" charset="0"/>
+              </a:rPr>
+              <a:t>   ▼</a:t>
+            </a:r>
+          </a:p>
+          <a:p>
+            <a:pPr>
+              <a:buNone/>
+            </a:pPr>
+            <a:r>
+              <a:rPr lang="en-US" sz="1200" b="1" dirty="0">
+                <a:solidFill>
+                  <a:schemeClr val="accent6"/>
+                </a:solidFill>
+                <a:latin typeface="Courier New" panose="02070309020205020404" pitchFamily="49" charset="0"/>
+              </a:rPr>
+              <a:t>8. POST-PATCH (Parallel, via Lambda → SSM)</a:t>
+            </a:r>
+          </a:p>
+          <a:p>
+            <a:pPr>
+              <a:buNone/>
+            </a:pPr>
+            <a:r>
+              <a:rPr lang="en-US" sz="1200" b="1" dirty="0">
+                <a:solidFill>
+                  <a:schemeClr val="accent6"/>
+                </a:solidFill>
+                <a:latin typeface="Courier New" panose="02070309020205020404" pitchFamily="49" charset="0"/>
+              </a:rPr>
+              <a:t>   │  SSM Runner Lambda verifies patches on RHEL8 and Windows</a:t>
+            </a:r>
+          </a:p>
+          <a:p>
+            <a:pPr>
+              <a:buNone/>
+            </a:pPr>
+            <a:r>
+              <a:rPr lang="en-US" sz="1200" b="1" dirty="0">
+                <a:latin typeface="Courier New" panose="02070309020205020404" pitchFamily="49" charset="0"/>
+              </a:rPr>
+              <a:t>   ▼</a:t>
+            </a:r>
+          </a:p>
+          <a:p>
+            <a:pPr>
+              <a:buNone/>
+            </a:pPr>
+            <a:r>
+              <a:rPr lang="en-US" sz="1200" b="1" dirty="0">
+                <a:latin typeface="Courier New" panose="02070309020205020404" pitchFamily="49" charset="0"/>
+              </a:rPr>
+              <a:t>9. COMPLETE</a:t>
+            </a:r>
+          </a:p>
+        </p:txBody>
+      </p:sp>
+      <p:sp>
+        <p:nvSpPr>
+          <p:cNvPr id="5" name="TextBox 4">
+            <a:extLst>
+              <a:ext uri="{FF2B5EF4-FFF2-40B4-BE49-F238E27FC236}">
+                <a16:creationId xmlns:a16="http://schemas.microsoft.com/office/drawing/2014/main" id="{59C5C8A8-15ED-A4E6-8948-8C240A25E73F}"/>
+              </a:ext>
+            </a:extLst>
+          </p:cNvPr>
+          <p:cNvSpPr txBox="1"/>
+          <p:nvPr/>
+        </p:nvSpPr>
+        <p:spPr>
+          <a:xfrm>
+            <a:off x="846414" y="193040"/>
+            <a:ext cx="6905666" cy="707886"/>
+          </a:xfrm>
+          <a:prstGeom prst="rect">
+            <a:avLst/>
+          </a:prstGeom>
+          <a:noFill/>
+        </p:spPr>
+        <p:txBody>
+          <a:bodyPr wrap="square" rtlCol="0">
+            <a:spAutoFit/>
+          </a:bodyPr>
+          <a:lstStyle/>
+          <a:p>
+            <a:r>
+              <a:rPr lang="en-US" sz="4000" dirty="0">
+                <a:solidFill>
+                  <a:srgbClr val="0A13F4"/>
+                </a:solidFill>
+                <a:latin typeface="+mj-lt"/>
+                <a:ea typeface="+mj-ea"/>
+                <a:cs typeface="+mj-cs"/>
+              </a:rPr>
+              <a:t>Amazon Inspector - Workflow</a:t>
+            </a:r>
+          </a:p>
+        </p:txBody>
+      </p:sp>
+    </p:spTree>
+    <p:extLst>
+      <p:ext uri="{BB962C8B-B14F-4D97-AF65-F5344CB8AC3E}">
+        <p14:creationId xmlns:p14="http://schemas.microsoft.com/office/powerpoint/2010/main" val="114748700"/>
+      </p:ext>
+    </p:extLst>
+  </p:cSld>
+  <p:clrMapOvr>
+    <a:masterClrMapping/>
+  </p:clrMapOvr>
+</p:sld>
+</file>
+
+<file path=ppt/slides/slide9.xml><?xml version="1.0" encoding="utf-8"?>
 <p:sld xmlns:a="http://schemas.openxmlformats.org/drawingml/2006/main" xmlns:r="http://schemas.openxmlformats.org/officeDocument/2006/relationships" xmlns:p="http://schemas.openxmlformats.org/presentationml/2006/main">
   <p:cSld>
     <p:bg>
@@ -4483,846 +8090,6 @@
         <p14:creationId xmlns:p14="http://schemas.microsoft.com/office/powerpoint/2010/main" val="1609587067"/>
       </p:ext>
     </p:extLst>
-  </p:cSld>
-  <p:clrMapOvr>
-    <a:masterClrMapping/>
-  </p:clrMapOvr>
-</p:sld>
-</file>
-
-<file path=ppt/slides/slide7.xml><?xml version="1.0" encoding="utf-8"?>
-<p:sld xmlns:a="http://schemas.openxmlformats.org/drawingml/2006/main" xmlns:r="http://schemas.openxmlformats.org/officeDocument/2006/relationships" xmlns:p="http://schemas.openxmlformats.org/presentationml/2006/main">
-  <p:cSld>
-    <p:spTree>
-      <p:nvGrpSpPr>
-        <p:cNvPr id="1" name="">
-          <a:extLst>
-            <a:ext uri="{FF2B5EF4-FFF2-40B4-BE49-F238E27FC236}">
-              <a16:creationId xmlns:a16="http://schemas.microsoft.com/office/drawing/2014/main" id="{7D2834AC-7680-F908-4558-58A88E5B5426}"/>
-            </a:ext>
-          </a:extLst>
-        </p:cNvPr>
-        <p:cNvGrpSpPr/>
-        <p:nvPr/>
-      </p:nvGrpSpPr>
-      <p:grpSpPr>
-        <a:xfrm>
-          <a:off x="0" y="0"/>
-          <a:ext cx="0" cy="0"/>
-          <a:chOff x="0" y="0"/>
-          <a:chExt cx="0" cy="0"/>
-        </a:xfrm>
-      </p:grpSpPr>
-      <p:sp>
-        <p:nvSpPr>
-          <p:cNvPr id="4" name="TextBox 3">
-            <a:extLst>
-              <a:ext uri="{FF2B5EF4-FFF2-40B4-BE49-F238E27FC236}">
-                <a16:creationId xmlns:a16="http://schemas.microsoft.com/office/drawing/2014/main" id="{76D048C1-3BDF-3E76-A5E3-2DD31B3CC540}"/>
-              </a:ext>
-            </a:extLst>
-          </p:cNvPr>
-          <p:cNvSpPr txBox="1"/>
-          <p:nvPr/>
-        </p:nvSpPr>
-        <p:spPr>
-          <a:xfrm>
-            <a:off x="502470" y="1040178"/>
-            <a:ext cx="8641530" cy="5447645"/>
-          </a:xfrm>
-          <a:prstGeom prst="rect">
-            <a:avLst/>
-          </a:prstGeom>
-          <a:noFill/>
-        </p:spPr>
-        <p:txBody>
-          <a:bodyPr wrap="square">
-            <a:spAutoFit/>
-          </a:bodyPr>
-          <a:lstStyle/>
-          <a:p>
-            <a:pPr>
-              <a:buNone/>
-            </a:pPr>
-            <a:r>
-              <a:rPr lang="en-US" sz="1200" b="1" dirty="0">
-                <a:latin typeface="Courier New" panose="02070309020205020404" pitchFamily="49" charset="0"/>
-              </a:rPr>
-              <a:t>1. SCHEDULE (</a:t>
-            </a:r>
-            <a:r>
-              <a:rPr lang="en-US" sz="1200" b="1" dirty="0" err="1">
-                <a:latin typeface="Courier New" panose="02070309020205020404" pitchFamily="49" charset="0"/>
-              </a:rPr>
-              <a:t>EventBridge</a:t>
-            </a:r>
-            <a:r>
-              <a:rPr lang="en-US" sz="1200" b="1" dirty="0">
-                <a:latin typeface="Courier New" panose="02070309020205020404" pitchFamily="49" charset="0"/>
-              </a:rPr>
-              <a:t>)</a:t>
-            </a:r>
-          </a:p>
-          <a:p>
-            <a:pPr>
-              <a:buNone/>
-            </a:pPr>
-            <a:r>
-              <a:rPr lang="en-US" sz="1200" b="1" dirty="0">
-                <a:latin typeface="Courier New" panose="02070309020205020404" pitchFamily="49" charset="0"/>
-              </a:rPr>
-              <a:t>   │  </a:t>
-            </a:r>
-            <a:r>
-              <a:rPr lang="en-US" sz="1200" b="1" dirty="0" err="1">
-                <a:latin typeface="Courier New" panose="02070309020205020404" pitchFamily="49" charset="0"/>
-              </a:rPr>
-              <a:t>cron</a:t>
-            </a:r>
-            <a:r>
-              <a:rPr lang="en-US" sz="1200" b="1" dirty="0">
-                <a:latin typeface="Courier New" panose="02070309020205020404" pitchFamily="49" charset="0"/>
-              </a:rPr>
-              <a:t>(0 2 ? * 3#2 *)  →  2:00 AM UTC on 2nd Tuesday (after Patch Tuesday)</a:t>
-            </a:r>
-          </a:p>
-          <a:p>
-            <a:pPr>
-              <a:buNone/>
-            </a:pPr>
-            <a:r>
-              <a:rPr lang="en-US" sz="1200" b="1" dirty="0">
-                <a:latin typeface="Courier New" panose="02070309020205020404" pitchFamily="49" charset="0"/>
-              </a:rPr>
-              <a:t>   ▼</a:t>
-            </a:r>
-          </a:p>
-          <a:p>
-            <a:pPr>
-              <a:buNone/>
-            </a:pPr>
-            <a:r>
-              <a:rPr lang="en-US" sz="1200" b="1" dirty="0">
-                <a:solidFill>
-                  <a:schemeClr val="accent6"/>
-                </a:solidFill>
-                <a:latin typeface="Courier New" panose="02070309020205020404" pitchFamily="49" charset="0"/>
-              </a:rPr>
-              <a:t>2. DISCOVER INSTANCES (Lambda)</a:t>
-            </a:r>
-          </a:p>
-          <a:p>
-            <a:pPr>
-              <a:buNone/>
-            </a:pPr>
-            <a:r>
-              <a:rPr lang="en-US" sz="1200" b="1" dirty="0">
-                <a:solidFill>
-                  <a:schemeClr val="accent6"/>
-                </a:solidFill>
-                <a:latin typeface="Courier New" panose="02070309020205020404" pitchFamily="49" charset="0"/>
-              </a:rPr>
-              <a:t>   │  Instance Discovery Lambda: by tags (Role=patch-target) or static Terraform IDs</a:t>
-            </a:r>
-          </a:p>
-          <a:p>
-            <a:pPr>
-              <a:buNone/>
-            </a:pPr>
-            <a:r>
-              <a:rPr lang="en-US" sz="1200" b="1" dirty="0">
-                <a:solidFill>
-                  <a:schemeClr val="accent6"/>
-                </a:solidFill>
-                <a:latin typeface="Courier New" panose="02070309020205020404" pitchFamily="49" charset="0"/>
-              </a:rPr>
-              <a:t>   │  Excludes </a:t>
-            </a:r>
-            <a:r>
-              <a:rPr lang="en-US" sz="1200" b="1" dirty="0" err="1">
-                <a:solidFill>
-                  <a:schemeClr val="accent6"/>
-                </a:solidFill>
-                <a:latin typeface="Courier New" panose="02070309020205020404" pitchFamily="49" charset="0"/>
-              </a:rPr>
-              <a:t>PatchExcluded</a:t>
-            </a:r>
-            <a:r>
-              <a:rPr lang="en-US" sz="1200" b="1" dirty="0">
-                <a:solidFill>
-                  <a:schemeClr val="accent6"/>
-                </a:solidFill>
-                <a:latin typeface="Courier New" panose="02070309020205020404" pitchFamily="49" charset="0"/>
-              </a:rPr>
-              <a:t>=true</a:t>
-            </a:r>
-          </a:p>
-          <a:p>
-            <a:pPr>
-              <a:buNone/>
-            </a:pPr>
-            <a:r>
-              <a:rPr lang="en-US" sz="1200" b="1" dirty="0">
-                <a:latin typeface="Courier New" panose="02070309020205020404" pitchFamily="49" charset="0"/>
-              </a:rPr>
-              <a:t>   ▼</a:t>
-            </a:r>
-          </a:p>
-          <a:p>
-            <a:pPr>
-              <a:buNone/>
-            </a:pPr>
-            <a:r>
-              <a:rPr lang="en-US" sz="1200" b="1" dirty="0">
-                <a:latin typeface="Courier New" panose="02070309020205020404" pitchFamily="49" charset="0"/>
-              </a:rPr>
-              <a:t>3. CHECK SSM AGENT HEALTH (Lambda)</a:t>
-            </a:r>
-          </a:p>
-          <a:p>
-            <a:pPr>
-              <a:buNone/>
-            </a:pPr>
-            <a:r>
-              <a:rPr lang="en-US" sz="1200" b="1" dirty="0">
-                <a:latin typeface="Courier New" panose="02070309020205020404" pitchFamily="49" charset="0"/>
-              </a:rPr>
-              <a:t>   │  Filters out instances not in SSM Managed state; sends SNS alert if any excluded</a:t>
-            </a:r>
-          </a:p>
-          <a:p>
-            <a:pPr>
-              <a:buNone/>
-            </a:pPr>
-            <a:r>
-              <a:rPr lang="en-US" sz="1200" b="1" dirty="0">
-                <a:latin typeface="Courier New" panose="02070309020205020404" pitchFamily="49" charset="0"/>
-              </a:rPr>
-              <a:t>   ▼</a:t>
-            </a:r>
-          </a:p>
-          <a:p>
-            <a:pPr>
-              <a:buNone/>
-            </a:pPr>
-            <a:r>
-              <a:rPr lang="en-US" sz="1200" b="1" dirty="0">
-                <a:solidFill>
-                  <a:schemeClr val="accent6"/>
-                </a:solidFill>
-                <a:latin typeface="Courier New" panose="02070309020205020404" pitchFamily="49" charset="0"/>
-              </a:rPr>
-              <a:t>4. FETCH INSPECTOR FINDINGS (Lambda)</a:t>
-            </a:r>
-          </a:p>
-          <a:p>
-            <a:pPr>
-              <a:buNone/>
-            </a:pPr>
-            <a:r>
-              <a:rPr lang="en-US" sz="1200" b="1" dirty="0">
-                <a:solidFill>
-                  <a:schemeClr val="accent6"/>
-                </a:solidFill>
-                <a:latin typeface="Courier New" panose="02070309020205020404" pitchFamily="49" charset="0"/>
-              </a:rPr>
-              <a:t>   │  Inspector Findings Lambda fetches CVE findings from Amazon Inspector v2</a:t>
-            </a:r>
-          </a:p>
-          <a:p>
-            <a:pPr>
-              <a:buNone/>
-            </a:pPr>
-            <a:r>
-              <a:rPr lang="en-US" sz="1200" b="1" dirty="0">
-                <a:latin typeface="Courier New" panose="02070309020205020404" pitchFamily="49" charset="0"/>
-              </a:rPr>
-              <a:t>   ▼</a:t>
-            </a:r>
-          </a:p>
-          <a:p>
-            <a:pPr>
-              <a:buNone/>
-            </a:pPr>
-            <a:r>
-              <a:rPr lang="en-US" sz="1200" b="1" dirty="0">
-                <a:latin typeface="Courier New" panose="02070309020205020404" pitchFamily="49" charset="0"/>
-              </a:rPr>
-              <a:t>5. ANALYZE (Lambda + Bedrock)</a:t>
-            </a:r>
-          </a:p>
-          <a:p>
-            <a:pPr>
-              <a:buNone/>
-            </a:pPr>
-            <a:r>
-              <a:rPr lang="en-US" sz="1200" b="1" dirty="0">
-                <a:latin typeface="Courier New" panose="02070309020205020404" pitchFamily="49" charset="0"/>
-              </a:rPr>
-              <a:t>   │  Lambda sends Inspector findings to Bedrock; model analyzes CVEs</a:t>
-            </a:r>
-          </a:p>
-          <a:p>
-            <a:pPr>
-              <a:buNone/>
-            </a:pPr>
-            <a:r>
-              <a:rPr lang="en-US" sz="1200" b="1" dirty="0">
-                <a:latin typeface="Courier New" panose="02070309020205020404" pitchFamily="49" charset="0"/>
-              </a:rPr>
-              <a:t>   │  Returns </a:t>
-            </a:r>
-            <a:r>
-              <a:rPr lang="en-US" sz="1200" b="1" dirty="0" err="1">
-                <a:latin typeface="Courier New" panose="02070309020205020404" pitchFamily="49" charset="0"/>
-              </a:rPr>
-              <a:t>has_critical_cves</a:t>
-            </a:r>
-            <a:r>
-              <a:rPr lang="en-US" sz="1200" b="1" dirty="0">
-                <a:latin typeface="Courier New" panose="02070309020205020404" pitchFamily="49" charset="0"/>
-              </a:rPr>
-              <a:t> flag + recommendations</a:t>
-            </a:r>
-          </a:p>
-          <a:p>
-            <a:pPr>
-              <a:buNone/>
-            </a:pPr>
-            <a:r>
-              <a:rPr lang="en-US" sz="1200" b="1" dirty="0">
-                <a:latin typeface="Courier New" panose="02070309020205020404" pitchFamily="49" charset="0"/>
-              </a:rPr>
-              <a:t>   ▼</a:t>
-            </a:r>
-          </a:p>
-          <a:p>
-            <a:pPr>
-              <a:buNone/>
-            </a:pPr>
-            <a:r>
-              <a:rPr lang="en-US" sz="1200" b="1" dirty="0">
-                <a:solidFill>
-                  <a:schemeClr val="accent6"/>
-                </a:solidFill>
-                <a:latin typeface="Courier New" panose="02070309020205020404" pitchFamily="49" charset="0"/>
-              </a:rPr>
-              <a:t>6. CHECK MAINTENANCE WINDOW</a:t>
-            </a:r>
-          </a:p>
-          <a:p>
-            <a:pPr>
-              <a:buNone/>
-            </a:pPr>
-            <a:r>
-              <a:rPr lang="en-US" sz="1200" b="1" dirty="0">
-                <a:solidFill>
-                  <a:schemeClr val="accent6"/>
-                </a:solidFill>
-                <a:latin typeface="Courier New" panose="02070309020205020404" pitchFamily="49" charset="0"/>
-              </a:rPr>
-              <a:t>   │  If outside window → Skip (enabled by default)</a:t>
-            </a:r>
-          </a:p>
-          <a:p>
-            <a:pPr>
-              <a:buNone/>
-            </a:pPr>
-            <a:r>
-              <a:rPr lang="en-US" sz="1200" b="1" dirty="0">
-                <a:latin typeface="Courier New" panose="02070309020205020404" pitchFamily="49" charset="0"/>
-              </a:rPr>
-              <a:t>   ▼</a:t>
-            </a:r>
-          </a:p>
-          <a:p>
-            <a:pPr>
-              <a:buNone/>
-            </a:pPr>
-            <a:r>
-              <a:rPr lang="en-US" sz="1200" b="1" dirty="0">
-                <a:latin typeface="Courier New" panose="02070309020205020404" pitchFamily="49" charset="0"/>
-              </a:rPr>
-              <a:t>7. PREPARE BATCHES + APPLY (Map over batches)</a:t>
-            </a:r>
-          </a:p>
-          <a:p>
-            <a:pPr>
-              <a:buNone/>
-            </a:pPr>
-            <a:r>
-              <a:rPr lang="en-US" sz="1200" b="1" dirty="0">
-                <a:latin typeface="Courier New" panose="02070309020205020404" pitchFamily="49" charset="0"/>
-              </a:rPr>
-              <a:t>   │  Per batch: Patch → Wait 180s → </a:t>
-            </a:r>
-            <a:r>
-              <a:rPr lang="en-US" sz="1200" b="1" dirty="0" err="1">
-                <a:latin typeface="Courier New" panose="02070309020205020404" pitchFamily="49" charset="0"/>
-              </a:rPr>
-              <a:t>CheckFailure</a:t>
-            </a:r>
-            <a:r>
-              <a:rPr lang="en-US" sz="1200" b="1" dirty="0">
-                <a:latin typeface="Courier New" panose="02070309020205020404" pitchFamily="49" charset="0"/>
-              </a:rPr>
-              <a:t> → continue or abort</a:t>
-            </a:r>
-          </a:p>
-          <a:p>
-            <a:pPr>
-              <a:buNone/>
-            </a:pPr>
-            <a:r>
-              <a:rPr lang="en-US" sz="1200" b="1" dirty="0">
-                <a:latin typeface="Courier New" panose="02070309020205020404" pitchFamily="49" charset="0"/>
-              </a:rPr>
-              <a:t>   │  Batched patching stops within same run if instance fails to reboot</a:t>
-            </a:r>
-          </a:p>
-          <a:p>
-            <a:pPr>
-              <a:buNone/>
-            </a:pPr>
-            <a:r>
-              <a:rPr lang="en-US" sz="1200" b="1" dirty="0">
-                <a:latin typeface="Courier New" panose="02070309020205020404" pitchFamily="49" charset="0"/>
-              </a:rPr>
-              <a:t>   │  Canary: first batch uses </a:t>
-            </a:r>
-            <a:r>
-              <a:rPr lang="en-US" sz="1200" b="1" dirty="0" err="1">
-                <a:latin typeface="Courier New" panose="02070309020205020404" pitchFamily="49" charset="0"/>
-              </a:rPr>
-              <a:t>canary_batch_size</a:t>
-            </a:r>
-            <a:r>
-              <a:rPr lang="en-US" sz="1200" b="1" dirty="0">
-                <a:latin typeface="Courier New" panose="02070309020205020404" pitchFamily="49" charset="0"/>
-              </a:rPr>
-              <a:t>, then remaining batches</a:t>
-            </a:r>
-          </a:p>
-          <a:p>
-            <a:pPr>
-              <a:buNone/>
-            </a:pPr>
-            <a:r>
-              <a:rPr lang="en-US" sz="1200" b="1" dirty="0">
-                <a:latin typeface="Courier New" panose="02070309020205020404" pitchFamily="49" charset="0"/>
-              </a:rPr>
-              <a:t>   ▼</a:t>
-            </a:r>
-          </a:p>
-          <a:p>
-            <a:pPr>
-              <a:buNone/>
-            </a:pPr>
-            <a:r>
-              <a:rPr lang="en-US" sz="1200" b="1" dirty="0">
-                <a:solidFill>
-                  <a:schemeClr val="accent6"/>
-                </a:solidFill>
-                <a:latin typeface="Courier New" panose="02070309020205020404" pitchFamily="49" charset="0"/>
-              </a:rPr>
-              <a:t>8. POST-PATCH (Parallel, via Lambda → SSM)</a:t>
-            </a:r>
-          </a:p>
-          <a:p>
-            <a:pPr>
-              <a:buNone/>
-            </a:pPr>
-            <a:r>
-              <a:rPr lang="en-US" sz="1200" b="1" dirty="0">
-                <a:solidFill>
-                  <a:schemeClr val="accent6"/>
-                </a:solidFill>
-                <a:latin typeface="Courier New" panose="02070309020205020404" pitchFamily="49" charset="0"/>
-              </a:rPr>
-              <a:t>   │  SSM Runner Lambda verifies patches on RHEL8 and Windows</a:t>
-            </a:r>
-          </a:p>
-          <a:p>
-            <a:pPr>
-              <a:buNone/>
-            </a:pPr>
-            <a:r>
-              <a:rPr lang="en-US" sz="1200" b="1" dirty="0">
-                <a:latin typeface="Courier New" panose="02070309020205020404" pitchFamily="49" charset="0"/>
-              </a:rPr>
-              <a:t>   ▼</a:t>
-            </a:r>
-          </a:p>
-          <a:p>
-            <a:pPr>
-              <a:buNone/>
-            </a:pPr>
-            <a:r>
-              <a:rPr lang="en-US" sz="1200" b="1" dirty="0">
-                <a:latin typeface="Courier New" panose="02070309020205020404" pitchFamily="49" charset="0"/>
-              </a:rPr>
-              <a:t>9. COMPLETE</a:t>
-            </a:r>
-          </a:p>
-        </p:txBody>
-      </p:sp>
-      <p:sp>
-        <p:nvSpPr>
-          <p:cNvPr id="5" name="TextBox 4">
-            <a:extLst>
-              <a:ext uri="{FF2B5EF4-FFF2-40B4-BE49-F238E27FC236}">
-                <a16:creationId xmlns:a16="http://schemas.microsoft.com/office/drawing/2014/main" id="{59C5C8A8-15ED-A4E6-8948-8C240A25E73F}"/>
-              </a:ext>
-            </a:extLst>
-          </p:cNvPr>
-          <p:cNvSpPr txBox="1"/>
-          <p:nvPr/>
-        </p:nvSpPr>
-        <p:spPr>
-          <a:xfrm>
-            <a:off x="846414" y="193040"/>
-            <a:ext cx="6905666" cy="707886"/>
-          </a:xfrm>
-          <a:prstGeom prst="rect">
-            <a:avLst/>
-          </a:prstGeom>
-          <a:noFill/>
-        </p:spPr>
-        <p:txBody>
-          <a:bodyPr wrap="square" rtlCol="0">
-            <a:spAutoFit/>
-          </a:bodyPr>
-          <a:lstStyle/>
-          <a:p>
-            <a:r>
-              <a:rPr lang="en-US" sz="4000" dirty="0">
-                <a:solidFill>
-                  <a:srgbClr val="0A13F4"/>
-                </a:solidFill>
-                <a:latin typeface="+mj-lt"/>
-                <a:ea typeface="+mj-ea"/>
-                <a:cs typeface="+mj-cs"/>
-              </a:rPr>
-              <a:t>Amazon Inspector - Workflow</a:t>
-            </a:r>
-          </a:p>
-        </p:txBody>
-      </p:sp>
-    </p:spTree>
-    <p:extLst>
-      <p:ext uri="{BB962C8B-B14F-4D97-AF65-F5344CB8AC3E}">
-        <p14:creationId xmlns:p14="http://schemas.microsoft.com/office/powerpoint/2010/main" val="114748700"/>
-      </p:ext>
-    </p:extLst>
-  </p:cSld>
-  <p:clrMapOvr>
-    <a:masterClrMapping/>
-  </p:clrMapOvr>
-</p:sld>
-</file>
-
-<file path=ppt/slides/slide8.xml><?xml version="1.0" encoding="utf-8"?>
-<p:sld xmlns:a="http://schemas.openxmlformats.org/drawingml/2006/main" xmlns:r="http://schemas.openxmlformats.org/officeDocument/2006/relationships" xmlns:p="http://schemas.openxmlformats.org/presentationml/2006/main">
-  <p:cSld>
-    <p:spTree>
-      <p:nvGrpSpPr>
-        <p:cNvPr id="1" name=""/>
-        <p:cNvGrpSpPr/>
-        <p:nvPr/>
-      </p:nvGrpSpPr>
-      <p:grpSpPr>
-        <a:xfrm>
-          <a:off x="0" y="0"/>
-          <a:ext cx="0" cy="0"/>
-          <a:chOff x="0" y="0"/>
-          <a:chExt cx="0" cy="0"/>
-        </a:xfrm>
-      </p:grpSpPr>
-      <p:sp>
-        <p:nvSpPr>
-          <p:cNvPr id="2" name="Title 1"/>
-          <p:cNvSpPr>
-            <a:spLocks noGrp="1"/>
-          </p:cNvSpPr>
-          <p:nvPr>
-            <p:ph type="title"/>
-          </p:nvPr>
-        </p:nvSpPr>
-        <p:spPr/>
-        <p:txBody>
-          <a:bodyPr/>
-          <a:lstStyle/>
-          <a:p>
-            <a:r>
-              <a:rPr dirty="0"/>
-              <a:t>Component Stack</a:t>
-            </a:r>
-          </a:p>
-        </p:txBody>
-      </p:sp>
-      <p:sp>
-        <p:nvSpPr>
-          <p:cNvPr id="3" name="Content Placeholder 2"/>
-          <p:cNvSpPr>
-            <a:spLocks noGrp="1"/>
-          </p:cNvSpPr>
-          <p:nvPr>
-            <p:ph idx="1"/>
-          </p:nvPr>
-        </p:nvSpPr>
-        <p:spPr/>
-        <p:txBody>
-          <a:bodyPr/>
-          <a:lstStyle/>
-          <a:p>
-            <a:r>
-              <a:rPr lang="en-US" sz="1000" b="1" dirty="0"/>
-              <a:t>What the Customer Wants</a:t>
-            </a:r>
-          </a:p>
-          <a:p>
-            <a:r>
-              <a:rPr lang="en-US" sz="1000" b="1" dirty="0"/>
-              <a:t>Automated, production-safe CVE patching that scales without risk.</a:t>
-            </a:r>
-            <a:endParaRPr lang="en-US" sz="1000" dirty="0"/>
-          </a:p>
-          <a:p>
-            <a:r>
-              <a:rPr lang="en-US" sz="1000" dirty="0"/>
-              <a:t>The customer needs to keep RHEL8 and Windows servers secure by applying critical security patches, while avoiding the operational risk and downtime that comes from blind or manual patching.</a:t>
-            </a:r>
-          </a:p>
-          <a:p>
-            <a:pPr marL="0" indent="0">
-              <a:buNone/>
-            </a:pPr>
-            <a:br>
-              <a:rPr lang="en-US" sz="1000" dirty="0"/>
-            </a:br>
-            <a:endParaRPr lang="en-US" sz="1000" dirty="0"/>
-          </a:p>
-          <a:p>
-            <a:r>
-              <a:rPr lang="en-US" sz="1000" b="1" dirty="0"/>
-              <a:t>The Core Ask</a:t>
-            </a:r>
-          </a:p>
-          <a:p>
-            <a:r>
-              <a:rPr lang="en-US" sz="1000" b="1" dirty="0"/>
-              <a:t>Patch only when it matters</a:t>
-            </a:r>
-            <a:endParaRPr lang="en-US" sz="1000" dirty="0"/>
-          </a:p>
-          <a:p>
-            <a:r>
-              <a:rPr lang="en-US" sz="1000" dirty="0"/>
-              <a:t>Apply updates only when there are critical CVEs—not every minor update, not on a fixed schedule regardless of risk.</a:t>
-            </a:r>
-          </a:p>
-          <a:p>
-            <a:r>
-              <a:rPr lang="en-US" sz="1000" b="1" dirty="0"/>
-              <a:t>Stay production-safe</a:t>
-            </a:r>
-            <a:endParaRPr lang="en-US" sz="1000" dirty="0"/>
-          </a:p>
-          <a:p>
-            <a:r>
-              <a:rPr lang="en-US" sz="1000" dirty="0"/>
-              <a:t>Limit patching to security-related updates. No feature updates, no optional packages, no changes that could introduce breaking behavior.</a:t>
-            </a:r>
-          </a:p>
-          <a:p>
-            <a:r>
-              <a:rPr lang="en-US" sz="1000" b="1" dirty="0"/>
-              <a:t>Remove manual effort</a:t>
-            </a:r>
-            <a:endParaRPr lang="en-US" sz="1000" dirty="0"/>
-          </a:p>
-          <a:p>
-            <a:r>
-              <a:rPr lang="en-US" sz="1000" dirty="0"/>
-              <a:t>No more ad-hoc scripts, inconsistent pre-patch scans, or manual decisions about when to patch.</a:t>
-            </a:r>
-          </a:p>
-          <a:p>
-            <a:r>
-              <a:rPr lang="en-US" sz="1000" b="1" dirty="0"/>
-              <a:t>Use structured, reliable data</a:t>
-            </a:r>
-            <a:endParaRPr lang="en-US" sz="1000" dirty="0"/>
-          </a:p>
-          <a:p>
-            <a:r>
-              <a:rPr lang="en-US" sz="1000" dirty="0"/>
-              <a:t>Base patch decisions on authoritative CVE data (severity, affected packages, IDs), not raw command output or custom scripts.</a:t>
-            </a:r>
-          </a:p>
-          <a:p>
-            <a:r>
-              <a:rPr lang="en-US" sz="1000" b="1" dirty="0"/>
-              <a:t>Scale across the fleet</a:t>
-            </a:r>
-            <a:endParaRPr lang="en-US" sz="1000" dirty="0"/>
-          </a:p>
-          <a:p>
-            <a:r>
-              <a:rPr lang="en-US" sz="1000" dirty="0"/>
-              <a:t>Support RHEL8 and Windows across many instances without manual per-instance work.</a:t>
-            </a:r>
-          </a:p>
-          <a:p>
-            <a:endParaRPr sz="1000" dirty="0">
-              <a:latin typeface="Courier New"/>
-            </a:endParaRPr>
-          </a:p>
-        </p:txBody>
-      </p:sp>
-    </p:spTree>
-  </p:cSld>
-  <p:clrMapOvr>
-    <a:masterClrMapping/>
-  </p:clrMapOvr>
-</p:sld>
-</file>
-
-<file path=ppt/slides/slide9.xml><?xml version="1.0" encoding="utf-8"?>
-<p:sld xmlns:a="http://schemas.openxmlformats.org/drawingml/2006/main" xmlns:r="http://schemas.openxmlformats.org/officeDocument/2006/relationships" xmlns:p="http://schemas.openxmlformats.org/presentationml/2006/main">
-  <p:cSld>
-    <p:spTree>
-      <p:nvGrpSpPr>
-        <p:cNvPr id="1" name=""/>
-        <p:cNvGrpSpPr/>
-        <p:nvPr/>
-      </p:nvGrpSpPr>
-      <p:grpSpPr>
-        <a:xfrm>
-          <a:off x="0" y="0"/>
-          <a:ext cx="0" cy="0"/>
-          <a:chOff x="0" y="0"/>
-          <a:chExt cx="0" cy="0"/>
-        </a:xfrm>
-      </p:grpSpPr>
-      <p:sp>
-        <p:nvSpPr>
-          <p:cNvPr id="2" name="Title 1"/>
-          <p:cNvSpPr>
-            <a:spLocks noGrp="1"/>
-          </p:cNvSpPr>
-          <p:nvPr>
-            <p:ph type="title"/>
-          </p:nvPr>
-        </p:nvSpPr>
-        <p:spPr/>
-        <p:txBody>
-          <a:bodyPr/>
-          <a:lstStyle/>
-          <a:p>
-            <a:r>
-              <a:t>Slide 2: The Problem – Pain Points</a:t>
-            </a:r>
-          </a:p>
-        </p:txBody>
-      </p:sp>
-      <p:sp>
-        <p:nvSpPr>
-          <p:cNvPr id="3" name="Content Placeholder 2"/>
-          <p:cNvSpPr>
-            <a:spLocks noGrp="1"/>
-          </p:cNvSpPr>
-          <p:nvPr>
-            <p:ph idx="1"/>
-          </p:nvPr>
-        </p:nvSpPr>
-        <p:spPr/>
-        <p:txBody>
-          <a:bodyPr/>
-          <a:lstStyle/>
-          <a:p>
-            <a:r>
-              <a:rPr sz="1000">
-                <a:latin typeface="Courier New"/>
-              </a:rPr>
-              <a:t>flowchart LR</a:t>
-            </a:r>
-          </a:p>
-          <a:p>
-            <a:r>
-              <a:rPr sz="1000">
-                <a:latin typeface="Courier New"/>
-              </a:rPr>
-              <a:t>    subgraph Problems["The Problem"]</a:t>
-            </a:r>
-          </a:p>
-          <a:p>
-            <a:r>
-              <a:rPr sz="1000">
-                <a:latin typeface="Courier New"/>
-              </a:rPr>
-              <a:t>        P1["Manual patching&lt;br/&gt;Error-prone, doesn't scale"]</a:t>
-            </a:r>
-          </a:p>
-          <a:p>
-            <a:r>
-              <a:rPr sz="1000">
-                <a:latin typeface="Courier New"/>
-              </a:rPr>
-              <a:t>        P2["Blind automation&lt;br/&gt;Unnecessary risk"]</a:t>
-            </a:r>
-          </a:p>
-          <a:p>
-            <a:r>
-              <a:rPr sz="1000">
-                <a:latin typeface="Courier New"/>
-              </a:rPr>
-              <a:t>        P3["Pre-patch scripts&lt;br/&gt;Inconsistent, hard to maintain"]</a:t>
-            </a:r>
-          </a:p>
-          <a:p>
-            <a:r>
-              <a:rPr sz="1000">
-                <a:latin typeface="Courier New"/>
-              </a:rPr>
-              <a:t>        P4["Need smart decision&lt;br/&gt;When to patch?"]</a:t>
-            </a:r>
-          </a:p>
-          <a:p>
-            <a:r>
-              <a:rPr sz="1000">
-                <a:latin typeface="Courier New"/>
-              </a:rPr>
-              <a:t>    end</a:t>
-            </a:r>
-          </a:p>
-          <a:p>
-            <a:r>
-              <a:rPr sz="1000">
-                <a:latin typeface="Courier New"/>
-              </a:rPr>
-              <a:t>    P1 --&gt; P4</a:t>
-            </a:r>
-          </a:p>
-          <a:p>
-            <a:r>
-              <a:rPr sz="1000">
-                <a:latin typeface="Courier New"/>
-              </a:rPr>
-              <a:t>    P2 --&gt; P4</a:t>
-            </a:r>
-          </a:p>
-          <a:p>
-            <a:r>
-              <a:rPr sz="1000">
-                <a:latin typeface="Courier New"/>
-              </a:rPr>
-              <a:t>    P3 --&gt; P4</a:t>
-            </a:r>
-          </a:p>
-        </p:txBody>
-      </p:sp>
-    </p:spTree>
   </p:cSld>
   <p:clrMapOvr>
     <a:masterClrMapping/>
